--- a/presentations/otel-lgtm-python.pptx
+++ b/presentations/otel-lgtm-python.pptx
@@ -36,9 +36,12 @@
     <p:sldId id="284" r:id="rId30"/>
     <p:sldId id="285" r:id="rId31"/>
     <p:sldId id="286" r:id="rId32"/>
+    <p:sldId id="287" r:id="rId33"/>
+    <p:sldId id="288" r:id="rId34"/>
+    <p:sldId id="289" r:id="rId35"/>
   </p:sldIdLst>
   <p:notesMasterIdLst>
-    <p:notesMasterId r:id="rId33"/>
+    <p:notesMasterId r:id="rId36"/>
   </p:notesMasterIdLst>
   <p:sldSz cx="12192000" cy="6858000"/>
   <p:notesSz cx="6858000" cy="12192000"/>
@@ -620,7 +623,7 @@
           <a:p>
             <a:r>
               <a:rPr lang="en-US" dirty="0"/>
-              <a:t>Give the canonical hand-off story: the metric tells you error rate just spiked, the trace shows which hop is failing, the log line gives the exact exception. That chain only works if all three carry the same identifiers — which is the entire reason to use one OpenTelemetry SDK rather than three unrelated libraries. Emphasize the trace_id as the thread running through all of it. Keep this conceptual; the wiring comes next.</a:t>
+              <a:t>This is the spine of the whole talk; the same SVG appears in the tutorial as Figure 2.1. Trace the left-to-right flow: in-process SDK produces all three signals, exports once over OTLP to the Collector. The Collector has three internal stages — receivers accept OTLP, processors act on the stream in order (memory_limiter, batch, later a sampler), exporters fan out to the three backends. Grafana reads all three and links them because they share identifiers. The key teaching point: the application emits everything; the Collector decides what survives. That separation is why sampling and routing can change without touching application code.</a:t>
             </a:r>
             <a:endParaRPr lang="en-US" dirty="0"/>
           </a:p>
@@ -708,7 +711,7 @@
           <a:p>
             <a:r>
               <a:rPr lang="en-US" dirty="0"/>
-              <a:t>This slide narrates Figure 2.1 in words. The resource is easy to skip but important — it is the identity stamped on every signal, the thing that lets Grafana group everything from one service. Processor ORDER matters: memory_limiter first so you protect the Collector before doing anything expensive, batch to ship efficiently, sampler later once we get there. Land the punchline: the application emits everything; the Collector decides what survives. That is the whole argument for a Collector instead of exporting straight to each backend.</a:t>
+              <a:t>Give the canonical hand-off story: the metric tells you error rate just spiked, the trace shows which hop is failing, the log line gives the exact exception. That chain only works if all three carry the same identifiers — which is the entire reason to use one OpenTelemetry SDK rather than three unrelated libraries. Emphasize the trace_id as the thread running through all of it. Keep this conceptual; the wiring comes next.</a:t>
             </a:r>
             <a:endParaRPr lang="en-US" dirty="0"/>
           </a:p>
@@ -796,7 +799,7 @@
           <a:p>
             <a:r>
               <a:rPr lang="en-US" dirty="0"/>
-              <a:t>This is the thesis statement for the second half of the talk. Make the audience feel the problem before we solve it: an in-process call shares context for free through the call stack, and gRPC carries it in a header automatically, but a Kafka message is just bytes — the trace context is not in those bytes unless you put it there. Plant the flag now: the single trace_id flowing through every hop is the foundation everything else is built on, and the Kafka hop is where it is easiest to lose. We will fix it explicitly later with a propagator that writes context into message headers.</a:t>
+              <a:t>This slide narrates Figure 2.1 in words. The resource is easy to skip but important — it is the identity stamped on every signal, the thing that lets Grafana group everything from one service. Processor ORDER matters: memory_limiter first so you protect the Collector before doing anything expensive, batch to ship efficiently, sampler later once we get there. Land the punchline: the application emits everything; the Collector decides what survives. That is the whole argument for a Collector instead of exporting straight to each backend.</a:t>
             </a:r>
             <a:endParaRPr lang="en-US" dirty="0"/>
           </a:p>
@@ -884,7 +887,7 @@
           <a:p>
             <a:r>
               <a:rPr lang="en-US" dirty="0"/>
-              <a:t>Same SVG as Figure 3.1 in the tutorial. Walk the fan-out with your finger: a client POSTs to the order service; order calls inventory and payment over gRPC, writes Postgres, and publishes order.placed to Kafka; shipping and notification each consume that event; review answers a GraphQL read. The cast is a small set of familiar e-commerce services — order, inventory, payment, shipping, notification, review — run on Podman compose, not Kubernetes, because this is an OpenTelemetry talk. The names are borrowed from a separate data-mesh reference project; here they are just realistic domains to instrument. The teaching point: five protocols means five places a trace can continue or break. Auto-instrumentation will carry it across REST and gRPC for free; the Kafka hop is the one we wire by hand later.</a:t>
+              <a:t>This is the thesis statement for the second half of the talk. Make the audience feel the problem before we solve it: an in-process call shares context for free through the call stack, and gRPC carries it in a header automatically, but a Kafka message is just bytes — the trace context is not in those bytes unless you put it there. Plant the flag now: the single trace_id flowing through every hop is the foundation everything else is built on, and the Kafka hop is where it is easiest to lose. We will fix it explicitly later with a propagator that writes context into message headers.</a:t>
             </a:r>
             <a:endParaRPr lang="en-US" dirty="0"/>
           </a:p>
@@ -972,7 +975,7 @@
           <a:p>
             <a:r>
               <a:rPr lang="en-US" dirty="0"/>
-              <a:t>Set up the order of operations as deliberate, not arbitrary: you reserve stock before charging, charge before confirming, confirm before announcing — so a failure at any step leaves the system consistent and the customer correctly informed. The order service short-circuits with a 409 if stock can't be reserved and a 402 if payment declines, writing a row with the reason either way so failures are visible. This is the spine the next slides instrument.</a:t>
+              <a:t>Same SVG as Figure 3.1 in the tutorial. Walk the fan-out with your finger: a client POSTs to the order service; order calls inventory and payment over gRPC, writes Postgres, and publishes order.placed to Kafka; shipping and notification each consume that event; review answers a GraphQL read. The cast is a small set of familiar e-commerce services — order, inventory, payment, shipping, notification, review — run on Podman compose, not Kubernetes, because this is an OpenTelemetry talk. The teaching point: five protocols means five places a trace can continue or break. Auto-instrumentation will carry it across REST and gRPC for free; the Kafka hop is the one we wire by hand later.</a:t>
             </a:r>
             <a:endParaRPr lang="en-US" dirty="0"/>
           </a:p>
@@ -1060,7 +1063,7 @@
           <a:p>
             <a:r>
               <a:rPr lang="en-US" dirty="0"/>
-              <a:t>The point of a shared obs package is that the talk can show the SAME setup() call in every service rather than six slightly different bootstraps. It is also what makes the no-telemetry baseline a one-variable change: setup() checks OTEL_SDK_DISABLED first and returns no-op providers when it is true. Name the four submodules so the audience has a map for the chapters that follow: otel (the bootstrap), kafka/kafka_propagation (the async hop), db (the pool), logging (correlated logs).</a:t>
+              <a:t>Set up the order of operations as deliberate, not arbitrary: you reserve stock before charging, charge before confirming, confirm before announcing — so a failure at any step leaves the system consistent and the customer correctly informed. The order service short-circuits with a 409 if stock can't be reserved and a 402 if payment declines, writing a row with the reason either way so failures are visible. This is the spine the next slides instrument.</a:t>
             </a:r>
             <a:endParaRPr lang="en-US" dirty="0"/>
           </a:p>
@@ -1148,7 +1151,7 @@
           <a:p>
             <a:r>
               <a:rPr lang="en-US" dirty="0"/>
-              <a:t>The thing to point at is what is NOT here: no spans, no trace ids, no propagation. The handler reads as plain business logic — reserve, authorize, persist, announce — and yet by the next part it produces a full trace across two processes. That is the payoff of auto-instrumentation plus the obs library: the gRPC client calls and the Postgres queries instrument themselves; the only deliberately-instrumented hop is the Kafka publish, and even that is hidden inside obskafka.publish_event. Stress the short-circuits: 409 on stock, 402 on payment — those give us repeatable error traces later.</a:t>
+              <a:t>The point of a shared obs package is that the talk can show the SAME setup() call in every service rather than six slightly different bootstraps. It is also what makes the no-telemetry baseline a one-variable change: setup() checks OTEL_SDK_DISABLED first and returns no-op providers when it is true. Name the four submodules so the audience has a map for the chapters that follow: otel (the bootstrap), kafka/kafka_propagation (the async hop), db (the pool), logging (correlated logs).</a:t>
             </a:r>
             <a:endParaRPr lang="en-US" dirty="0"/>
           </a:p>
@@ -1236,7 +1239,7 @@
           <a:p>
             <a:r>
               <a:rPr lang="en-US" dirty="0"/>
-              <a:t>Two things to land. First, the single conditional UPDATE … WHERE on_hand &gt;= qty RETURNING on_hand both checks and decrements stock atomically — no read-then-write race — and returns NULL when there isn't enough, which is how Reserve signals failure. A reservation row keyed by order_id makes a retry idempotent. Second: this runs in a DIFFERENT process from the order service, yet because the gRPC server is auto-instrumented and the order service injected context on the wire, these spans and their Postgres children land under the order's trace. The proto that defines this service lives once at the repo top level and is compiled into the image.</a:t>
+              <a:t>The thing to point at is what is NOT here: no spans, no trace ids, no propagation. The handler reads as plain business logic — reserve, authorize, persist, announce — and yet by the next part it produces a full trace across two processes. That is the payoff of auto-instrumentation plus the obs library: the gRPC client calls and the Postgres queries instrument themselves; the only deliberately-instrumented hop is the Kafka publish, and even that is hidden inside obskafka.publish_event. Stress the short-circuits: 409 on stock, 402 on payment — those give us repeatable error traces later.</a:t>
             </a:r>
             <a:endParaRPr lang="en-US" dirty="0"/>
           </a:p>
@@ -1324,7 +1327,7 @@
           <a:p>
             <a:r>
               <a:rPr lang="en-US" dirty="0"/>
-              <a:t>Naming the simplifications buys credibility and heads off the 'but what about…' questions. The one most likely to be challenged is the shared database — be ready to say that per-domain stores are the production ideal but co-locating them changes nothing about the telemetry, which is what this talk is about. Keep the focus on observability.</a:t>
+              <a:t>Two things to land. First, the single conditional UPDATE … WHERE on_hand &gt;= qty RETURNING on_hand both checks and decrements stock atomically — no read-then-write race — and returns NULL when there isn't enough, which is how Reserve signals failure. A reservation row keyed by order_id makes a retry idempotent. Second: this runs in a DIFFERENT process from the order service, yet because the gRPC server is auto-instrumented and the order service injected context on the wire, these spans and their Postgres children land under the order's trace. The proto that defines this service lives once at the repo top level and is compiled into the image.</a:t>
             </a:r>
             <a:endParaRPr lang="en-US" dirty="0"/>
           </a:p>
@@ -1412,7 +1415,7 @@
           <a:p>
             <a:r>
               <a:rPr lang="en-US" dirty="0"/>
-              <a:t>The emotional pivot of the foundation: the system works perfectly and tells you nothing. Run it, show the confirmed response, then pull up an empty Grafana and let the silence land. Demo 1 ships with OTEL_SDK_DISABLED=true on purpose; the next part flips one variable and the same request lights up.</a:t>
+              <a:t>Naming the simplifications buys credibility and heads off the 'but what about…' questions. The one most likely to be challenged is the shared database — be ready to say that per-domain stores are the production ideal but co-locating them changes nothing about the telemetry, which is what this talk is about. Keep the focus on observability.</a:t>
             </a:r>
             <a:endParaRPr lang="en-US" dirty="0"/>
           </a:p>
@@ -1588,7 +1591,7 @@
           <a:p>
             <a:r>
               <a:rPr lang="en-US" dirty="0"/>
-              <a:t>This part turns the SDK on and adds one signal at a time to the exact same code, ending by carrying trace context across the Kafka hop so the async work rejoins the trace.</a:t>
+              <a:t>The emotional pivot of the foundation: the system works perfectly and tells you nothing. Run it, show the confirmed response, then pull up an empty Grafana and let the silence land. Demo 1 ships with OTEL_SDK_DISABLED=true on purpose; the next part flips one variable and the same request lights up.</a:t>
             </a:r>
             <a:endParaRPr lang="en-US" dirty="0"/>
           </a:p>
@@ -1676,7 +1679,7 @@
           <a:p>
             <a:r>
               <a:rPr lang="en-US" dirty="0"/>
-              <a:t>Frame the three columns. Auto-instrumentation is breadth for free: turn it on and FastAPI, gRPC, and asyncpg emit spans with no code change. Custom instrumentation is depth where it matters: you open spans for the work the libraries can't see. The hybrid is what every real service is — and the one gotcha is the occasional duplicate span when auto and custom overlap. This part starts with the free breadth, then earns the depth in the Kafka chapter.</a:t>
+              <a:t>This part turns the SDK on and adds one signal at a time to the exact same code, ending by carrying trace context across the Kafka hop so the async work rejoins the trace.</a:t>
             </a:r>
             <a:endParaRPr lang="en-US" dirty="0"/>
           </a:p>
@@ -1764,7 +1767,7 @@
           <a:p>
             <a:r>
               <a:rPr lang="en-US" dirty="0"/>
-              <a:t>Three beats. The resource is the identity stamped on every signal — service.name is the single most important attribute in the whole system, which is why we pass it explicitly rather than trust a default. The Batch processor ships spans on a background thread, so observing the service never slows the request. And the three instrument() calls are the whole of 'auto': each patches its library process-wide, so the order handler we saw earlier — with no tracing in it — now produces gRPC and Postgres spans automatically. FastAPI is the exception, instrumented against the app object via instrument_fastapi(app).</a:t>
+              <a:t>Frame the three columns. Auto-instrumentation is breadth for free: turn it on and FastAPI, gRPC, and asyncpg emit spans with no code change. Custom instrumentation is depth where it matters: you open spans for the work the libraries can't see. The hybrid is what every real service is — and the one gotcha is the occasional duplicate span when auto and custom overlap. This part starts with the free breadth, then earns the depth in the Kafka chapter.</a:t>
             </a:r>
             <a:endParaRPr lang="en-US" dirty="0"/>
           </a:p>
@@ -1852,7 +1855,7 @@
           <a:p>
             <a:r>
               <a:rPr lang="en-US" dirty="0"/>
-              <a:t>This is the honest edge of auto-instrumentation and the hook for the rest of the part. Show the beautiful free trace first, then deliberately point at what's missing: the consumers are off on their own. Resist the urge to hand-wave — name why (no instrumented client owns the Kafka publish header) so the fix in Chapter 7 feels inevitable rather than magic.</a:t>
+              <a:t>Three beats. The resource is the identity stamped on every signal — service.name is the single most important attribute in the whole system, which is why we pass it explicitly rather than trust a default. The Batch processor ships spans on a background thread, so observing the service never slows the request. And the three instrument() calls are the whole of 'auto': each patches its library process-wide, so the order handler we saw earlier — with no tracing in it — now produces gRPC and Postgres spans automatically. FastAPI is the exception, instrumented against the app object via instrument_fastapi(app).</a:t>
             </a:r>
             <a:endParaRPr lang="en-US" dirty="0"/>
           </a:p>
@@ -1940,7 +1943,7 @@
           <a:p>
             <a:r>
               <a:rPr lang="en-US" dirty="0"/>
-              <a:t>The single most valuable idea on this slide is exemplars — they turn 'p99 spiked at 14:32' from a dead end into 'here is a request that was actually slow.' That only works because the same SDK with the same resource emits both signals, so the ids line up. Mention that domain questions ('how many orders declined for payment?') need a custom Counter you define with obs.otel.meter(); the transport metrics cover RED but not the business.</a:t>
+              <a:t>This is the honest edge of auto-instrumentation and the hook for the rest of the part. Show the beautiful free trace first, then deliberately point at what's missing: the consumers are off on their own. Resist the urge to hand-wave — name why (no instrumented client owns the Kafka publish header) so the fix in Chapter 7 feels inevitable rather than magic.</a:t>
             </a:r>
             <a:endParaRPr lang="en-US" dirty="0"/>
           </a:p>
@@ -2028,7 +2031,7 @@
           <a:p>
             <a:r>
               <a:rPr lang="en-US" dirty="0"/>
-              <a:t>Two decisions make logs correlatable: structure (JSON, so trace_id is a queryable field, not buried in a string) and the trace context on every record. A logging Filter is the right hook because it runs at log time, so inside a request the ids are the request's ids and outside one they're '-'. The hex formatting (032x / 016x) is the canonical form Tempo expects, so the value in Loki matches the trace exactly. Services log to stdout; the collector routes it to Loki, so the service stays ignorant of the backend.</a:t>
+              <a:t>Set up the RED slide with the mechanic: a span is one event, a metric is a running aggregate sampled on an interval — two shapes of the same traffic. The exemplar is the thread between them, which is exactly why the next slide's 'click the dot to open the slow trace' works.</a:t>
             </a:r>
             <a:endParaRPr lang="en-US" dirty="0"/>
           </a:p>
@@ -2116,7 +2119,7 @@
           <a:p>
             <a:r>
               <a:rPr lang="en-US" dirty="0"/>
-              <a:t>This is the climax of the talk and the technique that generalises: anywhere context doesn't propagate automatically — a queue, a batch job, a custom protocol — you do exactly this. Walk the figure: the producer injects the active context into the Kafka message headers; the consumer extracts it and opens its processing span with that context as the parent. The same traceparent the gRPC hop used, just placed and read by hand because no library does it for a Kafka message.</a:t>
+              <a:t>The single most valuable idea on this slide is exemplars — they turn 'p99 spiked at 14:32' from a dead end into 'here is a request that was actually slow.' That only works because the same SDK with the same resource emits both signals, so the ids line up. Mention that domain questions ('how many orders declined for payment?') need a custom Counter you define with obs.otel.meter(); the transport metrics cover RED but not the business.</a:t>
             </a:r>
             <a:endParaRPr lang="en-US" dirty="0"/>
           </a:p>
@@ -2204,7 +2207,7 @@
           <a:p>
             <a:r>
               <a:rPr lang="en-US" dirty="0"/>
-              <a:t>Slow down on context=ctx — it is the whole chapter in one argument. propagate.inject is the same call the HTTP and gRPC instrumentors make internally; we do it explicitly only because no library will do it for a Kafka message. extract_context returns a context value, not an active one; passing it as context= to start_as_current_span is what makes the consumer's span a child of the order service's publish span, in a different process, reached asynchronously. The asyncpg span for create_shipment then nests under that automatically. Two lines per consumer — extract, then pass context= — and the async hop is whole.</a:t>
+              <a:t>Lead the logs section with the why before the code: a log line alone tells you what happened, not which request it belonged to. Stamp the trace_id and a line in Loki links to its trace in Tempo, and a span links back to its logs. The next slide is the filter that does the stamping.</a:t>
             </a:r>
             <a:endParaRPr lang="en-US" dirty="0"/>
           </a:p>
@@ -2292,7 +2295,7 @@
           <a:p>
             <a:r>
               <a:rPr lang="en-US" dirty="0"/>
-              <a:t>Close the part by generalising: start_as_current_span is not a Kafka tool, it is THE tool for making invisible work visible — the Kafka consumers and the GraphQL resolvers are two faces of the same move. End on the side-by-side: Demo 2's trace stopped at the broker; Demo 5's runs all the way through shipping and notification. Same code, one env var, the whole picture.</a:t>
+              <a:t>Two decisions make logs correlatable: structure (JSON, so trace_id is a queryable field, not buried in a string) and the trace context on every record. A logging Filter is the right hook because it runs at log time, so inside a request the ids are the request's ids and outside one they're '-'. The hex formatting (032x / 016x) is the canonical form Tempo expects, so the value in Loki matches the trace exactly. Services log to stdout; the collector routes it to Loki, so the service stays ignorant of the backend.</a:t>
             </a:r>
             <a:endParaRPr lang="en-US" dirty="0"/>
           </a:p>
@@ -2380,7 +2383,7 @@
           <a:p>
             <a:r>
               <a:rPr lang="en-US" dirty="0"/>
-              <a:t>This is the slide the senior engineers in the room are waiting for: the honest cost/benefit. Auto is not free — it is volume and it is library-shaped. Custom is not noble — it is maintenance you ration. The hybrid is the only realistic answer, and the two failure modes worth naming out loud are double-instrumenting one boundary (the duplicate-span smell) and shoving an unbounded id like order_id into a metric label, which is how an observability bill becomes a horror story. Identifiers belong on spans, where one-per-request is already the shape; metrics get bounded labels — route, method, status.</a:t>
+              <a:t>This is the climax of the talk and the technique that generalises: anywhere context doesn't propagate automatically — a queue, a batch job, a custom protocol — you do exactly this. Walk the figure: the producer injects the active context into the Kafka message headers; the consumer extracts it and opens its processing span with that context as the parent. The same traceparent the gRPC hop used, just placed and read by hand because no library does it for a Kafka message.</a:t>
             </a:r>
             <a:endParaRPr lang="en-US" dirty="0"/>
           </a:p>
@@ -2556,7 +2559,7 @@
           <a:p>
             <a:r>
               <a:rPr lang="en-US" dirty="0"/>
-              <a:t>This is the payoff slide — open Grafana and actually use the correlation. Walk the four moves live if you can. (1) In Tempo, a trace read top-down IS the distributed business flow — the path across services with a duration on each hop, and on a failed order the error sits on the Authorize span with the decline reason as an attribute. (2) From a span, 'Logs for this span' jumps by trace_id to exactly that service's lines in Loki — no grep, no window-guessing. (3) From a p99 bump in Mimir, an exemplar dot opens the slow trace behind it. (4) The gap between a gRPC client span and its server span is wire + serialization time, with message sizes on the spans — the serde cost read straight off the trace. All four pivot on one trace_id flowing through every hop. That movement between signals is the whole point; it is what a wall of disconnected logs can never give you.</a:t>
+              <a:t>Slow down on context=ctx — it is the whole chapter in one argument. propagate.inject is the same call the HTTP and gRPC instrumentors make internally; we do it explicitly only because no library will do it for a Kafka message. extract_context returns a context value, not an active one; passing it as context= to start_as_current_span is what makes the consumer's span a child of the order service's publish span, in a different process, reached asynchronously. The asyncpg span for create_shipment then nests under that automatically. Two lines per consumer — extract, then pass context= — and the async hop is whole.</a:t>
             </a:r>
             <a:endParaRPr lang="en-US" dirty="0"/>
           </a:p>
@@ -2644,7 +2647,7 @@
           <a:p>
             <a:r>
               <a:rPr lang="en-US" dirty="0"/>
-              <a:t>Re-walk the arc so the audience knows what they hold and what's coming. The foundation gave them the services and the model; this part gave them the three correlated signals, the cost of getting them, and the one-click view that ties them together; the pipeline part is about keeping all of it affordable at volume. Be honest about iteration state: r1.1 is authored against the target versions but not yet run end-to-end here, so it ships marked unverified, and a live rehearsal against the real stack is the next milestone. Point people at the repo: the tutorial mirrors these slides chapter for chapter, and every example has a runnable demo.sh.</a:t>
+              <a:t>Close the part by generalising: start_as_current_span is not a Kafka tool, it is THE tool for making invisible work visible — the Kafka consumers and the GraphQL resolvers are two faces of the same move. End on the side-by-side: Demo 2's trace stopped at the broker; Demo 5's runs all the way through shipping and notification. Same code, one env var, the whole picture.</a:t>
             </a:r>
             <a:endParaRPr lang="en-US" dirty="0"/>
           </a:p>
@@ -2668,6 +2671,270 @@
             <a:fld id="{F7021451-1387-4CA6-816F-3879F97B5CBC}" type="slidenum">
               <a:rPr lang="en-US"/>
               <a:t>31</a:t>
+            </a:fld>
+            <a:endParaRPr lang="en-US"/>
+          </a:p>
+        </p:txBody>
+      </p:sp>
+    </p:spTree>
+    <p:extLst>
+      <p:ext uri="{BB962C8B-B14F-4D97-AF65-F5344CB8AC3E}">
+        <p14:creationId xmlns:p14="http://schemas.microsoft.com/office/powerpoint/2010/main" val="1024086991"/>
+      </p:ext>
+    </p:extLst>
+  </p:cSld>
+  <p:clrMapOvr>
+    <a:masterClrMapping/>
+  </p:clrMapOvr>
+</p:notes>
+</file>
+
+<file path=ppt/notesSlides/notesSlide32.xml><?xml version="1.0" encoding="utf-8"?>
+<p:notes xmlns:a="http://schemas.openxmlformats.org/drawingml/2006/main" xmlns:r="http://schemas.openxmlformats.org/officeDocument/2006/relationships" xmlns:p="http://schemas.openxmlformats.org/presentationml/2006/main">
+  <p:cSld>
+    <p:spTree>
+      <p:nvGrpSpPr>
+        <p:cNvPr id="1" name=""/>
+        <p:cNvGrpSpPr/>
+        <p:nvPr/>
+      </p:nvGrpSpPr>
+      <p:grpSpPr>
+        <a:xfrm>
+          <a:off x="0" y="0"/>
+          <a:ext cx="0" cy="0"/>
+          <a:chOff x="0" y="0"/>
+          <a:chExt cx="0" cy="0"/>
+        </a:xfrm>
+      </p:grpSpPr>
+      <p:sp>
+        <p:nvSpPr>
+          <p:cNvPr id="2" name="Slide Image Placeholder 1"/>
+          <p:cNvSpPr>
+            <a:spLocks noGrp="1" noRot="1" noChangeAspect="1"/>
+          </p:cNvSpPr>
+          <p:nvPr>
+            <p:ph type="sldImg"/>
+          </p:nvPr>
+        </p:nvSpPr>
+        <p:spPr/>
+      </p:sp>
+      <p:sp>
+        <p:nvSpPr>
+          <p:cNvPr id="3" name="Notes Placeholder 2"/>
+          <p:cNvSpPr>
+            <a:spLocks noGrp="1"/>
+          </p:cNvSpPr>
+          <p:nvPr>
+            <p:ph type="body" idx="1"/>
+          </p:nvPr>
+        </p:nvSpPr>
+        <p:spPr/>
+        <p:txBody>
+          <a:bodyPr/>
+          <a:lstStyle/>
+          <a:p>
+            <a:r>
+              <a:rPr lang="en-US" dirty="0"/>
+              <a:t>This is the slide the senior engineers in the room are waiting for: the honest cost/benefit. Auto is not free — it is volume and it is library-shaped. Custom is not noble — it is maintenance you ration. The hybrid is the only realistic answer, and the two failure modes worth naming out loud are double-instrumenting one boundary (the duplicate-span smell) and shoving an unbounded id like order_id into a metric label, which is how an observability bill becomes a horror story. Identifiers belong on spans, where one-per-request is already the shape; metrics get bounded labels — route, method, status.</a:t>
+            </a:r>
+            <a:endParaRPr lang="en-US" dirty="0"/>
+          </a:p>
+        </p:txBody>
+      </p:sp>
+      <p:sp>
+        <p:nvSpPr>
+          <p:cNvPr id="4" name="Slide Number Placeholder 3"/>
+          <p:cNvSpPr>
+            <a:spLocks noGrp="1"/>
+          </p:cNvSpPr>
+          <p:nvPr>
+            <p:ph type="sldNum" sz="quarter" idx="10"/>
+          </p:nvPr>
+        </p:nvSpPr>
+        <p:spPr/>
+        <p:txBody>
+          <a:bodyPr/>
+          <a:lstStyle/>
+          <a:p>
+            <a:fld id="{F7021451-1387-4CA6-816F-3879F97B5CBC}" type="slidenum">
+              <a:rPr lang="en-US"/>
+              <a:t>32</a:t>
+            </a:fld>
+            <a:endParaRPr lang="en-US"/>
+          </a:p>
+        </p:txBody>
+      </p:sp>
+    </p:spTree>
+    <p:extLst>
+      <p:ext uri="{BB962C8B-B14F-4D97-AF65-F5344CB8AC3E}">
+        <p14:creationId xmlns:p14="http://schemas.microsoft.com/office/powerpoint/2010/main" val="1024086991"/>
+      </p:ext>
+    </p:extLst>
+  </p:cSld>
+  <p:clrMapOvr>
+    <a:masterClrMapping/>
+  </p:clrMapOvr>
+</p:notes>
+</file>
+
+<file path=ppt/notesSlides/notesSlide33.xml><?xml version="1.0" encoding="utf-8"?>
+<p:notes xmlns:a="http://schemas.openxmlformats.org/drawingml/2006/main" xmlns:r="http://schemas.openxmlformats.org/officeDocument/2006/relationships" xmlns:p="http://schemas.openxmlformats.org/presentationml/2006/main">
+  <p:cSld>
+    <p:spTree>
+      <p:nvGrpSpPr>
+        <p:cNvPr id="1" name=""/>
+        <p:cNvGrpSpPr/>
+        <p:nvPr/>
+      </p:nvGrpSpPr>
+      <p:grpSpPr>
+        <a:xfrm>
+          <a:off x="0" y="0"/>
+          <a:ext cx="0" cy="0"/>
+          <a:chOff x="0" y="0"/>
+          <a:chExt cx="0" cy="0"/>
+        </a:xfrm>
+      </p:grpSpPr>
+      <p:sp>
+        <p:nvSpPr>
+          <p:cNvPr id="2" name="Slide Image Placeholder 1"/>
+          <p:cNvSpPr>
+            <a:spLocks noGrp="1" noRot="1" noChangeAspect="1"/>
+          </p:cNvSpPr>
+          <p:nvPr>
+            <p:ph type="sldImg"/>
+          </p:nvPr>
+        </p:nvSpPr>
+        <p:spPr/>
+      </p:sp>
+      <p:sp>
+        <p:nvSpPr>
+          <p:cNvPr id="3" name="Notes Placeholder 2"/>
+          <p:cNvSpPr>
+            <a:spLocks noGrp="1"/>
+          </p:cNvSpPr>
+          <p:nvPr>
+            <p:ph type="body" idx="1"/>
+          </p:nvPr>
+        </p:nvSpPr>
+        <p:spPr/>
+        <p:txBody>
+          <a:bodyPr/>
+          <a:lstStyle/>
+          <a:p>
+            <a:r>
+              <a:rPr lang="en-US" dirty="0"/>
+              <a:t>This is the payoff slide — open Grafana and actually use the correlation. Walk the four moves live if you can. (1) In Tempo, a trace read top-down IS the distributed business flow — the path across services with a duration on each hop, and on a failed order the error sits on the Authorize span with the decline reason as an attribute. (2) From a span, 'Logs for this span' jumps by trace_id to exactly that service's lines in Loki — no grep, no window-guessing. (3) From a p99 bump in Mimir, an exemplar dot opens the slow trace behind it. (4) The gap between a gRPC client span and its server span is wire + serialization time, with message sizes on the spans — the serde cost read straight off the trace. All four pivot on one trace_id flowing through every hop. That movement between signals is the whole point; it is what a wall of disconnected logs can never give you.</a:t>
+            </a:r>
+            <a:endParaRPr lang="en-US" dirty="0"/>
+          </a:p>
+        </p:txBody>
+      </p:sp>
+      <p:sp>
+        <p:nvSpPr>
+          <p:cNvPr id="4" name="Slide Number Placeholder 3"/>
+          <p:cNvSpPr>
+            <a:spLocks noGrp="1"/>
+          </p:cNvSpPr>
+          <p:nvPr>
+            <p:ph type="sldNum" sz="quarter" idx="10"/>
+          </p:nvPr>
+        </p:nvSpPr>
+        <p:spPr/>
+        <p:txBody>
+          <a:bodyPr/>
+          <a:lstStyle/>
+          <a:p>
+            <a:fld id="{F7021451-1387-4CA6-816F-3879F97B5CBC}" type="slidenum">
+              <a:rPr lang="en-US"/>
+              <a:t>33</a:t>
+            </a:fld>
+            <a:endParaRPr lang="en-US"/>
+          </a:p>
+        </p:txBody>
+      </p:sp>
+    </p:spTree>
+    <p:extLst>
+      <p:ext uri="{BB962C8B-B14F-4D97-AF65-F5344CB8AC3E}">
+        <p14:creationId xmlns:p14="http://schemas.microsoft.com/office/powerpoint/2010/main" val="1024086991"/>
+      </p:ext>
+    </p:extLst>
+  </p:cSld>
+  <p:clrMapOvr>
+    <a:masterClrMapping/>
+  </p:clrMapOvr>
+</p:notes>
+</file>
+
+<file path=ppt/notesSlides/notesSlide34.xml><?xml version="1.0" encoding="utf-8"?>
+<p:notes xmlns:a="http://schemas.openxmlformats.org/drawingml/2006/main" xmlns:r="http://schemas.openxmlformats.org/officeDocument/2006/relationships" xmlns:p="http://schemas.openxmlformats.org/presentationml/2006/main">
+  <p:cSld>
+    <p:spTree>
+      <p:nvGrpSpPr>
+        <p:cNvPr id="1" name=""/>
+        <p:cNvGrpSpPr/>
+        <p:nvPr/>
+      </p:nvGrpSpPr>
+      <p:grpSpPr>
+        <a:xfrm>
+          <a:off x="0" y="0"/>
+          <a:ext cx="0" cy="0"/>
+          <a:chOff x="0" y="0"/>
+          <a:chExt cx="0" cy="0"/>
+        </a:xfrm>
+      </p:grpSpPr>
+      <p:sp>
+        <p:nvSpPr>
+          <p:cNvPr id="2" name="Slide Image Placeholder 1"/>
+          <p:cNvSpPr>
+            <a:spLocks noGrp="1" noRot="1" noChangeAspect="1"/>
+          </p:cNvSpPr>
+          <p:nvPr>
+            <p:ph type="sldImg"/>
+          </p:nvPr>
+        </p:nvSpPr>
+        <p:spPr/>
+      </p:sp>
+      <p:sp>
+        <p:nvSpPr>
+          <p:cNvPr id="3" name="Notes Placeholder 2"/>
+          <p:cNvSpPr>
+            <a:spLocks noGrp="1"/>
+          </p:cNvSpPr>
+          <p:nvPr>
+            <p:ph type="body" idx="1"/>
+          </p:nvPr>
+        </p:nvSpPr>
+        <p:spPr/>
+        <p:txBody>
+          <a:bodyPr/>
+          <a:lstStyle/>
+          <a:p>
+            <a:r>
+              <a:rPr lang="en-US" dirty="0"/>
+              <a:t>Re-walk the arc so the audience knows what they hold and what's coming. The foundation gave them the services and the model; this part gave them the three correlated signals, the cost of getting them, and the one-click view that ties them together; the pipeline part is about keeping all of it affordable at volume. Be honest about iteration state: r1.1 is authored against the target versions but not yet run end-to-end here, so it ships marked unverified, and a live rehearsal against the real stack is the next milestone. Point people at the repo: the tutorial mirrors these slides chapter for chapter, and every example has a runnable demo.sh.</a:t>
+            </a:r>
+            <a:endParaRPr lang="en-US" dirty="0"/>
+          </a:p>
+        </p:txBody>
+      </p:sp>
+      <p:sp>
+        <p:nvSpPr>
+          <p:cNvPr id="4" name="Slide Number Placeholder 3"/>
+          <p:cNvSpPr>
+            <a:spLocks noGrp="1"/>
+          </p:cNvSpPr>
+          <p:nvPr>
+            <p:ph type="sldNum" sz="quarter" idx="10"/>
+          </p:nvPr>
+        </p:nvSpPr>
+        <p:spPr/>
+        <p:txBody>
+          <a:bodyPr/>
+          <a:lstStyle/>
+          <a:p>
+            <a:fld id="{F7021451-1387-4CA6-816F-3879F97B5CBC}" type="slidenum">
+              <a:rPr lang="en-US"/>
+              <a:t>34</a:t>
             </a:fld>
             <a:endParaRPr lang="en-US"/>
           </a:p>
@@ -2996,7 +3263,7 @@
           <a:p>
             <a:r>
               <a:rPr lang="en-US" dirty="0"/>
-              <a:t>The backend is one image — grafana/otel-lgtm — that bundles Grafana, Tempo, Mimir, Loki, AND an OpenTelemetry Collector. Bundling keeps the demo to a single podman compose up, but the architecture it stands for is the real one: apps send to a Collector, the Collector routes each signal to its backend. We mount our own Collector config in so sampling and routing stay first-class. Hammer the host-vs-network distinction — it is the most common 'can't reach the Collector' bug. From your laptop it's localhost:4318; from inside a container it's lgtm:4318.</a:t>
+              <a:t>Show the shape before the ports table. Everything runs in one compose network. The services emit OTLP/HTTP on 4318 to the Collector bundled inside the grafana/otel-lgtm image; the Collector fans each signal to Tempo, Mimir, and Loki, and Grafana reads all three. Kafka and Postgres are shared infra the services talk to directly. Nothing here is installed by hand except the container engine — the backend arrives as images on the first compose up.</a:t>
             </a:r>
             <a:endParaRPr lang="en-US" dirty="0"/>
           </a:p>
@@ -3084,7 +3351,7 @@
           <a:p>
             <a:r>
               <a:rPr lang="en-US" dirty="0"/>
-              <a:t>This is a deliberate, stated choice so nobody wonders later why the endpoints look the way they do. HTTP wins on debuggability for a teaching context — you can curl the receiver to prove it is listening. In production with high telemetry volume you might prefer gRPC for throughput; say so, and point out it is genuinely a one-line switch because both receivers are live. The path-less endpoint detail matters: the SDK appends /v1/traces, /v1/metrics, /v1/logs itself, so you configure the base once.</a:t>
+              <a:t>The backend is one image — grafana/otel-lgtm — that bundles Grafana, Tempo, Mimir, Loki, AND an OpenTelemetry Collector. Bundling keeps the demo to a single podman compose up, but the architecture it stands for is the real one: apps send to a Collector, the Collector routes each signal to its backend. We mount our own Collector config in so sampling and routing stay first-class. Hammer the host-vs-network distinction — it is the most common 'can't reach the Collector' bug. From your laptop it's localhost:4318; from inside a container it's lgtm:4318.</a:t>
             </a:r>
             <a:endParaRPr lang="en-US" dirty="0"/>
           </a:p>
@@ -3172,7 +3439,7 @@
           <a:p>
             <a:r>
               <a:rPr lang="en-US" dirty="0"/>
-              <a:t>This is the spine of the whole talk; the same SVG appears in the tutorial as Figure 2.1. Trace the left-to-right flow: in-process SDK produces all three signals, exports once over OTLP to the Collector. The Collector has three internal stages — receivers accept OTLP, processors act on the stream in order (memory_limiter, batch, later a sampler), exporters fan out to the three backends. Grafana reads all three and links them because they share identifiers. The key teaching point: the app emits everything; the Collector decides what survives. That separation is why sampling and routing can change without touching app code.</a:t>
+              <a:t>This is a deliberate, stated choice so nobody wonders later why the endpoints look the way they do. HTTP wins on debuggability for a teaching context — you can curl the receiver to prove it is listening. In production with high telemetry volume you might prefer gRPC for throughput; say so, and point out it is genuinely a one-line switch because both receivers are live. The path-less endpoint detail matters: the SDK appends /v1/traces, /v1/metrics, /v1/logs itself, so you configure the base once.</a:t>
             </a:r>
             <a:endParaRPr lang="en-US" dirty="0"/>
           </a:p>
@@ -3926,22 +4193,45 @@
                 <a:ea typeface="Overpass" pitchFamily="34" charset="-122"/>
                 <a:cs typeface="Overpass" pitchFamily="34" charset="-120"/>
               </a:rPr>
-              <a:t>Three signals, three questions</a:t>
+              <a:t>One SDK, one Collector, three backends, one UI</a:t>
             </a:r>
             <a:endParaRPr lang="en-US" sz="3000" dirty="0"/>
           </a:p>
         </p:txBody>
       </p:sp>
-      <p:sp>
-        <p:nvSpPr>
-          <p:cNvPr id="6" name="Text 3"/>
+      <p:pic>
+        <p:nvPicPr>
+          <p:cNvPr id="6" name="Image 1" descr="./png/fig-02-otel-data-path.png">    </p:cNvPr>
+          <p:cNvPicPr>
+            <a:picLocks noChangeAspect="1"/>
+          </p:cNvPicPr>
+          <p:nvPr/>
+        </p:nvPicPr>
+        <p:blipFill>
+          <a:blip r:embed="rId2"/>
+          <a:srcRect l="0" r="0" t="0" b="0"/>
+          <a:stretch/>
+        </p:blipFill>
+        <p:spPr>
+          <a:xfrm>
+            <a:off x="1645920" y="1600200"/>
+            <a:ext cx="8906256" cy="4343400"/>
+          </a:xfrm>
+          <a:prstGeom prst="rect">
+            <a:avLst/>
+          </a:prstGeom>
+        </p:spPr>
+      </p:pic>
+      <p:sp>
+        <p:nvSpPr>
+          <p:cNvPr id="7" name="Text 3"/>
           <p:cNvSpPr/>
           <p:nvPr/>
         </p:nvSpPr>
         <p:spPr>
           <a:xfrm>
-            <a:off x="566928" y="1691640"/>
-            <a:ext cx="11055096" cy="4434840"/>
+            <a:off x="566928" y="5943600"/>
+            <a:ext cx="11055096" cy="310896"/>
           </a:xfrm>
           <a:prstGeom prst="rect">
             <a:avLst/>
@@ -3950,116 +4240,22 @@
           <a:ln/>
         </p:spPr>
         <p:txBody>
-          <a:bodyPr wrap="square" rtlCol="0" anchor="t"/>
-          <a:lstStyle/>
-          <a:p>
-            <a:pPr algn="l" marL="342900" indent="-342900">
-              <a:lnSpc>
-                <a:spcPct val="115000"/>
-              </a:lnSpc>
-              <a:spcAft>
-                <a:spcPts val="600"/>
-              </a:spcAft>
-              <a:buSzPct val="100000"/>
-              <a:buChar char="●"/>
-            </a:pPr>
-            <a:r>
-              <a:rPr lang="en-US" sz="1600" dirty="0">
-                <a:solidFill>
-                  <a:srgbClr val="242424"/>
+          <a:bodyPr wrap="square" rtlCol="0" anchor="ctr"/>
+          <a:lstStyle/>
+          <a:p>
+            <a:pPr algn="ctr" indent="0" marL="0">
+              <a:buNone/>
+            </a:pPr>
+            <a:r>
+              <a:rPr lang="en-US" sz="1300" i="1" dirty="0">
+                <a:solidFill>
+                  <a:srgbClr val="5A5A5A"/>
                 </a:solidFill>
                 <a:latin typeface="Red Hat Text" pitchFamily="34" charset="0"/>
                 <a:ea typeface="Red Hat Text" pitchFamily="34" charset="-122"/>
                 <a:cs typeface="Red Hat Text" pitchFamily="34" charset="-120"/>
               </a:rPr>
-              <a:t>A trace answers where did the time go, and what happened along the way — a tree of spans sharing one trace_id, each with a duration, attributes, and a parent. One trace should span the REST request, both gRPC calls, the Postgres writes, the Kafka publish, and the shipping and notification consumers.</a:t>
-            </a:r>
-            <a:endParaRPr lang="en-US" sz="1600" dirty="0"/>
-          </a:p>
-          <a:p>
-            <a:pPr algn="l" marL="342900" indent="-342900">
-              <a:lnSpc>
-                <a:spcPct val="115000"/>
-              </a:lnSpc>
-              <a:spcAft>
-                <a:spcPts val="600"/>
-              </a:spcAft>
-              <a:buSzPct val="100000"/>
-              <a:buChar char="●"/>
-            </a:pPr>
-            <a:r>
-              <a:rPr lang="en-US" sz="1600" dirty="0">
-                <a:solidFill>
-                  <a:srgbClr val="242424"/>
-                </a:solidFill>
-                <a:latin typeface="Red Hat Text" pitchFamily="34" charset="0"/>
-                <a:ea typeface="Red Hat Text" pitchFamily="34" charset="-122"/>
-                <a:cs typeface="Red Hat Text" pitchFamily="34" charset="-120"/>
-              </a:rPr>
-              <a:t>A metric answers how much, how often, how slow — in aggregate. Cheap numbers over time: request rate, error rate, duration percentiles. Small enough to keep for everything, always — which is what alerts fire on.</a:t>
-            </a:r>
-            <a:endParaRPr lang="en-US" sz="1600" dirty="0"/>
-          </a:p>
-          <a:p>
-            <a:pPr algn="l" marL="342900" indent="-342900">
-              <a:lnSpc>
-                <a:spcPct val="115000"/>
-              </a:lnSpc>
-              <a:spcAft>
-                <a:spcPts val="600"/>
-              </a:spcAft>
-              <a:buSzPct val="100000"/>
-              <a:buChar char="●"/>
-            </a:pPr>
-            <a:r>
-              <a:rPr lang="en-US" sz="1600" dirty="0">
-                <a:solidFill>
-                  <a:srgbClr val="242424"/>
-                </a:solidFill>
-                <a:latin typeface="Red Hat Text" pitchFamily="34" charset="0"/>
-                <a:ea typeface="Red Hat Text" pitchFamily="34" charset="-122"/>
-                <a:cs typeface="Red Hat Text" pitchFamily="34" charset="-120"/>
-              </a:rPr>
-              <a:t>A log answers what exactly happened at this instant — a timestamped, ideally structured record carrying the detail a metric averages away and a span has no room for.</a:t>
-            </a:r>
-            <a:endParaRPr lang="en-US" sz="1600" dirty="0"/>
-          </a:p>
-        </p:txBody>
-      </p:sp>
-      <p:sp>
-        <p:nvSpPr>
-          <p:cNvPr id="7" name="Text 4"/>
-          <p:cNvSpPr/>
-          <p:nvPr/>
-        </p:nvSpPr>
-        <p:spPr>
-          <a:xfrm>
-            <a:off x="566928" y="5943600"/>
-            <a:ext cx="11055096" cy="310896"/>
-          </a:xfrm>
-          <a:prstGeom prst="rect">
-            <a:avLst/>
-          </a:prstGeom>
-          <a:noFill/>
-          <a:ln/>
-        </p:spPr>
-        <p:txBody>
-          <a:bodyPr wrap="square" rtlCol="0" anchor="ctr"/>
-          <a:lstStyle/>
-          <a:p>
-            <a:pPr algn="ctr" indent="0" marL="0">
-              <a:buNone/>
-            </a:pPr>
-            <a:r>
-              <a:rPr lang="en-US" sz="1300" i="1" dirty="0">
-                <a:solidFill>
-                  <a:srgbClr val="5A5A5A"/>
-                </a:solidFill>
-                <a:latin typeface="Red Hat Text" pitchFamily="34" charset="0"/>
-                <a:ea typeface="Red Hat Text" pitchFamily="34" charset="-122"/>
-                <a:cs typeface="Red Hat Text" pitchFamily="34" charset="-120"/>
-              </a:rPr>
-              <a:t>The trap is treating them as three products; their strength is the hand-off between them.</a:t>
+              <a:t>Figure 2.1 — A service's SDK exports OTLP to the Collector, which routes traces → Tempo, metrics → Mimir, logs → Loki, all viewed in Grafana.</a:t>
             </a:r>
             <a:endParaRPr lang="en-US" sz="1300" dirty="0"/>
           </a:p>
@@ -4225,7 +4421,7 @@
                 <a:ea typeface="Overpass" pitchFamily="34" charset="-122"/>
                 <a:cs typeface="Overpass" pitchFamily="34" charset="-120"/>
               </a:rPr>
-              <a:t>The OpenTelemetry data path</a:t>
+              <a:t>Three signals, three questions</a:t>
             </a:r>
             <a:endParaRPr lang="en-US" sz="3000" dirty="0"/>
           </a:p>
@@ -4271,7 +4467,7 @@
                 <a:ea typeface="Red Hat Text" pitchFamily="34" charset="-122"/>
                 <a:cs typeface="Red Hat Text" pitchFamily="34" charset="-120"/>
               </a:rPr>
-              <a:t>OpenTelemetry splits producing telemetry from shipping it. In your process the SDK creates spans, records measurements, and emits logs, all stamped with a shared resource — the service.name, version, and environment that say who produced this.</a:t>
+              <a:t>A trace answers where did the time go, and what happened along the way — a tree of spans sharing one trace_id, each with a duration, attributes, and a parent. One trace should span the REST request, both gRPC calls, the Postgres writes, the Kafka publish, and the shipping and notification consumers.</a:t>
             </a:r>
             <a:endParaRPr lang="en-US" sz="1600" dirty="0"/>
           </a:p>
@@ -4295,7 +4491,7 @@
                 <a:ea typeface="Red Hat Text" pitchFamily="34" charset="-122"/>
                 <a:cs typeface="Red Hat Text" pitchFamily="34" charset="-120"/>
               </a:rPr>
-              <a:t>The SDK exports over OTLP to the Collector — the decision point. Receivers accept OTLP; processors act in order (a memory_limiter so a flood can't take the Collector down, a batch processor, later a sampler); exporters route traces → Tempo, metrics → Mimir, logs → Loki.</a:t>
+              <a:t>A metric answers how much, how often, how slow — in aggregate. Cheap numbers over time: request rate, error rate, duration percentiles. Small enough to keep for everything, always — which is what alerts fire on.</a:t>
             </a:r>
             <a:endParaRPr lang="en-US" sz="1600" dirty="0"/>
           </a:p>
@@ -4319,9 +4515,48 @@
                 <a:ea typeface="Red Hat Text" pitchFamily="34" charset="-122"/>
                 <a:cs typeface="Red Hat Text" pitchFamily="34" charset="-120"/>
               </a:rPr>
-              <a:t>Putting the Collector in the path lets sampling, batching, redaction, and routing be configured in one place, owned by whoever runs the platform, without touching application code.</a:t>
+              <a:t>A log answers what exactly happened at this instant — a timestamped, ideally structured record carrying the detail a metric averages away and a span has no room for.</a:t>
             </a:r>
             <a:endParaRPr lang="en-US" sz="1600" dirty="0"/>
+          </a:p>
+        </p:txBody>
+      </p:sp>
+      <p:sp>
+        <p:nvSpPr>
+          <p:cNvPr id="7" name="Text 4"/>
+          <p:cNvSpPr/>
+          <p:nvPr/>
+        </p:nvSpPr>
+        <p:spPr>
+          <a:xfrm>
+            <a:off x="566928" y="5943600"/>
+            <a:ext cx="11055096" cy="310896"/>
+          </a:xfrm>
+          <a:prstGeom prst="rect">
+            <a:avLst/>
+          </a:prstGeom>
+          <a:noFill/>
+          <a:ln/>
+        </p:spPr>
+        <p:txBody>
+          <a:bodyPr wrap="square" rtlCol="0" anchor="ctr"/>
+          <a:lstStyle/>
+          <a:p>
+            <a:pPr algn="ctr" indent="0" marL="0">
+              <a:buNone/>
+            </a:pPr>
+            <a:r>
+              <a:rPr lang="en-US" sz="1300" i="1" dirty="0">
+                <a:solidFill>
+                  <a:srgbClr val="5A5A5A"/>
+                </a:solidFill>
+                <a:latin typeface="Red Hat Text" pitchFamily="34" charset="0"/>
+                <a:ea typeface="Red Hat Text" pitchFamily="34" charset="-122"/>
+                <a:cs typeface="Red Hat Text" pitchFamily="34" charset="-120"/>
+              </a:rPr>
+              <a:t>The trap is treating them as three products; their strength is the hand-off between them.</a:t>
+            </a:r>
+            <a:endParaRPr lang="en-US" sz="1300" dirty="0"/>
           </a:p>
         </p:txBody>
       </p:sp>
@@ -4485,7 +4720,7 @@
                 <a:ea typeface="Overpass" pitchFamily="34" charset="-122"/>
                 <a:cs typeface="Overpass" pitchFamily="34" charset="-120"/>
               </a:rPr>
-              <a:t>Why the shared context is the point</a:t>
+              <a:t>The OpenTelemetry data path</a:t>
             </a:r>
             <a:endParaRPr lang="en-US" sz="3000" dirty="0"/>
           </a:p>
@@ -4531,7 +4766,7 @@
                 <a:ea typeface="Red Hat Text" pitchFamily="34" charset="-122"/>
                 <a:cs typeface="Red Hat Text" pitchFamily="34" charset="-120"/>
               </a:rPr>
-              <a:t>Context propagation is what makes this one system, not three. When a span is active the SDK can stamp its trace_id and span_id onto log records emitted in the same breath, and attach an exemplar — a pointer back to a representative trace — onto a metric.</a:t>
+              <a:t>OpenTelemetry splits producing telemetry from shipping it. In your process the SDK creates spans, records measurements, and emits logs, all stamped with a shared resource — the service.name, version, and environment that say who produced this.</a:t>
             </a:r>
             <a:endParaRPr lang="en-US" sz="1600" dirty="0"/>
           </a:p>
@@ -4555,7 +4790,7 @@
                 <a:ea typeface="Red Hat Text" pitchFamily="34" charset="-122"/>
                 <a:cs typeface="Red Hat Text" pitchFamily="34" charset="-120"/>
               </a:rPr>
-              <a:t>The hard part, and the part most material skips: keeping that context alive across a boundary that is not a function call. When the order service publishes order.placed to Kafka, the shipping and notification consumers are different processes with no shared call stack.</a:t>
+              <a:t>The SDK exports over OTLP to the Collector — the decision point. Receivers accept OTLP; processors act in order (a memory_limiter so a flood can't take the Collector down, a batch processor, later a sampler); exporters route traces → Tempo, metrics → Mimir, logs → Loki.</a:t>
             </a:r>
             <a:endParaRPr lang="en-US" sz="1600" dirty="0"/>
           </a:p>
@@ -4579,7 +4814,7 @@
                 <a:ea typeface="Red Hat Text" pitchFamily="34" charset="-122"/>
                 <a:cs typeface="Red Hat Text" pitchFamily="34" charset="-120"/>
               </a:rPr>
-              <a:t>Unless the trace context travels with the message, each consumer starts a brand-new trace and the chain breaks in the middle. Carrying it across that hop is the job of the custom-instrumentation chapter.</a:t>
+              <a:t>Putting the Collector in the path lets sampling, batching, redaction, and routing be configured in one place, owned by whoever runs the platform, without touching application code.</a:t>
             </a:r>
             <a:endParaRPr lang="en-US" sz="1600" dirty="0"/>
           </a:p>
@@ -4706,7 +4941,7 @@
                 <a:ea typeface="Overpass" pitchFamily="34" charset="-122"/>
                 <a:cs typeface="Overpass" pitchFamily="34" charset="-120"/>
               </a:rPr>
-              <a:t>FOUNDATIONS · THE EXAMPLE SERVICES</a:t>
+              <a:t>FOUNDATIONS · FUNDAMENTALS</a:t>
             </a:r>
             <a:endParaRPr lang="en-US" sz="1200" dirty="0"/>
           </a:p>
@@ -4745,45 +4980,22 @@
                 <a:ea typeface="Overpass" pitchFamily="34" charset="-122"/>
                 <a:cs typeface="Overpass" pitchFamily="34" charset="-120"/>
               </a:rPr>
-              <a:t>One order, five protocols, six services</a:t>
+              <a:t>Why the shared context is the point</a:t>
             </a:r>
             <a:endParaRPr lang="en-US" sz="3000" dirty="0"/>
           </a:p>
         </p:txBody>
       </p:sp>
-      <p:pic>
-        <p:nvPicPr>
-          <p:cNvPr id="6" name="Image 1" descr="./png/fig-03-service-topology.png">    </p:cNvPr>
-          <p:cNvPicPr>
-            <a:picLocks noChangeAspect="1"/>
-          </p:cNvPicPr>
-          <p:nvPr/>
-        </p:nvPicPr>
-        <p:blipFill>
-          <a:blip r:embed="rId2"/>
-          <a:srcRect l="0" r="0" t="0" b="0"/>
-          <a:stretch/>
-        </p:blipFill>
-        <p:spPr>
-          <a:xfrm>
-            <a:off x="1645920" y="1600200"/>
-            <a:ext cx="8906256" cy="4343400"/>
-          </a:xfrm>
-          <a:prstGeom prst="rect">
-            <a:avLst/>
-          </a:prstGeom>
-        </p:spPr>
-      </p:pic>
-      <p:sp>
-        <p:nvSpPr>
-          <p:cNvPr id="7" name="Text 3"/>
+      <p:sp>
+        <p:nvSpPr>
+          <p:cNvPr id="6" name="Text 3"/>
           <p:cNvSpPr/>
           <p:nvPr/>
         </p:nvSpPr>
         <p:spPr>
           <a:xfrm>
-            <a:off x="566928" y="5943600"/>
-            <a:ext cx="11055096" cy="310896"/>
+            <a:off x="566928" y="1691640"/>
+            <a:ext cx="11055096" cy="4434840"/>
           </a:xfrm>
           <a:prstGeom prst="rect">
             <a:avLst/>
@@ -4792,24 +5004,79 @@
           <a:ln/>
         </p:spPr>
         <p:txBody>
-          <a:bodyPr wrap="square" rtlCol="0" anchor="ctr"/>
-          <a:lstStyle/>
-          <a:p>
-            <a:pPr algn="ctr" indent="0" marL="0">
-              <a:buNone/>
-            </a:pPr>
-            <a:r>
-              <a:rPr lang="en-US" sz="1300" i="1" dirty="0">
-                <a:solidFill>
-                  <a:srgbClr val="5A5A5A"/>
+          <a:bodyPr wrap="square" rtlCol="0" anchor="t"/>
+          <a:lstStyle/>
+          <a:p>
+            <a:pPr algn="l" marL="342900" indent="-342900">
+              <a:lnSpc>
+                <a:spcPct val="115000"/>
+              </a:lnSpc>
+              <a:spcAft>
+                <a:spcPts val="600"/>
+              </a:spcAft>
+              <a:buSzPct val="100000"/>
+              <a:buChar char="●"/>
+            </a:pPr>
+            <a:r>
+              <a:rPr lang="en-US" sz="1600" dirty="0">
+                <a:solidFill>
+                  <a:srgbClr val="242424"/>
                 </a:solidFill>
                 <a:latin typeface="Red Hat Text" pitchFamily="34" charset="0"/>
                 <a:ea typeface="Red Hat Text" pitchFamily="34" charset="-122"/>
                 <a:cs typeface="Red Hat Text" pitchFamily="34" charset="-120"/>
               </a:rPr>
-              <a:t>Figure 3.1 — POST /orders fans out: gRPC to inventory + payment, Postgres, Kafka order.placed → shipping + notification; review serves GraphQL.</a:t>
-            </a:r>
-            <a:endParaRPr lang="en-US" sz="1300" dirty="0"/>
+              <a:t>Context propagation is what makes this one system, not three. When a span is active the SDK can stamp its trace_id and span_id onto log records emitted in the same breath, and attach an exemplar — a pointer back to a representative trace — onto a metric.</a:t>
+            </a:r>
+            <a:endParaRPr lang="en-US" sz="1600" dirty="0"/>
+          </a:p>
+          <a:p>
+            <a:pPr algn="l" marL="342900" indent="-342900">
+              <a:lnSpc>
+                <a:spcPct val="115000"/>
+              </a:lnSpc>
+              <a:spcAft>
+                <a:spcPts val="600"/>
+              </a:spcAft>
+              <a:buSzPct val="100000"/>
+              <a:buChar char="●"/>
+            </a:pPr>
+            <a:r>
+              <a:rPr lang="en-US" sz="1600" dirty="0">
+                <a:solidFill>
+                  <a:srgbClr val="242424"/>
+                </a:solidFill>
+                <a:latin typeface="Red Hat Text" pitchFamily="34" charset="0"/>
+                <a:ea typeface="Red Hat Text" pitchFamily="34" charset="-122"/>
+                <a:cs typeface="Red Hat Text" pitchFamily="34" charset="-120"/>
+              </a:rPr>
+              <a:t>The hard part, and the part most material skips: keeping that context alive across a boundary that is not a function call. When the order service publishes order.placed to Kafka, the shipping and notification consumers are different processes with no shared call stack.</a:t>
+            </a:r>
+            <a:endParaRPr lang="en-US" sz="1600" dirty="0"/>
+          </a:p>
+          <a:p>
+            <a:pPr algn="l" marL="342900" indent="-342900">
+              <a:lnSpc>
+                <a:spcPct val="115000"/>
+              </a:lnSpc>
+              <a:spcAft>
+                <a:spcPts val="600"/>
+              </a:spcAft>
+              <a:buSzPct val="100000"/>
+              <a:buChar char="●"/>
+            </a:pPr>
+            <a:r>
+              <a:rPr lang="en-US" sz="1600" dirty="0">
+                <a:solidFill>
+                  <a:srgbClr val="242424"/>
+                </a:solidFill>
+                <a:latin typeface="Red Hat Text" pitchFamily="34" charset="0"/>
+                <a:ea typeface="Red Hat Text" pitchFamily="34" charset="-122"/>
+                <a:cs typeface="Red Hat Text" pitchFamily="34" charset="-120"/>
+              </a:rPr>
+              <a:t>Unless the trace context travels with the message, each consumer starts a brand-new trace and the chain breaks in the middle. Carrying it across that hop is the job of the custom-instrumentation chapter.</a:t>
+            </a:r>
+            <a:endParaRPr lang="en-US" sz="1600" dirty="0"/>
           </a:p>
         </p:txBody>
       </p:sp>
@@ -4973,22 +5240,45 @@
                 <a:ea typeface="Overpass" pitchFamily="34" charset="-122"/>
                 <a:cs typeface="Overpass" pitchFamily="34" charset="-120"/>
               </a:rPr>
-              <a:t>The one request the whole talk follows</a:t>
+              <a:t>One order, five protocols, six services</a:t>
             </a:r>
             <a:endParaRPr lang="en-US" sz="3000" dirty="0"/>
           </a:p>
         </p:txBody>
       </p:sp>
-      <p:sp>
-        <p:nvSpPr>
-          <p:cNvPr id="6" name="Text 3"/>
+      <p:pic>
+        <p:nvPicPr>
+          <p:cNvPr id="6" name="Image 1" descr="./png/fig-03-service-topology.png">    </p:cNvPr>
+          <p:cNvPicPr>
+            <a:picLocks noChangeAspect="1"/>
+          </p:cNvPicPr>
+          <p:nvPr/>
+        </p:nvPicPr>
+        <p:blipFill>
+          <a:blip r:embed="rId2"/>
+          <a:srcRect l="0" r="0" t="0" b="0"/>
+          <a:stretch/>
+        </p:blipFill>
+        <p:spPr>
+          <a:xfrm>
+            <a:off x="1645920" y="1600200"/>
+            <a:ext cx="8906256" cy="4343400"/>
+          </a:xfrm>
+          <a:prstGeom prst="rect">
+            <a:avLst/>
+          </a:prstGeom>
+        </p:spPr>
+      </p:pic>
+      <p:sp>
+        <p:nvSpPr>
+          <p:cNvPr id="7" name="Text 3"/>
           <p:cNvSpPr/>
           <p:nvPr/>
         </p:nvSpPr>
         <p:spPr>
           <a:xfrm>
-            <a:off x="566928" y="1691640"/>
-            <a:ext cx="11055096" cy="4434840"/>
+            <a:off x="566928" y="5943600"/>
+            <a:ext cx="11055096" cy="310896"/>
           </a:xfrm>
           <a:prstGeom prst="rect">
             <a:avLst/>
@@ -4997,116 +5287,22 @@
           <a:ln/>
         </p:spPr>
         <p:txBody>
-          <a:bodyPr wrap="square" rtlCol="0" anchor="t"/>
-          <a:lstStyle/>
-          <a:p>
-            <a:pPr algn="l" marL="342900" indent="-342900">
-              <a:lnSpc>
-                <a:spcPct val="115000"/>
-              </a:lnSpc>
-              <a:spcAft>
-                <a:spcPts val="600"/>
-              </a:spcAft>
-              <a:buSzPct val="100000"/>
-              <a:buChar char="●"/>
-            </a:pPr>
-            <a:r>
-              <a:rPr lang="en-US" sz="1600" dirty="0">
-                <a:solidFill>
-                  <a:srgbClr val="242424"/>
+          <a:bodyPr wrap="square" rtlCol="0" anchor="ctr"/>
+          <a:lstStyle/>
+          <a:p>
+            <a:pPr algn="ctr" indent="0" marL="0">
+              <a:buNone/>
+            </a:pPr>
+            <a:r>
+              <a:rPr lang="en-US" sz="1300" i="1" dirty="0">
+                <a:solidFill>
+                  <a:srgbClr val="5A5A5A"/>
                 </a:solidFill>
                 <a:latin typeface="Red Hat Text" pitchFamily="34" charset="0"/>
                 <a:ea typeface="Red Hat Text" pitchFamily="34" charset="-122"/>
                 <a:cs typeface="Red Hat Text" pitchFamily="34" charset="-120"/>
               </a:rPr>
-              <a:t>POST /orders on the order service is the action everything hangs off. In sequence: reserve stock (gRPC → inventory), authorize payment (gRPC → payment), persist the order (Postgres), publish order.placed (Kafka), return the confirmed order.</a:t>
-            </a:r>
-            <a:endParaRPr lang="en-US" sz="1600" dirty="0"/>
-          </a:p>
-          <a:p>
-            <a:pPr algn="l" marL="342900" indent="-342900">
-              <a:lnSpc>
-                <a:spcPct val="115000"/>
-              </a:lnSpc>
-              <a:spcAft>
-                <a:spcPts val="600"/>
-              </a:spcAft>
-              <a:buSzPct val="100000"/>
-              <a:buChar char="●"/>
-            </a:pPr>
-            <a:r>
-              <a:rPr lang="en-US" sz="1600" dirty="0">
-                <a:solidFill>
-                  <a:srgbClr val="242424"/>
-                </a:solidFill>
-                <a:latin typeface="Red Hat Text" pitchFamily="34" charset="0"/>
-                <a:ea typeface="Red Hat Text" pitchFamily="34" charset="-122"/>
-                <a:cs typeface="Red Hat Text" pitchFamily="34" charset="-120"/>
-              </a:rPr>
-              <a:t>Two services react asynchronously: shipping consumes the event and writes a shipment; notification consumes the same event and sends a message. A separate review service exposes a GraphQL read API over orders and reviews.</a:t>
-            </a:r>
-            <a:endParaRPr lang="en-US" sz="1600" dirty="0"/>
-          </a:p>
-          <a:p>
-            <a:pPr algn="l" marL="342900" indent="-342900">
-              <a:lnSpc>
-                <a:spcPct val="115000"/>
-              </a:lnSpc>
-              <a:spcAft>
-                <a:spcPts val="600"/>
-              </a:spcAft>
-              <a:buSzPct val="100000"/>
-              <a:buChar char="●"/>
-            </a:pPr>
-            <a:r>
-              <a:rPr lang="en-US" sz="1600" dirty="0">
-                <a:solidFill>
-                  <a:srgbClr val="242424"/>
-                </a:solidFill>
-                <a:latin typeface="Red Hat Text" pitchFamily="34" charset="0"/>
-                <a:ea typeface="Red Hat Text" pitchFamily="34" charset="-122"/>
-                <a:cs typeface="Red Hat Text" pitchFamily="34" charset="-120"/>
-              </a:rPr>
-              <a:t>That is REST at the edge, gRPC between services, Kafka for the async fan-out, Postgres underneath, and GraphQL on the read side — one workflow, five protocols, all of which a single trace must stay whole across.</a:t>
-            </a:r>
-            <a:endParaRPr lang="en-US" sz="1600" dirty="0"/>
-          </a:p>
-        </p:txBody>
-      </p:sp>
-      <p:sp>
-        <p:nvSpPr>
-          <p:cNvPr id="7" name="Text 4"/>
-          <p:cNvSpPr/>
-          <p:nvPr/>
-        </p:nvSpPr>
-        <p:spPr>
-          <a:xfrm>
-            <a:off x="566928" y="5943600"/>
-            <a:ext cx="11055096" cy="310896"/>
-          </a:xfrm>
-          <a:prstGeom prst="rect">
-            <a:avLst/>
-          </a:prstGeom>
-          <a:noFill/>
-          <a:ln/>
-        </p:spPr>
-        <p:txBody>
-          <a:bodyPr wrap="square" rtlCol="0" anchor="ctr"/>
-          <a:lstStyle/>
-          <a:p>
-            <a:pPr algn="ctr" indent="0" marL="0">
-              <a:buNone/>
-            </a:pPr>
-            <a:r>
-              <a:rPr lang="en-US" sz="1300" i="1" dirty="0">
-                <a:solidFill>
-                  <a:srgbClr val="5A5A5A"/>
-                </a:solidFill>
-                <a:latin typeface="Red Hat Text" pitchFamily="34" charset="0"/>
-                <a:ea typeface="Red Hat Text" pitchFamily="34" charset="-122"/>
-                <a:cs typeface="Red Hat Text" pitchFamily="34" charset="-120"/>
-              </a:rPr>
-              <a:t>Reserve before you charge, charge before you promise, promise before you announce.</a:t>
+              <a:t>Figure 3.1 — POST /orders fans out: gRPC to inventory + payment, Postgres, Kafka order.placed → shipping + notification; review serves GraphQL.</a:t>
             </a:r>
             <a:endParaRPr lang="en-US" sz="1300" dirty="0"/>
           </a:p>
@@ -5272,7 +5468,7 @@
                 <a:ea typeface="Overpass" pitchFamily="34" charset="-122"/>
                 <a:cs typeface="Overpass" pitchFamily="34" charset="-120"/>
               </a:rPr>
-              <a:t>One shared library carries all the telemetry</a:t>
+              <a:t>The one request the whole talk follows</a:t>
             </a:r>
             <a:endParaRPr lang="en-US" sz="3000" dirty="0"/>
           </a:p>
@@ -5318,7 +5514,7 @@
                 <a:ea typeface="Red Hat Text" pitchFamily="34" charset="-122"/>
                 <a:cs typeface="Red Hat Text" pitchFamily="34" charset="-120"/>
               </a:rPr>
-              <a:t>Every service depends on a small package, obs (services/common/), so the instrumentation story is identical everywhere and lives in one reviewable place — application code stays clean.</a:t>
+              <a:t>POST /orders on the order service is the action everything hangs off. In sequence: reserve stock (gRPC → inventory), authorize payment (gRPC → payment), persist the order (Postgres), publish order.placed (Kafka), return the confirmed order.</a:t>
             </a:r>
             <a:endParaRPr lang="en-US" sz="1600" dirty="0"/>
           </a:p>
@@ -5342,7 +5538,7 @@
                 <a:ea typeface="Red Hat Text" pitchFamily="34" charset="-122"/>
                 <a:cs typeface="Red Hat Text" pitchFamily="34" charset="-120"/>
               </a:rPr>
-              <a:t>obs.otel.setup(name) builds the resource, the OTLP/HTTP exporters for all three signals, the W3C propagator, and turns on auto-instrumentation for FastAPI, gRPC, and asyncpg.</a:t>
+              <a:t>Two services react asynchronously: shipping consumes the event and writes a shipment; notification consumes the same event and sends a message. A separate review service exposes a GraphQL read API over orders and reviews.</a:t>
             </a:r>
             <a:endParaRPr lang="en-US" sz="1600" dirty="0"/>
           </a:p>
@@ -5366,9 +5562,48 @@
                 <a:ea typeface="Red Hat Text" pitchFamily="34" charset="-122"/>
                 <a:cs typeface="Red Hat Text" pitchFamily="34" charset="-120"/>
               </a:rPr>
-              <a:t>obs.kafka / obs.kafka_propagation publish JSON events and carry trace context across Kafka; obs.db is one asyncpg pool; obs.logging emits trace-stamped JSON. In Foundations none of it is switched on yet (OTEL_SDK_DISABLED=true).</a:t>
+              <a:t>That is REST at the edge, gRPC between services, Kafka for the async fan-out, Postgres underneath, and GraphQL on the read side — one workflow, five protocols, all of which a single trace must stay whole across.</a:t>
             </a:r>
             <a:endParaRPr lang="en-US" sz="1600" dirty="0"/>
+          </a:p>
+        </p:txBody>
+      </p:sp>
+      <p:sp>
+        <p:nvSpPr>
+          <p:cNvPr id="7" name="Text 4"/>
+          <p:cNvSpPr/>
+          <p:nvPr/>
+        </p:nvSpPr>
+        <p:spPr>
+          <a:xfrm>
+            <a:off x="566928" y="5943600"/>
+            <a:ext cx="11055096" cy="310896"/>
+          </a:xfrm>
+          <a:prstGeom prst="rect">
+            <a:avLst/>
+          </a:prstGeom>
+          <a:noFill/>
+          <a:ln/>
+        </p:spPr>
+        <p:txBody>
+          <a:bodyPr wrap="square" rtlCol="0" anchor="ctr"/>
+          <a:lstStyle/>
+          <a:p>
+            <a:pPr algn="ctr" indent="0" marL="0">
+              <a:buNone/>
+            </a:pPr>
+            <a:r>
+              <a:rPr lang="en-US" sz="1300" i="1" dirty="0">
+                <a:solidFill>
+                  <a:srgbClr val="5A5A5A"/>
+                </a:solidFill>
+                <a:latin typeface="Red Hat Text" pitchFamily="34" charset="0"/>
+                <a:ea typeface="Red Hat Text" pitchFamily="34" charset="-122"/>
+                <a:cs typeface="Red Hat Text" pitchFamily="34" charset="-120"/>
+              </a:rPr>
+              <a:t>Reserve before you charge, charge before you promise, promise before you announce.</a:t>
+            </a:r>
+            <a:endParaRPr lang="en-US" sz="1300" dirty="0"/>
           </a:p>
         </p:txBody>
       </p:sp>
@@ -5508,7 +5743,7 @@
         <p:spPr>
           <a:xfrm>
             <a:off x="566928" y="676656"/>
-            <a:ext cx="7223760" cy="1005840"/>
+            <a:ext cx="11055096" cy="1005840"/>
           </a:xfrm>
           <a:prstGeom prst="rect">
             <a:avLst/>
@@ -5532,7 +5767,7 @@
                 <a:ea typeface="Overpass" pitchFamily="34" charset="-122"/>
                 <a:cs typeface="Overpass" pitchFamily="34" charset="-120"/>
               </a:rPr>
-              <a:t>The order handler — the spine</a:t>
+              <a:t>One shared library carries all the telemetry</a:t>
             </a:r>
             <a:endParaRPr lang="en-US" sz="3000" dirty="0"/>
           </a:p>
@@ -5546,8 +5781,8 @@
         </p:nvSpPr>
         <p:spPr>
           <a:xfrm>
-            <a:off x="7882128" y="969264"/>
-            <a:ext cx="3739896" cy="274320"/>
+            <a:off x="566928" y="1691640"/>
+            <a:ext cx="11055096" cy="4434840"/>
           </a:xfrm>
           <a:prstGeom prst="rect">
             <a:avLst/>
@@ -5556,419 +5791,79 @@
           <a:ln/>
         </p:spPr>
         <p:txBody>
-          <a:bodyPr wrap="square" rtlCol="0" anchor="ctr"/>
-          <a:lstStyle/>
-          <a:p>
-            <a:pPr algn="r" indent="0" marL="0">
-              <a:buNone/>
-            </a:pPr>
-            <a:r>
-              <a:rPr lang="en-US" sz="1100" b="1" spc="200" kern="0" dirty="0">
-                <a:solidFill>
-                  <a:srgbClr val="5A5A5A"/>
-                </a:solidFill>
-                <a:latin typeface="Red Hat Mono" pitchFamily="34" charset="0"/>
-                <a:ea typeface="Red Hat Mono" pitchFamily="34" charset="-122"/>
-                <a:cs typeface="Red Hat Mono" pitchFamily="34" charset="-120"/>
-              </a:rPr>
-              <a:t>python · FastAPI</a:t>
-            </a:r>
-            <a:endParaRPr lang="en-US" sz="1100" dirty="0"/>
-          </a:p>
-        </p:txBody>
-      </p:sp>
-      <p:sp>
-        <p:nvSpPr>
-          <p:cNvPr id="7" name="Shape 4"/>
-          <p:cNvSpPr/>
-          <p:nvPr/>
-        </p:nvSpPr>
-        <p:spPr>
-          <a:xfrm>
-            <a:off x="566928" y="1691640"/>
-            <a:ext cx="11055096" cy="4251960"/>
-          </a:xfrm>
-          <a:prstGeom prst="rect">
-            <a:avLst/>
-          </a:prstGeom>
-          <a:solidFill>
-            <a:srgbClr val="151515"/>
-          </a:solidFill>
-          <a:ln w="12700">
-            <a:solidFill>
-              <a:srgbClr val="151515"/>
-            </a:solidFill>
-            <a:prstDash val="solid"/>
-          </a:ln>
-        </p:spPr>
-      </p:sp>
-      <p:sp>
-        <p:nvSpPr>
-          <p:cNvPr id="8" name="Text 5"/>
-          <p:cNvSpPr/>
-          <p:nvPr/>
-        </p:nvSpPr>
-        <p:spPr>
-          <a:xfrm>
-            <a:off x="749808" y="1783080"/>
-            <a:ext cx="10689336" cy="4069080"/>
-          </a:xfrm>
-          <a:prstGeom prst="rect">
-            <a:avLst/>
-          </a:prstGeom>
-          <a:noFill/>
-          <a:ln/>
-        </p:spPr>
-        <p:txBody>
           <a:bodyPr wrap="square" rtlCol="0" anchor="t"/>
           <a:lstStyle/>
           <a:p>
-            <a:pPr algn="l" indent="0" marL="0">
+            <a:pPr algn="l" marL="342900" indent="-342900">
               <a:lnSpc>
-                <a:spcPct val="110000"/>
+                <a:spcPct val="115000"/>
               </a:lnSpc>
-              <a:buNone/>
-            </a:pPr>
-            <a:r>
-              <a:rPr lang="en-US" sz="1000" dirty="0">
-                <a:solidFill>
-                  <a:srgbClr val="E6E6E6"/>
-                </a:solidFill>
-                <a:latin typeface="Red Hat Mono" pitchFamily="34" charset="0"/>
-                <a:ea typeface="Red Hat Mono" pitchFamily="34" charset="-122"/>
-                <a:cs typeface="Red Hat Mono" pitchFamily="34" charset="-120"/>
-              </a:rPr>
-              <a:t>@app.post("/orders")
-</a:t>
-            </a:r>
-            <a:pPr algn="l" indent="0" marL="0">
-              <a:lnSpc>
-                <a:spcPct val="110000"/>
-              </a:lnSpc>
-              <a:buNone/>
-            </a:pPr>
-            <a:r>
-              <a:rPr lang="en-US" sz="1000" dirty="0">
-                <a:solidFill>
-                  <a:srgbClr val="E6E6E6"/>
-                </a:solidFill>
-                <a:latin typeface="Red Hat Mono" pitchFamily="34" charset="0"/>
-                <a:ea typeface="Red Hat Mono" pitchFamily="34" charset="-122"/>
-                <a:cs typeface="Red Hat Mono" pitchFamily="34" charset="-120"/>
-              </a:rPr>
-              <a:t>async def create_order(body: CreateOrder) -&gt; dict:
-</a:t>
-            </a:r>
-            <a:pPr algn="l" indent="0" marL="0">
-              <a:lnSpc>
-                <a:spcPct val="110000"/>
-              </a:lnSpc>
-              <a:buNone/>
-            </a:pPr>
-            <a:r>
-              <a:rPr lang="en-US" sz="1000" dirty="0">
-                <a:solidFill>
-                  <a:srgbClr val="E6E6E6"/>
-                </a:solidFill>
-                <a:latin typeface="Red Hat Mono" pitchFamily="34" charset="0"/>
-                <a:ea typeface="Red Hat Mono" pitchFamily="34" charset="-122"/>
-                <a:cs typeface="Red Hat Mono" pitchFamily="34" charset="-120"/>
-              </a:rPr>
-              <a:t>    order_id = str(uuid.uuid4())
-</a:t>
-            </a:r>
-            <a:pPr algn="l" indent="0" marL="0">
-              <a:lnSpc>
-                <a:spcPct val="110000"/>
-              </a:lnSpc>
-              <a:buNone/>
-            </a:pPr>
-            <a:r>
-              <a:rPr lang="en-US" sz="1000" dirty="0">
-                <a:solidFill>
-                  <a:srgbClr val="E6E6E6"/>
-                </a:solidFill>
-                <a:latin typeface="Red Hat Mono" pitchFamily="34" charset="0"/>
-                <a:ea typeface="Red Hat Mono" pitchFamily="34" charset="-122"/>
-                <a:cs typeface="Red Hat Mono" pitchFamily="34" charset="-120"/>
-              </a:rPr>
-              <a:t>    amount_cents = UNIT_PRICE_CENTS * body.quantity
-</a:t>
-            </a:r>
-            <a:pPr algn="l" indent="0" marL="0">
-              <a:lnSpc>
-                <a:spcPct val="110000"/>
-              </a:lnSpc>
-              <a:buNone/>
-            </a:pPr>
-            <a:r>
-              <a:rPr lang="en-US" sz="1000" dirty="0">
-                <a:solidFill>
-                  <a:srgbClr val="8FB98F"/>
-                </a:solidFill>
-                <a:latin typeface="Red Hat Mono" pitchFamily="34" charset="0"/>
-                <a:ea typeface="Red Hat Mono" pitchFamily="34" charset="-122"/>
-                <a:cs typeface="Red Hat Mono" pitchFamily="34" charset="-120"/>
-              </a:rPr>
-              <a:t>    # 1. reserve stock (gRPC → inventory; auto-traced)
-</a:t>
-            </a:r>
-            <a:pPr algn="l" indent="0" marL="0">
-              <a:lnSpc>
-                <a:spcPct val="110000"/>
-              </a:lnSpc>
-              <a:buNone/>
-            </a:pPr>
-            <a:r>
-              <a:rPr lang="en-US" sz="1000" dirty="0">
-                <a:solidFill>
-                  <a:srgbClr val="E6E6E6"/>
-                </a:solidFill>
-                <a:latin typeface="Red Hat Mono" pitchFamily="34" charset="0"/>
-                <a:ea typeface="Red Hat Mono" pitchFamily="34" charset="-122"/>
-                <a:cs typeface="Red Hat Mono" pitchFamily="34" charset="-120"/>
-              </a:rPr>
-              <a:t>    reservation = await app.state.clients.reserve(order_id, body.sku, body.quantity)
-</a:t>
-            </a:r>
-            <a:pPr algn="l" indent="0" marL="0">
-              <a:lnSpc>
-                <a:spcPct val="110000"/>
-              </a:lnSpc>
-              <a:buNone/>
-            </a:pPr>
-            <a:r>
-              <a:rPr lang="en-US" sz="1000" dirty="0">
-                <a:solidFill>
-                  <a:srgbClr val="E6E6E6"/>
-                </a:solidFill>
-                <a:latin typeface="Red Hat Mono" pitchFamily="34" charset="0"/>
-                <a:ea typeface="Red Hat Mono" pitchFamily="34" charset="-122"/>
-                <a:cs typeface="Red Hat Mono" pitchFamily="34" charset="-120"/>
-              </a:rPr>
-              <a:t>    if not reservation.reserved:
-</a:t>
-            </a:r>
-            <a:pPr algn="l" indent="0" marL="0">
-              <a:lnSpc>
-                <a:spcPct val="110000"/>
-              </a:lnSpc>
-              <a:buNone/>
-            </a:pPr>
-            <a:r>
-              <a:rPr lang="en-US" sz="1000" dirty="0">
-                <a:solidFill>
-                  <a:srgbClr val="E6E6E6"/>
-                </a:solidFill>
-                <a:latin typeface="Red Hat Mono" pitchFamily="34" charset="0"/>
-                <a:ea typeface="Red Hat Mono" pitchFamily="34" charset="-122"/>
-                <a:cs typeface="Red Hat Mono" pitchFamily="34" charset="-120"/>
-              </a:rPr>
-              <a:t>        raise HTTPException(409, "insufficient stock")
-</a:t>
-            </a:r>
-            <a:pPr algn="l" indent="0" marL="0">
-              <a:lnSpc>
-                <a:spcPct val="110000"/>
-              </a:lnSpc>
-              <a:buNone/>
-            </a:pPr>
-            <a:r>
-              <a:rPr lang="en-US" sz="1000" dirty="0">
-                <a:solidFill>
-                  <a:srgbClr val="8FB98F"/>
-                </a:solidFill>
-                <a:latin typeface="Red Hat Mono" pitchFamily="34" charset="0"/>
-                <a:ea typeface="Red Hat Mono" pitchFamily="34" charset="-122"/>
-                <a:cs typeface="Red Hat Mono" pitchFamily="34" charset="-120"/>
-              </a:rPr>
-              <a:t>    # 2. authorize payment (gRPC → payment; auto-traced)
-</a:t>
-            </a:r>
-            <a:pPr algn="l" indent="0" marL="0">
-              <a:lnSpc>
-                <a:spcPct val="110000"/>
-              </a:lnSpc>
-              <a:buNone/>
-            </a:pPr>
-            <a:r>
-              <a:rPr lang="en-US" sz="1000" dirty="0">
-                <a:solidFill>
-                  <a:srgbClr val="E6E6E6"/>
-                </a:solidFill>
-                <a:latin typeface="Red Hat Mono" pitchFamily="34" charset="0"/>
-                <a:ea typeface="Red Hat Mono" pitchFamily="34" charset="-122"/>
-                <a:cs typeface="Red Hat Mono" pitchFamily="34" charset="-120"/>
-              </a:rPr>
-              <a:t>    auth = await app.state.clients.authorize(order_id, body.customer_id, amount_cents)
-</a:t>
-            </a:r>
-            <a:pPr algn="l" indent="0" marL="0">
-              <a:lnSpc>
-                <a:spcPct val="110000"/>
-              </a:lnSpc>
-              <a:buNone/>
-            </a:pPr>
-            <a:r>
-              <a:rPr lang="en-US" sz="1000" dirty="0">
-                <a:solidFill>
-                  <a:srgbClr val="E6E6E6"/>
-                </a:solidFill>
-                <a:latin typeface="Red Hat Mono" pitchFamily="34" charset="0"/>
-                <a:ea typeface="Red Hat Mono" pitchFamily="34" charset="-122"/>
-                <a:cs typeface="Red Hat Mono" pitchFamily="34" charset="-120"/>
-              </a:rPr>
-              <a:t>    if not auth.authorized:
-</a:t>
-            </a:r>
-            <a:pPr algn="l" indent="0" marL="0">
-              <a:lnSpc>
-                <a:spcPct val="110000"/>
-              </a:lnSpc>
-              <a:buNone/>
-            </a:pPr>
-            <a:r>
-              <a:rPr lang="en-US" sz="1000" dirty="0">
-                <a:solidFill>
-                  <a:srgbClr val="E6E6E6"/>
-                </a:solidFill>
-                <a:latin typeface="Red Hat Mono" pitchFamily="34" charset="0"/>
-                <a:ea typeface="Red Hat Mono" pitchFamily="34" charset="-122"/>
-                <a:cs typeface="Red Hat Mono" pitchFamily="34" charset="-120"/>
-              </a:rPr>
-              <a:t>        raise HTTPException(402, f"payment declined: {auth.decline_reason}")
-</a:t>
-            </a:r>
-            <a:pPr algn="l" indent="0" marL="0">
-              <a:lnSpc>
-                <a:spcPct val="110000"/>
-              </a:lnSpc>
-              <a:buNone/>
-            </a:pPr>
-            <a:r>
-              <a:rPr lang="en-US" sz="1000" dirty="0">
-                <a:solidFill>
-                  <a:srgbClr val="8FB98F"/>
-                </a:solidFill>
-                <a:latin typeface="Red Hat Mono" pitchFamily="34" charset="0"/>
-                <a:ea typeface="Red Hat Mono" pitchFamily="34" charset="-122"/>
-                <a:cs typeface="Red Hat Mono" pitchFamily="34" charset="-120"/>
-              </a:rPr>
-              <a:t>    # 3. persist (Postgres)   4. announce (Kafka, context in headers)
-</a:t>
-            </a:r>
-            <a:pPr algn="l" indent="0" marL="0">
-              <a:lnSpc>
-                <a:spcPct val="110000"/>
-              </a:lnSpc>
-              <a:buNone/>
-            </a:pPr>
-            <a:r>
-              <a:rPr lang="en-US" sz="1000" dirty="0">
-                <a:solidFill>
-                  <a:srgbClr val="E6E6E6"/>
-                </a:solidFill>
-                <a:latin typeface="Red Hat Mono" pitchFamily="34" charset="0"/>
-                <a:ea typeface="Red Hat Mono" pitchFamily="34" charset="-122"/>
-                <a:cs typeface="Red Hat Mono" pitchFamily="34" charset="-120"/>
-              </a:rPr>
-              <a:t>    await repo.insert_order(order_id, ..., status="confirmed")
-</a:t>
-            </a:r>
-            <a:pPr algn="l" indent="0" marL="0">
-              <a:lnSpc>
-                <a:spcPct val="110000"/>
-              </a:lnSpc>
-              <a:buNone/>
-            </a:pPr>
-            <a:r>
-              <a:rPr lang="en-US" sz="1000" dirty="0">
-                <a:solidFill>
-                  <a:srgbClr val="E6E6E6"/>
-                </a:solidFill>
-                <a:latin typeface="Red Hat Mono" pitchFamily="34" charset="0"/>
-                <a:ea typeface="Red Hat Mono" pitchFamily="34" charset="-122"/>
-                <a:cs typeface="Red Hat Mono" pitchFamily="34" charset="-120"/>
-              </a:rPr>
-              <a:t>    await obskafka.publish_event(app.state.producer, ORDER_PLACED_TOPIC,
-</a:t>
-            </a:r>
-            <a:pPr algn="l" indent="0" marL="0">
-              <a:lnSpc>
-                <a:spcPct val="110000"/>
-              </a:lnSpc>
-              <a:buNone/>
-            </a:pPr>
-            <a:r>
-              <a:rPr lang="en-US" sz="1000" dirty="0">
-                <a:solidFill>
-                  <a:srgbClr val="E6E6E6"/>
-                </a:solidFill>
-                <a:latin typeface="Red Hat Mono" pitchFamily="34" charset="0"/>
-                <a:ea typeface="Red Hat Mono" pitchFamily="34" charset="-122"/>
-                <a:cs typeface="Red Hat Mono" pitchFamily="34" charset="-120"/>
-              </a:rPr>
-              <a:t>                                 key=order_id, value={...})
-</a:t>
-            </a:r>
-            <a:pPr algn="l" indent="0" marL="0">
-              <a:lnSpc>
-                <a:spcPct val="110000"/>
-              </a:lnSpc>
-              <a:buNone/>
-            </a:pPr>
-            <a:r>
-              <a:rPr lang="en-US" sz="1000" dirty="0">
-                <a:solidFill>
-                  <a:srgbClr val="E6E6E6"/>
-                </a:solidFill>
-                <a:latin typeface="Red Hat Mono" pitchFamily="34" charset="0"/>
-                <a:ea typeface="Red Hat Mono" pitchFamily="34" charset="-122"/>
-                <a:cs typeface="Red Hat Mono" pitchFamily="34" charset="-120"/>
-              </a:rPr>
-              <a:t>    return {"order_id": order_id, "status": "confirmed"}
-</a:t>
-            </a:r>
-            <a:endParaRPr lang="en-US" sz="1000" dirty="0"/>
-          </a:p>
-        </p:txBody>
-      </p:sp>
-      <p:sp>
-        <p:nvSpPr>
-          <p:cNvPr id="9" name="Text 6"/>
-          <p:cNvSpPr/>
-          <p:nvPr/>
-        </p:nvSpPr>
-        <p:spPr>
-          <a:xfrm>
-            <a:off x="566928" y="5943600"/>
-            <a:ext cx="11055096" cy="310896"/>
-          </a:xfrm>
-          <a:prstGeom prst="rect">
-            <a:avLst/>
-          </a:prstGeom>
-          <a:noFill/>
-          <a:ln/>
-        </p:spPr>
-        <p:txBody>
-          <a:bodyPr wrap="square" rtlCol="0" anchor="ctr"/>
-          <a:lstStyle/>
-          <a:p>
-            <a:pPr algn="ctr" indent="0" marL="0">
-              <a:buNone/>
-            </a:pPr>
-            <a:r>
-              <a:rPr lang="en-US" sz="1300" i="1" dirty="0">
-                <a:solidFill>
-                  <a:srgbClr val="5A5A5A"/>
+              <a:spcAft>
+                <a:spcPts val="600"/>
+              </a:spcAft>
+              <a:buSzPct val="100000"/>
+              <a:buChar char="●"/>
+            </a:pPr>
+            <a:r>
+              <a:rPr lang="en-US" sz="1600" dirty="0">
+                <a:solidFill>
+                  <a:srgbClr val="242424"/>
                 </a:solidFill>
                 <a:latin typeface="Red Hat Text" pitchFamily="34" charset="0"/>
                 <a:ea typeface="Red Hat Text" pitchFamily="34" charset="-122"/>
                 <a:cs typeface="Red Hat Text" pitchFamily="34" charset="-120"/>
               </a:rPr>
-              <a:t>Two gRPC calls, a Postgres write, a Kafka publish — and not one line of tracing code.</a:t>
-            </a:r>
-            <a:endParaRPr lang="en-US" sz="1300" dirty="0"/>
+              <a:t>Every service depends on a small package, obs (services/common/), so the instrumentation story is identical everywhere and lives in one reviewable place — application code stays clean.</a:t>
+            </a:r>
+            <a:endParaRPr lang="en-US" sz="1600" dirty="0"/>
+          </a:p>
+          <a:p>
+            <a:pPr algn="l" marL="342900" indent="-342900">
+              <a:lnSpc>
+                <a:spcPct val="115000"/>
+              </a:lnSpc>
+              <a:spcAft>
+                <a:spcPts val="600"/>
+              </a:spcAft>
+              <a:buSzPct val="100000"/>
+              <a:buChar char="●"/>
+            </a:pPr>
+            <a:r>
+              <a:rPr lang="en-US" sz="1600" dirty="0">
+                <a:solidFill>
+                  <a:srgbClr val="242424"/>
+                </a:solidFill>
+                <a:latin typeface="Red Hat Text" pitchFamily="34" charset="0"/>
+                <a:ea typeface="Red Hat Text" pitchFamily="34" charset="-122"/>
+                <a:cs typeface="Red Hat Text" pitchFamily="34" charset="-120"/>
+              </a:rPr>
+              <a:t>obs.otel.setup(name) builds the resource, the OTLP/HTTP exporters for all three signals, the W3C propagator, and turns on auto-instrumentation for FastAPI, gRPC, and asyncpg.</a:t>
+            </a:r>
+            <a:endParaRPr lang="en-US" sz="1600" dirty="0"/>
+          </a:p>
+          <a:p>
+            <a:pPr algn="l" marL="342900" indent="-342900">
+              <a:lnSpc>
+                <a:spcPct val="115000"/>
+              </a:lnSpc>
+              <a:spcAft>
+                <a:spcPts val="600"/>
+              </a:spcAft>
+              <a:buSzPct val="100000"/>
+              <a:buChar char="●"/>
+            </a:pPr>
+            <a:r>
+              <a:rPr lang="en-US" sz="1600" dirty="0">
+                <a:solidFill>
+                  <a:srgbClr val="242424"/>
+                </a:solidFill>
+                <a:latin typeface="Red Hat Text" pitchFamily="34" charset="0"/>
+                <a:ea typeface="Red Hat Text" pitchFamily="34" charset="-122"/>
+                <a:cs typeface="Red Hat Text" pitchFamily="34" charset="-120"/>
+              </a:rPr>
+              <a:t>obs.kafka / obs.kafka_propagation publish JSON events and carry trace context across Kafka; obs.db is one asyncpg pool; obs.logging emits trace-stamped JSON. In Foundations none of it is switched on yet (OTEL_SDK_DISABLED=true).</a:t>
+            </a:r>
+            <a:endParaRPr lang="en-US" sz="1600" dirty="0"/>
           </a:p>
         </p:txBody>
       </p:sp>
@@ -6132,7 +6027,7 @@
                 <a:ea typeface="Overpass" pitchFamily="34" charset="-122"/>
                 <a:cs typeface="Overpass" pitchFamily="34" charset="-120"/>
               </a:rPr>
-              <a:t>A gRPC service — inventory.Reserve</a:t>
+              <a:t>The order handler — the spine</a:t>
             </a:r>
             <a:endParaRPr lang="en-US" sz="3000" dirty="0"/>
           </a:p>
@@ -6171,7 +6066,7 @@
                 <a:ea typeface="Red Hat Mono" pitchFamily="34" charset="-122"/>
                 <a:cs typeface="Red Hat Mono" pitchFamily="34" charset="-120"/>
               </a:rPr>
-              <a:t>python · grpc.aio + asyncpg</a:t>
+              <a:t>python · FastAPI</a:t>
             </a:r>
             <a:endParaRPr lang="en-US" sz="1100" dirty="0"/>
           </a:p>
@@ -6238,7 +6133,7 @@
                 <a:ea typeface="Red Hat Mono" pitchFamily="34" charset="-122"/>
                 <a:cs typeface="Red Hat Mono" pitchFamily="34" charset="-120"/>
               </a:rPr>
-              <a:t>class InventoryServicer(inventory_pb2_grpc.InventoryServiceServicer):
+              <a:t>@app.post("/orders")
 </a:t>
             </a:r>
             <a:pPr algn="l" indent="0" marL="0">
@@ -6256,7 +6151,7 @@
                 <a:ea typeface="Red Hat Mono" pitchFamily="34" charset="-122"/>
                 <a:cs typeface="Red Hat Mono" pitchFamily="34" charset="-120"/>
               </a:rPr>
-              <a:t>    async def Reserve(self, request, context):
+              <a:t>async def create_order(body: CreateOrder) -&gt; dict:
 </a:t>
             </a:r>
             <a:pPr algn="l" indent="0" marL="0">
@@ -6274,7 +6169,7 @@
                 <a:ea typeface="Red Hat Mono" pitchFamily="34" charset="-122"/>
                 <a:cs typeface="Red Hat Mono" pitchFamily="34" charset="-120"/>
               </a:rPr>
-              <a:t>        pool = await db.get_pool()
+              <a:t>    order_id = str(uuid.uuid4())
 </a:t>
             </a:r>
             <a:pPr algn="l" indent="0" marL="0">
@@ -6286,13 +6181,13 @@
             <a:r>
               <a:rPr lang="en-US" sz="1000" dirty="0">
                 <a:solidFill>
-                  <a:srgbClr val="8FB98F"/>
+                  <a:srgbClr val="E6E6E6"/>
                 </a:solidFill>
                 <a:latin typeface="Red Hat Mono" pitchFamily="34" charset="0"/>
                 <a:ea typeface="Red Hat Mono" pitchFamily="34" charset="-122"/>
                 <a:cs typeface="Red Hat Mono" pitchFamily="34" charset="-120"/>
               </a:rPr>
-              <a:t>        # atomic check-and-decrement: only succeeds if enough on hand
+              <a:t>    amount_cents = UNIT_PRICE_CENTS * body.quantity
 </a:t>
             </a:r>
             <a:pPr algn="l" indent="0" marL="0">
@@ -6304,13 +6199,13 @@
             <a:r>
               <a:rPr lang="en-US" sz="1000" dirty="0">
                 <a:solidFill>
-                  <a:srgbClr val="E6E6E6"/>
+                  <a:srgbClr val="8FB98F"/>
                 </a:solidFill>
                 <a:latin typeface="Red Hat Mono" pitchFamily="34" charset="0"/>
                 <a:ea typeface="Red Hat Mono" pitchFamily="34" charset="-122"/>
                 <a:cs typeface="Red Hat Mono" pitchFamily="34" charset="-120"/>
               </a:rPr>
-              <a:t>        remaining = await pool.fetchval(
+              <a:t>    # 1. reserve stock (gRPC → inventory; auto-traced)
 </a:t>
             </a:r>
             <a:pPr algn="l" indent="0" marL="0">
@@ -6328,7 +6223,7 @@
                 <a:ea typeface="Red Hat Mono" pitchFamily="34" charset="-122"/>
                 <a:cs typeface="Red Hat Mono" pitchFamily="34" charset="-120"/>
               </a:rPr>
-              <a:t>            "UPDATE stock SET on_hand = on_hand - $2 "
+              <a:t>    reservation = await app.state.clients.reserve(order_id, body.sku, body.quantity)
 </a:t>
             </a:r>
             <a:pPr algn="l" indent="0" marL="0">
@@ -6346,7 +6241,7 @@
                 <a:ea typeface="Red Hat Mono" pitchFamily="34" charset="-122"/>
                 <a:cs typeface="Red Hat Mono" pitchFamily="34" charset="-120"/>
               </a:rPr>
-              <a:t>            "WHERE sku = $1 AND on_hand &gt;= $2 RETURNING on_hand",
+              <a:t>    if not reservation.reserved:
 </a:t>
             </a:r>
             <a:pPr algn="l" indent="0" marL="0">
@@ -6364,7 +6259,7 @@
                 <a:ea typeface="Red Hat Mono" pitchFamily="34" charset="-122"/>
                 <a:cs typeface="Red Hat Mono" pitchFamily="34" charset="-120"/>
               </a:rPr>
-              <a:t>            request.sku, request.quantity)
+              <a:t>        raise HTTPException(409, "insufficient stock")
 </a:t>
             </a:r>
             <a:pPr algn="l" indent="0" marL="0">
@@ -6376,13 +6271,13 @@
             <a:r>
               <a:rPr lang="en-US" sz="1000" dirty="0">
                 <a:solidFill>
-                  <a:srgbClr val="E6E6E6"/>
+                  <a:srgbClr val="8FB98F"/>
                 </a:solidFill>
                 <a:latin typeface="Red Hat Mono" pitchFamily="34" charset="0"/>
                 <a:ea typeface="Red Hat Mono" pitchFamily="34" charset="-122"/>
                 <a:cs typeface="Red Hat Mono" pitchFamily="34" charset="-120"/>
               </a:rPr>
-              <a:t>        if remaining is None:
+              <a:t>    # 2. authorize payment (gRPC → payment; auto-traced)
 </a:t>
             </a:r>
             <a:pPr algn="l" indent="0" marL="0">
@@ -6400,7 +6295,7 @@
                 <a:ea typeface="Red Hat Mono" pitchFamily="34" charset="-122"/>
                 <a:cs typeface="Red Hat Mono" pitchFamily="34" charset="-120"/>
               </a:rPr>
-              <a:t>            return inventory_pb2.ReserveResponse(reserved=False)
+              <a:t>    auth = await app.state.clients.authorize(order_id, body.customer_id, amount_cents)
 </a:t>
             </a:r>
             <a:pPr algn="l" indent="0" marL="0">
@@ -6418,7 +6313,7 @@
                 <a:ea typeface="Red Hat Mono" pitchFamily="34" charset="-122"/>
                 <a:cs typeface="Red Hat Mono" pitchFamily="34" charset="-120"/>
               </a:rPr>
-              <a:t>        reservation_id = str(uuid.uuid4())
+              <a:t>    if not auth.authorized:
 </a:t>
             </a:r>
             <a:pPr algn="l" indent="0" marL="0">
@@ -6436,7 +6331,7 @@
                 <a:ea typeface="Red Hat Mono" pitchFamily="34" charset="-122"/>
                 <a:cs typeface="Red Hat Mono" pitchFamily="34" charset="-120"/>
               </a:rPr>
-              <a:t>        await pool.execute("INSERT INTO reservations ...", reservation_id, ...)
+              <a:t>        raise HTTPException(402, f"payment declined: {auth.decline_reason}")
 </a:t>
             </a:r>
             <a:pPr algn="l" indent="0" marL="0">
@@ -6448,13 +6343,13 @@
             <a:r>
               <a:rPr lang="en-US" sz="1000" dirty="0">
                 <a:solidFill>
-                  <a:srgbClr val="E6E6E6"/>
+                  <a:srgbClr val="8FB98F"/>
                 </a:solidFill>
                 <a:latin typeface="Red Hat Mono" pitchFamily="34" charset="0"/>
                 <a:ea typeface="Red Hat Mono" pitchFamily="34" charset="-122"/>
                 <a:cs typeface="Red Hat Mono" pitchFamily="34" charset="-120"/>
               </a:rPr>
-              <a:t>        return inventory_pb2.ReserveResponse(reserved=True,
+              <a:t>    # 3. persist (Postgres)   4. announce (Kafka, context in headers)
 </a:t>
             </a:r>
             <a:pPr algn="l" indent="0" marL="0">
@@ -6472,7 +6367,61 @@
                 <a:ea typeface="Red Hat Mono" pitchFamily="34" charset="-122"/>
                 <a:cs typeface="Red Hat Mono" pitchFamily="34" charset="-120"/>
               </a:rPr>
-              <a:t>            reservation_id=reservation_id, remaining=remaining)
+              <a:t>    await repo.insert_order(order_id, ..., status="confirmed")
+</a:t>
+            </a:r>
+            <a:pPr algn="l" indent="0" marL="0">
+              <a:lnSpc>
+                <a:spcPct val="110000"/>
+              </a:lnSpc>
+              <a:buNone/>
+            </a:pPr>
+            <a:r>
+              <a:rPr lang="en-US" sz="1000" dirty="0">
+                <a:solidFill>
+                  <a:srgbClr val="E6E6E6"/>
+                </a:solidFill>
+                <a:latin typeface="Red Hat Mono" pitchFamily="34" charset="0"/>
+                <a:ea typeface="Red Hat Mono" pitchFamily="34" charset="-122"/>
+                <a:cs typeface="Red Hat Mono" pitchFamily="34" charset="-120"/>
+              </a:rPr>
+              <a:t>    await obskafka.publish_event(app.state.producer, ORDER_PLACED_TOPIC,
+</a:t>
+            </a:r>
+            <a:pPr algn="l" indent="0" marL="0">
+              <a:lnSpc>
+                <a:spcPct val="110000"/>
+              </a:lnSpc>
+              <a:buNone/>
+            </a:pPr>
+            <a:r>
+              <a:rPr lang="en-US" sz="1000" dirty="0">
+                <a:solidFill>
+                  <a:srgbClr val="E6E6E6"/>
+                </a:solidFill>
+                <a:latin typeface="Red Hat Mono" pitchFamily="34" charset="0"/>
+                <a:ea typeface="Red Hat Mono" pitchFamily="34" charset="-122"/>
+                <a:cs typeface="Red Hat Mono" pitchFamily="34" charset="-120"/>
+              </a:rPr>
+              <a:t>                                 key=order_id, value={...})
+</a:t>
+            </a:r>
+            <a:pPr algn="l" indent="0" marL="0">
+              <a:lnSpc>
+                <a:spcPct val="110000"/>
+              </a:lnSpc>
+              <a:buNone/>
+            </a:pPr>
+            <a:r>
+              <a:rPr lang="en-US" sz="1000" dirty="0">
+                <a:solidFill>
+                  <a:srgbClr val="E6E6E6"/>
+                </a:solidFill>
+                <a:latin typeface="Red Hat Mono" pitchFamily="34" charset="0"/>
+                <a:ea typeface="Red Hat Mono" pitchFamily="34" charset="-122"/>
+                <a:cs typeface="Red Hat Mono" pitchFamily="34" charset="-120"/>
+              </a:rPr>
+              <a:t>    return {"order_id": order_id, "status": "confirmed"}
 </a:t>
             </a:r>
             <a:endParaRPr lang="en-US" sz="1000" dirty="0"/>
@@ -6512,7 +6461,7 @@
                 <a:ea typeface="Red Hat Text" pitchFamily="34" charset="-122"/>
                 <a:cs typeface="Red Hat Text" pitchFamily="34" charset="-120"/>
               </a:rPr>
-              <a:t>Contracts are shared protos at proto/shop/…; the gRPC server instrumentation continues the order's trace.</a:t>
+              <a:t>Two gRPC calls, a Postgres write, a Kafka publish — and not one line of tracing code.</a:t>
             </a:r>
             <a:endParaRPr lang="en-US" sz="1300" dirty="0"/>
           </a:p>
@@ -6654,7 +6603,7 @@
         <p:spPr>
           <a:xfrm>
             <a:off x="566928" y="676656"/>
-            <a:ext cx="11055096" cy="1005840"/>
+            <a:ext cx="7223760" cy="1005840"/>
           </a:xfrm>
           <a:prstGeom prst="rect">
             <a:avLst/>
@@ -6678,7 +6627,7 @@
                 <a:ea typeface="Overpass" pitchFamily="34" charset="-122"/>
                 <a:cs typeface="Overpass" pitchFamily="34" charset="-120"/>
               </a:rPr>
-              <a:t>The fragile bits, named not hidden</a:t>
+              <a:t>A gRPC service — inventory.Reserve</a:t>
             </a:r>
             <a:endParaRPr lang="en-US" sz="3000" dirty="0"/>
           </a:p>
@@ -6692,8 +6641,8 @@
         </p:nvSpPr>
         <p:spPr>
           <a:xfrm>
-            <a:off x="566928" y="1691640"/>
-            <a:ext cx="11055096" cy="4434840"/>
+            <a:off x="7882128" y="969264"/>
+            <a:ext cx="3739896" cy="274320"/>
           </a:xfrm>
           <a:prstGeom prst="rect">
             <a:avLst/>
@@ -6702,79 +6651,365 @@
           <a:ln/>
         </p:spPr>
         <p:txBody>
+          <a:bodyPr wrap="square" rtlCol="0" anchor="ctr"/>
+          <a:lstStyle/>
+          <a:p>
+            <a:pPr algn="r" indent="0" marL="0">
+              <a:buNone/>
+            </a:pPr>
+            <a:r>
+              <a:rPr lang="en-US" sz="1100" b="1" spc="200" kern="0" dirty="0">
+                <a:solidFill>
+                  <a:srgbClr val="5A5A5A"/>
+                </a:solidFill>
+                <a:latin typeface="Red Hat Mono" pitchFamily="34" charset="0"/>
+                <a:ea typeface="Red Hat Mono" pitchFamily="34" charset="-122"/>
+                <a:cs typeface="Red Hat Mono" pitchFamily="34" charset="-120"/>
+              </a:rPr>
+              <a:t>python · grpc.aio + asyncpg</a:t>
+            </a:r>
+            <a:endParaRPr lang="en-US" sz="1100" dirty="0"/>
+          </a:p>
+        </p:txBody>
+      </p:sp>
+      <p:sp>
+        <p:nvSpPr>
+          <p:cNvPr id="7" name="Shape 4"/>
+          <p:cNvSpPr/>
+          <p:nvPr/>
+        </p:nvSpPr>
+        <p:spPr>
+          <a:xfrm>
+            <a:off x="566928" y="1691640"/>
+            <a:ext cx="11055096" cy="4251960"/>
+          </a:xfrm>
+          <a:prstGeom prst="rect">
+            <a:avLst/>
+          </a:prstGeom>
+          <a:solidFill>
+            <a:srgbClr val="151515"/>
+          </a:solidFill>
+          <a:ln w="12700">
+            <a:solidFill>
+              <a:srgbClr val="151515"/>
+            </a:solidFill>
+            <a:prstDash val="solid"/>
+          </a:ln>
+        </p:spPr>
+      </p:sp>
+      <p:sp>
+        <p:nvSpPr>
+          <p:cNvPr id="8" name="Text 5"/>
+          <p:cNvSpPr/>
+          <p:nvPr/>
+        </p:nvSpPr>
+        <p:spPr>
+          <a:xfrm>
+            <a:off x="749808" y="1783080"/>
+            <a:ext cx="10689336" cy="4069080"/>
+          </a:xfrm>
+          <a:prstGeom prst="rect">
+            <a:avLst/>
+          </a:prstGeom>
+          <a:noFill/>
+          <a:ln/>
+        </p:spPr>
+        <p:txBody>
           <a:bodyPr wrap="square" rtlCol="0" anchor="t"/>
           <a:lstStyle/>
           <a:p>
-            <a:pPr algn="l" marL="342900" indent="-342900">
+            <a:pPr algn="l" indent="0" marL="0">
               <a:lnSpc>
-                <a:spcPct val="115000"/>
+                <a:spcPct val="110000"/>
               </a:lnSpc>
-              <a:spcAft>
-                <a:spcPts val="600"/>
-              </a:spcAft>
-              <a:buSzPct val="100000"/>
-              <a:buChar char="●"/>
-            </a:pPr>
-            <a:r>
-              <a:rPr lang="en-US" sz="1600" dirty="0">
-                <a:solidFill>
-                  <a:srgbClr val="242424"/>
+              <a:buNone/>
+            </a:pPr>
+            <a:r>
+              <a:rPr lang="en-US" sz="1000" dirty="0">
+                <a:solidFill>
+                  <a:srgbClr val="E6E6E6"/>
+                </a:solidFill>
+                <a:latin typeface="Red Hat Mono" pitchFamily="34" charset="0"/>
+                <a:ea typeface="Red Hat Mono" pitchFamily="34" charset="-122"/>
+                <a:cs typeface="Red Hat Mono" pitchFamily="34" charset="-120"/>
+              </a:rPr>
+              <a:t>class InventoryServicer(inventory_pb2_grpc.InventoryServiceServicer):
+</a:t>
+            </a:r>
+            <a:pPr algn="l" indent="0" marL="0">
+              <a:lnSpc>
+                <a:spcPct val="110000"/>
+              </a:lnSpc>
+              <a:buNone/>
+            </a:pPr>
+            <a:r>
+              <a:rPr lang="en-US" sz="1000" dirty="0">
+                <a:solidFill>
+                  <a:srgbClr val="E6E6E6"/>
+                </a:solidFill>
+                <a:latin typeface="Red Hat Mono" pitchFamily="34" charset="0"/>
+                <a:ea typeface="Red Hat Mono" pitchFamily="34" charset="-122"/>
+                <a:cs typeface="Red Hat Mono" pitchFamily="34" charset="-120"/>
+              </a:rPr>
+              <a:t>    async def Reserve(self, request, context):
+</a:t>
+            </a:r>
+            <a:pPr algn="l" indent="0" marL="0">
+              <a:lnSpc>
+                <a:spcPct val="110000"/>
+              </a:lnSpc>
+              <a:buNone/>
+            </a:pPr>
+            <a:r>
+              <a:rPr lang="en-US" sz="1000" dirty="0">
+                <a:solidFill>
+                  <a:srgbClr val="E6E6E6"/>
+                </a:solidFill>
+                <a:latin typeface="Red Hat Mono" pitchFamily="34" charset="0"/>
+                <a:ea typeface="Red Hat Mono" pitchFamily="34" charset="-122"/>
+                <a:cs typeface="Red Hat Mono" pitchFamily="34" charset="-120"/>
+              </a:rPr>
+              <a:t>        pool = await db.get_pool()
+</a:t>
+            </a:r>
+            <a:pPr algn="l" indent="0" marL="0">
+              <a:lnSpc>
+                <a:spcPct val="110000"/>
+              </a:lnSpc>
+              <a:buNone/>
+            </a:pPr>
+            <a:r>
+              <a:rPr lang="en-US" sz="1000" dirty="0">
+                <a:solidFill>
+                  <a:srgbClr val="8FB98F"/>
+                </a:solidFill>
+                <a:latin typeface="Red Hat Mono" pitchFamily="34" charset="0"/>
+                <a:ea typeface="Red Hat Mono" pitchFamily="34" charset="-122"/>
+                <a:cs typeface="Red Hat Mono" pitchFamily="34" charset="-120"/>
+              </a:rPr>
+              <a:t>        # atomic check-and-decrement: only succeeds if enough on hand
+</a:t>
+            </a:r>
+            <a:pPr algn="l" indent="0" marL="0">
+              <a:lnSpc>
+                <a:spcPct val="110000"/>
+              </a:lnSpc>
+              <a:buNone/>
+            </a:pPr>
+            <a:r>
+              <a:rPr lang="en-US" sz="1000" dirty="0">
+                <a:solidFill>
+                  <a:srgbClr val="E6E6E6"/>
+                </a:solidFill>
+                <a:latin typeface="Red Hat Mono" pitchFamily="34" charset="0"/>
+                <a:ea typeface="Red Hat Mono" pitchFamily="34" charset="-122"/>
+                <a:cs typeface="Red Hat Mono" pitchFamily="34" charset="-120"/>
+              </a:rPr>
+              <a:t>        remaining = await pool.fetchval(
+</a:t>
+            </a:r>
+            <a:pPr algn="l" indent="0" marL="0">
+              <a:lnSpc>
+                <a:spcPct val="110000"/>
+              </a:lnSpc>
+              <a:buNone/>
+            </a:pPr>
+            <a:r>
+              <a:rPr lang="en-US" sz="1000" dirty="0">
+                <a:solidFill>
+                  <a:srgbClr val="E6E6E6"/>
+                </a:solidFill>
+                <a:latin typeface="Red Hat Mono" pitchFamily="34" charset="0"/>
+                <a:ea typeface="Red Hat Mono" pitchFamily="34" charset="-122"/>
+                <a:cs typeface="Red Hat Mono" pitchFamily="34" charset="-120"/>
+              </a:rPr>
+              <a:t>            "UPDATE stock SET on_hand = on_hand - $2 "
+</a:t>
+            </a:r>
+            <a:pPr algn="l" indent="0" marL="0">
+              <a:lnSpc>
+                <a:spcPct val="110000"/>
+              </a:lnSpc>
+              <a:buNone/>
+            </a:pPr>
+            <a:r>
+              <a:rPr lang="en-US" sz="1000" dirty="0">
+                <a:solidFill>
+                  <a:srgbClr val="E6E6E6"/>
+                </a:solidFill>
+                <a:latin typeface="Red Hat Mono" pitchFamily="34" charset="0"/>
+                <a:ea typeface="Red Hat Mono" pitchFamily="34" charset="-122"/>
+                <a:cs typeface="Red Hat Mono" pitchFamily="34" charset="-120"/>
+              </a:rPr>
+              <a:t>            "WHERE sku = $1 AND on_hand &gt;= $2 RETURNING on_hand",
+</a:t>
+            </a:r>
+            <a:pPr algn="l" indent="0" marL="0">
+              <a:lnSpc>
+                <a:spcPct val="110000"/>
+              </a:lnSpc>
+              <a:buNone/>
+            </a:pPr>
+            <a:r>
+              <a:rPr lang="en-US" sz="1000" dirty="0">
+                <a:solidFill>
+                  <a:srgbClr val="E6E6E6"/>
+                </a:solidFill>
+                <a:latin typeface="Red Hat Mono" pitchFamily="34" charset="0"/>
+                <a:ea typeface="Red Hat Mono" pitchFamily="34" charset="-122"/>
+                <a:cs typeface="Red Hat Mono" pitchFamily="34" charset="-120"/>
+              </a:rPr>
+              <a:t>            request.sku, request.quantity)
+</a:t>
+            </a:r>
+            <a:pPr algn="l" indent="0" marL="0">
+              <a:lnSpc>
+                <a:spcPct val="110000"/>
+              </a:lnSpc>
+              <a:buNone/>
+            </a:pPr>
+            <a:r>
+              <a:rPr lang="en-US" sz="1000" dirty="0">
+                <a:solidFill>
+                  <a:srgbClr val="E6E6E6"/>
+                </a:solidFill>
+                <a:latin typeface="Red Hat Mono" pitchFamily="34" charset="0"/>
+                <a:ea typeface="Red Hat Mono" pitchFamily="34" charset="-122"/>
+                <a:cs typeface="Red Hat Mono" pitchFamily="34" charset="-120"/>
+              </a:rPr>
+              <a:t>        if remaining is None:
+</a:t>
+            </a:r>
+            <a:pPr algn="l" indent="0" marL="0">
+              <a:lnSpc>
+                <a:spcPct val="110000"/>
+              </a:lnSpc>
+              <a:buNone/>
+            </a:pPr>
+            <a:r>
+              <a:rPr lang="en-US" sz="1000" dirty="0">
+                <a:solidFill>
+                  <a:srgbClr val="E6E6E6"/>
+                </a:solidFill>
+                <a:latin typeface="Red Hat Mono" pitchFamily="34" charset="0"/>
+                <a:ea typeface="Red Hat Mono" pitchFamily="34" charset="-122"/>
+                <a:cs typeface="Red Hat Mono" pitchFamily="34" charset="-120"/>
+              </a:rPr>
+              <a:t>            return inventory_pb2.ReserveResponse(reserved=False)
+</a:t>
+            </a:r>
+            <a:pPr algn="l" indent="0" marL="0">
+              <a:lnSpc>
+                <a:spcPct val="110000"/>
+              </a:lnSpc>
+              <a:buNone/>
+            </a:pPr>
+            <a:r>
+              <a:rPr lang="en-US" sz="1000" dirty="0">
+                <a:solidFill>
+                  <a:srgbClr val="E6E6E6"/>
+                </a:solidFill>
+                <a:latin typeface="Red Hat Mono" pitchFamily="34" charset="0"/>
+                <a:ea typeface="Red Hat Mono" pitchFamily="34" charset="-122"/>
+                <a:cs typeface="Red Hat Mono" pitchFamily="34" charset="-120"/>
+              </a:rPr>
+              <a:t>        reservation_id = str(uuid.uuid4())
+</a:t>
+            </a:r>
+            <a:pPr algn="l" indent="0" marL="0">
+              <a:lnSpc>
+                <a:spcPct val="110000"/>
+              </a:lnSpc>
+              <a:buNone/>
+            </a:pPr>
+            <a:r>
+              <a:rPr lang="en-US" sz="1000" dirty="0">
+                <a:solidFill>
+                  <a:srgbClr val="E6E6E6"/>
+                </a:solidFill>
+                <a:latin typeface="Red Hat Mono" pitchFamily="34" charset="0"/>
+                <a:ea typeface="Red Hat Mono" pitchFamily="34" charset="-122"/>
+                <a:cs typeface="Red Hat Mono" pitchFamily="34" charset="-120"/>
+              </a:rPr>
+              <a:t>        await pool.execute("INSERT INTO reservations ...", reservation_id, ...)
+</a:t>
+            </a:r>
+            <a:pPr algn="l" indent="0" marL="0">
+              <a:lnSpc>
+                <a:spcPct val="110000"/>
+              </a:lnSpc>
+              <a:buNone/>
+            </a:pPr>
+            <a:r>
+              <a:rPr lang="en-US" sz="1000" dirty="0">
+                <a:solidFill>
+                  <a:srgbClr val="E6E6E6"/>
+                </a:solidFill>
+                <a:latin typeface="Red Hat Mono" pitchFamily="34" charset="0"/>
+                <a:ea typeface="Red Hat Mono" pitchFamily="34" charset="-122"/>
+                <a:cs typeface="Red Hat Mono" pitchFamily="34" charset="-120"/>
+              </a:rPr>
+              <a:t>        return inventory_pb2.ReserveResponse(reserved=True,
+</a:t>
+            </a:r>
+            <a:pPr algn="l" indent="0" marL="0">
+              <a:lnSpc>
+                <a:spcPct val="110000"/>
+              </a:lnSpc>
+              <a:buNone/>
+            </a:pPr>
+            <a:r>
+              <a:rPr lang="en-US" sz="1000" dirty="0">
+                <a:solidFill>
+                  <a:srgbClr val="E6E6E6"/>
+                </a:solidFill>
+                <a:latin typeface="Red Hat Mono" pitchFamily="34" charset="0"/>
+                <a:ea typeface="Red Hat Mono" pitchFamily="34" charset="-122"/>
+                <a:cs typeface="Red Hat Mono" pitchFamily="34" charset="-120"/>
+              </a:rPr>
+              <a:t>            reservation_id=reservation_id, remaining=remaining)
+</a:t>
+            </a:r>
+            <a:endParaRPr lang="en-US" sz="1000" dirty="0"/>
+          </a:p>
+        </p:txBody>
+      </p:sp>
+      <p:sp>
+        <p:nvSpPr>
+          <p:cNvPr id="9" name="Text 6"/>
+          <p:cNvSpPr/>
+          <p:nvPr/>
+        </p:nvSpPr>
+        <p:spPr>
+          <a:xfrm>
+            <a:off x="566928" y="5943600"/>
+            <a:ext cx="11055096" cy="310896"/>
+          </a:xfrm>
+          <a:prstGeom prst="rect">
+            <a:avLst/>
+          </a:prstGeom>
+          <a:noFill/>
+          <a:ln/>
+        </p:spPr>
+        <p:txBody>
+          <a:bodyPr wrap="square" rtlCol="0" anchor="ctr"/>
+          <a:lstStyle/>
+          <a:p>
+            <a:pPr algn="ctr" indent="0" marL="0">
+              <a:buNone/>
+            </a:pPr>
+            <a:r>
+              <a:rPr lang="en-US" sz="1300" i="1" dirty="0">
+                <a:solidFill>
+                  <a:srgbClr val="5A5A5A"/>
                 </a:solidFill>
                 <a:latin typeface="Red Hat Text" pitchFamily="34" charset="0"/>
                 <a:ea typeface="Red Hat Text" pitchFamily="34" charset="-122"/>
                 <a:cs typeface="Red Hat Text" pitchFamily="34" charset="-120"/>
               </a:rPr>
-              <a:t>Every domain shares one Postgres database (appdb) for laptop simplicity; a production system might isolate a store per domain. The observability story — a Postgres span per service under one trace — is identical either way.</a:t>
-            </a:r>
-            <a:endParaRPr lang="en-US" sz="1600" dirty="0"/>
-          </a:p>
-          <a:p>
-            <a:pPr algn="l" marL="342900" indent="-342900">
-              <a:lnSpc>
-                <a:spcPct val="115000"/>
-              </a:lnSpc>
-              <a:spcAft>
-                <a:spcPts val="600"/>
-              </a:spcAft>
-              <a:buSzPct val="100000"/>
-              <a:buChar char="●"/>
-            </a:pPr>
-            <a:r>
-              <a:rPr lang="en-US" sz="1600" dirty="0">
-                <a:solidFill>
-                  <a:srgbClr val="242424"/>
-                </a:solidFill>
-                <a:latin typeface="Red Hat Text" pitchFamily="34" charset="0"/>
-                <a:ea typeface="Red Hat Text" pitchFamily="34" charset="-122"/>
-                <a:cs typeface="Red Hat Text" pitchFamily="34" charset="-120"/>
-              </a:rPr>
-              <a:t>The payment ceiling and the catalog unit price are hardcoded so demos are deterministic: a fixed amount authorizes, a large quantity declines, on demand.</a:t>
-            </a:r>
-            <a:endParaRPr lang="en-US" sz="1600" dirty="0"/>
-          </a:p>
-          <a:p>
-            <a:pPr algn="l" marL="342900" indent="-342900">
-              <a:lnSpc>
-                <a:spcPct val="115000"/>
-              </a:lnSpc>
-              <a:spcAft>
-                <a:spcPts val="600"/>
-              </a:spcAft>
-              <a:buSzPct val="100000"/>
-              <a:buChar char="●"/>
-            </a:pPr>
-            <a:r>
-              <a:rPr lang="en-US" sz="1600" dirty="0">
-                <a:solidFill>
-                  <a:srgbClr val="242424"/>
-                </a:solidFill>
-                <a:latin typeface="Red Hat Text" pitchFamily="34" charset="0"/>
-                <a:ea typeface="Red Hat Text" pitchFamily="34" charset="-122"/>
-                <a:cs typeface="Red Hat Text" pitchFamily="34" charset="-120"/>
-              </a:rPr>
-              <a:t>Kafka auto-creates the order.placed topic; production would create topics explicitly with chosen partition counts. None of these change the spans or metrics — they are scope cuts, stated out loud.</a:t>
-            </a:r>
-            <a:endParaRPr lang="en-US" sz="1600" dirty="0"/>
+              <a:t>Contracts are shared protos at proto/shop/…; the gRPC server instrumentation continues the order's trace.</a:t>
+            </a:r>
+            <a:endParaRPr lang="en-US" sz="1300" dirty="0"/>
           </a:p>
         </p:txBody>
       </p:sp>
@@ -6938,7 +7173,7 @@
                 <a:ea typeface="Overpass" pitchFamily="34" charset="-122"/>
                 <a:cs typeface="Overpass" pitchFamily="34" charset="-120"/>
               </a:rPr>
-              <a:t>It works — and it is completely opaque</a:t>
+              <a:t>The fragile bits, named not hidden</a:t>
             </a:r>
             <a:endParaRPr lang="en-US" sz="3000" dirty="0"/>
           </a:p>
@@ -6984,7 +7219,7 @@
                 <a:ea typeface="Red Hat Text" pitchFamily="34" charset="-122"/>
                 <a:cs typeface="Red Hat Text" pitchFamily="34" charset="-120"/>
               </a:rPr>
-              <a:t>cd examples/01-no-telemetry &amp;&amp; ./demo.sh — brings the whole stack up in Podman with telemetry disabled and places one order.</a:t>
+              <a:t>Every domain shares one Postgres database (appdb) for laptop simplicity; a production system might isolate a store per domain. The observability story — a Postgres span per service under one trace — is identical either way.</a:t>
             </a:r>
             <a:endParaRPr lang="en-US" sz="1600" dirty="0"/>
           </a:p>
@@ -7008,7 +7243,7 @@
                 <a:ea typeface="Red Hat Text" pitchFamily="34" charset="-122"/>
                 <a:cs typeface="Red Hat Text" pitchFamily="34" charset="-120"/>
               </a:rPr>
-              <a:t>Expect a confirmed order in the response, a shipment row, and a notification log — proof the request travelled the full chain across REST, gRPC, Kafka, and Postgres.</a:t>
+              <a:t>The payment ceiling and the catalog unit price are hardcoded so demos are deterministic: a fixed amount authorizes, a large quantity declines, on demand.</a:t>
             </a:r>
             <a:endParaRPr lang="en-US" sz="1600" dirty="0"/>
           </a:p>
@@ -7032,48 +7267,9 @@
                 <a:ea typeface="Red Hat Text" pitchFamily="34" charset="-122"/>
                 <a:cs typeface="Red Hat Text" pitchFamily="34" charset="-120"/>
               </a:rPr>
-              <a:t>Then open Grafana and look for it. There is nothing there. Six services just collaborated to fulfil that order and you cannot see any of it — exactly the opacity the rest of the talk removes.</a:t>
+              <a:t>Kafka auto-creates the order.placed topic; production would create topics explicitly with chosen partition counts. None of these change the spans or metrics — they are scope cuts, stated out loud.</a:t>
             </a:r>
             <a:endParaRPr lang="en-US" sz="1600" dirty="0"/>
-          </a:p>
-        </p:txBody>
-      </p:sp>
-      <p:sp>
-        <p:nvSpPr>
-          <p:cNvPr id="7" name="Text 4"/>
-          <p:cNvSpPr/>
-          <p:nvPr/>
-        </p:nvSpPr>
-        <p:spPr>
-          <a:xfrm>
-            <a:off x="566928" y="5943600"/>
-            <a:ext cx="11055096" cy="310896"/>
-          </a:xfrm>
-          <a:prstGeom prst="rect">
-            <a:avLst/>
-          </a:prstGeom>
-          <a:noFill/>
-          <a:ln/>
-        </p:spPr>
-        <p:txBody>
-          <a:bodyPr wrap="square" rtlCol="0" anchor="ctr"/>
-          <a:lstStyle/>
-          <a:p>
-            <a:pPr algn="ctr" indent="0" marL="0">
-              <a:buNone/>
-            </a:pPr>
-            <a:r>
-              <a:rPr lang="en-US" sz="1300" i="1" dirty="0">
-                <a:solidFill>
-                  <a:srgbClr val="5A5A5A"/>
-                </a:solidFill>
-                <a:latin typeface="Red Hat Text" pitchFamily="34" charset="0"/>
-                <a:ea typeface="Red Hat Text" pitchFamily="34" charset="-122"/>
-                <a:cs typeface="Red Hat Text" pitchFamily="34" charset="-120"/>
-              </a:rPr>
-              <a:t>This is the baseline: no telemetry. Every later demo is measured against this opacity.</a:t>
-            </a:r>
-            <a:endParaRPr lang="en-US" sz="1300" dirty="0"/>
           </a:p>
         </p:txBody>
       </p:sp>
@@ -7244,7 +7440,7 @@
                 <a:ea typeface="Red Hat Text" pitchFamily="34" charset="-122"/>
                 <a:cs typeface="Red Hat Text" pitchFamily="34" charset="-120"/>
               </a:rPr>
-              <a:t>The stack, the signals, and the app we will instrument.</a:t>
+              <a:t>The stack, the signals, and the services we will instrument.</a:t>
             </a:r>
             <a:endParaRPr lang="en-US" sz="1600" dirty="0"/>
           </a:p>
@@ -7285,6 +7481,305 @@
 <file path=ppt/slides/slide20.xml><?xml version="1.0" encoding="utf-8"?>
 <p:sld xmlns:a="http://schemas.openxmlformats.org/drawingml/2006/main" xmlns:r="http://schemas.openxmlformats.org/officeDocument/2006/relationships" xmlns:p="http://schemas.openxmlformats.org/presentationml/2006/main">
   <p:cSld name="Slide 20">
+    <p:spTree>
+      <p:nvGrpSpPr>
+        <p:cNvPr id="1" name=""/>
+        <p:cNvGrpSpPr/>
+        <p:nvPr/>
+      </p:nvGrpSpPr>
+      <p:grpSpPr>
+        <a:xfrm>
+          <a:off x="0" y="0"/>
+          <a:ext cx="0" cy="0"/>
+          <a:chOff x="0" y="0"/>
+          <a:chExt cx="0" cy="0"/>
+        </a:xfrm>
+      </p:grpSpPr>
+      <p:sp>
+        <p:nvSpPr>
+          <p:cNvPr id="2" name="Text 0"/>
+          <p:cNvSpPr/>
+          <p:nvPr/>
+        </p:nvSpPr>
+        <p:spPr>
+          <a:xfrm>
+            <a:off x="566928" y="6364224"/>
+            <a:ext cx="914400" cy="274320"/>
+          </a:xfrm>
+          <a:prstGeom prst="rect">
+            <a:avLst/>
+          </a:prstGeom>
+          <a:noFill/>
+          <a:ln/>
+        </p:spPr>
+        <p:txBody>
+          <a:bodyPr wrap="square" rtlCol="0" anchor="ctr"/>
+          <a:lstStyle/>
+          <a:p>
+            <a:pPr algn="l" indent="0" marL="0">
+              <a:buNone/>
+            </a:pPr>
+            <a:r>
+              <a:rPr lang="en-US" sz="1000" dirty="0">
+                <a:solidFill>
+                  <a:srgbClr val="8A8A8A"/>
+                </a:solidFill>
+                <a:latin typeface="Red Hat Text" pitchFamily="34" charset="0"/>
+                <a:ea typeface="Red Hat Text" pitchFamily="34" charset="-122"/>
+                <a:cs typeface="Red Hat Text" pitchFamily="34" charset="-120"/>
+              </a:rPr>
+              <a:t>20</a:t>
+            </a:r>
+            <a:endParaRPr lang="en-US" sz="1000" dirty="0"/>
+          </a:p>
+        </p:txBody>
+      </p:sp>
+      <p:pic>
+        <p:nvPicPr>
+          <p:cNvPr id="3" name="Image 0" descr="./assets/logo-candidate-2.png">    </p:cNvPr>
+          <p:cNvPicPr>
+            <a:picLocks noChangeAspect="1"/>
+          </p:cNvPicPr>
+          <p:nvPr/>
+        </p:nvPicPr>
+        <p:blipFill>
+          <a:blip r:embed="rId1"/>
+          <a:stretch>
+            <a:fillRect/>
+          </a:stretch>
+        </p:blipFill>
+        <p:spPr>
+          <a:xfrm>
+            <a:off x="10561320" y="6355080"/>
+            <a:ext cx="1033272" cy="246888"/>
+          </a:xfrm>
+          <a:prstGeom prst="rect">
+            <a:avLst/>
+          </a:prstGeom>
+        </p:spPr>
+      </p:pic>
+      <p:sp>
+        <p:nvSpPr>
+          <p:cNvPr id="4" name="Text 1"/>
+          <p:cNvSpPr/>
+          <p:nvPr/>
+        </p:nvSpPr>
+        <p:spPr>
+          <a:xfrm>
+            <a:off x="566928" y="384048"/>
+            <a:ext cx="11055096" cy="292608"/>
+          </a:xfrm>
+          <a:prstGeom prst="rect">
+            <a:avLst/>
+          </a:prstGeom>
+          <a:noFill/>
+          <a:ln/>
+        </p:spPr>
+        <p:txBody>
+          <a:bodyPr wrap="square" rtlCol="0" anchor="ctr"/>
+          <a:lstStyle/>
+          <a:p>
+            <a:pPr algn="l" indent="0" marL="0">
+              <a:buNone/>
+            </a:pPr>
+            <a:r>
+              <a:rPr lang="en-US" sz="1200" b="1" spc="400" kern="0" dirty="0">
+                <a:solidFill>
+                  <a:srgbClr val="EE0000"/>
+                </a:solidFill>
+                <a:latin typeface="Overpass" pitchFamily="34" charset="0"/>
+                <a:ea typeface="Overpass" pitchFamily="34" charset="-122"/>
+                <a:cs typeface="Overpass" pitchFamily="34" charset="-120"/>
+              </a:rPr>
+              <a:t>FOUNDATIONS · THE EXAMPLE SERVICES</a:t>
+            </a:r>
+            <a:endParaRPr lang="en-US" sz="1200" dirty="0"/>
+          </a:p>
+        </p:txBody>
+      </p:sp>
+      <p:sp>
+        <p:nvSpPr>
+          <p:cNvPr id="5" name="Text 2"/>
+          <p:cNvSpPr/>
+          <p:nvPr/>
+        </p:nvSpPr>
+        <p:spPr>
+          <a:xfrm>
+            <a:off x="566928" y="676656"/>
+            <a:ext cx="11055096" cy="1005840"/>
+          </a:xfrm>
+          <a:prstGeom prst="rect">
+            <a:avLst/>
+          </a:prstGeom>
+          <a:noFill/>
+          <a:ln/>
+        </p:spPr>
+        <p:txBody>
+          <a:bodyPr wrap="square" rtlCol="0" anchor="t"/>
+          <a:lstStyle/>
+          <a:p>
+            <a:pPr algn="l" indent="0" marL="0">
+              <a:buNone/>
+            </a:pPr>
+            <a:r>
+              <a:rPr lang="en-US" sz="3000" b="1" dirty="0">
+                <a:solidFill>
+                  <a:srgbClr val="151515"/>
+                </a:solidFill>
+                <a:latin typeface="Overpass" pitchFamily="34" charset="0"/>
+                <a:ea typeface="Overpass" pitchFamily="34" charset="-122"/>
+                <a:cs typeface="Overpass" pitchFamily="34" charset="-120"/>
+              </a:rPr>
+              <a:t>It works — and it is completely opaque</a:t>
+            </a:r>
+            <a:endParaRPr lang="en-US" sz="3000" dirty="0"/>
+          </a:p>
+        </p:txBody>
+      </p:sp>
+      <p:sp>
+        <p:nvSpPr>
+          <p:cNvPr id="6" name="Text 3"/>
+          <p:cNvSpPr/>
+          <p:nvPr/>
+        </p:nvSpPr>
+        <p:spPr>
+          <a:xfrm>
+            <a:off x="566928" y="1691640"/>
+            <a:ext cx="11055096" cy="4434840"/>
+          </a:xfrm>
+          <a:prstGeom prst="rect">
+            <a:avLst/>
+          </a:prstGeom>
+          <a:noFill/>
+          <a:ln/>
+        </p:spPr>
+        <p:txBody>
+          <a:bodyPr wrap="square" rtlCol="0" anchor="t"/>
+          <a:lstStyle/>
+          <a:p>
+            <a:pPr algn="l" marL="342900" indent="-342900">
+              <a:lnSpc>
+                <a:spcPct val="115000"/>
+              </a:lnSpc>
+              <a:spcAft>
+                <a:spcPts val="600"/>
+              </a:spcAft>
+              <a:buSzPct val="100000"/>
+              <a:buChar char="●"/>
+            </a:pPr>
+            <a:r>
+              <a:rPr lang="en-US" sz="1600" dirty="0">
+                <a:solidFill>
+                  <a:srgbClr val="242424"/>
+                </a:solidFill>
+                <a:latin typeface="Red Hat Text" pitchFamily="34" charset="0"/>
+                <a:ea typeface="Red Hat Text" pitchFamily="34" charset="-122"/>
+                <a:cs typeface="Red Hat Text" pitchFamily="34" charset="-120"/>
+              </a:rPr>
+              <a:t>cd examples/01-no-telemetry &amp;&amp; ./demo.sh — brings the whole stack up in Podman with telemetry disabled and places one order.</a:t>
+            </a:r>
+            <a:endParaRPr lang="en-US" sz="1600" dirty="0"/>
+          </a:p>
+          <a:p>
+            <a:pPr algn="l" marL="342900" indent="-342900">
+              <a:lnSpc>
+                <a:spcPct val="115000"/>
+              </a:lnSpc>
+              <a:spcAft>
+                <a:spcPts val="600"/>
+              </a:spcAft>
+              <a:buSzPct val="100000"/>
+              <a:buChar char="●"/>
+            </a:pPr>
+            <a:r>
+              <a:rPr lang="en-US" sz="1600" dirty="0">
+                <a:solidFill>
+                  <a:srgbClr val="242424"/>
+                </a:solidFill>
+                <a:latin typeface="Red Hat Text" pitchFamily="34" charset="0"/>
+                <a:ea typeface="Red Hat Text" pitchFamily="34" charset="-122"/>
+                <a:cs typeface="Red Hat Text" pitchFamily="34" charset="-120"/>
+              </a:rPr>
+              <a:t>Expect a confirmed order in the response, a shipment row, and a notification log — proof the request travelled the full chain across REST, gRPC, Kafka, and Postgres.</a:t>
+            </a:r>
+            <a:endParaRPr lang="en-US" sz="1600" dirty="0"/>
+          </a:p>
+          <a:p>
+            <a:pPr algn="l" marL="342900" indent="-342900">
+              <a:lnSpc>
+                <a:spcPct val="115000"/>
+              </a:lnSpc>
+              <a:spcAft>
+                <a:spcPts val="600"/>
+              </a:spcAft>
+              <a:buSzPct val="100000"/>
+              <a:buChar char="●"/>
+            </a:pPr>
+            <a:r>
+              <a:rPr lang="en-US" sz="1600" dirty="0">
+                <a:solidFill>
+                  <a:srgbClr val="242424"/>
+                </a:solidFill>
+                <a:latin typeface="Red Hat Text" pitchFamily="34" charset="0"/>
+                <a:ea typeface="Red Hat Text" pitchFamily="34" charset="-122"/>
+                <a:cs typeface="Red Hat Text" pitchFamily="34" charset="-120"/>
+              </a:rPr>
+              <a:t>Then open Grafana and look for it. There is nothing there. Six services just collaborated to fulfil that order and you cannot see any of it — exactly the opacity the rest of the talk removes.</a:t>
+            </a:r>
+            <a:endParaRPr lang="en-US" sz="1600" dirty="0"/>
+          </a:p>
+        </p:txBody>
+      </p:sp>
+      <p:sp>
+        <p:nvSpPr>
+          <p:cNvPr id="7" name="Text 4"/>
+          <p:cNvSpPr/>
+          <p:nvPr/>
+        </p:nvSpPr>
+        <p:spPr>
+          <a:xfrm>
+            <a:off x="566928" y="5943600"/>
+            <a:ext cx="11055096" cy="310896"/>
+          </a:xfrm>
+          <a:prstGeom prst="rect">
+            <a:avLst/>
+          </a:prstGeom>
+          <a:noFill/>
+          <a:ln/>
+        </p:spPr>
+        <p:txBody>
+          <a:bodyPr wrap="square" rtlCol="0" anchor="ctr"/>
+          <a:lstStyle/>
+          <a:p>
+            <a:pPr algn="ctr" indent="0" marL="0">
+              <a:buNone/>
+            </a:pPr>
+            <a:r>
+              <a:rPr lang="en-US" sz="1300" i="1" dirty="0">
+                <a:solidFill>
+                  <a:srgbClr val="5A5A5A"/>
+                </a:solidFill>
+                <a:latin typeface="Red Hat Text" pitchFamily="34" charset="0"/>
+                <a:ea typeface="Red Hat Text" pitchFamily="34" charset="-122"/>
+                <a:cs typeface="Red Hat Text" pitchFamily="34" charset="-120"/>
+              </a:rPr>
+              <a:t>This is the baseline: no telemetry. Every later demo is measured against this opacity.</a:t>
+            </a:r>
+            <a:endParaRPr lang="en-US" sz="1300" dirty="0"/>
+          </a:p>
+        </p:txBody>
+      </p:sp>
+    </p:spTree>
+  </p:cSld>
+  <p:clrMapOvr>
+    <a:masterClrMapping/>
+  </p:clrMapOvr>
+</p:sld>
+</file>
+
+<file path=ppt/slides/slide21.xml><?xml version="1.0" encoding="utf-8"?>
+<p:sld xmlns:a="http://schemas.openxmlformats.org/drawingml/2006/main" xmlns:r="http://schemas.openxmlformats.org/officeDocument/2006/relationships" xmlns:p="http://schemas.openxmlformats.org/presentationml/2006/main">
+  <p:cSld name="Slide 21">
     <p:bg>
       <p:bgPr>
         <a:solidFill>
@@ -7479,234 +7974,6 @@
 </p:sld>
 </file>
 
-<file path=ppt/slides/slide21.xml><?xml version="1.0" encoding="utf-8"?>
-<p:sld xmlns:a="http://schemas.openxmlformats.org/drawingml/2006/main" xmlns:r="http://schemas.openxmlformats.org/officeDocument/2006/relationships" xmlns:p="http://schemas.openxmlformats.org/presentationml/2006/main">
-  <p:cSld name="Slide 21">
-    <p:spTree>
-      <p:nvGrpSpPr>
-        <p:cNvPr id="1" name=""/>
-        <p:cNvGrpSpPr/>
-        <p:nvPr/>
-      </p:nvGrpSpPr>
-      <p:grpSpPr>
-        <a:xfrm>
-          <a:off x="0" y="0"/>
-          <a:ext cx="0" cy="0"/>
-          <a:chOff x="0" y="0"/>
-          <a:chExt cx="0" cy="0"/>
-        </a:xfrm>
-      </p:grpSpPr>
-      <p:sp>
-        <p:nvSpPr>
-          <p:cNvPr id="2" name="Text 0"/>
-          <p:cNvSpPr/>
-          <p:nvPr/>
-        </p:nvSpPr>
-        <p:spPr>
-          <a:xfrm>
-            <a:off x="566928" y="6364224"/>
-            <a:ext cx="914400" cy="274320"/>
-          </a:xfrm>
-          <a:prstGeom prst="rect">
-            <a:avLst/>
-          </a:prstGeom>
-          <a:noFill/>
-          <a:ln/>
-        </p:spPr>
-        <p:txBody>
-          <a:bodyPr wrap="square" rtlCol="0" anchor="ctr"/>
-          <a:lstStyle/>
-          <a:p>
-            <a:pPr algn="l" indent="0" marL="0">
-              <a:buNone/>
-            </a:pPr>
-            <a:r>
-              <a:rPr lang="en-US" sz="1000" dirty="0">
-                <a:solidFill>
-                  <a:srgbClr val="8A8A8A"/>
-                </a:solidFill>
-                <a:latin typeface="Red Hat Text" pitchFamily="34" charset="0"/>
-                <a:ea typeface="Red Hat Text" pitchFamily="34" charset="-122"/>
-                <a:cs typeface="Red Hat Text" pitchFamily="34" charset="-120"/>
-              </a:rPr>
-              <a:t>21</a:t>
-            </a:r>
-            <a:endParaRPr lang="en-US" sz="1000" dirty="0"/>
-          </a:p>
-        </p:txBody>
-      </p:sp>
-      <p:pic>
-        <p:nvPicPr>
-          <p:cNvPr id="3" name="Image 0" descr="./assets/logo-candidate-2.png">    </p:cNvPr>
-          <p:cNvPicPr>
-            <a:picLocks noChangeAspect="1"/>
-          </p:cNvPicPr>
-          <p:nvPr/>
-        </p:nvPicPr>
-        <p:blipFill>
-          <a:blip r:embed="rId1"/>
-          <a:stretch>
-            <a:fillRect/>
-          </a:stretch>
-        </p:blipFill>
-        <p:spPr>
-          <a:xfrm>
-            <a:off x="10561320" y="6355080"/>
-            <a:ext cx="1033272" cy="246888"/>
-          </a:xfrm>
-          <a:prstGeom prst="rect">
-            <a:avLst/>
-          </a:prstGeom>
-        </p:spPr>
-      </p:pic>
-      <p:sp>
-        <p:nvSpPr>
-          <p:cNvPr id="4" name="Text 1"/>
-          <p:cNvSpPr/>
-          <p:nvPr/>
-        </p:nvSpPr>
-        <p:spPr>
-          <a:xfrm>
-            <a:off x="566928" y="384048"/>
-            <a:ext cx="11055096" cy="292608"/>
-          </a:xfrm>
-          <a:prstGeom prst="rect">
-            <a:avLst/>
-          </a:prstGeom>
-          <a:noFill/>
-          <a:ln/>
-        </p:spPr>
-        <p:txBody>
-          <a:bodyPr wrap="square" rtlCol="0" anchor="ctr"/>
-          <a:lstStyle/>
-          <a:p>
-            <a:pPr algn="l" indent="0" marL="0">
-              <a:buNone/>
-            </a:pPr>
-            <a:r>
-              <a:rPr lang="en-US" sz="1200" b="1" spc="400" kern="0" dirty="0">
-                <a:solidFill>
-                  <a:srgbClr val="EE0000"/>
-                </a:solidFill>
-                <a:latin typeface="Overpass" pitchFamily="34" charset="0"/>
-                <a:ea typeface="Overpass" pitchFamily="34" charset="-122"/>
-                <a:cs typeface="Overpass" pitchFamily="34" charset="-120"/>
-              </a:rPr>
-              <a:t>THE THREE SIGNALS · AUTO-INSTRUMENTATION</a:t>
-            </a:r>
-            <a:endParaRPr lang="en-US" sz="1200" dirty="0"/>
-          </a:p>
-        </p:txBody>
-      </p:sp>
-      <p:sp>
-        <p:nvSpPr>
-          <p:cNvPr id="5" name="Text 2"/>
-          <p:cNvSpPr/>
-          <p:nvPr/>
-        </p:nvSpPr>
-        <p:spPr>
-          <a:xfrm>
-            <a:off x="566928" y="676656"/>
-            <a:ext cx="11055096" cy="1005840"/>
-          </a:xfrm>
-          <a:prstGeom prst="rect">
-            <a:avLst/>
-          </a:prstGeom>
-          <a:noFill/>
-          <a:ln/>
-        </p:spPr>
-        <p:txBody>
-          <a:bodyPr wrap="square" rtlCol="0" anchor="t"/>
-          <a:lstStyle/>
-          <a:p>
-            <a:pPr algn="l" indent="0" marL="0">
-              <a:buNone/>
-            </a:pPr>
-            <a:r>
-              <a:rPr lang="en-US" sz="3000" b="1" dirty="0">
-                <a:solidFill>
-                  <a:srgbClr val="151515"/>
-                </a:solidFill>
-                <a:latin typeface="Overpass" pitchFamily="34" charset="0"/>
-                <a:ea typeface="Overpass" pitchFamily="34" charset="-122"/>
-                <a:cs typeface="Overpass" pitchFamily="34" charset="-120"/>
-              </a:rPr>
-              <a:t>Auto, custom, and the hybrid you actually ship</a:t>
-            </a:r>
-            <a:endParaRPr lang="en-US" sz="3000" dirty="0"/>
-          </a:p>
-        </p:txBody>
-      </p:sp>
-      <p:pic>
-        <p:nvPicPr>
-          <p:cNvPr id="6" name="Image 1" descr="./png/fig-04-instrumentation-layers.png">    </p:cNvPr>
-          <p:cNvPicPr>
-            <a:picLocks noChangeAspect="1"/>
-          </p:cNvPicPr>
-          <p:nvPr/>
-        </p:nvPicPr>
-        <p:blipFill>
-          <a:blip r:embed="rId2"/>
-          <a:srcRect l="0" r="0" t="0" b="0"/>
-          <a:stretch/>
-        </p:blipFill>
-        <p:spPr>
-          <a:xfrm>
-            <a:off x="1645920" y="1600200"/>
-            <a:ext cx="8906256" cy="4343400"/>
-          </a:xfrm>
-          <a:prstGeom prst="rect">
-            <a:avLst/>
-          </a:prstGeom>
-        </p:spPr>
-      </p:pic>
-      <p:sp>
-        <p:nvSpPr>
-          <p:cNvPr id="7" name="Text 3"/>
-          <p:cNvSpPr/>
-          <p:nvPr/>
-        </p:nvSpPr>
-        <p:spPr>
-          <a:xfrm>
-            <a:off x="566928" y="5943600"/>
-            <a:ext cx="11055096" cy="310896"/>
-          </a:xfrm>
-          <a:prstGeom prst="rect">
-            <a:avLst/>
-          </a:prstGeom>
-          <a:noFill/>
-          <a:ln/>
-        </p:spPr>
-        <p:txBody>
-          <a:bodyPr wrap="square" rtlCol="0" anchor="ctr"/>
-          <a:lstStyle/>
-          <a:p>
-            <a:pPr algn="ctr" indent="0" marL="0">
-              <a:buNone/>
-            </a:pPr>
-            <a:r>
-              <a:rPr lang="en-US" sz="1300" i="1" dirty="0">
-                <a:solidFill>
-                  <a:srgbClr val="5A5A5A"/>
-                </a:solidFill>
-                <a:latin typeface="Red Hat Text" pitchFamily="34" charset="0"/>
-                <a:ea typeface="Red Hat Text" pitchFamily="34" charset="-122"/>
-                <a:cs typeface="Red Hat Text" pitchFamily="34" charset="-120"/>
-              </a:rPr>
-              <a:t>Figure 4.1 — Auto-instrumentation gives breadth for free; custom spans give depth where it matters; real systems run both.</a:t>
-            </a:r>
-            <a:endParaRPr lang="en-US" sz="1300" dirty="0"/>
-          </a:p>
-        </p:txBody>
-      </p:sp>
-    </p:spTree>
-  </p:cSld>
-  <p:clrMapOvr>
-    <a:masterClrMapping/>
-  </p:clrMapOvr>
-</p:sld>
-</file>
-
 <file path=ppt/slides/slide22.xml><?xml version="1.0" encoding="utf-8"?>
 <p:sld xmlns:a="http://schemas.openxmlformats.org/drawingml/2006/main" xmlns:r="http://schemas.openxmlformats.org/officeDocument/2006/relationships" xmlns:p="http://schemas.openxmlformats.org/presentationml/2006/main">
   <p:cSld name="Slide 22">
@@ -7835,7 +8102,7 @@
         <p:spPr>
           <a:xfrm>
             <a:off x="566928" y="676656"/>
-            <a:ext cx="7223760" cy="1005840"/>
+            <a:ext cx="11055096" cy="1005840"/>
           </a:xfrm>
           <a:prstGeom prst="rect">
             <a:avLst/>
@@ -7859,356 +8126,38 @@
                 <a:ea typeface="Overpass" pitchFamily="34" charset="-122"/>
                 <a:cs typeface="Overpass" pitchFamily="34" charset="-120"/>
               </a:rPr>
-              <a:t>Turn it on once, in the shared library</a:t>
+              <a:t>Auto, custom, and the hybrid you actually ship</a:t>
             </a:r>
             <a:endParaRPr lang="en-US" sz="3000" dirty="0"/>
           </a:p>
         </p:txBody>
       </p:sp>
-      <p:sp>
-        <p:nvSpPr>
-          <p:cNvPr id="6" name="Text 3"/>
-          <p:cNvSpPr/>
-          <p:nvPr/>
-        </p:nvSpPr>
-        <p:spPr>
-          <a:xfrm>
-            <a:off x="7882128" y="969264"/>
-            <a:ext cx="3739896" cy="274320"/>
-          </a:xfrm>
-          <a:prstGeom prst="rect">
-            <a:avLst/>
-          </a:prstGeom>
-          <a:noFill/>
-          <a:ln/>
-        </p:spPr>
-        <p:txBody>
-          <a:bodyPr wrap="square" rtlCol="0" anchor="ctr"/>
-          <a:lstStyle/>
-          <a:p>
-            <a:pPr algn="r" indent="0" marL="0">
-              <a:buNone/>
-            </a:pPr>
-            <a:r>
-              <a:rPr lang="en-US" sz="1100" b="1" spc="200" kern="0" dirty="0">
-                <a:solidFill>
-                  <a:srgbClr val="5A5A5A"/>
-                </a:solidFill>
-                <a:latin typeface="Red Hat Mono" pitchFamily="34" charset="0"/>
-                <a:ea typeface="Red Hat Mono" pitchFamily="34" charset="-122"/>
-                <a:cs typeface="Red Hat Mono" pitchFamily="34" charset="-120"/>
-              </a:rPr>
-              <a:t>python · obs.otel.setup</a:t>
-            </a:r>
-            <a:endParaRPr lang="en-US" sz="1100" dirty="0"/>
-          </a:p>
-        </p:txBody>
-      </p:sp>
-      <p:sp>
-        <p:nvSpPr>
-          <p:cNvPr id="7" name="Shape 4"/>
-          <p:cNvSpPr/>
-          <p:nvPr/>
-        </p:nvSpPr>
-        <p:spPr>
-          <a:xfrm>
-            <a:off x="566928" y="1691640"/>
-            <a:ext cx="11055096" cy="4251960"/>
-          </a:xfrm>
-          <a:prstGeom prst="rect">
-            <a:avLst/>
-          </a:prstGeom>
-          <a:solidFill>
-            <a:srgbClr val="151515"/>
-          </a:solidFill>
-          <a:ln w="12700">
-            <a:solidFill>
-              <a:srgbClr val="151515"/>
-            </a:solidFill>
-            <a:prstDash val="solid"/>
-          </a:ln>
-        </p:spPr>
-      </p:sp>
-      <p:sp>
-        <p:nvSpPr>
-          <p:cNvPr id="8" name="Text 5"/>
-          <p:cNvSpPr/>
-          <p:nvPr/>
-        </p:nvSpPr>
-        <p:spPr>
-          <a:xfrm>
-            <a:off x="749808" y="1783080"/>
-            <a:ext cx="10689336" cy="4069080"/>
-          </a:xfrm>
-          <a:prstGeom prst="rect">
-            <a:avLst/>
-          </a:prstGeom>
-          <a:noFill/>
-          <a:ln/>
-        </p:spPr>
-        <p:txBody>
-          <a:bodyPr wrap="square" rtlCol="0" anchor="t"/>
-          <a:lstStyle/>
-          <a:p>
-            <a:pPr algn="l" indent="0" marL="0">
-              <a:lnSpc>
-                <a:spcPct val="110000"/>
-              </a:lnSpc>
-              <a:buNone/>
-            </a:pPr>
-            <a:r>
-              <a:rPr lang="en-US" sz="1000" dirty="0">
-                <a:solidFill>
-                  <a:srgbClr val="E6E6E6"/>
-                </a:solidFill>
-                <a:latin typeface="Red Hat Mono" pitchFamily="34" charset="0"/>
-                <a:ea typeface="Red Hat Mono" pitchFamily="34" charset="-122"/>
-                <a:cs typeface="Red Hat Mono" pitchFamily="34" charset="-120"/>
-              </a:rPr>
-              <a:t>resource = Resource.create({
-</a:t>
-            </a:r>
-            <a:pPr algn="l" indent="0" marL="0">
-              <a:lnSpc>
-                <a:spcPct val="110000"/>
-              </a:lnSpc>
-              <a:buNone/>
-            </a:pPr>
-            <a:r>
-              <a:rPr lang="en-US" sz="1000" dirty="0">
-                <a:solidFill>
-                  <a:srgbClr val="E6E6E6"/>
-                </a:solidFill>
-                <a:latin typeface="Red Hat Mono" pitchFamily="34" charset="0"/>
-                <a:ea typeface="Red Hat Mono" pitchFamily="34" charset="-122"/>
-                <a:cs typeface="Red Hat Mono" pitchFamily="34" charset="-120"/>
-              </a:rPr>
-              <a:t>    "service.name": cfg.service_name,    # the most important attribute
-</a:t>
-            </a:r>
-            <a:pPr algn="l" indent="0" marL="0">
-              <a:lnSpc>
-                <a:spcPct val="110000"/>
-              </a:lnSpc>
-              <a:buNone/>
-            </a:pPr>
-            <a:r>
-              <a:rPr lang="en-US" sz="1000" dirty="0">
-                <a:solidFill>
-                  <a:srgbClr val="E6E6E6"/>
-                </a:solidFill>
-                <a:latin typeface="Red Hat Mono" pitchFamily="34" charset="0"/>
-                <a:ea typeface="Red Hat Mono" pitchFamily="34" charset="-122"/>
-                <a:cs typeface="Red Hat Mono" pitchFamily="34" charset="-120"/>
-              </a:rPr>
-              <a:t>    "service.version": cfg.service_version,
-</a:t>
-            </a:r>
-            <a:pPr algn="l" indent="0" marL="0">
-              <a:lnSpc>
-                <a:spcPct val="110000"/>
-              </a:lnSpc>
-              <a:buNone/>
-            </a:pPr>
-            <a:r>
-              <a:rPr lang="en-US" sz="1000" dirty="0">
-                <a:solidFill>
-                  <a:srgbClr val="E6E6E6"/>
-                </a:solidFill>
-                <a:latin typeface="Red Hat Mono" pitchFamily="34" charset="0"/>
-                <a:ea typeface="Red Hat Mono" pitchFamily="34" charset="-122"/>
-                <a:cs typeface="Red Hat Mono" pitchFamily="34" charset="-120"/>
-              </a:rPr>
-              <a:t>    "deployment.environment": cfg.environment})
-</a:t>
-            </a:r>
-            <a:pPr algn="l" indent="0" marL="0">
-              <a:lnSpc>
-                <a:spcPct val="110000"/>
-              </a:lnSpc>
-              <a:buNone/>
-            </a:pPr>
-            <a:r>
-              <a:rPr lang="en-US" sz="1000" dirty="0">
-                <a:solidFill>
-                  <a:srgbClr val="E6E6E6"/>
-                </a:solidFill>
-                <a:latin typeface="Red Hat Mono" pitchFamily="34" charset="0"/>
-                <a:ea typeface="Red Hat Mono" pitchFamily="34" charset="-122"/>
-                <a:cs typeface="Red Hat Mono" pitchFamily="34" charset="-120"/>
-              </a:rPr>
-              <a:t>
-</a:t>
-            </a:r>
-            <a:pPr algn="l" indent="0" marL="0">
-              <a:lnSpc>
-                <a:spcPct val="110000"/>
-              </a:lnSpc>
-              <a:buNone/>
-            </a:pPr>
-            <a:r>
-              <a:rPr lang="en-US" sz="1000" dirty="0">
-                <a:solidFill>
-                  <a:srgbClr val="E6E6E6"/>
-                </a:solidFill>
-                <a:latin typeface="Red Hat Mono" pitchFamily="34" charset="0"/>
-                <a:ea typeface="Red Hat Mono" pitchFamily="34" charset="-122"/>
-                <a:cs typeface="Red Hat Mono" pitchFamily="34" charset="-120"/>
-              </a:rPr>
-              <a:t>tracer_provider = TracerProvider(resource=resource)
-</a:t>
-            </a:r>
-            <a:pPr algn="l" indent="0" marL="0">
-              <a:lnSpc>
-                <a:spcPct val="110000"/>
-              </a:lnSpc>
-              <a:buNone/>
-            </a:pPr>
-            <a:r>
-              <a:rPr lang="en-US" sz="1000" dirty="0">
-                <a:solidFill>
-                  <a:srgbClr val="E6E6E6"/>
-                </a:solidFill>
-                <a:latin typeface="Red Hat Mono" pitchFamily="34" charset="0"/>
-                <a:ea typeface="Red Hat Mono" pitchFamily="34" charset="-122"/>
-                <a:cs typeface="Red Hat Mono" pitchFamily="34" charset="-120"/>
-              </a:rPr>
-              <a:t>tracer_provider.add_span_processor(
-</a:t>
-            </a:r>
-            <a:pPr algn="l" indent="0" marL="0">
-              <a:lnSpc>
-                <a:spcPct val="110000"/>
-              </a:lnSpc>
-              <a:buNone/>
-            </a:pPr>
-            <a:r>
-              <a:rPr lang="en-US" sz="1000" dirty="0">
-                <a:solidFill>
-                  <a:srgbClr val="E6E6E6"/>
-                </a:solidFill>
-                <a:latin typeface="Red Hat Mono" pitchFamily="34" charset="0"/>
-                <a:ea typeface="Red Hat Mono" pitchFamily="34" charset="-122"/>
-                <a:cs typeface="Red Hat Mono" pitchFamily="34" charset="-120"/>
-              </a:rPr>
-              <a:t>    BatchSpanProcessor(OTLPSpanExporter(f"{cfg.endpoint}/v1/traces")))
-</a:t>
-            </a:r>
-            <a:pPr algn="l" indent="0" marL="0">
-              <a:lnSpc>
-                <a:spcPct val="110000"/>
-              </a:lnSpc>
-              <a:buNone/>
-            </a:pPr>
-            <a:r>
-              <a:rPr lang="en-US" sz="1000" dirty="0">
-                <a:solidFill>
-                  <a:srgbClr val="E6E6E6"/>
-                </a:solidFill>
-                <a:latin typeface="Red Hat Mono" pitchFamily="34" charset="0"/>
-                <a:ea typeface="Red Hat Mono" pitchFamily="34" charset="-122"/>
-                <a:cs typeface="Red Hat Mono" pitchFamily="34" charset="-120"/>
-              </a:rPr>
-              <a:t>trace.set_tracer_provider(tracer_provider)
-</a:t>
-            </a:r>
-            <a:pPr algn="l" indent="0" marL="0">
-              <a:lnSpc>
-                <a:spcPct val="110000"/>
-              </a:lnSpc>
-              <a:buNone/>
-            </a:pPr>
-            <a:r>
-              <a:rPr lang="en-US" sz="1000" dirty="0">
-                <a:solidFill>
-                  <a:srgbClr val="8FB98F"/>
-                </a:solidFill>
-                <a:latin typeface="Red Hat Mono" pitchFamily="34" charset="0"/>
-                <a:ea typeface="Red Hat Mono" pitchFamily="34" charset="-122"/>
-                <a:cs typeface="Red Hat Mono" pitchFamily="34" charset="-120"/>
-              </a:rPr>
-              <a:t># … MeterProvider + LoggerProvider wired the same way …
-</a:t>
-            </a:r>
-            <a:pPr algn="l" indent="0" marL="0">
-              <a:lnSpc>
-                <a:spcPct val="110000"/>
-              </a:lnSpc>
-              <a:buNone/>
-            </a:pPr>
-            <a:r>
-              <a:rPr lang="en-US" sz="1000" dirty="0">
-                <a:solidFill>
-                  <a:srgbClr val="E6E6E6"/>
-                </a:solidFill>
-                <a:latin typeface="Red Hat Mono" pitchFamily="34" charset="0"/>
-                <a:ea typeface="Red Hat Mono" pitchFamily="34" charset="-122"/>
-                <a:cs typeface="Red Hat Mono" pitchFamily="34" charset="-120"/>
-              </a:rPr>
-              <a:t>
-</a:t>
-            </a:r>
-            <a:pPr algn="l" indent="0" marL="0">
-              <a:lnSpc>
-                <a:spcPct val="110000"/>
-              </a:lnSpc>
-              <a:buNone/>
-            </a:pPr>
-            <a:r>
-              <a:rPr lang="en-US" sz="1000" dirty="0">
-                <a:solidFill>
-                  <a:srgbClr val="E6E6E6"/>
-                </a:solidFill>
-                <a:latin typeface="Red Hat Mono" pitchFamily="34" charset="0"/>
-                <a:ea typeface="Red Hat Mono" pitchFamily="34" charset="-122"/>
-                <a:cs typeface="Red Hat Mono" pitchFamily="34" charset="-120"/>
-              </a:rPr>
-              <a:t>AsyncPGInstrumentor().instrument()        # every query → a span
-</a:t>
-            </a:r>
-            <a:pPr algn="l" indent="0" marL="0">
-              <a:lnSpc>
-                <a:spcPct val="110000"/>
-              </a:lnSpc>
-              <a:buNone/>
-            </a:pPr>
-            <a:r>
-              <a:rPr lang="en-US" sz="1000" dirty="0">
-                <a:solidFill>
-                  <a:srgbClr val="E6E6E6"/>
-                </a:solidFill>
-                <a:latin typeface="Red Hat Mono" pitchFamily="34" charset="0"/>
-                <a:ea typeface="Red Hat Mono" pitchFamily="34" charset="-122"/>
-                <a:cs typeface="Red Hat Mono" pitchFamily="34" charset="-120"/>
-              </a:rPr>
-              <a:t>GrpcAioInstrumentorClient().instrument()  # inject context on the wire
-</a:t>
-            </a:r>
-            <a:pPr algn="l" indent="0" marL="0">
-              <a:lnSpc>
-                <a:spcPct val="110000"/>
-              </a:lnSpc>
-              <a:buNone/>
-            </a:pPr>
-            <a:r>
-              <a:rPr lang="en-US" sz="1000" dirty="0">
-                <a:solidFill>
-                  <a:srgbClr val="E6E6E6"/>
-                </a:solidFill>
-                <a:latin typeface="Red Hat Mono" pitchFamily="34" charset="0"/>
-                <a:ea typeface="Red Hat Mono" pitchFamily="34" charset="-122"/>
-                <a:cs typeface="Red Hat Mono" pitchFamily="34" charset="-120"/>
-              </a:rPr>
-              <a:t>GrpcAioInstrumentorServer().instrument()  # extract it on arrival
-</a:t>
-            </a:r>
-            <a:endParaRPr lang="en-US" sz="1000" dirty="0"/>
-          </a:p>
-        </p:txBody>
-      </p:sp>
-      <p:sp>
-        <p:nvSpPr>
-          <p:cNvPr id="9" name="Text 6"/>
+      <p:pic>
+        <p:nvPicPr>
+          <p:cNvPr id="6" name="Image 1" descr="./png/fig-04-instrumentation-layers.png">    </p:cNvPr>
+          <p:cNvPicPr>
+            <a:picLocks noChangeAspect="1"/>
+          </p:cNvPicPr>
+          <p:nvPr/>
+        </p:nvPicPr>
+        <p:blipFill>
+          <a:blip r:embed="rId2"/>
+          <a:srcRect l="0" r="0" t="0" b="0"/>
+          <a:stretch/>
+        </p:blipFill>
+        <p:spPr>
+          <a:xfrm>
+            <a:off x="1645920" y="1600200"/>
+            <a:ext cx="8906256" cy="4343400"/>
+          </a:xfrm>
+          <a:prstGeom prst="rect">
+            <a:avLst/>
+          </a:prstGeom>
+        </p:spPr>
+      </p:pic>
+      <p:sp>
+        <p:nvSpPr>
+          <p:cNvPr id="7" name="Text 3"/>
           <p:cNvSpPr/>
           <p:nvPr/>
         </p:nvSpPr>
@@ -8239,7 +8188,7 @@
                 <a:ea typeface="Red Hat Text" pitchFamily="34" charset="-122"/>
                 <a:cs typeface="Red Hat Text" pitchFamily="34" charset="-120"/>
               </a:rPr>
-              <a:t>service.name is what lets Grafana say 'this span happened in payment'; BatchSpanProcessor keeps export off the critical path.</a:t>
+              <a:t>Figure 4.1 — Auto-instrumentation gives breadth for free; custom spans give depth where it matters; real systems run both.</a:t>
             </a:r>
             <a:endParaRPr lang="en-US" sz="1300" dirty="0"/>
           </a:p>
@@ -8381,7 +8330,7 @@
         <p:spPr>
           <a:xfrm>
             <a:off x="566928" y="676656"/>
-            <a:ext cx="11055096" cy="1005840"/>
+            <a:ext cx="7223760" cy="1005840"/>
           </a:xfrm>
           <a:prstGeom prst="rect">
             <a:avLst/>
@@ -8405,7 +8354,7 @@
                 <a:ea typeface="Overpass" pitchFamily="34" charset="-122"/>
                 <a:cs typeface="Overpass" pitchFamily="34" charset="-120"/>
               </a:rPr>
-              <a:t>One trace for free — until Kafka</a:t>
+              <a:t>Turn it on once, in the shared library</a:t>
             </a:r>
             <a:endParaRPr lang="en-US" sz="3000" dirty="0"/>
           </a:p>
@@ -8419,8 +8368,8 @@
         </p:nvSpPr>
         <p:spPr>
           <a:xfrm>
-            <a:off x="566928" y="1691640"/>
-            <a:ext cx="11055096" cy="4434840"/>
+            <a:off x="7882128" y="969264"/>
+            <a:ext cx="3739896" cy="274320"/>
           </a:xfrm>
           <a:prstGeom prst="rect">
             <a:avLst/>
@@ -8429,79 +8378,365 @@
           <a:ln/>
         </p:spPr>
         <p:txBody>
+          <a:bodyPr wrap="square" rtlCol="0" anchor="ctr"/>
+          <a:lstStyle/>
+          <a:p>
+            <a:pPr algn="r" indent="0" marL="0">
+              <a:buNone/>
+            </a:pPr>
+            <a:r>
+              <a:rPr lang="en-US" sz="1100" b="1" spc="200" kern="0" dirty="0">
+                <a:solidFill>
+                  <a:srgbClr val="5A5A5A"/>
+                </a:solidFill>
+                <a:latin typeface="Red Hat Mono" pitchFamily="34" charset="0"/>
+                <a:ea typeface="Red Hat Mono" pitchFamily="34" charset="-122"/>
+                <a:cs typeface="Red Hat Mono" pitchFamily="34" charset="-120"/>
+              </a:rPr>
+              <a:t>python · obs.otel.setup</a:t>
+            </a:r>
+            <a:endParaRPr lang="en-US" sz="1100" dirty="0"/>
+          </a:p>
+        </p:txBody>
+      </p:sp>
+      <p:sp>
+        <p:nvSpPr>
+          <p:cNvPr id="7" name="Shape 4"/>
+          <p:cNvSpPr/>
+          <p:nvPr/>
+        </p:nvSpPr>
+        <p:spPr>
+          <a:xfrm>
+            <a:off x="566928" y="1691640"/>
+            <a:ext cx="11055096" cy="4251960"/>
+          </a:xfrm>
+          <a:prstGeom prst="rect">
+            <a:avLst/>
+          </a:prstGeom>
+          <a:solidFill>
+            <a:srgbClr val="151515"/>
+          </a:solidFill>
+          <a:ln w="12700">
+            <a:solidFill>
+              <a:srgbClr val="151515"/>
+            </a:solidFill>
+            <a:prstDash val="solid"/>
+          </a:ln>
+        </p:spPr>
+      </p:sp>
+      <p:sp>
+        <p:nvSpPr>
+          <p:cNvPr id="8" name="Text 5"/>
+          <p:cNvSpPr/>
+          <p:nvPr/>
+        </p:nvSpPr>
+        <p:spPr>
+          <a:xfrm>
+            <a:off x="749808" y="1783080"/>
+            <a:ext cx="10689336" cy="4069080"/>
+          </a:xfrm>
+          <a:prstGeom prst="rect">
+            <a:avLst/>
+          </a:prstGeom>
+          <a:noFill/>
+          <a:ln/>
+        </p:spPr>
+        <p:txBody>
           <a:bodyPr wrap="square" rtlCol="0" anchor="t"/>
           <a:lstStyle/>
           <a:p>
-            <a:pPr algn="l" marL="342900" indent="-342900">
+            <a:pPr algn="l" indent="0" marL="0">
               <a:lnSpc>
-                <a:spcPct val="115000"/>
+                <a:spcPct val="110000"/>
               </a:lnSpc>
-              <a:spcAft>
-                <a:spcPts val="600"/>
-              </a:spcAft>
-              <a:buSzPct val="100000"/>
-              <a:buChar char="●"/>
-            </a:pPr>
-            <a:r>
-              <a:rPr lang="en-US" sz="1600" dirty="0">
-                <a:solidFill>
-                  <a:srgbClr val="242424"/>
+              <a:buNone/>
+            </a:pPr>
+            <a:r>
+              <a:rPr lang="en-US" sz="1000" dirty="0">
+                <a:solidFill>
+                  <a:srgbClr val="E6E6E6"/>
+                </a:solidFill>
+                <a:latin typeface="Red Hat Mono" pitchFamily="34" charset="0"/>
+                <a:ea typeface="Red Hat Mono" pitchFamily="34" charset="-122"/>
+                <a:cs typeface="Red Hat Mono" pitchFamily="34" charset="-120"/>
+              </a:rPr>
+              <a:t>resource = Resource.create({
+</a:t>
+            </a:r>
+            <a:pPr algn="l" indent="0" marL="0">
+              <a:lnSpc>
+                <a:spcPct val="110000"/>
+              </a:lnSpc>
+              <a:buNone/>
+            </a:pPr>
+            <a:r>
+              <a:rPr lang="en-US" sz="1000" dirty="0">
+                <a:solidFill>
+                  <a:srgbClr val="E6E6E6"/>
+                </a:solidFill>
+                <a:latin typeface="Red Hat Mono" pitchFamily="34" charset="0"/>
+                <a:ea typeface="Red Hat Mono" pitchFamily="34" charset="-122"/>
+                <a:cs typeface="Red Hat Mono" pitchFamily="34" charset="-120"/>
+              </a:rPr>
+              <a:t>    "service.name": cfg.service_name,    # the most important attribute
+</a:t>
+            </a:r>
+            <a:pPr algn="l" indent="0" marL="0">
+              <a:lnSpc>
+                <a:spcPct val="110000"/>
+              </a:lnSpc>
+              <a:buNone/>
+            </a:pPr>
+            <a:r>
+              <a:rPr lang="en-US" sz="1000" dirty="0">
+                <a:solidFill>
+                  <a:srgbClr val="E6E6E6"/>
+                </a:solidFill>
+                <a:latin typeface="Red Hat Mono" pitchFamily="34" charset="0"/>
+                <a:ea typeface="Red Hat Mono" pitchFamily="34" charset="-122"/>
+                <a:cs typeface="Red Hat Mono" pitchFamily="34" charset="-120"/>
+              </a:rPr>
+              <a:t>    "service.version": cfg.service_version,
+</a:t>
+            </a:r>
+            <a:pPr algn="l" indent="0" marL="0">
+              <a:lnSpc>
+                <a:spcPct val="110000"/>
+              </a:lnSpc>
+              <a:buNone/>
+            </a:pPr>
+            <a:r>
+              <a:rPr lang="en-US" sz="1000" dirty="0">
+                <a:solidFill>
+                  <a:srgbClr val="E6E6E6"/>
+                </a:solidFill>
+                <a:latin typeface="Red Hat Mono" pitchFamily="34" charset="0"/>
+                <a:ea typeface="Red Hat Mono" pitchFamily="34" charset="-122"/>
+                <a:cs typeface="Red Hat Mono" pitchFamily="34" charset="-120"/>
+              </a:rPr>
+              <a:t>    "deployment.environment": cfg.environment})
+</a:t>
+            </a:r>
+            <a:pPr algn="l" indent="0" marL="0">
+              <a:lnSpc>
+                <a:spcPct val="110000"/>
+              </a:lnSpc>
+              <a:buNone/>
+            </a:pPr>
+            <a:r>
+              <a:rPr lang="en-US" sz="1000" dirty="0">
+                <a:solidFill>
+                  <a:srgbClr val="E6E6E6"/>
+                </a:solidFill>
+                <a:latin typeface="Red Hat Mono" pitchFamily="34" charset="0"/>
+                <a:ea typeface="Red Hat Mono" pitchFamily="34" charset="-122"/>
+                <a:cs typeface="Red Hat Mono" pitchFamily="34" charset="-120"/>
+              </a:rPr>
+              <a:t>
+</a:t>
+            </a:r>
+            <a:pPr algn="l" indent="0" marL="0">
+              <a:lnSpc>
+                <a:spcPct val="110000"/>
+              </a:lnSpc>
+              <a:buNone/>
+            </a:pPr>
+            <a:r>
+              <a:rPr lang="en-US" sz="1000" dirty="0">
+                <a:solidFill>
+                  <a:srgbClr val="E6E6E6"/>
+                </a:solidFill>
+                <a:latin typeface="Red Hat Mono" pitchFamily="34" charset="0"/>
+                <a:ea typeface="Red Hat Mono" pitchFamily="34" charset="-122"/>
+                <a:cs typeface="Red Hat Mono" pitchFamily="34" charset="-120"/>
+              </a:rPr>
+              <a:t>tracer_provider = TracerProvider(resource=resource)
+</a:t>
+            </a:r>
+            <a:pPr algn="l" indent="0" marL="0">
+              <a:lnSpc>
+                <a:spcPct val="110000"/>
+              </a:lnSpc>
+              <a:buNone/>
+            </a:pPr>
+            <a:r>
+              <a:rPr lang="en-US" sz="1000" dirty="0">
+                <a:solidFill>
+                  <a:srgbClr val="E6E6E6"/>
+                </a:solidFill>
+                <a:latin typeface="Red Hat Mono" pitchFamily="34" charset="0"/>
+                <a:ea typeface="Red Hat Mono" pitchFamily="34" charset="-122"/>
+                <a:cs typeface="Red Hat Mono" pitchFamily="34" charset="-120"/>
+              </a:rPr>
+              <a:t>tracer_provider.add_span_processor(
+</a:t>
+            </a:r>
+            <a:pPr algn="l" indent="0" marL="0">
+              <a:lnSpc>
+                <a:spcPct val="110000"/>
+              </a:lnSpc>
+              <a:buNone/>
+            </a:pPr>
+            <a:r>
+              <a:rPr lang="en-US" sz="1000" dirty="0">
+                <a:solidFill>
+                  <a:srgbClr val="E6E6E6"/>
+                </a:solidFill>
+                <a:latin typeface="Red Hat Mono" pitchFamily="34" charset="0"/>
+                <a:ea typeface="Red Hat Mono" pitchFamily="34" charset="-122"/>
+                <a:cs typeface="Red Hat Mono" pitchFamily="34" charset="-120"/>
+              </a:rPr>
+              <a:t>    BatchSpanProcessor(OTLPSpanExporter(f"{cfg.endpoint}/v1/traces")))
+</a:t>
+            </a:r>
+            <a:pPr algn="l" indent="0" marL="0">
+              <a:lnSpc>
+                <a:spcPct val="110000"/>
+              </a:lnSpc>
+              <a:buNone/>
+            </a:pPr>
+            <a:r>
+              <a:rPr lang="en-US" sz="1000" dirty="0">
+                <a:solidFill>
+                  <a:srgbClr val="E6E6E6"/>
+                </a:solidFill>
+                <a:latin typeface="Red Hat Mono" pitchFamily="34" charset="0"/>
+                <a:ea typeface="Red Hat Mono" pitchFamily="34" charset="-122"/>
+                <a:cs typeface="Red Hat Mono" pitchFamily="34" charset="-120"/>
+              </a:rPr>
+              <a:t>trace.set_tracer_provider(tracer_provider)
+</a:t>
+            </a:r>
+            <a:pPr algn="l" indent="0" marL="0">
+              <a:lnSpc>
+                <a:spcPct val="110000"/>
+              </a:lnSpc>
+              <a:buNone/>
+            </a:pPr>
+            <a:r>
+              <a:rPr lang="en-US" sz="1000" dirty="0">
+                <a:solidFill>
+                  <a:srgbClr val="8FB98F"/>
+                </a:solidFill>
+                <a:latin typeface="Red Hat Mono" pitchFamily="34" charset="0"/>
+                <a:ea typeface="Red Hat Mono" pitchFamily="34" charset="-122"/>
+                <a:cs typeface="Red Hat Mono" pitchFamily="34" charset="-120"/>
+              </a:rPr>
+              <a:t># … MeterProvider + LoggerProvider wired the same way …
+</a:t>
+            </a:r>
+            <a:pPr algn="l" indent="0" marL="0">
+              <a:lnSpc>
+                <a:spcPct val="110000"/>
+              </a:lnSpc>
+              <a:buNone/>
+            </a:pPr>
+            <a:r>
+              <a:rPr lang="en-US" sz="1000" dirty="0">
+                <a:solidFill>
+                  <a:srgbClr val="E6E6E6"/>
+                </a:solidFill>
+                <a:latin typeface="Red Hat Mono" pitchFamily="34" charset="0"/>
+                <a:ea typeface="Red Hat Mono" pitchFamily="34" charset="-122"/>
+                <a:cs typeface="Red Hat Mono" pitchFamily="34" charset="-120"/>
+              </a:rPr>
+              <a:t>
+</a:t>
+            </a:r>
+            <a:pPr algn="l" indent="0" marL="0">
+              <a:lnSpc>
+                <a:spcPct val="110000"/>
+              </a:lnSpc>
+              <a:buNone/>
+            </a:pPr>
+            <a:r>
+              <a:rPr lang="en-US" sz="1000" dirty="0">
+                <a:solidFill>
+                  <a:srgbClr val="E6E6E6"/>
+                </a:solidFill>
+                <a:latin typeface="Red Hat Mono" pitchFamily="34" charset="0"/>
+                <a:ea typeface="Red Hat Mono" pitchFamily="34" charset="-122"/>
+                <a:cs typeface="Red Hat Mono" pitchFamily="34" charset="-120"/>
+              </a:rPr>
+              <a:t>AsyncPGInstrumentor().instrument()        # every query → a span
+</a:t>
+            </a:r>
+            <a:pPr algn="l" indent="0" marL="0">
+              <a:lnSpc>
+                <a:spcPct val="110000"/>
+              </a:lnSpc>
+              <a:buNone/>
+            </a:pPr>
+            <a:r>
+              <a:rPr lang="en-US" sz="1000" dirty="0">
+                <a:solidFill>
+                  <a:srgbClr val="E6E6E6"/>
+                </a:solidFill>
+                <a:latin typeface="Red Hat Mono" pitchFamily="34" charset="0"/>
+                <a:ea typeface="Red Hat Mono" pitchFamily="34" charset="-122"/>
+                <a:cs typeface="Red Hat Mono" pitchFamily="34" charset="-120"/>
+              </a:rPr>
+              <a:t>GrpcAioInstrumentorClient().instrument()  # inject context on the wire
+</a:t>
+            </a:r>
+            <a:pPr algn="l" indent="0" marL="0">
+              <a:lnSpc>
+                <a:spcPct val="110000"/>
+              </a:lnSpc>
+              <a:buNone/>
+            </a:pPr>
+            <a:r>
+              <a:rPr lang="en-US" sz="1000" dirty="0">
+                <a:solidFill>
+                  <a:srgbClr val="E6E6E6"/>
+                </a:solidFill>
+                <a:latin typeface="Red Hat Mono" pitchFamily="34" charset="0"/>
+                <a:ea typeface="Red Hat Mono" pitchFamily="34" charset="-122"/>
+                <a:cs typeface="Red Hat Mono" pitchFamily="34" charset="-120"/>
+              </a:rPr>
+              <a:t>GrpcAioInstrumentorServer().instrument()  # extract it on arrival
+</a:t>
+            </a:r>
+            <a:endParaRPr lang="en-US" sz="1000" dirty="0"/>
+          </a:p>
+        </p:txBody>
+      </p:sp>
+      <p:sp>
+        <p:nvSpPr>
+          <p:cNvPr id="9" name="Text 6"/>
+          <p:cNvSpPr/>
+          <p:nvPr/>
+        </p:nvSpPr>
+        <p:spPr>
+          <a:xfrm>
+            <a:off x="566928" y="5943600"/>
+            <a:ext cx="11055096" cy="310896"/>
+          </a:xfrm>
+          <a:prstGeom prst="rect">
+            <a:avLst/>
+          </a:prstGeom>
+          <a:noFill/>
+          <a:ln/>
+        </p:spPr>
+        <p:txBody>
+          <a:bodyPr wrap="square" rtlCol="0" anchor="ctr"/>
+          <a:lstStyle/>
+          <a:p>
+            <a:pPr algn="ctr" indent="0" marL="0">
+              <a:buNone/>
+            </a:pPr>
+            <a:r>
+              <a:rPr lang="en-US" sz="1300" i="1" dirty="0">
+                <a:solidFill>
+                  <a:srgbClr val="5A5A5A"/>
                 </a:solidFill>
                 <a:latin typeface="Red Hat Text" pitchFamily="34" charset="0"/>
                 <a:ea typeface="Red Hat Text" pitchFamily="34" charset="-122"/>
                 <a:cs typeface="Red Hat Text" pitchFamily="34" charset="-120"/>
               </a:rPr>
-              <a:t>Place an order, open Tempo: one trace spans the POST /orders server span, the inventory and payment gRPC client+server spans, and every asyncpg query — none of it written by hand.</a:t>
-            </a:r>
-            <a:endParaRPr lang="en-US" sz="1600" dirty="0"/>
-          </a:p>
-          <a:p>
-            <a:pPr algn="l" marL="342900" indent="-342900">
-              <a:lnSpc>
-                <a:spcPct val="115000"/>
-              </a:lnSpc>
-              <a:spcAft>
-                <a:spcPts val="600"/>
-              </a:spcAft>
-              <a:buSzPct val="100000"/>
-              <a:buChar char="●"/>
-            </a:pPr>
-            <a:r>
-              <a:rPr lang="en-US" sz="1600" dirty="0">
-                <a:solidFill>
-                  <a:srgbClr val="242424"/>
-                </a:solidFill>
-                <a:latin typeface="Red Hat Text" pitchFamily="34" charset="0"/>
-                <a:ea typeface="Red Hat Text" pitchFamily="34" charset="-122"/>
-                <a:cs typeface="Red Hat Text" pitchFamily="34" charset="-120"/>
-              </a:rPr>
-              <a:t>Context crosses HTTP and gRPC because the instrumented client writes a traceparent header and the server reads it — the W3C Trace Context standard, propagated automatically.</a:t>
-            </a:r>
-            <a:endParaRPr lang="en-US" sz="1600" dirty="0"/>
-          </a:p>
-          <a:p>
-            <a:pPr algn="l" marL="342900" indent="-342900">
-              <a:lnSpc>
-                <a:spcPct val="115000"/>
-              </a:lnSpc>
-              <a:spcAft>
-                <a:spcPts val="600"/>
-              </a:spcAft>
-              <a:buSzPct val="100000"/>
-              <a:buChar char="●"/>
-            </a:pPr>
-            <a:r>
-              <a:rPr lang="en-US" sz="1600" dirty="0">
-                <a:solidFill>
-                  <a:srgbClr val="242424"/>
-                </a:solidFill>
-                <a:latin typeface="Red Hat Text" pitchFamily="34" charset="0"/>
-                <a:ea typeface="Red Hat Text" pitchFamily="34" charset="-122"/>
-                <a:cs typeface="Red Hat Text" pitchFamily="34" charset="-120"/>
-              </a:rPr>
-              <a:t>But the shipping and notification work shows up as separate, parentless traces. A Kafka message has no one filling in a traceparent for you, so the chain breaks at the broker. Demo 2 runs with propagation off to make that visible; Chapter 7 fixes it.</a:t>
-            </a:r>
-            <a:endParaRPr lang="en-US" sz="1600" dirty="0"/>
+              <a:t>service.name is what lets Grafana say 'this span happened in payment'; BatchSpanProcessor keeps export off the critical path.</a:t>
+            </a:r>
+            <a:endParaRPr lang="en-US" sz="1300" dirty="0"/>
           </a:p>
         </p:txBody>
       </p:sp>
@@ -8626,7 +8861,7 @@
                 <a:ea typeface="Overpass" pitchFamily="34" charset="-122"/>
                 <a:cs typeface="Overpass" pitchFamily="34" charset="-120"/>
               </a:rPr>
-              <a:t>THE THREE SIGNALS · METRICS</a:t>
+              <a:t>THE THREE SIGNALS · AUTO-INSTRUMENTATION</a:t>
             </a:r>
             <a:endParaRPr lang="en-US" sz="1200" dirty="0"/>
           </a:p>
@@ -8665,7 +8900,7 @@
                 <a:ea typeface="Overpass" pitchFamily="34" charset="-122"/>
                 <a:cs typeface="Overpass" pitchFamily="34" charset="-120"/>
               </a:rPr>
-              <a:t>RED, mostly for free — and exemplars back to traces</a:t>
+              <a:t>One trace for free — until Kafka</a:t>
             </a:r>
             <a:endParaRPr lang="en-US" sz="3000" dirty="0"/>
           </a:p>
@@ -8711,7 +8946,7 @@
                 <a:ea typeface="Red Hat Text" pitchFamily="34" charset="-122"/>
                 <a:cs typeface="Red Hat Text" pitchFamily="34" charset="-120"/>
               </a:rPr>
-              <a:t>RED — Rate, Errors, Duration — is the default question set for a request-driven service: is it busy, is it broken, is it slow? The HTTP and gRPC auto-instrumentation emits most of it already, labelled by route, method, and status.</a:t>
+              <a:t>Place an order, open Tempo: one trace spans the POST /orders server span, the inventory and payment gRPC client+server spans, and every asyncpg query — none of it written by hand.</a:t>
             </a:r>
             <a:endParaRPr lang="en-US" sz="1600" dirty="0"/>
           </a:p>
@@ -8735,7 +8970,7 @@
                 <a:ea typeface="Red Hat Text" pitchFamily="34" charset="-122"/>
                 <a:cs typeface="Red Hat Text" pitchFamily="34" charset="-120"/>
               </a:rPr>
-              <a:t>Metrics are periodic aggregates, not per-event records: a MeterProvider with a PeriodicExportingMetricReader samples in-memory aggregations and exports them on an interval — the fundamental difference from a span.</a:t>
+              <a:t>Context crosses HTTP and gRPC because the instrumented client writes a traceparent header and the server reads it — the W3C Trace Context standard, propagated automatically.</a:t>
             </a:r>
             <a:endParaRPr lang="en-US" sz="1600" dirty="0"/>
           </a:p>
@@ -8759,48 +8994,9 @@
                 <a:ea typeface="Red Hat Text" pitchFamily="34" charset="-122"/>
                 <a:cs typeface="Red Hat Text" pitchFamily="34" charset="-120"/>
               </a:rPr>
-              <a:t>Exemplars are the payoff: a sample trace_id attached to a histogram bucket when the measurement was taken inside a span. Grafana renders them as dots on the latency graph; click one to open the actual slow trace in Tempo.</a:t>
+              <a:t>But the shipping and notification work shows up as separate, parentless traces. A Kafka message has no one filling in a traceparent for you, so the chain breaks at the broker. Demo 2 runs with propagation off to make that visible; Chapter 7 fixes it.</a:t>
             </a:r>
             <a:endParaRPr lang="en-US" sz="1600" dirty="0"/>
-          </a:p>
-        </p:txBody>
-      </p:sp>
-      <p:sp>
-        <p:nvSpPr>
-          <p:cNvPr id="7" name="Text 4"/>
-          <p:cNvSpPr/>
-          <p:nvPr/>
-        </p:nvSpPr>
-        <p:spPr>
-          <a:xfrm>
-            <a:off x="566928" y="5943600"/>
-            <a:ext cx="11055096" cy="310896"/>
-          </a:xfrm>
-          <a:prstGeom prst="rect">
-            <a:avLst/>
-          </a:prstGeom>
-          <a:noFill/>
-          <a:ln/>
-        </p:spPr>
-        <p:txBody>
-          <a:bodyPr wrap="square" rtlCol="0" anchor="ctr"/>
-          <a:lstStyle/>
-          <a:p>
-            <a:pPr algn="ctr" indent="0" marL="0">
-              <a:buNone/>
-            </a:pPr>
-            <a:r>
-              <a:rPr lang="en-US" sz="1300" i="1" dirty="0">
-                <a:solidFill>
-                  <a:srgbClr val="5A5A5A"/>
-                </a:solidFill>
-                <a:latin typeface="Red Hat Text" pitchFamily="34" charset="0"/>
-                <a:ea typeface="Red Hat Text" pitchFamily="34" charset="-122"/>
-                <a:cs typeface="Red Hat Text" pitchFamily="34" charset="-120"/>
-              </a:rPr>
-              <a:t>Cross-check: the request count per minute should match the number of order traces for the same window.</a:t>
-            </a:r>
-            <a:endParaRPr lang="en-US" sz="1300" dirty="0"/>
           </a:p>
         </p:txBody>
       </p:sp>
@@ -8925,7 +9121,7 @@
                 <a:ea typeface="Overpass" pitchFamily="34" charset="-122"/>
                 <a:cs typeface="Overpass" pitchFamily="34" charset="-120"/>
               </a:rPr>
-              <a:t>THE THREE SIGNALS · LOGS</a:t>
+              <a:t>THE THREE SIGNALS · METRICS</a:t>
             </a:r>
             <a:endParaRPr lang="en-US" sz="1200" dirty="0"/>
           </a:p>
@@ -8940,7 +9136,7 @@
         <p:spPr>
           <a:xfrm>
             <a:off x="566928" y="676656"/>
-            <a:ext cx="7223760" cy="1005840"/>
+            <a:ext cx="11055096" cy="1005840"/>
           </a:xfrm>
           <a:prstGeom prst="rect">
             <a:avLst/>
@@ -8964,284 +9160,38 @@
                 <a:ea typeface="Overpass" pitchFamily="34" charset="-122"/>
                 <a:cs typeface="Overpass" pitchFamily="34" charset="-120"/>
               </a:rPr>
-              <a:t>Stamp every line with the active trace</a:t>
+              <a:t>One request, two shapes</a:t>
             </a:r>
             <a:endParaRPr lang="en-US" sz="3000" dirty="0"/>
           </a:p>
         </p:txBody>
       </p:sp>
-      <p:sp>
-        <p:nvSpPr>
-          <p:cNvPr id="6" name="Text 3"/>
-          <p:cNvSpPr/>
-          <p:nvPr/>
-        </p:nvSpPr>
-        <p:spPr>
-          <a:xfrm>
-            <a:off x="7882128" y="969264"/>
-            <a:ext cx="3739896" cy="274320"/>
-          </a:xfrm>
-          <a:prstGeom prst="rect">
-            <a:avLst/>
-          </a:prstGeom>
-          <a:noFill/>
-          <a:ln/>
-        </p:spPr>
-        <p:txBody>
-          <a:bodyPr wrap="square" rtlCol="0" anchor="ctr"/>
-          <a:lstStyle/>
-          <a:p>
-            <a:pPr algn="r" indent="0" marL="0">
-              <a:buNone/>
-            </a:pPr>
-            <a:r>
-              <a:rPr lang="en-US" sz="1100" b="1" spc="200" kern="0" dirty="0">
-                <a:solidFill>
-                  <a:srgbClr val="5A5A5A"/>
-                </a:solidFill>
-                <a:latin typeface="Red Hat Mono" pitchFamily="34" charset="0"/>
-                <a:ea typeface="Red Hat Mono" pitchFamily="34" charset="-122"/>
-                <a:cs typeface="Red Hat Mono" pitchFamily="34" charset="-120"/>
-              </a:rPr>
-              <a:t>python · obs.logging</a:t>
-            </a:r>
-            <a:endParaRPr lang="en-US" sz="1100" dirty="0"/>
-          </a:p>
-        </p:txBody>
-      </p:sp>
-      <p:sp>
-        <p:nvSpPr>
-          <p:cNvPr id="7" name="Shape 4"/>
-          <p:cNvSpPr/>
-          <p:nvPr/>
-        </p:nvSpPr>
-        <p:spPr>
-          <a:xfrm>
-            <a:off x="566928" y="1691640"/>
-            <a:ext cx="11055096" cy="4251960"/>
-          </a:xfrm>
-          <a:prstGeom prst="rect">
-            <a:avLst/>
-          </a:prstGeom>
-          <a:solidFill>
-            <a:srgbClr val="151515"/>
-          </a:solidFill>
-          <a:ln w="12700">
-            <a:solidFill>
-              <a:srgbClr val="151515"/>
-            </a:solidFill>
-            <a:prstDash val="solid"/>
-          </a:ln>
-        </p:spPr>
-      </p:sp>
-      <p:sp>
-        <p:nvSpPr>
-          <p:cNvPr id="8" name="Text 5"/>
-          <p:cNvSpPr/>
-          <p:nvPr/>
-        </p:nvSpPr>
-        <p:spPr>
-          <a:xfrm>
-            <a:off x="749808" y="1783080"/>
-            <a:ext cx="10689336" cy="4069080"/>
-          </a:xfrm>
-          <a:prstGeom prst="rect">
-            <a:avLst/>
-          </a:prstGeom>
-          <a:noFill/>
-          <a:ln/>
-        </p:spPr>
-        <p:txBody>
-          <a:bodyPr wrap="square" rtlCol="0" anchor="t"/>
-          <a:lstStyle/>
-          <a:p>
-            <a:pPr algn="l" indent="0" marL="0">
-              <a:lnSpc>
-                <a:spcPct val="110000"/>
-              </a:lnSpc>
-              <a:buNone/>
-            </a:pPr>
-            <a:r>
-              <a:rPr lang="en-US" sz="1100" dirty="0">
-                <a:solidFill>
-                  <a:srgbClr val="E6E6E6"/>
-                </a:solidFill>
-                <a:latin typeface="Red Hat Mono" pitchFamily="34" charset="0"/>
-                <a:ea typeface="Red Hat Mono" pitchFamily="34" charset="-122"/>
-                <a:cs typeface="Red Hat Mono" pitchFamily="34" charset="-120"/>
-              </a:rPr>
-              <a:t>class TraceContextFilter(logging.Filter):
-</a:t>
-            </a:r>
-            <a:pPr algn="l" indent="0" marL="0">
-              <a:lnSpc>
-                <a:spcPct val="110000"/>
-              </a:lnSpc>
-              <a:buNone/>
-            </a:pPr>
-            <a:r>
-              <a:rPr lang="en-US" sz="1100" dirty="0">
-                <a:solidFill>
-                  <a:srgbClr val="E6E6E6"/>
-                </a:solidFill>
-                <a:latin typeface="Red Hat Mono" pitchFamily="34" charset="0"/>
-                <a:ea typeface="Red Hat Mono" pitchFamily="34" charset="-122"/>
-                <a:cs typeface="Red Hat Mono" pitchFamily="34" charset="-120"/>
-              </a:rPr>
-              <a:t>    def filter(self, record):
-</a:t>
-            </a:r>
-            <a:pPr algn="l" indent="0" marL="0">
-              <a:lnSpc>
-                <a:spcPct val="110000"/>
-              </a:lnSpc>
-              <a:buNone/>
-            </a:pPr>
-            <a:r>
-              <a:rPr lang="en-US" sz="1100" dirty="0">
-                <a:solidFill>
-                  <a:srgbClr val="E6E6E6"/>
-                </a:solidFill>
-                <a:latin typeface="Red Hat Mono" pitchFamily="34" charset="0"/>
-                <a:ea typeface="Red Hat Mono" pitchFamily="34" charset="-122"/>
-                <a:cs typeface="Red Hat Mono" pitchFamily="34" charset="-120"/>
-              </a:rPr>
-              <a:t>        span = trace.get_current_span()
-</a:t>
-            </a:r>
-            <a:pPr algn="l" indent="0" marL="0">
-              <a:lnSpc>
-                <a:spcPct val="110000"/>
-              </a:lnSpc>
-              <a:buNone/>
-            </a:pPr>
-            <a:r>
-              <a:rPr lang="en-US" sz="1100" dirty="0">
-                <a:solidFill>
-                  <a:srgbClr val="E6E6E6"/>
-                </a:solidFill>
-                <a:latin typeface="Red Hat Mono" pitchFamily="34" charset="0"/>
-                <a:ea typeface="Red Hat Mono" pitchFamily="34" charset="-122"/>
-                <a:cs typeface="Red Hat Mono" pitchFamily="34" charset="-120"/>
-              </a:rPr>
-              <a:t>        ctx = span.get_span_context() if span else None
-</a:t>
-            </a:r>
-            <a:pPr algn="l" indent="0" marL="0">
-              <a:lnSpc>
-                <a:spcPct val="110000"/>
-              </a:lnSpc>
-              <a:buNone/>
-            </a:pPr>
-            <a:r>
-              <a:rPr lang="en-US" sz="1100" dirty="0">
-                <a:solidFill>
-                  <a:srgbClr val="E6E6E6"/>
-                </a:solidFill>
-                <a:latin typeface="Red Hat Mono" pitchFamily="34" charset="0"/>
-                <a:ea typeface="Red Hat Mono" pitchFamily="34" charset="-122"/>
-                <a:cs typeface="Red Hat Mono" pitchFamily="34" charset="-120"/>
-              </a:rPr>
-              <a:t>        if ctx and ctx.is_valid:
-</a:t>
-            </a:r>
-            <a:pPr algn="l" indent="0" marL="0">
-              <a:lnSpc>
-                <a:spcPct val="110000"/>
-              </a:lnSpc>
-              <a:buNone/>
-            </a:pPr>
-            <a:r>
-              <a:rPr lang="en-US" sz="1100" dirty="0">
-                <a:solidFill>
-                  <a:srgbClr val="E6E6E6"/>
-                </a:solidFill>
-                <a:latin typeface="Red Hat Mono" pitchFamily="34" charset="0"/>
-                <a:ea typeface="Red Hat Mono" pitchFamily="34" charset="-122"/>
-                <a:cs typeface="Red Hat Mono" pitchFamily="34" charset="-120"/>
-              </a:rPr>
-              <a:t>            record.trace_id = format(ctx.trace_id, "032x")
-</a:t>
-            </a:r>
-            <a:pPr algn="l" indent="0" marL="0">
-              <a:lnSpc>
-                <a:spcPct val="110000"/>
-              </a:lnSpc>
-              <a:buNone/>
-            </a:pPr>
-            <a:r>
-              <a:rPr lang="en-US" sz="1100" dirty="0">
-                <a:solidFill>
-                  <a:srgbClr val="E6E6E6"/>
-                </a:solidFill>
-                <a:latin typeface="Red Hat Mono" pitchFamily="34" charset="0"/>
-                <a:ea typeface="Red Hat Mono" pitchFamily="34" charset="-122"/>
-                <a:cs typeface="Red Hat Mono" pitchFamily="34" charset="-120"/>
-              </a:rPr>
-              <a:t>            record.span_id = format(ctx.span_id, "016x")
-</a:t>
-            </a:r>
-            <a:pPr algn="l" indent="0" marL="0">
-              <a:lnSpc>
-                <a:spcPct val="110000"/>
-              </a:lnSpc>
-              <a:buNone/>
-            </a:pPr>
-            <a:r>
-              <a:rPr lang="en-US" sz="1100" dirty="0">
-                <a:solidFill>
-                  <a:srgbClr val="E6E6E6"/>
-                </a:solidFill>
-                <a:latin typeface="Red Hat Mono" pitchFamily="34" charset="0"/>
-                <a:ea typeface="Red Hat Mono" pitchFamily="34" charset="-122"/>
-                <a:cs typeface="Red Hat Mono" pitchFamily="34" charset="-120"/>
-              </a:rPr>
-              <a:t>        else:
-</a:t>
-            </a:r>
-            <a:pPr algn="l" indent="0" marL="0">
-              <a:lnSpc>
-                <a:spcPct val="110000"/>
-              </a:lnSpc>
-              <a:buNone/>
-            </a:pPr>
-            <a:r>
-              <a:rPr lang="en-US" sz="1100" dirty="0">
-                <a:solidFill>
-                  <a:srgbClr val="E6E6E6"/>
-                </a:solidFill>
-                <a:latin typeface="Red Hat Mono" pitchFamily="34" charset="0"/>
-                <a:ea typeface="Red Hat Mono" pitchFamily="34" charset="-122"/>
-                <a:cs typeface="Red Hat Mono" pitchFamily="34" charset="-120"/>
-              </a:rPr>
-              <a:t>            record.trace_id = record.span_id = "-"
-</a:t>
-            </a:r>
-            <a:pPr algn="l" indent="0" marL="0">
-              <a:lnSpc>
-                <a:spcPct val="110000"/>
-              </a:lnSpc>
-              <a:buNone/>
-            </a:pPr>
-            <a:r>
-              <a:rPr lang="en-US" sz="1100" dirty="0">
-                <a:solidFill>
-                  <a:srgbClr val="E6E6E6"/>
-                </a:solidFill>
-                <a:latin typeface="Red Hat Mono" pitchFamily="34" charset="0"/>
-                <a:ea typeface="Red Hat Mono" pitchFamily="34" charset="-122"/>
-                <a:cs typeface="Red Hat Mono" pitchFamily="34" charset="-120"/>
-              </a:rPr>
-              <a:t>        return True   # a JsonFormatter then renders these as fields
-</a:t>
-            </a:r>
-            <a:endParaRPr lang="en-US" sz="1100" dirty="0"/>
-          </a:p>
-        </p:txBody>
-      </p:sp>
-      <p:sp>
-        <p:nvSpPr>
-          <p:cNvPr id="9" name="Text 6"/>
+      <p:pic>
+        <p:nvPicPr>
+          <p:cNvPr id="6" name="Image 1" descr="./png/fig-05-metrics-exemplars.png">    </p:cNvPr>
+          <p:cNvPicPr>
+            <a:picLocks noChangeAspect="1"/>
+          </p:cNvPicPr>
+          <p:nvPr/>
+        </p:nvPicPr>
+        <p:blipFill>
+          <a:blip r:embed="rId2"/>
+          <a:srcRect l="0" r="0" t="0" b="0"/>
+          <a:stretch/>
+        </p:blipFill>
+        <p:spPr>
+          <a:xfrm>
+            <a:off x="1645920" y="1600200"/>
+            <a:ext cx="8906256" cy="4343400"/>
+          </a:xfrm>
+          <a:prstGeom prst="rect">
+            <a:avLst/>
+          </a:prstGeom>
+        </p:spPr>
+      </p:pic>
+      <p:sp>
+        <p:nvSpPr>
+          <p:cNvPr id="7" name="Text 3"/>
           <p:cNvSpPr/>
           <p:nvPr/>
         </p:nvSpPr>
@@ -9272,7 +9222,7 @@
                 <a:ea typeface="Red Hat Text" pitchFamily="34" charset="-122"/>
                 <a:cs typeface="Red Hat Text" pitchFamily="34" charset="-120"/>
               </a:rPr>
-              <a:t>JSON + the trace_id on every record = a log in Loki links to its trace in Tempo, and back. The ids are the join key.</a:t>
+              <a:t>Figure 5.1 — The same request becomes a per-event span and a periodic histogram; the exemplar links a bucket back to a real trace.</a:t>
             </a:r>
             <a:endParaRPr lang="en-US" sz="1300" dirty="0"/>
           </a:p>
@@ -9399,7 +9349,7 @@
                 <a:ea typeface="Overpass" pitchFamily="34" charset="-122"/>
                 <a:cs typeface="Overpass" pitchFamily="34" charset="-120"/>
               </a:rPr>
-              <a:t>THE THREE SIGNALS · CUSTOM SPANS</a:t>
+              <a:t>THE THREE SIGNALS · METRICS</a:t>
             </a:r>
             <a:endParaRPr lang="en-US" sz="1200" dirty="0"/>
           </a:p>
@@ -9438,45 +9388,22 @@
                 <a:ea typeface="Overpass" pitchFamily="34" charset="-122"/>
                 <a:cs typeface="Overpass" pitchFamily="34" charset="-120"/>
               </a:rPr>
-              <a:t>Carrying the trace across the Kafka boundary</a:t>
+              <a:t>RED, mostly for free — and exemplars back to traces</a:t>
             </a:r>
             <a:endParaRPr lang="en-US" sz="3000" dirty="0"/>
           </a:p>
         </p:txBody>
       </p:sp>
-      <p:pic>
-        <p:nvPicPr>
-          <p:cNvPr id="6" name="Image 1" descr="./png/fig-07-context-propagation.png">    </p:cNvPr>
-          <p:cNvPicPr>
-            <a:picLocks noChangeAspect="1"/>
-          </p:cNvPicPr>
-          <p:nvPr/>
-        </p:nvPicPr>
-        <p:blipFill>
-          <a:blip r:embed="rId2"/>
-          <a:srcRect l="0" r="0" t="0" b="0"/>
-          <a:stretch/>
-        </p:blipFill>
-        <p:spPr>
-          <a:xfrm>
-            <a:off x="1645920" y="1600200"/>
-            <a:ext cx="8906256" cy="4343400"/>
-          </a:xfrm>
-          <a:prstGeom prst="rect">
-            <a:avLst/>
-          </a:prstGeom>
-        </p:spPr>
-      </p:pic>
-      <p:sp>
-        <p:nvSpPr>
-          <p:cNvPr id="7" name="Text 3"/>
+      <p:sp>
+        <p:nvSpPr>
+          <p:cNvPr id="6" name="Text 3"/>
           <p:cNvSpPr/>
           <p:nvPr/>
         </p:nvSpPr>
         <p:spPr>
           <a:xfrm>
-            <a:off x="566928" y="5943600"/>
-            <a:ext cx="11055096" cy="310896"/>
+            <a:off x="566928" y="1691640"/>
+            <a:ext cx="11055096" cy="4434840"/>
           </a:xfrm>
           <a:prstGeom prst="rect">
             <a:avLst/>
@@ -9485,22 +9412,116 @@
           <a:ln/>
         </p:spPr>
         <p:txBody>
-          <a:bodyPr wrap="square" rtlCol="0" anchor="ctr"/>
-          <a:lstStyle/>
-          <a:p>
-            <a:pPr algn="ctr" indent="0" marL="0">
-              <a:buNone/>
-            </a:pPr>
-            <a:r>
-              <a:rPr lang="en-US" sz="1300" i="1" dirty="0">
-                <a:solidFill>
-                  <a:srgbClr val="5A5A5A"/>
+          <a:bodyPr wrap="square" rtlCol="0" anchor="t"/>
+          <a:lstStyle/>
+          <a:p>
+            <a:pPr algn="l" marL="342900" indent="-342900">
+              <a:lnSpc>
+                <a:spcPct val="115000"/>
+              </a:lnSpc>
+              <a:spcAft>
+                <a:spcPts val="600"/>
+              </a:spcAft>
+              <a:buSzPct val="100000"/>
+              <a:buChar char="●"/>
+            </a:pPr>
+            <a:r>
+              <a:rPr lang="en-US" sz="1600" dirty="0">
+                <a:solidFill>
+                  <a:srgbClr val="242424"/>
                 </a:solidFill>
                 <a:latin typeface="Red Hat Text" pitchFamily="34" charset="0"/>
                 <a:ea typeface="Red Hat Text" pitchFamily="34" charset="-122"/>
                 <a:cs typeface="Red Hat Text" pitchFamily="34" charset="-120"/>
               </a:rPr>
-              <a:t>Figure 7.1 — gRPC propagates context for you; across Kafka you inject it into the message headers and extract it in the consumer.</a:t>
+              <a:t>RED — Rate, Errors, Duration — is the default question set for a request-driven service: is it busy, is it broken, is it slow? The HTTP and gRPC auto-instrumentation emits most of it already, labelled by route, method, and status.</a:t>
+            </a:r>
+            <a:endParaRPr lang="en-US" sz="1600" dirty="0"/>
+          </a:p>
+          <a:p>
+            <a:pPr algn="l" marL="342900" indent="-342900">
+              <a:lnSpc>
+                <a:spcPct val="115000"/>
+              </a:lnSpc>
+              <a:spcAft>
+                <a:spcPts val="600"/>
+              </a:spcAft>
+              <a:buSzPct val="100000"/>
+              <a:buChar char="●"/>
+            </a:pPr>
+            <a:r>
+              <a:rPr lang="en-US" sz="1600" dirty="0">
+                <a:solidFill>
+                  <a:srgbClr val="242424"/>
+                </a:solidFill>
+                <a:latin typeface="Red Hat Text" pitchFamily="34" charset="0"/>
+                <a:ea typeface="Red Hat Text" pitchFamily="34" charset="-122"/>
+                <a:cs typeface="Red Hat Text" pitchFamily="34" charset="-120"/>
+              </a:rPr>
+              <a:t>Metrics are periodic aggregates, not per-event records: a MeterProvider with a PeriodicExportingMetricReader samples in-memory aggregations and exports them on an interval — the fundamental difference from a span.</a:t>
+            </a:r>
+            <a:endParaRPr lang="en-US" sz="1600" dirty="0"/>
+          </a:p>
+          <a:p>
+            <a:pPr algn="l" marL="342900" indent="-342900">
+              <a:lnSpc>
+                <a:spcPct val="115000"/>
+              </a:lnSpc>
+              <a:spcAft>
+                <a:spcPts val="600"/>
+              </a:spcAft>
+              <a:buSzPct val="100000"/>
+              <a:buChar char="●"/>
+            </a:pPr>
+            <a:r>
+              <a:rPr lang="en-US" sz="1600" dirty="0">
+                <a:solidFill>
+                  <a:srgbClr val="242424"/>
+                </a:solidFill>
+                <a:latin typeface="Red Hat Text" pitchFamily="34" charset="0"/>
+                <a:ea typeface="Red Hat Text" pitchFamily="34" charset="-122"/>
+                <a:cs typeface="Red Hat Text" pitchFamily="34" charset="-120"/>
+              </a:rPr>
+              <a:t>Exemplars are the payoff: a sample trace_id attached to a histogram bucket when the measurement was taken inside a span. Grafana renders them as dots on the latency graph; click one to open the actual slow trace in Tempo.</a:t>
+            </a:r>
+            <a:endParaRPr lang="en-US" sz="1600" dirty="0"/>
+          </a:p>
+        </p:txBody>
+      </p:sp>
+      <p:sp>
+        <p:nvSpPr>
+          <p:cNvPr id="7" name="Text 4"/>
+          <p:cNvSpPr/>
+          <p:nvPr/>
+        </p:nvSpPr>
+        <p:spPr>
+          <a:xfrm>
+            <a:off x="566928" y="5943600"/>
+            <a:ext cx="11055096" cy="310896"/>
+          </a:xfrm>
+          <a:prstGeom prst="rect">
+            <a:avLst/>
+          </a:prstGeom>
+          <a:noFill/>
+          <a:ln/>
+        </p:spPr>
+        <p:txBody>
+          <a:bodyPr wrap="square" rtlCol="0" anchor="ctr"/>
+          <a:lstStyle/>
+          <a:p>
+            <a:pPr algn="ctr" indent="0" marL="0">
+              <a:buNone/>
+            </a:pPr>
+            <a:r>
+              <a:rPr lang="en-US" sz="1300" i="1" dirty="0">
+                <a:solidFill>
+                  <a:srgbClr val="5A5A5A"/>
+                </a:solidFill>
+                <a:latin typeface="Red Hat Text" pitchFamily="34" charset="0"/>
+                <a:ea typeface="Red Hat Text" pitchFamily="34" charset="-122"/>
+                <a:cs typeface="Red Hat Text" pitchFamily="34" charset="-120"/>
+              </a:rPr>
+              <a:t>Cross-check: the request count per minute should match the number of order traces for the same window.</a:t>
             </a:r>
             <a:endParaRPr lang="en-US" sz="1300" dirty="0"/>
           </a:p>
@@ -9627,7 +9648,7 @@
                 <a:ea typeface="Overpass" pitchFamily="34" charset="-122"/>
                 <a:cs typeface="Overpass" pitchFamily="34" charset="-120"/>
               </a:rPr>
-              <a:t>THE THREE SIGNALS · CUSTOM SPANS</a:t>
+              <a:t>THE THREE SIGNALS · LOGS</a:t>
             </a:r>
             <a:endParaRPr lang="en-US" sz="1200" dirty="0"/>
           </a:p>
@@ -9642,7 +9663,7 @@
         <p:spPr>
           <a:xfrm>
             <a:off x="566928" y="676656"/>
-            <a:ext cx="7223760" cy="1005840"/>
+            <a:ext cx="11055096" cy="1005840"/>
           </a:xfrm>
           <a:prstGeom prst="rect">
             <a:avLst/>
@@ -9666,284 +9687,38 @@
                 <a:ea typeface="Overpass" pitchFamily="34" charset="-122"/>
                 <a:cs typeface="Overpass" pitchFamily="34" charset="-120"/>
               </a:rPr>
-              <a:t>Inject on publish, extract on consume</a:t>
+              <a:t>The ids are the join key</a:t>
             </a:r>
             <a:endParaRPr lang="en-US" sz="3000" dirty="0"/>
           </a:p>
         </p:txBody>
       </p:sp>
-      <p:sp>
-        <p:nvSpPr>
-          <p:cNvPr id="6" name="Text 3"/>
-          <p:cNvSpPr/>
-          <p:nvPr/>
-        </p:nvSpPr>
-        <p:spPr>
-          <a:xfrm>
-            <a:off x="7882128" y="969264"/>
-            <a:ext cx="3739896" cy="274320"/>
-          </a:xfrm>
-          <a:prstGeom prst="rect">
-            <a:avLst/>
-          </a:prstGeom>
-          <a:noFill/>
-          <a:ln/>
-        </p:spPr>
-        <p:txBody>
-          <a:bodyPr wrap="square" rtlCol="0" anchor="ctr"/>
-          <a:lstStyle/>
-          <a:p>
-            <a:pPr algn="r" indent="0" marL="0">
-              <a:buNone/>
-            </a:pPr>
-            <a:r>
-              <a:rPr lang="en-US" sz="1100" b="1" spc="200" kern="0" dirty="0">
-                <a:solidFill>
-                  <a:srgbClr val="5A5A5A"/>
-                </a:solidFill>
-                <a:latin typeface="Red Hat Mono" pitchFamily="34" charset="0"/>
-                <a:ea typeface="Red Hat Mono" pitchFamily="34" charset="-122"/>
-                <a:cs typeface="Red Hat Mono" pitchFamily="34" charset="-120"/>
-              </a:rPr>
-              <a:t>python · obs.kafka_propagation</a:t>
-            </a:r>
-            <a:endParaRPr lang="en-US" sz="1100" dirty="0"/>
-          </a:p>
-        </p:txBody>
-      </p:sp>
-      <p:sp>
-        <p:nvSpPr>
-          <p:cNvPr id="7" name="Shape 4"/>
-          <p:cNvSpPr/>
-          <p:nvPr/>
-        </p:nvSpPr>
-        <p:spPr>
-          <a:xfrm>
-            <a:off x="566928" y="1691640"/>
-            <a:ext cx="11055096" cy="4251960"/>
-          </a:xfrm>
-          <a:prstGeom prst="rect">
-            <a:avLst/>
-          </a:prstGeom>
-          <a:solidFill>
-            <a:srgbClr val="151515"/>
-          </a:solidFill>
-          <a:ln w="12700">
-            <a:solidFill>
-              <a:srgbClr val="151515"/>
-            </a:solidFill>
-            <a:prstDash val="solid"/>
-          </a:ln>
-        </p:spPr>
-      </p:sp>
-      <p:sp>
-        <p:nvSpPr>
-          <p:cNvPr id="8" name="Text 5"/>
-          <p:cNvSpPr/>
-          <p:nvPr/>
-        </p:nvSpPr>
-        <p:spPr>
-          <a:xfrm>
-            <a:off x="749808" y="1783080"/>
-            <a:ext cx="10689336" cy="4069080"/>
-          </a:xfrm>
-          <a:prstGeom prst="rect">
-            <a:avLst/>
-          </a:prstGeom>
-          <a:noFill/>
-          <a:ln/>
-        </p:spPr>
-        <p:txBody>
-          <a:bodyPr wrap="square" rtlCol="0" anchor="t"/>
-          <a:lstStyle/>
-          <a:p>
-            <a:pPr algn="l" indent="0" marL="0">
-              <a:lnSpc>
-                <a:spcPct val="110000"/>
-              </a:lnSpc>
-              <a:buNone/>
-            </a:pPr>
-            <a:r>
-              <a:rPr lang="en-US" sz="1100" dirty="0">
-                <a:solidFill>
-                  <a:srgbClr val="8FB98F"/>
-                </a:solidFill>
-                <a:latin typeface="Red Hat Mono" pitchFamily="34" charset="0"/>
-                <a:ea typeface="Red Hat Mono" pitchFamily="34" charset="-122"/>
-                <a:cs typeface="Red Hat Mono" pitchFamily="34" charset="-120"/>
-              </a:rPr>
-              <a:t># producer side — inject the active context into Kafka headers
-</a:t>
-            </a:r>
-            <a:pPr algn="l" indent="0" marL="0">
-              <a:lnSpc>
-                <a:spcPct val="110000"/>
-              </a:lnSpc>
-              <a:buNone/>
-            </a:pPr>
-            <a:r>
-              <a:rPr lang="en-US" sz="1100" dirty="0">
-                <a:solidFill>
-                  <a:srgbClr val="E6E6E6"/>
-                </a:solidFill>
-                <a:latin typeface="Red Hat Mono" pitchFamily="34" charset="0"/>
-                <a:ea typeface="Red Hat Mono" pitchFamily="34" charset="-122"/>
-                <a:cs typeface="Red Hat Mono" pitchFamily="34" charset="-120"/>
-              </a:rPr>
-              <a:t>def inject_headers(existing=None):
-</a:t>
-            </a:r>
-            <a:pPr algn="l" indent="0" marL="0">
-              <a:lnSpc>
-                <a:spcPct val="110000"/>
-              </a:lnSpc>
-              <a:buNone/>
-            </a:pPr>
-            <a:r>
-              <a:rPr lang="en-US" sz="1100" dirty="0">
-                <a:solidFill>
-                  <a:srgbClr val="E6E6E6"/>
-                </a:solidFill>
-                <a:latin typeface="Red Hat Mono" pitchFamily="34" charset="0"/>
-                <a:ea typeface="Red Hat Mono" pitchFamily="34" charset="-122"/>
-                <a:cs typeface="Red Hat Mono" pitchFamily="34" charset="-120"/>
-              </a:rPr>
-              <a:t>    carrier = {}; propagate.inject(carrier)   # writes 'traceparent'
-</a:t>
-            </a:r>
-            <a:pPr algn="l" indent="0" marL="0">
-              <a:lnSpc>
-                <a:spcPct val="110000"/>
-              </a:lnSpc>
-              <a:buNone/>
-            </a:pPr>
-            <a:r>
-              <a:rPr lang="en-US" sz="1100" dirty="0">
-                <a:solidFill>
-                  <a:srgbClr val="E6E6E6"/>
-                </a:solidFill>
-                <a:latin typeface="Red Hat Mono" pitchFamily="34" charset="0"/>
-                <a:ea typeface="Red Hat Mono" pitchFamily="34" charset="-122"/>
-                <a:cs typeface="Red Hat Mono" pitchFamily="34" charset="-120"/>
-              </a:rPr>
-              <a:t>    return [(k, v.encode()) for k, v in carrier.items()]
-</a:t>
-            </a:r>
-            <a:pPr algn="l" indent="0" marL="0">
-              <a:lnSpc>
-                <a:spcPct val="110000"/>
-              </a:lnSpc>
-              <a:buNone/>
-            </a:pPr>
-            <a:r>
-              <a:rPr lang="en-US" sz="1100" dirty="0">
-                <a:solidFill>
-                  <a:srgbClr val="E6E6E6"/>
-                </a:solidFill>
-                <a:latin typeface="Red Hat Mono" pitchFamily="34" charset="0"/>
-                <a:ea typeface="Red Hat Mono" pitchFamily="34" charset="-122"/>
-                <a:cs typeface="Red Hat Mono" pitchFamily="34" charset="-120"/>
-              </a:rPr>
-              <a:t>
-</a:t>
-            </a:r>
-            <a:pPr algn="l" indent="0" marL="0">
-              <a:lnSpc>
-                <a:spcPct val="110000"/>
-              </a:lnSpc>
-              <a:buNone/>
-            </a:pPr>
-            <a:r>
-              <a:rPr lang="en-US" sz="1100" dirty="0">
-                <a:solidFill>
-                  <a:srgbClr val="8FB98F"/>
-                </a:solidFill>
-                <a:latin typeface="Red Hat Mono" pitchFamily="34" charset="0"/>
-                <a:ea typeface="Red Hat Mono" pitchFamily="34" charset="-122"/>
-                <a:cs typeface="Red Hat Mono" pitchFamily="34" charset="-120"/>
-              </a:rPr>
-              <a:t># consumer side — rebuild the context, then parent the span to it
-</a:t>
-            </a:r>
-            <a:pPr algn="l" indent="0" marL="0">
-              <a:lnSpc>
-                <a:spcPct val="110000"/>
-              </a:lnSpc>
-              <a:buNone/>
-            </a:pPr>
-            <a:r>
-              <a:rPr lang="en-US" sz="1100" dirty="0">
-                <a:solidFill>
-                  <a:srgbClr val="E6E6E6"/>
-                </a:solidFill>
-                <a:latin typeface="Red Hat Mono" pitchFamily="34" charset="0"/>
-                <a:ea typeface="Red Hat Mono" pitchFamily="34" charset="-122"/>
-                <a:cs typeface="Red Hat Mono" pitchFamily="34" charset="-120"/>
-              </a:rPr>
-              <a:t>ctx = extract_context(msg.headers)
-</a:t>
-            </a:r>
-            <a:pPr algn="l" indent="0" marL="0">
-              <a:lnSpc>
-                <a:spcPct val="110000"/>
-              </a:lnSpc>
-              <a:buNone/>
-            </a:pPr>
-            <a:r>
-              <a:rPr lang="en-US" sz="1100" dirty="0">
-                <a:solidFill>
-                  <a:srgbClr val="E6E6E6"/>
-                </a:solidFill>
-                <a:latin typeface="Red Hat Mono" pitchFamily="34" charset="0"/>
-                <a:ea typeface="Red Hat Mono" pitchFamily="34" charset="-122"/>
-                <a:cs typeface="Red Hat Mono" pitchFamily="34" charset="-120"/>
-              </a:rPr>
-              <a:t>with otel.tracer().start_as_current_span(
-</a:t>
-            </a:r>
-            <a:pPr algn="l" indent="0" marL="0">
-              <a:lnSpc>
-                <a:spcPct val="110000"/>
-              </a:lnSpc>
-              <a:buNone/>
-            </a:pPr>
-            <a:r>
-              <a:rPr lang="en-US" sz="1100" dirty="0">
-                <a:solidFill>
-                  <a:srgbClr val="E6E6E6"/>
-                </a:solidFill>
-                <a:latin typeface="Red Hat Mono" pitchFamily="34" charset="0"/>
-                <a:ea typeface="Red Hat Mono" pitchFamily="34" charset="-122"/>
-                <a:cs typeface="Red Hat Mono" pitchFamily="34" charset="-120"/>
-              </a:rPr>
-              <a:t>        "shipping.handle_order_placed", context=ctx):
-</a:t>
-            </a:r>
-            <a:pPr algn="l" indent="0" marL="0">
-              <a:lnSpc>
-                <a:spcPct val="110000"/>
-              </a:lnSpc>
-              <a:buNone/>
-            </a:pPr>
-            <a:r>
-              <a:rPr lang="en-US" sz="1100" dirty="0">
-                <a:solidFill>
-                  <a:srgbClr val="E6E6E6"/>
-                </a:solidFill>
-                <a:latin typeface="Red Hat Mono" pitchFamily="34" charset="0"/>
-                <a:ea typeface="Red Hat Mono" pitchFamily="34" charset="-122"/>
-                <a:cs typeface="Red Hat Mono" pitchFamily="34" charset="-120"/>
-              </a:rPr>
-              <a:t>    await create_shipment(order)   # this span is now a child of the order
-</a:t>
-            </a:r>
-            <a:endParaRPr lang="en-US" sz="1100" dirty="0"/>
-          </a:p>
-        </p:txBody>
-      </p:sp>
-      <p:sp>
-        <p:nvSpPr>
-          <p:cNvPr id="9" name="Text 6"/>
+      <p:pic>
+        <p:nvPicPr>
+          <p:cNvPr id="6" name="Image 1" descr="./png/fig-06-log-correlation.png">    </p:cNvPr>
+          <p:cNvPicPr>
+            <a:picLocks noChangeAspect="1"/>
+          </p:cNvPicPr>
+          <p:nvPr/>
+        </p:nvPicPr>
+        <p:blipFill>
+          <a:blip r:embed="rId2"/>
+          <a:srcRect l="0" r="0" t="0" b="0"/>
+          <a:stretch/>
+        </p:blipFill>
+        <p:spPr>
+          <a:xfrm>
+            <a:off x="1645920" y="1600200"/>
+            <a:ext cx="8906256" cy="4343400"/>
+          </a:xfrm>
+          <a:prstGeom prst="rect">
+            <a:avLst/>
+          </a:prstGeom>
+        </p:spPr>
+      </p:pic>
+      <p:sp>
+        <p:nvSpPr>
+          <p:cNvPr id="7" name="Text 3"/>
           <p:cNvSpPr/>
           <p:nvPr/>
         </p:nvSpPr>
@@ -9974,7 +9749,7 @@
                 <a:ea typeface="Red Hat Text" pitchFamily="34" charset="-122"/>
                 <a:cs typeface="Red Hat Text" pitchFamily="34" charset="-120"/>
               </a:rPr>
-              <a:t>context=ctx is the entire trick: without it the consumer starts a new trace; with it, it joins the order's.</a:t>
+              <a:t>Figure 6.1 — Stamp the active trace_id onto every JSON log line; Loki and Tempo then point at each other.</a:t>
             </a:r>
             <a:endParaRPr lang="en-US" sz="1300" dirty="0"/>
           </a:p>
@@ -10101,7 +9876,7 @@
                 <a:ea typeface="Overpass" pitchFamily="34" charset="-122"/>
                 <a:cs typeface="Overpass" pitchFamily="34" charset="-120"/>
               </a:rPr>
-              <a:t>THE THREE SIGNALS · CUSTOM SPANS</a:t>
+              <a:t>THE THREE SIGNALS · LOGS</a:t>
             </a:r>
             <a:endParaRPr lang="en-US" sz="1200" dirty="0"/>
           </a:p>
@@ -10116,7 +9891,7 @@
         <p:spPr>
           <a:xfrm>
             <a:off x="566928" y="676656"/>
-            <a:ext cx="11055096" cy="1005840"/>
+            <a:ext cx="7223760" cy="1005840"/>
           </a:xfrm>
           <a:prstGeom prst="rect">
             <a:avLst/>
@@ -10140,7 +9915,7 @@
                 <a:ea typeface="Overpass" pitchFamily="34" charset="-122"/>
                 <a:cs typeface="Overpass" pitchFamily="34" charset="-120"/>
               </a:rPr>
-              <a:t>Same API, a second use: GraphQL shape</a:t>
+              <a:t>Stamp every line with the active trace</a:t>
             </a:r>
             <a:endParaRPr lang="en-US" sz="3000" dirty="0"/>
           </a:p>
@@ -10154,8 +9929,8 @@
         </p:nvSpPr>
         <p:spPr>
           <a:xfrm>
-            <a:off x="566928" y="1691640"/>
-            <a:ext cx="11055096" cy="4434840"/>
+            <a:off x="7882128" y="969264"/>
+            <a:ext cx="3739896" cy="274320"/>
           </a:xfrm>
           <a:prstGeom prst="rect">
             <a:avLst/>
@@ -10164,116 +9939,291 @@
           <a:ln/>
         </p:spPr>
         <p:txBody>
+          <a:bodyPr wrap="square" rtlCol="0" anchor="ctr"/>
+          <a:lstStyle/>
+          <a:p>
+            <a:pPr algn="r" indent="0" marL="0">
+              <a:buNone/>
+            </a:pPr>
+            <a:r>
+              <a:rPr lang="en-US" sz="1100" b="1" spc="200" kern="0" dirty="0">
+                <a:solidFill>
+                  <a:srgbClr val="5A5A5A"/>
+                </a:solidFill>
+                <a:latin typeface="Red Hat Mono" pitchFamily="34" charset="0"/>
+                <a:ea typeface="Red Hat Mono" pitchFamily="34" charset="-122"/>
+                <a:cs typeface="Red Hat Mono" pitchFamily="34" charset="-120"/>
+              </a:rPr>
+              <a:t>python · obs.logging</a:t>
+            </a:r>
+            <a:endParaRPr lang="en-US" sz="1100" dirty="0"/>
+          </a:p>
+        </p:txBody>
+      </p:sp>
+      <p:sp>
+        <p:nvSpPr>
+          <p:cNvPr id="7" name="Shape 4"/>
+          <p:cNvSpPr/>
+          <p:nvPr/>
+        </p:nvSpPr>
+        <p:spPr>
+          <a:xfrm>
+            <a:off x="566928" y="1691640"/>
+            <a:ext cx="11055096" cy="4251960"/>
+          </a:xfrm>
+          <a:prstGeom prst="rect">
+            <a:avLst/>
+          </a:prstGeom>
+          <a:solidFill>
+            <a:srgbClr val="151515"/>
+          </a:solidFill>
+          <a:ln w="12700">
+            <a:solidFill>
+              <a:srgbClr val="151515"/>
+            </a:solidFill>
+            <a:prstDash val="solid"/>
+          </a:ln>
+        </p:spPr>
+      </p:sp>
+      <p:sp>
+        <p:nvSpPr>
+          <p:cNvPr id="8" name="Text 5"/>
+          <p:cNvSpPr/>
+          <p:nvPr/>
+        </p:nvSpPr>
+        <p:spPr>
+          <a:xfrm>
+            <a:off x="749808" y="1783080"/>
+            <a:ext cx="10689336" cy="4069080"/>
+          </a:xfrm>
+          <a:prstGeom prst="rect">
+            <a:avLst/>
+          </a:prstGeom>
+          <a:noFill/>
+          <a:ln/>
+        </p:spPr>
+        <p:txBody>
           <a:bodyPr wrap="square" rtlCol="0" anchor="t"/>
           <a:lstStyle/>
           <a:p>
-            <a:pPr algn="l" marL="342900" indent="-342900">
+            <a:pPr algn="l" indent="0" marL="0">
               <a:lnSpc>
-                <a:spcPct val="115000"/>
+                <a:spcPct val="110000"/>
               </a:lnSpc>
-              <a:spcAft>
-                <a:spcPts val="600"/>
-              </a:spcAft>
-              <a:buSzPct val="100000"/>
-              <a:buChar char="●"/>
-            </a:pPr>
-            <a:r>
-              <a:rPr lang="en-US" sz="1600" dirty="0">
-                <a:solidFill>
-                  <a:srgbClr val="242424"/>
+              <a:buNone/>
+            </a:pPr>
+            <a:r>
+              <a:rPr lang="en-US" sz="1100" dirty="0">
+                <a:solidFill>
+                  <a:srgbClr val="E6E6E6"/>
+                </a:solidFill>
+                <a:latin typeface="Red Hat Mono" pitchFamily="34" charset="0"/>
+                <a:ea typeface="Red Hat Mono" pitchFamily="34" charset="-122"/>
+                <a:cs typeface="Red Hat Mono" pitchFamily="34" charset="-120"/>
+              </a:rPr>
+              <a:t>class TraceContextFilter(logging.Filter):
+</a:t>
+            </a:r>
+            <a:pPr algn="l" indent="0" marL="0">
+              <a:lnSpc>
+                <a:spcPct val="110000"/>
+              </a:lnSpc>
+              <a:buNone/>
+            </a:pPr>
+            <a:r>
+              <a:rPr lang="en-US" sz="1100" dirty="0">
+                <a:solidFill>
+                  <a:srgbClr val="E6E6E6"/>
+                </a:solidFill>
+                <a:latin typeface="Red Hat Mono" pitchFamily="34" charset="0"/>
+                <a:ea typeface="Red Hat Mono" pitchFamily="34" charset="-122"/>
+                <a:cs typeface="Red Hat Mono" pitchFamily="34" charset="-120"/>
+              </a:rPr>
+              <a:t>    def filter(self, record):
+</a:t>
+            </a:r>
+            <a:pPr algn="l" indent="0" marL="0">
+              <a:lnSpc>
+                <a:spcPct val="110000"/>
+              </a:lnSpc>
+              <a:buNone/>
+            </a:pPr>
+            <a:r>
+              <a:rPr lang="en-US" sz="1100" dirty="0">
+                <a:solidFill>
+                  <a:srgbClr val="E6E6E6"/>
+                </a:solidFill>
+                <a:latin typeface="Red Hat Mono" pitchFamily="34" charset="0"/>
+                <a:ea typeface="Red Hat Mono" pitchFamily="34" charset="-122"/>
+                <a:cs typeface="Red Hat Mono" pitchFamily="34" charset="-120"/>
+              </a:rPr>
+              <a:t>        span = trace.get_current_span()
+</a:t>
+            </a:r>
+            <a:pPr algn="l" indent="0" marL="0">
+              <a:lnSpc>
+                <a:spcPct val="110000"/>
+              </a:lnSpc>
+              <a:buNone/>
+            </a:pPr>
+            <a:r>
+              <a:rPr lang="en-US" sz="1100" dirty="0">
+                <a:solidFill>
+                  <a:srgbClr val="E6E6E6"/>
+                </a:solidFill>
+                <a:latin typeface="Red Hat Mono" pitchFamily="34" charset="0"/>
+                <a:ea typeface="Red Hat Mono" pitchFamily="34" charset="-122"/>
+                <a:cs typeface="Red Hat Mono" pitchFamily="34" charset="-120"/>
+              </a:rPr>
+              <a:t>        ctx = span.get_span_context() if span else None
+</a:t>
+            </a:r>
+            <a:pPr algn="l" indent="0" marL="0">
+              <a:lnSpc>
+                <a:spcPct val="110000"/>
+              </a:lnSpc>
+              <a:buNone/>
+            </a:pPr>
+            <a:r>
+              <a:rPr lang="en-US" sz="1100" dirty="0">
+                <a:solidFill>
+                  <a:srgbClr val="E6E6E6"/>
+                </a:solidFill>
+                <a:latin typeface="Red Hat Mono" pitchFamily="34" charset="0"/>
+                <a:ea typeface="Red Hat Mono" pitchFamily="34" charset="-122"/>
+                <a:cs typeface="Red Hat Mono" pitchFamily="34" charset="-120"/>
+              </a:rPr>
+              <a:t>        if ctx and ctx.is_valid:
+</a:t>
+            </a:r>
+            <a:pPr algn="l" indent="0" marL="0">
+              <a:lnSpc>
+                <a:spcPct val="110000"/>
+              </a:lnSpc>
+              <a:buNone/>
+            </a:pPr>
+            <a:r>
+              <a:rPr lang="en-US" sz="1100" dirty="0">
+                <a:solidFill>
+                  <a:srgbClr val="E6E6E6"/>
+                </a:solidFill>
+                <a:latin typeface="Red Hat Mono" pitchFamily="34" charset="0"/>
+                <a:ea typeface="Red Hat Mono" pitchFamily="34" charset="-122"/>
+                <a:cs typeface="Red Hat Mono" pitchFamily="34" charset="-120"/>
+              </a:rPr>
+              <a:t>            record.trace_id = format(ctx.trace_id, "032x")
+</a:t>
+            </a:r>
+            <a:pPr algn="l" indent="0" marL="0">
+              <a:lnSpc>
+                <a:spcPct val="110000"/>
+              </a:lnSpc>
+              <a:buNone/>
+            </a:pPr>
+            <a:r>
+              <a:rPr lang="en-US" sz="1100" dirty="0">
+                <a:solidFill>
+                  <a:srgbClr val="E6E6E6"/>
+                </a:solidFill>
+                <a:latin typeface="Red Hat Mono" pitchFamily="34" charset="0"/>
+                <a:ea typeface="Red Hat Mono" pitchFamily="34" charset="-122"/>
+                <a:cs typeface="Red Hat Mono" pitchFamily="34" charset="-120"/>
+              </a:rPr>
+              <a:t>            record.span_id = format(ctx.span_id, "016x")
+</a:t>
+            </a:r>
+            <a:pPr algn="l" indent="0" marL="0">
+              <a:lnSpc>
+                <a:spcPct val="110000"/>
+              </a:lnSpc>
+              <a:buNone/>
+            </a:pPr>
+            <a:r>
+              <a:rPr lang="en-US" sz="1100" dirty="0">
+                <a:solidFill>
+                  <a:srgbClr val="E6E6E6"/>
+                </a:solidFill>
+                <a:latin typeface="Red Hat Mono" pitchFamily="34" charset="0"/>
+                <a:ea typeface="Red Hat Mono" pitchFamily="34" charset="-122"/>
+                <a:cs typeface="Red Hat Mono" pitchFamily="34" charset="-120"/>
+              </a:rPr>
+              <a:t>        else:
+</a:t>
+            </a:r>
+            <a:pPr algn="l" indent="0" marL="0">
+              <a:lnSpc>
+                <a:spcPct val="110000"/>
+              </a:lnSpc>
+              <a:buNone/>
+            </a:pPr>
+            <a:r>
+              <a:rPr lang="en-US" sz="1100" dirty="0">
+                <a:solidFill>
+                  <a:srgbClr val="E6E6E6"/>
+                </a:solidFill>
+                <a:latin typeface="Red Hat Mono" pitchFamily="34" charset="0"/>
+                <a:ea typeface="Red Hat Mono" pitchFamily="34" charset="-122"/>
+                <a:cs typeface="Red Hat Mono" pitchFamily="34" charset="-120"/>
+              </a:rPr>
+              <a:t>            record.trace_id = record.span_id = "-"
+</a:t>
+            </a:r>
+            <a:pPr algn="l" indent="0" marL="0">
+              <a:lnSpc>
+                <a:spcPct val="110000"/>
+              </a:lnSpc>
+              <a:buNone/>
+            </a:pPr>
+            <a:r>
+              <a:rPr lang="en-US" sz="1100" dirty="0">
+                <a:solidFill>
+                  <a:srgbClr val="E6E6E6"/>
+                </a:solidFill>
+                <a:latin typeface="Red Hat Mono" pitchFamily="34" charset="0"/>
+                <a:ea typeface="Red Hat Mono" pitchFamily="34" charset="-122"/>
+                <a:cs typeface="Red Hat Mono" pitchFamily="34" charset="-120"/>
+              </a:rPr>
+              <a:t>        return True   # a JsonFormatter then renders these as fields
+</a:t>
+            </a:r>
+            <a:endParaRPr lang="en-US" sz="1100" dirty="0"/>
+          </a:p>
+        </p:txBody>
+      </p:sp>
+      <p:sp>
+        <p:nvSpPr>
+          <p:cNvPr id="9" name="Text 6"/>
+          <p:cNvSpPr/>
+          <p:nvPr/>
+        </p:nvSpPr>
+        <p:spPr>
+          <a:xfrm>
+            <a:off x="566928" y="5943600"/>
+            <a:ext cx="11055096" cy="310896"/>
+          </a:xfrm>
+          <a:prstGeom prst="rect">
+            <a:avLst/>
+          </a:prstGeom>
+          <a:noFill/>
+          <a:ln/>
+        </p:spPr>
+        <p:txBody>
+          <a:bodyPr wrap="square" rtlCol="0" anchor="ctr"/>
+          <a:lstStyle/>
+          <a:p>
+            <a:pPr algn="ctr" indent="0" marL="0">
+              <a:buNone/>
+            </a:pPr>
+            <a:r>
+              <a:rPr lang="en-US" sz="1300" i="1" dirty="0">
+                <a:solidFill>
+                  <a:srgbClr val="5A5A5A"/>
                 </a:solidFill>
                 <a:latin typeface="Red Hat Text" pitchFamily="34" charset="0"/>
                 <a:ea typeface="Red Hat Text" pitchFamily="34" charset="-122"/>
                 <a:cs typeface="Red Hat Text" pitchFamily="34" charset="-120"/>
               </a:rPr>
-              <a:t>The review service uses the same start_as_current_span call for a different reason — not to cross a boundary, but to make one opaque POST /graphql legible.</a:t>
-            </a:r>
-            <a:endParaRPr lang="en-US" sz="1600" dirty="0"/>
-          </a:p>
-          <a:p>
-            <a:pPr algn="l" marL="342900" indent="-342900">
-              <a:lnSpc>
-                <a:spcPct val="115000"/>
-              </a:lnSpc>
-              <a:spcAft>
-                <a:spcPts val="600"/>
-              </a:spcAft>
-              <a:buSzPct val="100000"/>
-              <a:buChar char="●"/>
-            </a:pPr>
-            <a:r>
-              <a:rPr lang="en-US" sz="1600" dirty="0">
-                <a:solidFill>
-                  <a:srgbClr val="242424"/>
-                </a:solidFill>
-                <a:latin typeface="Red Hat Text" pitchFamily="34" charset="0"/>
-                <a:ea typeface="Red Hat Text" pitchFamily="34" charset="-122"/>
-                <a:cs typeface="Red Hat Text" pitchFamily="34" charset="-120"/>
-              </a:rPr>
-              <a:t>Each resolver opens a span (review.resolve_order, review.resolve_reviews), so a GraphQL query shows up as a resolver tree with its Postgres children — not a single span you can't see inside.</a:t>
-            </a:r>
-            <a:endParaRPr lang="en-US" sz="1600" dirty="0"/>
-          </a:p>
-          <a:p>
-            <a:pPr algn="l" marL="342900" indent="-342900">
-              <a:lnSpc>
-                <a:spcPct val="115000"/>
-              </a:lnSpc>
-              <a:spcAft>
-                <a:spcPts val="600"/>
-              </a:spcAft>
-              <a:buSzPct val="100000"/>
-              <a:buChar char="●"/>
-            </a:pPr>
-            <a:r>
-              <a:rPr lang="en-US" sz="1600" dirty="0">
-                <a:solidFill>
-                  <a:srgbClr val="242424"/>
-                </a:solidFill>
-                <a:latin typeface="Red Hat Text" pitchFamily="34" charset="0"/>
-                <a:ea typeface="Red Hat Text" pitchFamily="34" charset="-122"/>
-                <a:cs typeface="Red Hat Text" pitchFamily="34" charset="-120"/>
-              </a:rPr>
-              <a:t>Once you can open a span deliberately, you can give any custom work — resolvers, batch steps, scheduled jobs — the structure it deserves. That is the general lesson under the specific Kafka fix.</a:t>
-            </a:r>
-            <a:endParaRPr lang="en-US" sz="1600" dirty="0"/>
-          </a:p>
-        </p:txBody>
-      </p:sp>
-      <p:sp>
-        <p:nvSpPr>
-          <p:cNvPr id="7" name="Text 4"/>
-          <p:cNvSpPr/>
-          <p:nvPr/>
-        </p:nvSpPr>
-        <p:spPr>
-          <a:xfrm>
-            <a:off x="566928" y="5943600"/>
-            <a:ext cx="11055096" cy="310896"/>
-          </a:xfrm>
-          <a:prstGeom prst="rect">
-            <a:avLst/>
-          </a:prstGeom>
-          <a:noFill/>
-          <a:ln/>
-        </p:spPr>
-        <p:txBody>
-          <a:bodyPr wrap="square" rtlCol="0" anchor="ctr"/>
-          <a:lstStyle/>
-          <a:p>
-            <a:pPr algn="ctr" indent="0" marL="0">
-              <a:buNone/>
-            </a:pPr>
-            <a:r>
-              <a:rPr lang="en-US" sz="1300" i="1" dirty="0">
-                <a:solidFill>
-                  <a:srgbClr val="5A5A5A"/>
-                </a:solidFill>
-                <a:latin typeface="Red Hat Text" pitchFamily="34" charset="0"/>
-                <a:ea typeface="Red Hat Text" pitchFamily="34" charset="-122"/>
-                <a:cs typeface="Red Hat Text" pitchFamily="34" charset="-120"/>
-              </a:rPr>
-              <a:t>Run examples/05-spans-across-kafka and compare the trace to Demo 2: the consumers are now on it.</a:t>
+              <a:t>JSON + the trace_id on every record = a log in Loki links to its trace in Tempo, and back. The ids are the join key.</a:t>
             </a:r>
             <a:endParaRPr lang="en-US" sz="1300" dirty="0"/>
           </a:p>
@@ -10400,7 +10350,7 @@
                 <a:ea typeface="Overpass" pitchFamily="34" charset="-122"/>
                 <a:cs typeface="Overpass" pitchFamily="34" charset="-120"/>
               </a:rPr>
-              <a:t>THE THREE SIGNALS · HYBRID</a:t>
+              <a:t>THE THREE SIGNALS · CUSTOM SPANS</a:t>
             </a:r>
             <a:endParaRPr lang="en-US" sz="1200" dirty="0"/>
           </a:p>
@@ -10439,22 +10389,45 @@
                 <a:ea typeface="Overpass" pitchFamily="34" charset="-122"/>
                 <a:cs typeface="Overpass" pitchFamily="34" charset="-120"/>
               </a:rPr>
-              <a:t>Auto, custom, hybrid — and what each costs</a:t>
+              <a:t>Carrying the trace across the Kafka boundary</a:t>
             </a:r>
             <a:endParaRPr lang="en-US" sz="3000" dirty="0"/>
           </a:p>
         </p:txBody>
       </p:sp>
-      <p:sp>
-        <p:nvSpPr>
-          <p:cNvPr id="6" name="Text 3"/>
+      <p:pic>
+        <p:nvPicPr>
+          <p:cNvPr id="6" name="Image 1" descr="./png/fig-07-context-propagation.png">    </p:cNvPr>
+          <p:cNvPicPr>
+            <a:picLocks noChangeAspect="1"/>
+          </p:cNvPicPr>
+          <p:nvPr/>
+        </p:nvPicPr>
+        <p:blipFill>
+          <a:blip r:embed="rId2"/>
+          <a:srcRect l="0" r="0" t="0" b="0"/>
+          <a:stretch/>
+        </p:blipFill>
+        <p:spPr>
+          <a:xfrm>
+            <a:off x="1645920" y="1600200"/>
+            <a:ext cx="8906256" cy="4343400"/>
+          </a:xfrm>
+          <a:prstGeom prst="rect">
+            <a:avLst/>
+          </a:prstGeom>
+        </p:spPr>
+      </p:pic>
+      <p:sp>
+        <p:nvSpPr>
+          <p:cNvPr id="7" name="Text 3"/>
           <p:cNvSpPr/>
           <p:nvPr/>
         </p:nvSpPr>
         <p:spPr>
           <a:xfrm>
-            <a:off x="566928" y="1691640"/>
-            <a:ext cx="11055096" cy="4434840"/>
+            <a:off x="566928" y="5943600"/>
+            <a:ext cx="11055096" cy="310896"/>
           </a:xfrm>
           <a:prstGeom prst="rect">
             <a:avLst/>
@@ -10463,116 +10436,22 @@
           <a:ln/>
         </p:spPr>
         <p:txBody>
-          <a:bodyPr wrap="square" rtlCol="0" anchor="t"/>
-          <a:lstStyle/>
-          <a:p>
-            <a:pPr algn="l" marL="342900" indent="-342900">
-              <a:lnSpc>
-                <a:spcPct val="115000"/>
-              </a:lnSpc>
-              <a:spcAft>
-                <a:spcPts val="600"/>
-              </a:spcAft>
-              <a:buSzPct val="100000"/>
-              <a:buChar char="●"/>
-            </a:pPr>
-            <a:r>
-              <a:rPr lang="en-US" sz="1500" dirty="0">
-                <a:solidFill>
-                  <a:srgbClr val="242424"/>
+          <a:bodyPr wrap="square" rtlCol="0" anchor="ctr"/>
+          <a:lstStyle/>
+          <a:p>
+            <a:pPr algn="ctr" indent="0" marL="0">
+              <a:buNone/>
+            </a:pPr>
+            <a:r>
+              <a:rPr lang="en-US" sz="1300" i="1" dirty="0">
+                <a:solidFill>
+                  <a:srgbClr val="5A5A5A"/>
                 </a:solidFill>
                 <a:latin typeface="Red Hat Text" pitchFamily="34" charset="0"/>
                 <a:ea typeface="Red Hat Text" pitchFamily="34" charset="-122"/>
                 <a:cs typeface="Red Hat Text" pitchFamily="34" charset="-120"/>
               </a:rPr>
-              <a:t>Auto-instrumentation is breadth for free: every request, RPC, and query becomes a span with no code. The cost is volume you pay to export, store, and read, and blind spots — it sees nothing no instrumented library owns (the Kafka hop, a GraphQL resolver, the business meaning).</a:t>
-            </a:r>
-            <a:endParaRPr lang="en-US" sz="1500" dirty="0"/>
-          </a:p>
-          <a:p>
-            <a:pPr algn="l" marL="342900" indent="-342900">
-              <a:lnSpc>
-                <a:spcPct val="115000"/>
-              </a:lnSpc>
-              <a:spcAft>
-                <a:spcPts val="600"/>
-              </a:spcAft>
-              <a:buSzPct val="100000"/>
-              <a:buChar char="●"/>
-            </a:pPr>
-            <a:r>
-              <a:rPr lang="en-US" sz="1500" dirty="0">
-                <a:solidFill>
-                  <a:srgbClr val="242424"/>
-                </a:solidFill>
-                <a:latin typeface="Red Hat Text" pitchFamily="34" charset="0"/>
-                <a:ea typeface="Red Hat Text" pitchFamily="34" charset="-122"/>
-                <a:cs typeface="Red Hat Text" pitchFamily="34" charset="-120"/>
-              </a:rPr>
-              <a:t>Custom spans are depth where you decide: your names, your attributes (order_id, decline reason), wrapping work no instrumentor sees. The cost is code you maintain — so you spend it on the message boundary and the resolver, not on HTTP.</a:t>
-            </a:r>
-            <a:endParaRPr lang="en-US" sz="1500" dirty="0"/>
-          </a:p>
-          <a:p>
-            <a:pPr algn="l" marL="342900" indent="-342900">
-              <a:lnSpc>
-                <a:spcPct val="115000"/>
-              </a:lnSpc>
-              <a:spcAft>
-                <a:spcPts val="600"/>
-              </a:spcAft>
-              <a:buSzPct val="100000"/>
-              <a:buChar char="●"/>
-            </a:pPr>
-            <a:r>
-              <a:rPr lang="en-US" sz="1500" dirty="0">
-                <a:solidFill>
-                  <a:srgbClr val="242424"/>
-                </a:solidFill>
-                <a:latin typeface="Red Hat Text" pitchFamily="34" charset="0"/>
-                <a:ea typeface="Red Hat Text" pitchFamily="34" charset="-122"/>
-                <a:cs typeface="Red Hat Text" pitchFamily="34" charset="-120"/>
-              </a:rPr>
-              <a:t>Hybrid — auto everywhere, custom in the gaps — is the production default, and it is what this repo already runs. Two rules keep it cheap: instrument any one boundary once (two near-identical spans = double-instrumentation), and keep high-cardinality ids on spans, never on metric labels.</a:t>
-            </a:r>
-            <a:endParaRPr lang="en-US" sz="1500" dirty="0"/>
-          </a:p>
-        </p:txBody>
-      </p:sp>
-      <p:sp>
-        <p:nvSpPr>
-          <p:cNvPr id="7" name="Text 4"/>
-          <p:cNvSpPr/>
-          <p:nvPr/>
-        </p:nvSpPr>
-        <p:spPr>
-          <a:xfrm>
-            <a:off x="566928" y="5943600"/>
-            <a:ext cx="11055096" cy="310896"/>
-          </a:xfrm>
-          <a:prstGeom prst="rect">
-            <a:avLst/>
-          </a:prstGeom>
-          <a:noFill/>
-          <a:ln/>
-        </p:spPr>
-        <p:txBody>
-          <a:bodyPr wrap="square" rtlCol="0" anchor="ctr"/>
-          <a:lstStyle/>
-          <a:p>
-            <a:pPr algn="ctr" indent="0" marL="0">
-              <a:buNone/>
-            </a:pPr>
-            <a:r>
-              <a:rPr lang="en-US" sz="1300" i="1" dirty="0">
-                <a:solidFill>
-                  <a:srgbClr val="5A5A5A"/>
-                </a:solidFill>
-                <a:latin typeface="Red Hat Text" pitchFamily="34" charset="0"/>
-                <a:ea typeface="Red Hat Text" pitchFamily="34" charset="-122"/>
-                <a:cs typeface="Red Hat Text" pitchFamily="34" charset="-120"/>
-              </a:rPr>
-              <a:t>Demo 6 shows both layers in one trace; compare it to Demo 2 with the custom layer off.</a:t>
+              <a:t>Figure 7.1 — gRPC propagates context for you; across Kafka you inject it into the message headers and extract it in the consumer.</a:t>
             </a:r>
             <a:endParaRPr lang="en-US" sz="1300" dirty="0"/>
           </a:p>
@@ -10959,7 +10838,7 @@
                 <a:ea typeface="Overpass" pitchFamily="34" charset="-122"/>
                 <a:cs typeface="Overpass" pitchFamily="34" charset="-120"/>
               </a:rPr>
-              <a:t>THE THREE SIGNALS · CORRELATED VIEW</a:t>
+              <a:t>THE THREE SIGNALS · CUSTOM SPANS</a:t>
             </a:r>
             <a:endParaRPr lang="en-US" sz="1200" dirty="0"/>
           </a:p>
@@ -10974,7 +10853,7 @@
         <p:spPr>
           <a:xfrm>
             <a:off x="566928" y="676656"/>
-            <a:ext cx="11055096" cy="1005840"/>
+            <a:ext cx="7223760" cy="1005840"/>
           </a:xfrm>
           <a:prstGeom prst="rect">
             <a:avLst/>
@@ -10998,38 +10877,284 @@
                 <a:ea typeface="Overpass" pitchFamily="34" charset="-122"/>
                 <a:cs typeface="Overpass" pitchFamily="34" charset="-120"/>
               </a:rPr>
-              <a:t>Read one request across all three signals</a:t>
+              <a:t>Inject on publish, extract on consume</a:t>
             </a:r>
             <a:endParaRPr lang="en-US" sz="3000" dirty="0"/>
           </a:p>
         </p:txBody>
       </p:sp>
-      <p:pic>
-        <p:nvPicPr>
-          <p:cNvPr id="6" name="Image 1" descr="./png/fig-11-correlation-graph.png">    </p:cNvPr>
-          <p:cNvPicPr>
-            <a:picLocks noChangeAspect="1"/>
-          </p:cNvPicPr>
-          <p:nvPr/>
-        </p:nvPicPr>
-        <p:blipFill>
-          <a:blip r:embed="rId2"/>
-          <a:srcRect l="0" r="0" t="0" b="0"/>
-          <a:stretch/>
-        </p:blipFill>
-        <p:spPr>
-          <a:xfrm>
-            <a:off x="1645920" y="1600200"/>
-            <a:ext cx="8906256" cy="4343400"/>
-          </a:xfrm>
-          <a:prstGeom prst="rect">
-            <a:avLst/>
-          </a:prstGeom>
-        </p:spPr>
-      </p:pic>
-      <p:sp>
-        <p:nvSpPr>
-          <p:cNvPr id="7" name="Text 3"/>
+      <p:sp>
+        <p:nvSpPr>
+          <p:cNvPr id="6" name="Text 3"/>
+          <p:cNvSpPr/>
+          <p:nvPr/>
+        </p:nvSpPr>
+        <p:spPr>
+          <a:xfrm>
+            <a:off x="7882128" y="969264"/>
+            <a:ext cx="3739896" cy="274320"/>
+          </a:xfrm>
+          <a:prstGeom prst="rect">
+            <a:avLst/>
+          </a:prstGeom>
+          <a:noFill/>
+          <a:ln/>
+        </p:spPr>
+        <p:txBody>
+          <a:bodyPr wrap="square" rtlCol="0" anchor="ctr"/>
+          <a:lstStyle/>
+          <a:p>
+            <a:pPr algn="r" indent="0" marL="0">
+              <a:buNone/>
+            </a:pPr>
+            <a:r>
+              <a:rPr lang="en-US" sz="1100" b="1" spc="200" kern="0" dirty="0">
+                <a:solidFill>
+                  <a:srgbClr val="5A5A5A"/>
+                </a:solidFill>
+                <a:latin typeface="Red Hat Mono" pitchFamily="34" charset="0"/>
+                <a:ea typeface="Red Hat Mono" pitchFamily="34" charset="-122"/>
+                <a:cs typeface="Red Hat Mono" pitchFamily="34" charset="-120"/>
+              </a:rPr>
+              <a:t>python · obs.kafka_propagation</a:t>
+            </a:r>
+            <a:endParaRPr lang="en-US" sz="1100" dirty="0"/>
+          </a:p>
+        </p:txBody>
+      </p:sp>
+      <p:sp>
+        <p:nvSpPr>
+          <p:cNvPr id="7" name="Shape 4"/>
+          <p:cNvSpPr/>
+          <p:nvPr/>
+        </p:nvSpPr>
+        <p:spPr>
+          <a:xfrm>
+            <a:off x="566928" y="1691640"/>
+            <a:ext cx="11055096" cy="4251960"/>
+          </a:xfrm>
+          <a:prstGeom prst="rect">
+            <a:avLst/>
+          </a:prstGeom>
+          <a:solidFill>
+            <a:srgbClr val="151515"/>
+          </a:solidFill>
+          <a:ln w="12700">
+            <a:solidFill>
+              <a:srgbClr val="151515"/>
+            </a:solidFill>
+            <a:prstDash val="solid"/>
+          </a:ln>
+        </p:spPr>
+      </p:sp>
+      <p:sp>
+        <p:nvSpPr>
+          <p:cNvPr id="8" name="Text 5"/>
+          <p:cNvSpPr/>
+          <p:nvPr/>
+        </p:nvSpPr>
+        <p:spPr>
+          <a:xfrm>
+            <a:off x="749808" y="1783080"/>
+            <a:ext cx="10689336" cy="4069080"/>
+          </a:xfrm>
+          <a:prstGeom prst="rect">
+            <a:avLst/>
+          </a:prstGeom>
+          <a:noFill/>
+          <a:ln/>
+        </p:spPr>
+        <p:txBody>
+          <a:bodyPr wrap="square" rtlCol="0" anchor="t"/>
+          <a:lstStyle/>
+          <a:p>
+            <a:pPr algn="l" indent="0" marL="0">
+              <a:lnSpc>
+                <a:spcPct val="110000"/>
+              </a:lnSpc>
+              <a:buNone/>
+            </a:pPr>
+            <a:r>
+              <a:rPr lang="en-US" sz="1100" dirty="0">
+                <a:solidFill>
+                  <a:srgbClr val="8FB98F"/>
+                </a:solidFill>
+                <a:latin typeface="Red Hat Mono" pitchFamily="34" charset="0"/>
+                <a:ea typeface="Red Hat Mono" pitchFamily="34" charset="-122"/>
+                <a:cs typeface="Red Hat Mono" pitchFamily="34" charset="-120"/>
+              </a:rPr>
+              <a:t># producer side — inject the active context into Kafka headers
+</a:t>
+            </a:r>
+            <a:pPr algn="l" indent="0" marL="0">
+              <a:lnSpc>
+                <a:spcPct val="110000"/>
+              </a:lnSpc>
+              <a:buNone/>
+            </a:pPr>
+            <a:r>
+              <a:rPr lang="en-US" sz="1100" dirty="0">
+                <a:solidFill>
+                  <a:srgbClr val="E6E6E6"/>
+                </a:solidFill>
+                <a:latin typeface="Red Hat Mono" pitchFamily="34" charset="0"/>
+                <a:ea typeface="Red Hat Mono" pitchFamily="34" charset="-122"/>
+                <a:cs typeface="Red Hat Mono" pitchFamily="34" charset="-120"/>
+              </a:rPr>
+              <a:t>def inject_headers(existing=None):
+</a:t>
+            </a:r>
+            <a:pPr algn="l" indent="0" marL="0">
+              <a:lnSpc>
+                <a:spcPct val="110000"/>
+              </a:lnSpc>
+              <a:buNone/>
+            </a:pPr>
+            <a:r>
+              <a:rPr lang="en-US" sz="1100" dirty="0">
+                <a:solidFill>
+                  <a:srgbClr val="E6E6E6"/>
+                </a:solidFill>
+                <a:latin typeface="Red Hat Mono" pitchFamily="34" charset="0"/>
+                <a:ea typeface="Red Hat Mono" pitchFamily="34" charset="-122"/>
+                <a:cs typeface="Red Hat Mono" pitchFamily="34" charset="-120"/>
+              </a:rPr>
+              <a:t>    carrier = {}; propagate.inject(carrier)   # writes 'traceparent'
+</a:t>
+            </a:r>
+            <a:pPr algn="l" indent="0" marL="0">
+              <a:lnSpc>
+                <a:spcPct val="110000"/>
+              </a:lnSpc>
+              <a:buNone/>
+            </a:pPr>
+            <a:r>
+              <a:rPr lang="en-US" sz="1100" dirty="0">
+                <a:solidFill>
+                  <a:srgbClr val="E6E6E6"/>
+                </a:solidFill>
+                <a:latin typeface="Red Hat Mono" pitchFamily="34" charset="0"/>
+                <a:ea typeface="Red Hat Mono" pitchFamily="34" charset="-122"/>
+                <a:cs typeface="Red Hat Mono" pitchFamily="34" charset="-120"/>
+              </a:rPr>
+              <a:t>    return [(k, v.encode()) for k, v in carrier.items()]
+</a:t>
+            </a:r>
+            <a:pPr algn="l" indent="0" marL="0">
+              <a:lnSpc>
+                <a:spcPct val="110000"/>
+              </a:lnSpc>
+              <a:buNone/>
+            </a:pPr>
+            <a:r>
+              <a:rPr lang="en-US" sz="1100" dirty="0">
+                <a:solidFill>
+                  <a:srgbClr val="E6E6E6"/>
+                </a:solidFill>
+                <a:latin typeface="Red Hat Mono" pitchFamily="34" charset="0"/>
+                <a:ea typeface="Red Hat Mono" pitchFamily="34" charset="-122"/>
+                <a:cs typeface="Red Hat Mono" pitchFamily="34" charset="-120"/>
+              </a:rPr>
+              <a:t>
+</a:t>
+            </a:r>
+            <a:pPr algn="l" indent="0" marL="0">
+              <a:lnSpc>
+                <a:spcPct val="110000"/>
+              </a:lnSpc>
+              <a:buNone/>
+            </a:pPr>
+            <a:r>
+              <a:rPr lang="en-US" sz="1100" dirty="0">
+                <a:solidFill>
+                  <a:srgbClr val="8FB98F"/>
+                </a:solidFill>
+                <a:latin typeface="Red Hat Mono" pitchFamily="34" charset="0"/>
+                <a:ea typeface="Red Hat Mono" pitchFamily="34" charset="-122"/>
+                <a:cs typeface="Red Hat Mono" pitchFamily="34" charset="-120"/>
+              </a:rPr>
+              <a:t># consumer side — rebuild the context, then parent the span to it
+</a:t>
+            </a:r>
+            <a:pPr algn="l" indent="0" marL="0">
+              <a:lnSpc>
+                <a:spcPct val="110000"/>
+              </a:lnSpc>
+              <a:buNone/>
+            </a:pPr>
+            <a:r>
+              <a:rPr lang="en-US" sz="1100" dirty="0">
+                <a:solidFill>
+                  <a:srgbClr val="E6E6E6"/>
+                </a:solidFill>
+                <a:latin typeface="Red Hat Mono" pitchFamily="34" charset="0"/>
+                <a:ea typeface="Red Hat Mono" pitchFamily="34" charset="-122"/>
+                <a:cs typeface="Red Hat Mono" pitchFamily="34" charset="-120"/>
+              </a:rPr>
+              <a:t>ctx = extract_context(msg.headers)
+</a:t>
+            </a:r>
+            <a:pPr algn="l" indent="0" marL="0">
+              <a:lnSpc>
+                <a:spcPct val="110000"/>
+              </a:lnSpc>
+              <a:buNone/>
+            </a:pPr>
+            <a:r>
+              <a:rPr lang="en-US" sz="1100" dirty="0">
+                <a:solidFill>
+                  <a:srgbClr val="E6E6E6"/>
+                </a:solidFill>
+                <a:latin typeface="Red Hat Mono" pitchFamily="34" charset="0"/>
+                <a:ea typeface="Red Hat Mono" pitchFamily="34" charset="-122"/>
+                <a:cs typeface="Red Hat Mono" pitchFamily="34" charset="-120"/>
+              </a:rPr>
+              <a:t>with otel.tracer().start_as_current_span(
+</a:t>
+            </a:r>
+            <a:pPr algn="l" indent="0" marL="0">
+              <a:lnSpc>
+                <a:spcPct val="110000"/>
+              </a:lnSpc>
+              <a:buNone/>
+            </a:pPr>
+            <a:r>
+              <a:rPr lang="en-US" sz="1100" dirty="0">
+                <a:solidFill>
+                  <a:srgbClr val="E6E6E6"/>
+                </a:solidFill>
+                <a:latin typeface="Red Hat Mono" pitchFamily="34" charset="0"/>
+                <a:ea typeface="Red Hat Mono" pitchFamily="34" charset="-122"/>
+                <a:cs typeface="Red Hat Mono" pitchFamily="34" charset="-120"/>
+              </a:rPr>
+              <a:t>        "shipping.handle_order_placed", context=ctx):
+</a:t>
+            </a:r>
+            <a:pPr algn="l" indent="0" marL="0">
+              <a:lnSpc>
+                <a:spcPct val="110000"/>
+              </a:lnSpc>
+              <a:buNone/>
+            </a:pPr>
+            <a:r>
+              <a:rPr lang="en-US" sz="1100" dirty="0">
+                <a:solidFill>
+                  <a:srgbClr val="E6E6E6"/>
+                </a:solidFill>
+                <a:latin typeface="Red Hat Mono" pitchFamily="34" charset="0"/>
+                <a:ea typeface="Red Hat Mono" pitchFamily="34" charset="-122"/>
+                <a:cs typeface="Red Hat Mono" pitchFamily="34" charset="-120"/>
+              </a:rPr>
+              <a:t>    await create_shipment(order)   # this span is now a child of the order
+</a:t>
+            </a:r>
+            <a:endParaRPr lang="en-US" sz="1100" dirty="0"/>
+          </a:p>
+        </p:txBody>
+      </p:sp>
+      <p:sp>
+        <p:nvSpPr>
+          <p:cNvPr id="9" name="Text 6"/>
           <p:cNvSpPr/>
           <p:nvPr/>
         </p:nvSpPr>
@@ -11060,7 +11185,7 @@
                 <a:ea typeface="Red Hat Text" pitchFamily="34" charset="-122"/>
                 <a:cs typeface="Red Hat Text" pitchFamily="34" charset="-120"/>
               </a:rPr>
-              <a:t>Figure 9.1 — One trace_id links a trace in Tempo to its logs in Loki and its metrics in Mimir; the pivots are one click.</a:t>
+              <a:t>context=ctx is the entire trick: without it the consumer starts a new trace; with it, it joins the order's.</a:t>
             </a:r>
             <a:endParaRPr lang="en-US" sz="1300" dirty="0"/>
           </a:p>
@@ -11125,6 +11250,832 @@
                 <a:cs typeface="Red Hat Text" pitchFamily="34" charset="-120"/>
               </a:rPr>
               <a:t>31</a:t>
+            </a:r>
+            <a:endParaRPr lang="en-US" sz="1000" dirty="0"/>
+          </a:p>
+        </p:txBody>
+      </p:sp>
+      <p:pic>
+        <p:nvPicPr>
+          <p:cNvPr id="3" name="Image 0" descr="./assets/logo-candidate-2.png">    </p:cNvPr>
+          <p:cNvPicPr>
+            <a:picLocks noChangeAspect="1"/>
+          </p:cNvPicPr>
+          <p:nvPr/>
+        </p:nvPicPr>
+        <p:blipFill>
+          <a:blip r:embed="rId1"/>
+          <a:stretch>
+            <a:fillRect/>
+          </a:stretch>
+        </p:blipFill>
+        <p:spPr>
+          <a:xfrm>
+            <a:off x="10561320" y="6355080"/>
+            <a:ext cx="1033272" cy="246888"/>
+          </a:xfrm>
+          <a:prstGeom prst="rect">
+            <a:avLst/>
+          </a:prstGeom>
+        </p:spPr>
+      </p:pic>
+      <p:sp>
+        <p:nvSpPr>
+          <p:cNvPr id="4" name="Text 1"/>
+          <p:cNvSpPr/>
+          <p:nvPr/>
+        </p:nvSpPr>
+        <p:spPr>
+          <a:xfrm>
+            <a:off x="566928" y="384048"/>
+            <a:ext cx="11055096" cy="292608"/>
+          </a:xfrm>
+          <a:prstGeom prst="rect">
+            <a:avLst/>
+          </a:prstGeom>
+          <a:noFill/>
+          <a:ln/>
+        </p:spPr>
+        <p:txBody>
+          <a:bodyPr wrap="square" rtlCol="0" anchor="ctr"/>
+          <a:lstStyle/>
+          <a:p>
+            <a:pPr algn="l" indent="0" marL="0">
+              <a:buNone/>
+            </a:pPr>
+            <a:r>
+              <a:rPr lang="en-US" sz="1200" b="1" spc="400" kern="0" dirty="0">
+                <a:solidFill>
+                  <a:srgbClr val="EE0000"/>
+                </a:solidFill>
+                <a:latin typeface="Overpass" pitchFamily="34" charset="0"/>
+                <a:ea typeface="Overpass" pitchFamily="34" charset="-122"/>
+                <a:cs typeface="Overpass" pitchFamily="34" charset="-120"/>
+              </a:rPr>
+              <a:t>THE THREE SIGNALS · CUSTOM SPANS</a:t>
+            </a:r>
+            <a:endParaRPr lang="en-US" sz="1200" dirty="0"/>
+          </a:p>
+        </p:txBody>
+      </p:sp>
+      <p:sp>
+        <p:nvSpPr>
+          <p:cNvPr id="5" name="Text 2"/>
+          <p:cNvSpPr/>
+          <p:nvPr/>
+        </p:nvSpPr>
+        <p:spPr>
+          <a:xfrm>
+            <a:off x="566928" y="676656"/>
+            <a:ext cx="11055096" cy="1005840"/>
+          </a:xfrm>
+          <a:prstGeom prst="rect">
+            <a:avLst/>
+          </a:prstGeom>
+          <a:noFill/>
+          <a:ln/>
+        </p:spPr>
+        <p:txBody>
+          <a:bodyPr wrap="square" rtlCol="0" anchor="t"/>
+          <a:lstStyle/>
+          <a:p>
+            <a:pPr algn="l" indent="0" marL="0">
+              <a:buNone/>
+            </a:pPr>
+            <a:r>
+              <a:rPr lang="en-US" sz="3000" b="1" dirty="0">
+                <a:solidFill>
+                  <a:srgbClr val="151515"/>
+                </a:solidFill>
+                <a:latin typeface="Overpass" pitchFamily="34" charset="0"/>
+                <a:ea typeface="Overpass" pitchFamily="34" charset="-122"/>
+                <a:cs typeface="Overpass" pitchFamily="34" charset="-120"/>
+              </a:rPr>
+              <a:t>Same API, a second use: GraphQL shape</a:t>
+            </a:r>
+            <a:endParaRPr lang="en-US" sz="3000" dirty="0"/>
+          </a:p>
+        </p:txBody>
+      </p:sp>
+      <p:sp>
+        <p:nvSpPr>
+          <p:cNvPr id="6" name="Text 3"/>
+          <p:cNvSpPr/>
+          <p:nvPr/>
+        </p:nvSpPr>
+        <p:spPr>
+          <a:xfrm>
+            <a:off x="566928" y="1691640"/>
+            <a:ext cx="11055096" cy="4434840"/>
+          </a:xfrm>
+          <a:prstGeom prst="rect">
+            <a:avLst/>
+          </a:prstGeom>
+          <a:noFill/>
+          <a:ln/>
+        </p:spPr>
+        <p:txBody>
+          <a:bodyPr wrap="square" rtlCol="0" anchor="t"/>
+          <a:lstStyle/>
+          <a:p>
+            <a:pPr algn="l" marL="342900" indent="-342900">
+              <a:lnSpc>
+                <a:spcPct val="115000"/>
+              </a:lnSpc>
+              <a:spcAft>
+                <a:spcPts val="600"/>
+              </a:spcAft>
+              <a:buSzPct val="100000"/>
+              <a:buChar char="●"/>
+            </a:pPr>
+            <a:r>
+              <a:rPr lang="en-US" sz="1600" dirty="0">
+                <a:solidFill>
+                  <a:srgbClr val="242424"/>
+                </a:solidFill>
+                <a:latin typeface="Red Hat Text" pitchFamily="34" charset="0"/>
+                <a:ea typeface="Red Hat Text" pitchFamily="34" charset="-122"/>
+                <a:cs typeface="Red Hat Text" pitchFamily="34" charset="-120"/>
+              </a:rPr>
+              <a:t>The review service uses the same start_as_current_span call for a different reason — not to cross a boundary, but to make one opaque POST /graphql legible.</a:t>
+            </a:r>
+            <a:endParaRPr lang="en-US" sz="1600" dirty="0"/>
+          </a:p>
+          <a:p>
+            <a:pPr algn="l" marL="342900" indent="-342900">
+              <a:lnSpc>
+                <a:spcPct val="115000"/>
+              </a:lnSpc>
+              <a:spcAft>
+                <a:spcPts val="600"/>
+              </a:spcAft>
+              <a:buSzPct val="100000"/>
+              <a:buChar char="●"/>
+            </a:pPr>
+            <a:r>
+              <a:rPr lang="en-US" sz="1600" dirty="0">
+                <a:solidFill>
+                  <a:srgbClr val="242424"/>
+                </a:solidFill>
+                <a:latin typeface="Red Hat Text" pitchFamily="34" charset="0"/>
+                <a:ea typeface="Red Hat Text" pitchFamily="34" charset="-122"/>
+                <a:cs typeface="Red Hat Text" pitchFamily="34" charset="-120"/>
+              </a:rPr>
+              <a:t>Each resolver opens a span (review.resolve_order, review.resolve_reviews), so a GraphQL query shows up as a resolver tree with its Postgres children — not a single span you can't see inside.</a:t>
+            </a:r>
+            <a:endParaRPr lang="en-US" sz="1600" dirty="0"/>
+          </a:p>
+          <a:p>
+            <a:pPr algn="l" marL="342900" indent="-342900">
+              <a:lnSpc>
+                <a:spcPct val="115000"/>
+              </a:lnSpc>
+              <a:spcAft>
+                <a:spcPts val="600"/>
+              </a:spcAft>
+              <a:buSzPct val="100000"/>
+              <a:buChar char="●"/>
+            </a:pPr>
+            <a:r>
+              <a:rPr lang="en-US" sz="1600" dirty="0">
+                <a:solidFill>
+                  <a:srgbClr val="242424"/>
+                </a:solidFill>
+                <a:latin typeface="Red Hat Text" pitchFamily="34" charset="0"/>
+                <a:ea typeface="Red Hat Text" pitchFamily="34" charset="-122"/>
+                <a:cs typeface="Red Hat Text" pitchFamily="34" charset="-120"/>
+              </a:rPr>
+              <a:t>Once you can open a span deliberately, you can give any custom work — resolvers, batch steps, scheduled jobs — the structure it deserves. That is the general lesson under the specific Kafka fix.</a:t>
+            </a:r>
+            <a:endParaRPr lang="en-US" sz="1600" dirty="0"/>
+          </a:p>
+        </p:txBody>
+      </p:sp>
+      <p:sp>
+        <p:nvSpPr>
+          <p:cNvPr id="7" name="Text 4"/>
+          <p:cNvSpPr/>
+          <p:nvPr/>
+        </p:nvSpPr>
+        <p:spPr>
+          <a:xfrm>
+            <a:off x="566928" y="5943600"/>
+            <a:ext cx="11055096" cy="310896"/>
+          </a:xfrm>
+          <a:prstGeom prst="rect">
+            <a:avLst/>
+          </a:prstGeom>
+          <a:noFill/>
+          <a:ln/>
+        </p:spPr>
+        <p:txBody>
+          <a:bodyPr wrap="square" rtlCol="0" anchor="ctr"/>
+          <a:lstStyle/>
+          <a:p>
+            <a:pPr algn="ctr" indent="0" marL="0">
+              <a:buNone/>
+            </a:pPr>
+            <a:r>
+              <a:rPr lang="en-US" sz="1300" i="1" dirty="0">
+                <a:solidFill>
+                  <a:srgbClr val="5A5A5A"/>
+                </a:solidFill>
+                <a:latin typeface="Red Hat Text" pitchFamily="34" charset="0"/>
+                <a:ea typeface="Red Hat Text" pitchFamily="34" charset="-122"/>
+                <a:cs typeface="Red Hat Text" pitchFamily="34" charset="-120"/>
+              </a:rPr>
+              <a:t>Run examples/05-spans-across-kafka and compare the trace to Demo 2: the consumers are now on it.</a:t>
+            </a:r>
+            <a:endParaRPr lang="en-US" sz="1300" dirty="0"/>
+          </a:p>
+        </p:txBody>
+      </p:sp>
+    </p:spTree>
+  </p:cSld>
+  <p:clrMapOvr>
+    <a:masterClrMapping/>
+  </p:clrMapOvr>
+</p:sld>
+</file>
+
+<file path=ppt/slides/slide32.xml><?xml version="1.0" encoding="utf-8"?>
+<p:sld xmlns:a="http://schemas.openxmlformats.org/drawingml/2006/main" xmlns:r="http://schemas.openxmlformats.org/officeDocument/2006/relationships" xmlns:p="http://schemas.openxmlformats.org/presentationml/2006/main">
+  <p:cSld name="Slide 32">
+    <p:spTree>
+      <p:nvGrpSpPr>
+        <p:cNvPr id="1" name=""/>
+        <p:cNvGrpSpPr/>
+        <p:nvPr/>
+      </p:nvGrpSpPr>
+      <p:grpSpPr>
+        <a:xfrm>
+          <a:off x="0" y="0"/>
+          <a:ext cx="0" cy="0"/>
+          <a:chOff x="0" y="0"/>
+          <a:chExt cx="0" cy="0"/>
+        </a:xfrm>
+      </p:grpSpPr>
+      <p:sp>
+        <p:nvSpPr>
+          <p:cNvPr id="2" name="Text 0"/>
+          <p:cNvSpPr/>
+          <p:nvPr/>
+        </p:nvSpPr>
+        <p:spPr>
+          <a:xfrm>
+            <a:off x="566928" y="6364224"/>
+            <a:ext cx="914400" cy="274320"/>
+          </a:xfrm>
+          <a:prstGeom prst="rect">
+            <a:avLst/>
+          </a:prstGeom>
+          <a:noFill/>
+          <a:ln/>
+        </p:spPr>
+        <p:txBody>
+          <a:bodyPr wrap="square" rtlCol="0" anchor="ctr"/>
+          <a:lstStyle/>
+          <a:p>
+            <a:pPr algn="l" indent="0" marL="0">
+              <a:buNone/>
+            </a:pPr>
+            <a:r>
+              <a:rPr lang="en-US" sz="1000" dirty="0">
+                <a:solidFill>
+                  <a:srgbClr val="8A8A8A"/>
+                </a:solidFill>
+                <a:latin typeface="Red Hat Text" pitchFamily="34" charset="0"/>
+                <a:ea typeface="Red Hat Text" pitchFamily="34" charset="-122"/>
+                <a:cs typeface="Red Hat Text" pitchFamily="34" charset="-120"/>
+              </a:rPr>
+              <a:t>32</a:t>
+            </a:r>
+            <a:endParaRPr lang="en-US" sz="1000" dirty="0"/>
+          </a:p>
+        </p:txBody>
+      </p:sp>
+      <p:pic>
+        <p:nvPicPr>
+          <p:cNvPr id="3" name="Image 0" descr="./assets/logo-candidate-2.png">    </p:cNvPr>
+          <p:cNvPicPr>
+            <a:picLocks noChangeAspect="1"/>
+          </p:cNvPicPr>
+          <p:nvPr/>
+        </p:nvPicPr>
+        <p:blipFill>
+          <a:blip r:embed="rId1"/>
+          <a:stretch>
+            <a:fillRect/>
+          </a:stretch>
+        </p:blipFill>
+        <p:spPr>
+          <a:xfrm>
+            <a:off x="10561320" y="6355080"/>
+            <a:ext cx="1033272" cy="246888"/>
+          </a:xfrm>
+          <a:prstGeom prst="rect">
+            <a:avLst/>
+          </a:prstGeom>
+        </p:spPr>
+      </p:pic>
+      <p:sp>
+        <p:nvSpPr>
+          <p:cNvPr id="4" name="Text 1"/>
+          <p:cNvSpPr/>
+          <p:nvPr/>
+        </p:nvSpPr>
+        <p:spPr>
+          <a:xfrm>
+            <a:off x="566928" y="384048"/>
+            <a:ext cx="11055096" cy="292608"/>
+          </a:xfrm>
+          <a:prstGeom prst="rect">
+            <a:avLst/>
+          </a:prstGeom>
+          <a:noFill/>
+          <a:ln/>
+        </p:spPr>
+        <p:txBody>
+          <a:bodyPr wrap="square" rtlCol="0" anchor="ctr"/>
+          <a:lstStyle/>
+          <a:p>
+            <a:pPr algn="l" indent="0" marL="0">
+              <a:buNone/>
+            </a:pPr>
+            <a:r>
+              <a:rPr lang="en-US" sz="1200" b="1" spc="400" kern="0" dirty="0">
+                <a:solidFill>
+                  <a:srgbClr val="EE0000"/>
+                </a:solidFill>
+                <a:latin typeface="Overpass" pitchFamily="34" charset="0"/>
+                <a:ea typeface="Overpass" pitchFamily="34" charset="-122"/>
+                <a:cs typeface="Overpass" pitchFamily="34" charset="-120"/>
+              </a:rPr>
+              <a:t>THE THREE SIGNALS · HYBRID</a:t>
+            </a:r>
+            <a:endParaRPr lang="en-US" sz="1200" dirty="0"/>
+          </a:p>
+        </p:txBody>
+      </p:sp>
+      <p:sp>
+        <p:nvSpPr>
+          <p:cNvPr id="5" name="Text 2"/>
+          <p:cNvSpPr/>
+          <p:nvPr/>
+        </p:nvSpPr>
+        <p:spPr>
+          <a:xfrm>
+            <a:off x="566928" y="676656"/>
+            <a:ext cx="11055096" cy="1005840"/>
+          </a:xfrm>
+          <a:prstGeom prst="rect">
+            <a:avLst/>
+          </a:prstGeom>
+          <a:noFill/>
+          <a:ln/>
+        </p:spPr>
+        <p:txBody>
+          <a:bodyPr wrap="square" rtlCol="0" anchor="t"/>
+          <a:lstStyle/>
+          <a:p>
+            <a:pPr algn="l" indent="0" marL="0">
+              <a:buNone/>
+            </a:pPr>
+            <a:r>
+              <a:rPr lang="en-US" sz="3000" b="1" dirty="0">
+                <a:solidFill>
+                  <a:srgbClr val="151515"/>
+                </a:solidFill>
+                <a:latin typeface="Overpass" pitchFamily="34" charset="0"/>
+                <a:ea typeface="Overpass" pitchFamily="34" charset="-122"/>
+                <a:cs typeface="Overpass" pitchFamily="34" charset="-120"/>
+              </a:rPr>
+              <a:t>Auto, custom, hybrid — and what each costs</a:t>
+            </a:r>
+            <a:endParaRPr lang="en-US" sz="3000" dirty="0"/>
+          </a:p>
+        </p:txBody>
+      </p:sp>
+      <p:sp>
+        <p:nvSpPr>
+          <p:cNvPr id="6" name="Text 3"/>
+          <p:cNvSpPr/>
+          <p:nvPr/>
+        </p:nvSpPr>
+        <p:spPr>
+          <a:xfrm>
+            <a:off x="566928" y="1691640"/>
+            <a:ext cx="11055096" cy="4434840"/>
+          </a:xfrm>
+          <a:prstGeom prst="rect">
+            <a:avLst/>
+          </a:prstGeom>
+          <a:noFill/>
+          <a:ln/>
+        </p:spPr>
+        <p:txBody>
+          <a:bodyPr wrap="square" rtlCol="0" anchor="t"/>
+          <a:lstStyle/>
+          <a:p>
+            <a:pPr algn="l" marL="342900" indent="-342900">
+              <a:lnSpc>
+                <a:spcPct val="115000"/>
+              </a:lnSpc>
+              <a:spcAft>
+                <a:spcPts val="600"/>
+              </a:spcAft>
+              <a:buSzPct val="100000"/>
+              <a:buChar char="●"/>
+            </a:pPr>
+            <a:r>
+              <a:rPr lang="en-US" sz="1500" dirty="0">
+                <a:solidFill>
+                  <a:srgbClr val="242424"/>
+                </a:solidFill>
+                <a:latin typeface="Red Hat Text" pitchFamily="34" charset="0"/>
+                <a:ea typeface="Red Hat Text" pitchFamily="34" charset="-122"/>
+                <a:cs typeface="Red Hat Text" pitchFamily="34" charset="-120"/>
+              </a:rPr>
+              <a:t>Auto-instrumentation is breadth for free: every request, RPC, and query becomes a span with no code. The cost is volume you pay to export, store, and read, and blind spots — it sees nothing no instrumented library owns (the Kafka hop, a GraphQL resolver, the business meaning).</a:t>
+            </a:r>
+            <a:endParaRPr lang="en-US" sz="1500" dirty="0"/>
+          </a:p>
+          <a:p>
+            <a:pPr algn="l" marL="342900" indent="-342900">
+              <a:lnSpc>
+                <a:spcPct val="115000"/>
+              </a:lnSpc>
+              <a:spcAft>
+                <a:spcPts val="600"/>
+              </a:spcAft>
+              <a:buSzPct val="100000"/>
+              <a:buChar char="●"/>
+            </a:pPr>
+            <a:r>
+              <a:rPr lang="en-US" sz="1500" dirty="0">
+                <a:solidFill>
+                  <a:srgbClr val="242424"/>
+                </a:solidFill>
+                <a:latin typeface="Red Hat Text" pitchFamily="34" charset="0"/>
+                <a:ea typeface="Red Hat Text" pitchFamily="34" charset="-122"/>
+                <a:cs typeface="Red Hat Text" pitchFamily="34" charset="-120"/>
+              </a:rPr>
+              <a:t>Custom spans are depth where you decide: your names, your attributes (order_id, decline reason), wrapping work no instrumentor sees. The cost is code you maintain — so you spend it on the message boundary and the resolver, not on HTTP.</a:t>
+            </a:r>
+            <a:endParaRPr lang="en-US" sz="1500" dirty="0"/>
+          </a:p>
+          <a:p>
+            <a:pPr algn="l" marL="342900" indent="-342900">
+              <a:lnSpc>
+                <a:spcPct val="115000"/>
+              </a:lnSpc>
+              <a:spcAft>
+                <a:spcPts val="600"/>
+              </a:spcAft>
+              <a:buSzPct val="100000"/>
+              <a:buChar char="●"/>
+            </a:pPr>
+            <a:r>
+              <a:rPr lang="en-US" sz="1500" dirty="0">
+                <a:solidFill>
+                  <a:srgbClr val="242424"/>
+                </a:solidFill>
+                <a:latin typeface="Red Hat Text" pitchFamily="34" charset="0"/>
+                <a:ea typeface="Red Hat Text" pitchFamily="34" charset="-122"/>
+                <a:cs typeface="Red Hat Text" pitchFamily="34" charset="-120"/>
+              </a:rPr>
+              <a:t>Hybrid — auto everywhere, custom in the gaps — is the production default, and it is what this repo already runs. Two rules keep it cheap: instrument any one boundary once (two near-identical spans = double-instrumentation), and keep high-cardinality ids on spans, never on metric labels.</a:t>
+            </a:r>
+            <a:endParaRPr lang="en-US" sz="1500" dirty="0"/>
+          </a:p>
+        </p:txBody>
+      </p:sp>
+      <p:sp>
+        <p:nvSpPr>
+          <p:cNvPr id="7" name="Text 4"/>
+          <p:cNvSpPr/>
+          <p:nvPr/>
+        </p:nvSpPr>
+        <p:spPr>
+          <a:xfrm>
+            <a:off x="566928" y="5943600"/>
+            <a:ext cx="11055096" cy="310896"/>
+          </a:xfrm>
+          <a:prstGeom prst="rect">
+            <a:avLst/>
+          </a:prstGeom>
+          <a:noFill/>
+          <a:ln/>
+        </p:spPr>
+        <p:txBody>
+          <a:bodyPr wrap="square" rtlCol="0" anchor="ctr"/>
+          <a:lstStyle/>
+          <a:p>
+            <a:pPr algn="ctr" indent="0" marL="0">
+              <a:buNone/>
+            </a:pPr>
+            <a:r>
+              <a:rPr lang="en-US" sz="1300" i="1" dirty="0">
+                <a:solidFill>
+                  <a:srgbClr val="5A5A5A"/>
+                </a:solidFill>
+                <a:latin typeface="Red Hat Text" pitchFamily="34" charset="0"/>
+                <a:ea typeface="Red Hat Text" pitchFamily="34" charset="-122"/>
+                <a:cs typeface="Red Hat Text" pitchFamily="34" charset="-120"/>
+              </a:rPr>
+              <a:t>Demo 6 shows both layers in one trace; compare it to Demo 2 with the custom layer off.</a:t>
+            </a:r>
+            <a:endParaRPr lang="en-US" sz="1300" dirty="0"/>
+          </a:p>
+        </p:txBody>
+      </p:sp>
+    </p:spTree>
+  </p:cSld>
+  <p:clrMapOvr>
+    <a:masterClrMapping/>
+  </p:clrMapOvr>
+</p:sld>
+</file>
+
+<file path=ppt/slides/slide33.xml><?xml version="1.0" encoding="utf-8"?>
+<p:sld xmlns:a="http://schemas.openxmlformats.org/drawingml/2006/main" xmlns:r="http://schemas.openxmlformats.org/officeDocument/2006/relationships" xmlns:p="http://schemas.openxmlformats.org/presentationml/2006/main">
+  <p:cSld name="Slide 33">
+    <p:spTree>
+      <p:nvGrpSpPr>
+        <p:cNvPr id="1" name=""/>
+        <p:cNvGrpSpPr/>
+        <p:nvPr/>
+      </p:nvGrpSpPr>
+      <p:grpSpPr>
+        <a:xfrm>
+          <a:off x="0" y="0"/>
+          <a:ext cx="0" cy="0"/>
+          <a:chOff x="0" y="0"/>
+          <a:chExt cx="0" cy="0"/>
+        </a:xfrm>
+      </p:grpSpPr>
+      <p:sp>
+        <p:nvSpPr>
+          <p:cNvPr id="2" name="Text 0"/>
+          <p:cNvSpPr/>
+          <p:nvPr/>
+        </p:nvSpPr>
+        <p:spPr>
+          <a:xfrm>
+            <a:off x="566928" y="6364224"/>
+            <a:ext cx="914400" cy="274320"/>
+          </a:xfrm>
+          <a:prstGeom prst="rect">
+            <a:avLst/>
+          </a:prstGeom>
+          <a:noFill/>
+          <a:ln/>
+        </p:spPr>
+        <p:txBody>
+          <a:bodyPr wrap="square" rtlCol="0" anchor="ctr"/>
+          <a:lstStyle/>
+          <a:p>
+            <a:pPr algn="l" indent="0" marL="0">
+              <a:buNone/>
+            </a:pPr>
+            <a:r>
+              <a:rPr lang="en-US" sz="1000" dirty="0">
+                <a:solidFill>
+                  <a:srgbClr val="8A8A8A"/>
+                </a:solidFill>
+                <a:latin typeface="Red Hat Text" pitchFamily="34" charset="0"/>
+                <a:ea typeface="Red Hat Text" pitchFamily="34" charset="-122"/>
+                <a:cs typeface="Red Hat Text" pitchFamily="34" charset="-120"/>
+              </a:rPr>
+              <a:t>33</a:t>
+            </a:r>
+            <a:endParaRPr lang="en-US" sz="1000" dirty="0"/>
+          </a:p>
+        </p:txBody>
+      </p:sp>
+      <p:pic>
+        <p:nvPicPr>
+          <p:cNvPr id="3" name="Image 0" descr="./assets/logo-candidate-2.png">    </p:cNvPr>
+          <p:cNvPicPr>
+            <a:picLocks noChangeAspect="1"/>
+          </p:cNvPicPr>
+          <p:nvPr/>
+        </p:nvPicPr>
+        <p:blipFill>
+          <a:blip r:embed="rId1"/>
+          <a:stretch>
+            <a:fillRect/>
+          </a:stretch>
+        </p:blipFill>
+        <p:spPr>
+          <a:xfrm>
+            <a:off x="10561320" y="6355080"/>
+            <a:ext cx="1033272" cy="246888"/>
+          </a:xfrm>
+          <a:prstGeom prst="rect">
+            <a:avLst/>
+          </a:prstGeom>
+        </p:spPr>
+      </p:pic>
+      <p:sp>
+        <p:nvSpPr>
+          <p:cNvPr id="4" name="Text 1"/>
+          <p:cNvSpPr/>
+          <p:nvPr/>
+        </p:nvSpPr>
+        <p:spPr>
+          <a:xfrm>
+            <a:off x="566928" y="384048"/>
+            <a:ext cx="11055096" cy="292608"/>
+          </a:xfrm>
+          <a:prstGeom prst="rect">
+            <a:avLst/>
+          </a:prstGeom>
+          <a:noFill/>
+          <a:ln/>
+        </p:spPr>
+        <p:txBody>
+          <a:bodyPr wrap="square" rtlCol="0" anchor="ctr"/>
+          <a:lstStyle/>
+          <a:p>
+            <a:pPr algn="l" indent="0" marL="0">
+              <a:buNone/>
+            </a:pPr>
+            <a:r>
+              <a:rPr lang="en-US" sz="1200" b="1" spc="400" kern="0" dirty="0">
+                <a:solidFill>
+                  <a:srgbClr val="EE0000"/>
+                </a:solidFill>
+                <a:latin typeface="Overpass" pitchFamily="34" charset="0"/>
+                <a:ea typeface="Overpass" pitchFamily="34" charset="-122"/>
+                <a:cs typeface="Overpass" pitchFamily="34" charset="-120"/>
+              </a:rPr>
+              <a:t>THE THREE SIGNALS · CORRELATED VIEW</a:t>
+            </a:r>
+            <a:endParaRPr lang="en-US" sz="1200" dirty="0"/>
+          </a:p>
+        </p:txBody>
+      </p:sp>
+      <p:sp>
+        <p:nvSpPr>
+          <p:cNvPr id="5" name="Text 2"/>
+          <p:cNvSpPr/>
+          <p:nvPr/>
+        </p:nvSpPr>
+        <p:spPr>
+          <a:xfrm>
+            <a:off x="566928" y="676656"/>
+            <a:ext cx="11055096" cy="1005840"/>
+          </a:xfrm>
+          <a:prstGeom prst="rect">
+            <a:avLst/>
+          </a:prstGeom>
+          <a:noFill/>
+          <a:ln/>
+        </p:spPr>
+        <p:txBody>
+          <a:bodyPr wrap="square" rtlCol="0" anchor="t"/>
+          <a:lstStyle/>
+          <a:p>
+            <a:pPr algn="l" indent="0" marL="0">
+              <a:buNone/>
+            </a:pPr>
+            <a:r>
+              <a:rPr lang="en-US" sz="3000" b="1" dirty="0">
+                <a:solidFill>
+                  <a:srgbClr val="151515"/>
+                </a:solidFill>
+                <a:latin typeface="Overpass" pitchFamily="34" charset="0"/>
+                <a:ea typeface="Overpass" pitchFamily="34" charset="-122"/>
+                <a:cs typeface="Overpass" pitchFamily="34" charset="-120"/>
+              </a:rPr>
+              <a:t>Read one request across all three signals</a:t>
+            </a:r>
+            <a:endParaRPr lang="en-US" sz="3000" dirty="0"/>
+          </a:p>
+        </p:txBody>
+      </p:sp>
+      <p:pic>
+        <p:nvPicPr>
+          <p:cNvPr id="6" name="Image 1" descr="./png/fig-11-correlation-graph.png">    </p:cNvPr>
+          <p:cNvPicPr>
+            <a:picLocks noChangeAspect="1"/>
+          </p:cNvPicPr>
+          <p:nvPr/>
+        </p:nvPicPr>
+        <p:blipFill>
+          <a:blip r:embed="rId2"/>
+          <a:srcRect l="0" r="0" t="0" b="0"/>
+          <a:stretch/>
+        </p:blipFill>
+        <p:spPr>
+          <a:xfrm>
+            <a:off x="1645920" y="1600200"/>
+            <a:ext cx="8906256" cy="4343400"/>
+          </a:xfrm>
+          <a:prstGeom prst="rect">
+            <a:avLst/>
+          </a:prstGeom>
+        </p:spPr>
+      </p:pic>
+      <p:sp>
+        <p:nvSpPr>
+          <p:cNvPr id="7" name="Text 3"/>
+          <p:cNvSpPr/>
+          <p:nvPr/>
+        </p:nvSpPr>
+        <p:spPr>
+          <a:xfrm>
+            <a:off x="566928" y="5943600"/>
+            <a:ext cx="11055096" cy="310896"/>
+          </a:xfrm>
+          <a:prstGeom prst="rect">
+            <a:avLst/>
+          </a:prstGeom>
+          <a:noFill/>
+          <a:ln/>
+        </p:spPr>
+        <p:txBody>
+          <a:bodyPr wrap="square" rtlCol="0" anchor="ctr"/>
+          <a:lstStyle/>
+          <a:p>
+            <a:pPr algn="ctr" indent="0" marL="0">
+              <a:buNone/>
+            </a:pPr>
+            <a:r>
+              <a:rPr lang="en-US" sz="1300" i="1" dirty="0">
+                <a:solidFill>
+                  <a:srgbClr val="5A5A5A"/>
+                </a:solidFill>
+                <a:latin typeface="Red Hat Text" pitchFamily="34" charset="0"/>
+                <a:ea typeface="Red Hat Text" pitchFamily="34" charset="-122"/>
+                <a:cs typeface="Red Hat Text" pitchFamily="34" charset="-120"/>
+              </a:rPr>
+              <a:t>Figure 9.1 — One trace_id links a trace in Tempo to its logs in Loki and its metrics in Mimir; the pivots are one click.</a:t>
+            </a:r>
+            <a:endParaRPr lang="en-US" sz="1300" dirty="0"/>
+          </a:p>
+        </p:txBody>
+      </p:sp>
+    </p:spTree>
+  </p:cSld>
+  <p:clrMapOvr>
+    <a:masterClrMapping/>
+  </p:clrMapOvr>
+</p:sld>
+</file>
+
+<file path=ppt/slides/slide34.xml><?xml version="1.0" encoding="utf-8"?>
+<p:sld xmlns:a="http://schemas.openxmlformats.org/drawingml/2006/main" xmlns:r="http://schemas.openxmlformats.org/officeDocument/2006/relationships" xmlns:p="http://schemas.openxmlformats.org/presentationml/2006/main">
+  <p:cSld name="Slide 34">
+    <p:spTree>
+      <p:nvGrpSpPr>
+        <p:cNvPr id="1" name=""/>
+        <p:cNvGrpSpPr/>
+        <p:nvPr/>
+      </p:nvGrpSpPr>
+      <p:grpSpPr>
+        <a:xfrm>
+          <a:off x="0" y="0"/>
+          <a:ext cx="0" cy="0"/>
+          <a:chOff x="0" y="0"/>
+          <a:chExt cx="0" cy="0"/>
+        </a:xfrm>
+      </p:grpSpPr>
+      <p:sp>
+        <p:nvSpPr>
+          <p:cNvPr id="2" name="Text 0"/>
+          <p:cNvSpPr/>
+          <p:nvPr/>
+        </p:nvSpPr>
+        <p:spPr>
+          <a:xfrm>
+            <a:off x="566928" y="6364224"/>
+            <a:ext cx="914400" cy="274320"/>
+          </a:xfrm>
+          <a:prstGeom prst="rect">
+            <a:avLst/>
+          </a:prstGeom>
+          <a:noFill/>
+          <a:ln/>
+        </p:spPr>
+        <p:txBody>
+          <a:bodyPr wrap="square" rtlCol="0" anchor="ctr"/>
+          <a:lstStyle/>
+          <a:p>
+            <a:pPr algn="l" indent="0" marL="0">
+              <a:buNone/>
+            </a:pPr>
+            <a:r>
+              <a:rPr lang="en-US" sz="1000" dirty="0">
+                <a:solidFill>
+                  <a:srgbClr val="8A8A8A"/>
+                </a:solidFill>
+                <a:latin typeface="Red Hat Text" pitchFamily="34" charset="0"/>
+                <a:ea typeface="Red Hat Text" pitchFamily="34" charset="-122"/>
+                <a:cs typeface="Red Hat Text" pitchFamily="34" charset="-120"/>
+              </a:rPr>
+              <a:t>34</a:t>
             </a:r>
             <a:endParaRPr lang="en-US" sz="1000" dirty="0"/>
           </a:p>
@@ -12689,7 +13640,7 @@
                 <a:ea typeface="Red Hat Text" pitchFamily="34" charset="-122"/>
                 <a:cs typeface="Red Hat Text" pitchFamily="34" charset="-120"/>
               </a:rPr>
-              <a:t>Python 3.14 with Poetry for dependency management. The app's range stays open to 3.12+ so it installs on whatever supported CPython the current Red Hat UBI image ships while the 3.14 tag is confirmed.</a:t>
+              <a:t>Python 3.14 with Poetry for dependency management. Each service's range stays open to 3.12+ so the images build on whatever supported CPython the current Red Hat UBI base ships while the 3.14 tag is confirmed.</a:t>
             </a:r>
             <a:endParaRPr lang="en-US" sz="1700" dirty="0"/>
           </a:p>
@@ -12903,6 +13854,234 @@
                 <a:ea typeface="Overpass" pitchFamily="34" charset="-122"/>
                 <a:cs typeface="Overpass" pitchFamily="34" charset="-120"/>
               </a:rPr>
+              <a:t>What one `podman compose up` brings up</a:t>
+            </a:r>
+            <a:endParaRPr lang="en-US" sz="3000" dirty="0"/>
+          </a:p>
+        </p:txBody>
+      </p:sp>
+      <p:pic>
+        <p:nvPicPr>
+          <p:cNvPr id="6" name="Image 1" descr="./png/fig-01-running-stack.png">    </p:cNvPr>
+          <p:cNvPicPr>
+            <a:picLocks noChangeAspect="1"/>
+          </p:cNvPicPr>
+          <p:nvPr/>
+        </p:nvPicPr>
+        <p:blipFill>
+          <a:blip r:embed="rId2"/>
+          <a:srcRect l="0" r="0" t="0" b="0"/>
+          <a:stretch/>
+        </p:blipFill>
+        <p:spPr>
+          <a:xfrm>
+            <a:off x="1645920" y="1600200"/>
+            <a:ext cx="8906256" cy="4343400"/>
+          </a:xfrm>
+          <a:prstGeom prst="rect">
+            <a:avLst/>
+          </a:prstGeom>
+        </p:spPr>
+      </p:pic>
+      <p:sp>
+        <p:nvSpPr>
+          <p:cNvPr id="7" name="Text 3"/>
+          <p:cNvSpPr/>
+          <p:nvPr/>
+        </p:nvSpPr>
+        <p:spPr>
+          <a:xfrm>
+            <a:off x="566928" y="5943600"/>
+            <a:ext cx="11055096" cy="310896"/>
+          </a:xfrm>
+          <a:prstGeom prst="rect">
+            <a:avLst/>
+          </a:prstGeom>
+          <a:noFill/>
+          <a:ln/>
+        </p:spPr>
+        <p:txBody>
+          <a:bodyPr wrap="square" rtlCol="0" anchor="ctr"/>
+          <a:lstStyle/>
+          <a:p>
+            <a:pPr algn="ctr" indent="0" marL="0">
+              <a:buNone/>
+            </a:pPr>
+            <a:r>
+              <a:rPr lang="en-US" sz="1300" i="1" dirty="0">
+                <a:solidFill>
+                  <a:srgbClr val="5A5A5A"/>
+                </a:solidFill>
+                <a:latin typeface="Red Hat Text" pitchFamily="34" charset="0"/>
+                <a:ea typeface="Red Hat Text" pitchFamily="34" charset="-122"/>
+                <a:cs typeface="Red Hat Text" pitchFamily="34" charset="-120"/>
+              </a:rPr>
+              <a:t>Figure 1.1 — Services send OTLP/HTTP :4318 to the bundled otel-lgtm Collector → Tempo/Mimir/Loki → Grafana; Kafka and Postgres sit alongside.</a:t>
+            </a:r>
+            <a:endParaRPr lang="en-US" sz="1300" dirty="0"/>
+          </a:p>
+        </p:txBody>
+      </p:sp>
+    </p:spTree>
+  </p:cSld>
+  <p:clrMapOvr>
+    <a:masterClrMapping/>
+  </p:clrMapOvr>
+</p:sld>
+</file>
+
+<file path=ppt/slides/slide8.xml><?xml version="1.0" encoding="utf-8"?>
+<p:sld xmlns:a="http://schemas.openxmlformats.org/drawingml/2006/main" xmlns:r="http://schemas.openxmlformats.org/officeDocument/2006/relationships" xmlns:p="http://schemas.openxmlformats.org/presentationml/2006/main">
+  <p:cSld name="Slide 8">
+    <p:spTree>
+      <p:nvGrpSpPr>
+        <p:cNvPr id="1" name=""/>
+        <p:cNvGrpSpPr/>
+        <p:nvPr/>
+      </p:nvGrpSpPr>
+      <p:grpSpPr>
+        <a:xfrm>
+          <a:off x="0" y="0"/>
+          <a:ext cx="0" cy="0"/>
+          <a:chOff x="0" y="0"/>
+          <a:chExt cx="0" cy="0"/>
+        </a:xfrm>
+      </p:grpSpPr>
+      <p:sp>
+        <p:nvSpPr>
+          <p:cNvPr id="2" name="Text 0"/>
+          <p:cNvSpPr/>
+          <p:nvPr/>
+        </p:nvSpPr>
+        <p:spPr>
+          <a:xfrm>
+            <a:off x="566928" y="6364224"/>
+            <a:ext cx="914400" cy="274320"/>
+          </a:xfrm>
+          <a:prstGeom prst="rect">
+            <a:avLst/>
+          </a:prstGeom>
+          <a:noFill/>
+          <a:ln/>
+        </p:spPr>
+        <p:txBody>
+          <a:bodyPr wrap="square" rtlCol="0" anchor="ctr"/>
+          <a:lstStyle/>
+          <a:p>
+            <a:pPr algn="l" indent="0" marL="0">
+              <a:buNone/>
+            </a:pPr>
+            <a:r>
+              <a:rPr lang="en-US" sz="1000" dirty="0">
+                <a:solidFill>
+                  <a:srgbClr val="8A8A8A"/>
+                </a:solidFill>
+                <a:latin typeface="Red Hat Text" pitchFamily="34" charset="0"/>
+                <a:ea typeface="Red Hat Text" pitchFamily="34" charset="-122"/>
+                <a:cs typeface="Red Hat Text" pitchFamily="34" charset="-120"/>
+              </a:rPr>
+              <a:t>8</a:t>
+            </a:r>
+            <a:endParaRPr lang="en-US" sz="1000" dirty="0"/>
+          </a:p>
+        </p:txBody>
+      </p:sp>
+      <p:pic>
+        <p:nvPicPr>
+          <p:cNvPr id="3" name="Image 0" descr="./assets/logo-candidate-2.png">    </p:cNvPr>
+          <p:cNvPicPr>
+            <a:picLocks noChangeAspect="1"/>
+          </p:cNvPicPr>
+          <p:nvPr/>
+        </p:nvPicPr>
+        <p:blipFill>
+          <a:blip r:embed="rId1"/>
+          <a:stretch>
+            <a:fillRect/>
+          </a:stretch>
+        </p:blipFill>
+        <p:spPr>
+          <a:xfrm>
+            <a:off x="10561320" y="6355080"/>
+            <a:ext cx="1033272" cy="246888"/>
+          </a:xfrm>
+          <a:prstGeom prst="rect">
+            <a:avLst/>
+          </a:prstGeom>
+        </p:spPr>
+      </p:pic>
+      <p:sp>
+        <p:nvSpPr>
+          <p:cNvPr id="4" name="Text 1"/>
+          <p:cNvSpPr/>
+          <p:nvPr/>
+        </p:nvSpPr>
+        <p:spPr>
+          <a:xfrm>
+            <a:off x="566928" y="384048"/>
+            <a:ext cx="11055096" cy="292608"/>
+          </a:xfrm>
+          <a:prstGeom prst="rect">
+            <a:avLst/>
+          </a:prstGeom>
+          <a:noFill/>
+          <a:ln/>
+        </p:spPr>
+        <p:txBody>
+          <a:bodyPr wrap="square" rtlCol="0" anchor="ctr"/>
+          <a:lstStyle/>
+          <a:p>
+            <a:pPr algn="l" indent="0" marL="0">
+              <a:buNone/>
+            </a:pPr>
+            <a:r>
+              <a:rPr lang="en-US" sz="1200" b="1" spc="400" kern="0" dirty="0">
+                <a:solidFill>
+                  <a:srgbClr val="EE0000"/>
+                </a:solidFill>
+                <a:latin typeface="Overpass" pitchFamily="34" charset="0"/>
+                <a:ea typeface="Overpass" pitchFamily="34" charset="-122"/>
+                <a:cs typeface="Overpass" pitchFamily="34" charset="-120"/>
+              </a:rPr>
+              <a:t>FOUNDATIONS · PREREQUISITES</a:t>
+            </a:r>
+            <a:endParaRPr lang="en-US" sz="1200" dirty="0"/>
+          </a:p>
+        </p:txBody>
+      </p:sp>
+      <p:sp>
+        <p:nvSpPr>
+          <p:cNvPr id="5" name="Text 2"/>
+          <p:cNvSpPr/>
+          <p:nvPr/>
+        </p:nvSpPr>
+        <p:spPr>
+          <a:xfrm>
+            <a:off x="566928" y="676656"/>
+            <a:ext cx="11055096" cy="1005840"/>
+          </a:xfrm>
+          <a:prstGeom prst="rect">
+            <a:avLst/>
+          </a:prstGeom>
+          <a:noFill/>
+          <a:ln/>
+        </p:spPr>
+        <p:txBody>
+          <a:bodyPr wrap="square" rtlCol="0" anchor="t"/>
+          <a:lstStyle/>
+          <a:p>
+            <a:pPr algn="l" indent="0" marL="0">
+              <a:buNone/>
+            </a:pPr>
+            <a:r>
+              <a:rPr lang="en-US" sz="3000" b="1" dirty="0">
+                <a:solidFill>
+                  <a:srgbClr val="151515"/>
+                </a:solidFill>
+                <a:latin typeface="Overpass" pitchFamily="34" charset="0"/>
+                <a:ea typeface="Overpass" pitchFamily="34" charset="-122"/>
+                <a:cs typeface="Overpass" pitchFamily="34" charset="-120"/>
+              </a:rPr>
               <a:t>One image, the whole backend</a:t>
             </a:r>
             <a:endParaRPr lang="en-US" sz="3000" dirty="0"/>
@@ -12911,7 +14090,7 @@
       </p:sp>
       <p:graphicFrame>
         <p:nvGraphicFramePr>
-          <p:cNvPr id="8" name="Table 0"/>
+          <p:cNvPr id="9" name="Table 0"/>
           <p:cNvGraphicFramePr>
             <a:graphicFrameLocks noGrp="1"/>
           </p:cNvGraphicFramePr>
@@ -12936,7 +14115,7 @@
                 <a:gridCol w="2834640"/>
                 <a:gridCol w="6208776"/>
               </a:tblGrid>
-              <a:tr h="420624">
+              <a:tr h="384048">
                 <a:tc>
                   <a:txBody>
                     <a:bodyPr/>
@@ -13133,7 +14312,7 @@
                   </a:tcPr>
                 </a:tc>
               </a:tr>
-              <a:tr h="420624">
+              <a:tr h="384048">
                 <a:tc>
                   <a:txBody>
                     <a:bodyPr/>
@@ -13330,7 +14509,7 @@
                   </a:tcPr>
                 </a:tc>
               </a:tr>
-              <a:tr h="420624">
+              <a:tr h="384048">
                 <a:tc>
                   <a:txBody>
                     <a:bodyPr/>
@@ -13527,7 +14706,7 @@
                   </a:tcPr>
                 </a:tc>
               </a:tr>
-              <a:tr h="420624">
+              <a:tr h="384048">
                 <a:tc>
                   <a:txBody>
                     <a:bodyPr/>
@@ -13724,7 +14903,7 @@
                   </a:tcPr>
                 </a:tc>
               </a:tr>
-              <a:tr h="420624">
+              <a:tr h="384048">
                 <a:tc>
                   <a:txBody>
                     <a:bodyPr/>
@@ -13921,7 +15100,7 @@
                   </a:tcPr>
                 </a:tc>
               </a:tr>
-              <a:tr h="420624">
+              <a:tr h="384048">
                 <a:tc>
                   <a:txBody>
                     <a:bodyPr/>
@@ -14118,7 +15297,7 @@
                   </a:tcPr>
                 </a:tc>
               </a:tr>
-              <a:tr h="420624">
+              <a:tr h="384048">
                 <a:tc>
                   <a:txBody>
                     <a:bodyPr/>
@@ -14136,7 +15315,7 @@
                           <a:ea typeface="Red Hat Mono" pitchFamily="34" charset="-122"/>
                           <a:cs typeface="Red Hat Mono" pitchFamily="34" charset="-120"/>
                         </a:rPr>
-                        <a:t>API</a:t>
+                        <a:t>Order</a:t>
                       </a:r>
                       <a:endParaRPr lang="en-US" sz="1500" dirty="0">
                         <a:latin typeface="Red Hat Mono" charset="0"/>
@@ -14266,7 +15445,204 @@
                           <a:ea typeface="Red Hat Text" pitchFamily="34" charset="-122"/>
                           <a:cs typeface="Red Hat Text" pitchFamily="34" charset="-120"/>
                         </a:rPr>
-                        <a:t>the demo service</a:t>
+                        <a:t>external REST edge — place/read orders</a:t>
+                      </a:r>
+                      <a:endParaRPr lang="en-US" sz="1300" dirty="0">
+                        <a:latin typeface="Red Hat Text" charset="0"/>
+                        <a:ea typeface="Red Hat Text" charset="0"/>
+                        <a:cs typeface="Red Hat Text" charset="0"/>
+                      </a:endParaRPr>
+                    </a:p>
+                  </a:txBody>
+                  <a:tcPr marL="91440" marR="91440" marT="45720" marB="45720" anchor="ctr">
+                    <a:lnL w="6350" cap="flat" cmpd="sng" algn="ctr">
+                      <a:solidFill>
+                        <a:srgbClr val="D2D2D2"/>
+                      </a:solidFill>
+                      <a:prstDash val="solid"/>
+                      <a:round/>
+                      <a:headEnd type="none" w="med" len="med"/>
+                      <a:tailEnd type="none" w="med" len="med"/>
+                    </a:lnL>
+                    <a:lnR w="6350" cap="flat" cmpd="sng" algn="ctr">
+                      <a:solidFill>
+                        <a:srgbClr val="D2D2D2"/>
+                      </a:solidFill>
+                      <a:prstDash val="solid"/>
+                      <a:round/>
+                      <a:headEnd type="none" w="med" len="med"/>
+                      <a:tailEnd type="none" w="med" len="med"/>
+                    </a:lnR>
+                    <a:lnT w="6350" cap="flat" cmpd="sng" algn="ctr">
+                      <a:solidFill>
+                        <a:srgbClr val="D2D2D2"/>
+                      </a:solidFill>
+                      <a:prstDash val="solid"/>
+                      <a:round/>
+                      <a:headEnd type="none" w="med" len="med"/>
+                      <a:tailEnd type="none" w="med" len="med"/>
+                    </a:lnT>
+                    <a:lnB w="6350" cap="flat" cmpd="sng" algn="ctr">
+                      <a:solidFill>
+                        <a:srgbClr val="D2D2D2"/>
+                      </a:solidFill>
+                      <a:prstDash val="solid"/>
+                      <a:round/>
+                      <a:headEnd type="none" w="med" len="med"/>
+                      <a:tailEnd type="none" w="med" len="med"/>
+                    </a:lnB>
+                  </a:tcPr>
+                </a:tc>
+              </a:tr>
+              <a:tr h="384048">
+                <a:tc>
+                  <a:txBody>
+                    <a:bodyPr/>
+                    <a:lstStyle/>
+                    <a:p>
+                      <a:pPr algn="l" indent="0" marL="0">
+                        <a:buNone/>
+                      </a:pPr>
+                      <a:r>
+                        <a:rPr lang="en-US" sz="1500" b="1" dirty="0">
+                          <a:solidFill>
+                            <a:srgbClr val="EE0000"/>
+                          </a:solidFill>
+                          <a:latin typeface="Red Hat Mono" pitchFamily="34" charset="0"/>
+                          <a:ea typeface="Red Hat Mono" pitchFamily="34" charset="-122"/>
+                          <a:cs typeface="Red Hat Mono" pitchFamily="34" charset="-120"/>
+                        </a:rPr>
+                        <a:t>Review</a:t>
+                      </a:r>
+                      <a:endParaRPr lang="en-US" sz="1500" dirty="0">
+                        <a:latin typeface="Red Hat Mono" charset="0"/>
+                        <a:ea typeface="Red Hat Mono" charset="0"/>
+                        <a:cs typeface="Red Hat Mono" charset="0"/>
+                      </a:endParaRPr>
+                    </a:p>
+                  </a:txBody>
+                  <a:tcPr marL="91440" marR="91440" marT="45720" marB="45720" anchor="ctr">
+                    <a:lnL w="6350" cap="flat" cmpd="sng" algn="ctr">
+                      <a:solidFill>
+                        <a:srgbClr val="D2D2D2"/>
+                      </a:solidFill>
+                      <a:prstDash val="solid"/>
+                      <a:round/>
+                      <a:headEnd type="none" w="med" len="med"/>
+                      <a:tailEnd type="none" w="med" len="med"/>
+                    </a:lnL>
+                    <a:lnR w="6350" cap="flat" cmpd="sng" algn="ctr">
+                      <a:solidFill>
+                        <a:srgbClr val="D2D2D2"/>
+                      </a:solidFill>
+                      <a:prstDash val="solid"/>
+                      <a:round/>
+                      <a:headEnd type="none" w="med" len="med"/>
+                      <a:tailEnd type="none" w="med" len="med"/>
+                    </a:lnR>
+                    <a:lnT w="6350" cap="flat" cmpd="sng" algn="ctr">
+                      <a:solidFill>
+                        <a:srgbClr val="D2D2D2"/>
+                      </a:solidFill>
+                      <a:prstDash val="solid"/>
+                      <a:round/>
+                      <a:headEnd type="none" w="med" len="med"/>
+                      <a:tailEnd type="none" w="med" len="med"/>
+                    </a:lnT>
+                    <a:lnB w="6350" cap="flat" cmpd="sng" algn="ctr">
+                      <a:solidFill>
+                        <a:srgbClr val="D2D2D2"/>
+                      </a:solidFill>
+                      <a:prstDash val="solid"/>
+                      <a:round/>
+                      <a:headEnd type="none" w="med" len="med"/>
+                      <a:tailEnd type="none" w="med" len="med"/>
+                    </a:lnB>
+                  </a:tcPr>
+                </a:tc>
+                <a:tc>
+                  <a:txBody>
+                    <a:bodyPr/>
+                    <a:lstStyle/>
+                    <a:p>
+                      <a:pPr algn="l" indent="0" marL="0">
+                        <a:buNone/>
+                      </a:pPr>
+                      <a:r>
+                        <a:rPr lang="en-US" sz="1400" b="1" dirty="0">
+                          <a:solidFill>
+                            <a:srgbClr val="151515"/>
+                          </a:solidFill>
+                          <a:latin typeface="Red Hat Text" pitchFamily="34" charset="0"/>
+                          <a:ea typeface="Red Hat Text" pitchFamily="34" charset="-122"/>
+                          <a:cs typeface="Red Hat Text" pitchFamily="34" charset="-120"/>
+                        </a:rPr>
+                        <a:t>localhost:8081</a:t>
+                      </a:r>
+                      <a:endParaRPr lang="en-US" sz="1400" dirty="0">
+                        <a:latin typeface="Red Hat Text" charset="0"/>
+                        <a:ea typeface="Red Hat Text" charset="0"/>
+                        <a:cs typeface="Red Hat Text" charset="0"/>
+                      </a:endParaRPr>
+                    </a:p>
+                  </a:txBody>
+                  <a:tcPr marL="91440" marR="91440" marT="45720" marB="45720" anchor="ctr">
+                    <a:lnL w="6350" cap="flat" cmpd="sng" algn="ctr">
+                      <a:solidFill>
+                        <a:srgbClr val="D2D2D2"/>
+                      </a:solidFill>
+                      <a:prstDash val="solid"/>
+                      <a:round/>
+                      <a:headEnd type="none" w="med" len="med"/>
+                      <a:tailEnd type="none" w="med" len="med"/>
+                    </a:lnL>
+                    <a:lnR w="6350" cap="flat" cmpd="sng" algn="ctr">
+                      <a:solidFill>
+                        <a:srgbClr val="D2D2D2"/>
+                      </a:solidFill>
+                      <a:prstDash val="solid"/>
+                      <a:round/>
+                      <a:headEnd type="none" w="med" len="med"/>
+                      <a:tailEnd type="none" w="med" len="med"/>
+                    </a:lnR>
+                    <a:lnT w="6350" cap="flat" cmpd="sng" algn="ctr">
+                      <a:solidFill>
+                        <a:srgbClr val="D2D2D2"/>
+                      </a:solidFill>
+                      <a:prstDash val="solid"/>
+                      <a:round/>
+                      <a:headEnd type="none" w="med" len="med"/>
+                      <a:tailEnd type="none" w="med" len="med"/>
+                    </a:lnT>
+                    <a:lnB w="6350" cap="flat" cmpd="sng" algn="ctr">
+                      <a:solidFill>
+                        <a:srgbClr val="D2D2D2"/>
+                      </a:solidFill>
+                      <a:prstDash val="solid"/>
+                      <a:round/>
+                      <a:headEnd type="none" w="med" len="med"/>
+                      <a:tailEnd type="none" w="med" len="med"/>
+                    </a:lnB>
+                  </a:tcPr>
+                </a:tc>
+                <a:tc>
+                  <a:txBody>
+                    <a:bodyPr/>
+                    <a:lstStyle/>
+                    <a:p>
+                      <a:pPr algn="l" indent="0" marL="0">
+                        <a:buNone/>
+                      </a:pPr>
+                      <a:r>
+                        <a:rPr lang="en-US" sz="1300" dirty="0">
+                          <a:solidFill>
+                            <a:srgbClr val="242424"/>
+                          </a:solidFill>
+                          <a:latin typeface="Red Hat Text" pitchFamily="34" charset="0"/>
+                          <a:ea typeface="Red Hat Text" pitchFamily="34" charset="-122"/>
+                          <a:cs typeface="Red Hat Text" pitchFamily="34" charset="-120"/>
+                        </a:rPr>
+                        <a:t>external GraphQL read edge</a:t>
                       </a:r>
                       <a:endParaRPr lang="en-US" sz="1300" dirty="0">
                         <a:latin typeface="Red Hat Text" charset="0"/>
@@ -14366,266 +15742,6 @@
 </p:sld>
 </file>
 
-<file path=ppt/slides/slide8.xml><?xml version="1.0" encoding="utf-8"?>
-<p:sld xmlns:a="http://schemas.openxmlformats.org/drawingml/2006/main" xmlns:r="http://schemas.openxmlformats.org/officeDocument/2006/relationships" xmlns:p="http://schemas.openxmlformats.org/presentationml/2006/main">
-  <p:cSld name="Slide 8">
-    <p:spTree>
-      <p:nvGrpSpPr>
-        <p:cNvPr id="1" name=""/>
-        <p:cNvGrpSpPr/>
-        <p:nvPr/>
-      </p:nvGrpSpPr>
-      <p:grpSpPr>
-        <a:xfrm>
-          <a:off x="0" y="0"/>
-          <a:ext cx="0" cy="0"/>
-          <a:chOff x="0" y="0"/>
-          <a:chExt cx="0" cy="0"/>
-        </a:xfrm>
-      </p:grpSpPr>
-      <p:sp>
-        <p:nvSpPr>
-          <p:cNvPr id="2" name="Text 0"/>
-          <p:cNvSpPr/>
-          <p:nvPr/>
-        </p:nvSpPr>
-        <p:spPr>
-          <a:xfrm>
-            <a:off x="566928" y="6364224"/>
-            <a:ext cx="914400" cy="274320"/>
-          </a:xfrm>
-          <a:prstGeom prst="rect">
-            <a:avLst/>
-          </a:prstGeom>
-          <a:noFill/>
-          <a:ln/>
-        </p:spPr>
-        <p:txBody>
-          <a:bodyPr wrap="square" rtlCol="0" anchor="ctr"/>
-          <a:lstStyle/>
-          <a:p>
-            <a:pPr algn="l" indent="0" marL="0">
-              <a:buNone/>
-            </a:pPr>
-            <a:r>
-              <a:rPr lang="en-US" sz="1000" dirty="0">
-                <a:solidFill>
-                  <a:srgbClr val="8A8A8A"/>
-                </a:solidFill>
-                <a:latin typeface="Red Hat Text" pitchFamily="34" charset="0"/>
-                <a:ea typeface="Red Hat Text" pitchFamily="34" charset="-122"/>
-                <a:cs typeface="Red Hat Text" pitchFamily="34" charset="-120"/>
-              </a:rPr>
-              <a:t>8</a:t>
-            </a:r>
-            <a:endParaRPr lang="en-US" sz="1000" dirty="0"/>
-          </a:p>
-        </p:txBody>
-      </p:sp>
-      <p:pic>
-        <p:nvPicPr>
-          <p:cNvPr id="3" name="Image 0" descr="./assets/logo-candidate-2.png">    </p:cNvPr>
-          <p:cNvPicPr>
-            <a:picLocks noChangeAspect="1"/>
-          </p:cNvPicPr>
-          <p:nvPr/>
-        </p:nvPicPr>
-        <p:blipFill>
-          <a:blip r:embed="rId1"/>
-          <a:stretch>
-            <a:fillRect/>
-          </a:stretch>
-        </p:blipFill>
-        <p:spPr>
-          <a:xfrm>
-            <a:off x="10561320" y="6355080"/>
-            <a:ext cx="1033272" cy="246888"/>
-          </a:xfrm>
-          <a:prstGeom prst="rect">
-            <a:avLst/>
-          </a:prstGeom>
-        </p:spPr>
-      </p:pic>
-      <p:sp>
-        <p:nvSpPr>
-          <p:cNvPr id="4" name="Text 1"/>
-          <p:cNvSpPr/>
-          <p:nvPr/>
-        </p:nvSpPr>
-        <p:spPr>
-          <a:xfrm>
-            <a:off x="566928" y="384048"/>
-            <a:ext cx="11055096" cy="292608"/>
-          </a:xfrm>
-          <a:prstGeom prst="rect">
-            <a:avLst/>
-          </a:prstGeom>
-          <a:noFill/>
-          <a:ln/>
-        </p:spPr>
-        <p:txBody>
-          <a:bodyPr wrap="square" rtlCol="0" anchor="ctr"/>
-          <a:lstStyle/>
-          <a:p>
-            <a:pPr algn="l" indent="0" marL="0">
-              <a:buNone/>
-            </a:pPr>
-            <a:r>
-              <a:rPr lang="en-US" sz="1200" b="1" spc="400" kern="0" dirty="0">
-                <a:solidFill>
-                  <a:srgbClr val="EE0000"/>
-                </a:solidFill>
-                <a:latin typeface="Overpass" pitchFamily="34" charset="0"/>
-                <a:ea typeface="Overpass" pitchFamily="34" charset="-122"/>
-                <a:cs typeface="Overpass" pitchFamily="34" charset="-120"/>
-              </a:rPr>
-              <a:t>FOUNDATIONS · PREREQUISITES</a:t>
-            </a:r>
-            <a:endParaRPr lang="en-US" sz="1200" dirty="0"/>
-          </a:p>
-        </p:txBody>
-      </p:sp>
-      <p:sp>
-        <p:nvSpPr>
-          <p:cNvPr id="5" name="Text 2"/>
-          <p:cNvSpPr/>
-          <p:nvPr/>
-        </p:nvSpPr>
-        <p:spPr>
-          <a:xfrm>
-            <a:off x="566928" y="676656"/>
-            <a:ext cx="11055096" cy="1005840"/>
-          </a:xfrm>
-          <a:prstGeom prst="rect">
-            <a:avLst/>
-          </a:prstGeom>
-          <a:noFill/>
-          <a:ln/>
-        </p:spPr>
-        <p:txBody>
-          <a:bodyPr wrap="square" rtlCol="0" anchor="t"/>
-          <a:lstStyle/>
-          <a:p>
-            <a:pPr algn="l" indent="0" marL="0">
-              <a:buNone/>
-            </a:pPr>
-            <a:r>
-              <a:rPr lang="en-US" sz="3000" b="1" dirty="0">
-                <a:solidFill>
-                  <a:srgbClr val="151515"/>
-                </a:solidFill>
-                <a:latin typeface="Overpass" pitchFamily="34" charset="0"/>
-                <a:ea typeface="Overpass" pitchFamily="34" charset="-122"/>
-                <a:cs typeface="Overpass" pitchFamily="34" charset="-120"/>
-              </a:rPr>
-              <a:t>A house-style choice: OTLP over HTTP</a:t>
-            </a:r>
-            <a:endParaRPr lang="en-US" sz="3000" dirty="0"/>
-          </a:p>
-        </p:txBody>
-      </p:sp>
-      <p:sp>
-        <p:nvSpPr>
-          <p:cNvPr id="6" name="Text 3"/>
-          <p:cNvSpPr/>
-          <p:nvPr/>
-        </p:nvSpPr>
-        <p:spPr>
-          <a:xfrm>
-            <a:off x="566928" y="1691640"/>
-            <a:ext cx="11055096" cy="4434840"/>
-          </a:xfrm>
-          <a:prstGeom prst="rect">
-            <a:avLst/>
-          </a:prstGeom>
-          <a:noFill/>
-          <a:ln/>
-        </p:spPr>
-        <p:txBody>
-          <a:bodyPr wrap="square" rtlCol="0" anchor="t"/>
-          <a:lstStyle/>
-          <a:p>
-            <a:pPr algn="l" marL="342900" indent="-342900">
-              <a:lnSpc>
-                <a:spcPct val="115000"/>
-              </a:lnSpc>
-              <a:spcAft>
-                <a:spcPts val="600"/>
-              </a:spcAft>
-              <a:buSzPct val="100000"/>
-              <a:buChar char="●"/>
-            </a:pPr>
-            <a:r>
-              <a:rPr lang="en-US" sz="1700" dirty="0">
-                <a:solidFill>
-                  <a:srgbClr val="242424"/>
-                </a:solidFill>
-                <a:latin typeface="Red Hat Text" pitchFamily="34" charset="0"/>
-                <a:ea typeface="Red Hat Text" pitchFamily="34" charset="-122"/>
-                <a:cs typeface="Red Hat Text" pitchFamily="34" charset="-120"/>
-              </a:rPr>
-              <a:t>Telemetry can leave the SDK over OTLP/gRPC (4317) or OTLP/HTTP (4318). This talk defaults to HTTP on 4318.</a:t>
-            </a:r>
-            <a:endParaRPr lang="en-US" sz="1700" dirty="0"/>
-          </a:p>
-          <a:p>
-            <a:pPr algn="l" marL="342900" indent="-342900">
-              <a:lnSpc>
-                <a:spcPct val="115000"/>
-              </a:lnSpc>
-              <a:spcAft>
-                <a:spcPts val="600"/>
-              </a:spcAft>
-              <a:buSzPct val="100000"/>
-              <a:buChar char="●"/>
-            </a:pPr>
-            <a:r>
-              <a:rPr lang="en-US" sz="1700" dirty="0">
-                <a:solidFill>
-                  <a:srgbClr val="242424"/>
-                </a:solidFill>
-                <a:latin typeface="Red Hat Text" pitchFamily="34" charset="0"/>
-                <a:ea typeface="Red Hat Text" pitchFamily="34" charset="-122"/>
-                <a:cs typeface="Red Hat Text" pitchFamily="34" charset="-120"/>
-              </a:rPr>
-              <a:t>It is easier to debug — a plain curl can post to it — more firewall-friendly, and for a development workload the performance difference is negligible.</a:t>
-            </a:r>
-            <a:endParaRPr lang="en-US" sz="1700" dirty="0"/>
-          </a:p>
-          <a:p>
-            <a:pPr algn="l" marL="342900" indent="-342900">
-              <a:lnSpc>
-                <a:spcPct val="115000"/>
-              </a:lnSpc>
-              <a:spcAft>
-                <a:spcPts val="600"/>
-              </a:spcAft>
-              <a:buSzPct val="100000"/>
-              <a:buChar char="●"/>
-            </a:pPr>
-            <a:r>
-              <a:rPr lang="en-US" sz="1700" dirty="0">
-                <a:solidFill>
-                  <a:srgbClr val="242424"/>
-                </a:solidFill>
-                <a:latin typeface="Red Hat Text" pitchFamily="34" charset="0"/>
-                <a:ea typeface="Red Hat Text" pitchFamily="34" charset="-122"/>
-                <a:cs typeface="Red Hat Text" pitchFamily="34" charset="-120"/>
-              </a:rPr>
-              <a:t>The gRPC endpoint stays exposed, so switching is a one-line change to OTEL_EXPORTER_OTLP_PROTOCOL and the port. Endpoints in later chapters use the path-less form http://lgtm:4318, which the SDK completes per signal.</a:t>
-            </a:r>
-            <a:endParaRPr lang="en-US" sz="1700" dirty="0"/>
-          </a:p>
-        </p:txBody>
-      </p:sp>
-    </p:spTree>
-  </p:cSld>
-  <p:clrMapOvr>
-    <a:masterClrMapping/>
-  </p:clrMapOvr>
-</p:sld>
-</file>
-
 <file path=ppt/slides/slide9.xml><?xml version="1.0" encoding="utf-8"?>
 <p:sld xmlns:a="http://schemas.openxmlformats.org/drawingml/2006/main" xmlns:r="http://schemas.openxmlformats.org/officeDocument/2006/relationships" xmlns:p="http://schemas.openxmlformats.org/presentationml/2006/main">
   <p:cSld name="Slide 9">
@@ -14739,7 +15855,7 @@
                 <a:ea typeface="Overpass" pitchFamily="34" charset="-122"/>
                 <a:cs typeface="Overpass" pitchFamily="34" charset="-120"/>
               </a:rPr>
-              <a:t>FOUNDATIONS · FUNDAMENTALS</a:t>
+              <a:t>FOUNDATIONS · PREREQUISITES</a:t>
             </a:r>
             <a:endParaRPr lang="en-US" sz="1200" dirty="0"/>
           </a:p>
@@ -14778,45 +15894,22 @@
                 <a:ea typeface="Overpass" pitchFamily="34" charset="-122"/>
                 <a:cs typeface="Overpass" pitchFamily="34" charset="-120"/>
               </a:rPr>
-              <a:t>One SDK, one Collector, three backends, one UI</a:t>
+              <a:t>A house-style choice: OTLP over HTTP</a:t>
             </a:r>
             <a:endParaRPr lang="en-US" sz="3000" dirty="0"/>
           </a:p>
         </p:txBody>
       </p:sp>
-      <p:pic>
-        <p:nvPicPr>
-          <p:cNvPr id="6" name="Image 1" descr="./png/fig-02-otel-data-path.png">    </p:cNvPr>
-          <p:cNvPicPr>
-            <a:picLocks noChangeAspect="1"/>
-          </p:cNvPicPr>
-          <p:nvPr/>
-        </p:nvPicPr>
-        <p:blipFill>
-          <a:blip r:embed="rId2"/>
-          <a:srcRect l="0" r="0" t="0" b="0"/>
-          <a:stretch/>
-        </p:blipFill>
-        <p:spPr>
-          <a:xfrm>
-            <a:off x="1645920" y="1600200"/>
-            <a:ext cx="8906256" cy="4343400"/>
-          </a:xfrm>
-          <a:prstGeom prst="rect">
-            <a:avLst/>
-          </a:prstGeom>
-        </p:spPr>
-      </p:pic>
-      <p:sp>
-        <p:nvSpPr>
-          <p:cNvPr id="7" name="Text 3"/>
+      <p:sp>
+        <p:nvSpPr>
+          <p:cNvPr id="6" name="Text 3"/>
           <p:cNvSpPr/>
           <p:nvPr/>
         </p:nvSpPr>
         <p:spPr>
           <a:xfrm>
-            <a:off x="566928" y="5943600"/>
-            <a:ext cx="11055096" cy="310896"/>
+            <a:off x="566928" y="1691640"/>
+            <a:ext cx="11055096" cy="4434840"/>
           </a:xfrm>
           <a:prstGeom prst="rect">
             <a:avLst/>
@@ -14825,24 +15918,79 @@
           <a:ln/>
         </p:spPr>
         <p:txBody>
-          <a:bodyPr wrap="square" rtlCol="0" anchor="ctr"/>
-          <a:lstStyle/>
-          <a:p>
-            <a:pPr algn="ctr" indent="0" marL="0">
-              <a:buNone/>
-            </a:pPr>
-            <a:r>
-              <a:rPr lang="en-US" sz="1300" i="1" dirty="0">
-                <a:solidFill>
-                  <a:srgbClr val="5A5A5A"/>
+          <a:bodyPr wrap="square" rtlCol="0" anchor="t"/>
+          <a:lstStyle/>
+          <a:p>
+            <a:pPr algn="l" marL="342900" indent="-342900">
+              <a:lnSpc>
+                <a:spcPct val="115000"/>
+              </a:lnSpc>
+              <a:spcAft>
+                <a:spcPts val="600"/>
+              </a:spcAft>
+              <a:buSzPct val="100000"/>
+              <a:buChar char="●"/>
+            </a:pPr>
+            <a:r>
+              <a:rPr lang="en-US" sz="1700" dirty="0">
+                <a:solidFill>
+                  <a:srgbClr val="242424"/>
                 </a:solidFill>
                 <a:latin typeface="Red Hat Text" pitchFamily="34" charset="0"/>
                 <a:ea typeface="Red Hat Text" pitchFamily="34" charset="-122"/>
                 <a:cs typeface="Red Hat Text" pitchFamily="34" charset="-120"/>
               </a:rPr>
-              <a:t>Figure 2.1 — The app's SDK exports OTLP to the Collector, which routes traces → Tempo, metrics → Mimir, logs → Loki, all viewed in Grafana.</a:t>
-            </a:r>
-            <a:endParaRPr lang="en-US" sz="1300" dirty="0"/>
+              <a:t>Telemetry can leave the SDK over OTLP/gRPC (4317) or OTLP/HTTP (4318). This talk defaults to HTTP on 4318.</a:t>
+            </a:r>
+            <a:endParaRPr lang="en-US" sz="1700" dirty="0"/>
+          </a:p>
+          <a:p>
+            <a:pPr algn="l" marL="342900" indent="-342900">
+              <a:lnSpc>
+                <a:spcPct val="115000"/>
+              </a:lnSpc>
+              <a:spcAft>
+                <a:spcPts val="600"/>
+              </a:spcAft>
+              <a:buSzPct val="100000"/>
+              <a:buChar char="●"/>
+            </a:pPr>
+            <a:r>
+              <a:rPr lang="en-US" sz="1700" dirty="0">
+                <a:solidFill>
+                  <a:srgbClr val="242424"/>
+                </a:solidFill>
+                <a:latin typeface="Red Hat Text" pitchFamily="34" charset="0"/>
+                <a:ea typeface="Red Hat Text" pitchFamily="34" charset="-122"/>
+                <a:cs typeface="Red Hat Text" pitchFamily="34" charset="-120"/>
+              </a:rPr>
+              <a:t>It is easier to debug — a plain curl can post to it — more firewall-friendly, and for a development workload the performance difference is negligible.</a:t>
+            </a:r>
+            <a:endParaRPr lang="en-US" sz="1700" dirty="0"/>
+          </a:p>
+          <a:p>
+            <a:pPr algn="l" marL="342900" indent="-342900">
+              <a:lnSpc>
+                <a:spcPct val="115000"/>
+              </a:lnSpc>
+              <a:spcAft>
+                <a:spcPts val="600"/>
+              </a:spcAft>
+              <a:buSzPct val="100000"/>
+              <a:buChar char="●"/>
+            </a:pPr>
+            <a:r>
+              <a:rPr lang="en-US" sz="1700" dirty="0">
+                <a:solidFill>
+                  <a:srgbClr val="242424"/>
+                </a:solidFill>
+                <a:latin typeface="Red Hat Text" pitchFamily="34" charset="0"/>
+                <a:ea typeface="Red Hat Text" pitchFamily="34" charset="-122"/>
+                <a:cs typeface="Red Hat Text" pitchFamily="34" charset="-120"/>
+              </a:rPr>
+              <a:t>The gRPC endpoint stays exposed, so switching is a one-line change to OTEL_EXPORTER_OTLP_PROTOCOL and the port. Endpoints in later chapters use the path-less form http://lgtm:4318, which the SDK completes per signal.</a:t>
+            </a:r>
+            <a:endParaRPr lang="en-US" sz="1700" dirty="0"/>
           </a:p>
         </p:txBody>
       </p:sp>

--- a/presentations/otel-lgtm-python.pptx
+++ b/presentations/otel-lgtm-python.pptx
@@ -39,9 +39,14 @@
     <p:sldId id="287" r:id="rId33"/>
     <p:sldId id="288" r:id="rId34"/>
     <p:sldId id="289" r:id="rId35"/>
+    <p:sldId id="290" r:id="rId36"/>
+    <p:sldId id="291" r:id="rId37"/>
+    <p:sldId id="292" r:id="rId38"/>
+    <p:sldId id="293" r:id="rId39"/>
+    <p:sldId id="294" r:id="rId40"/>
   </p:sldIdLst>
   <p:notesMasterIdLst>
-    <p:notesMasterId r:id="rId36"/>
+    <p:notesMasterId r:id="rId41"/>
   </p:notesMasterIdLst>
   <p:sldSz cx="12192000" cy="6858000"/>
   <p:notesSz cx="6858000" cy="12192000"/>
@@ -2911,7 +2916,7 @@
           <a:p>
             <a:r>
               <a:rPr lang="en-US" dirty="0"/>
-              <a:t>Re-walk the arc so the audience knows what they hold and what's coming. The foundation gave them the services and the model; this part gave them the three correlated signals, the cost of getting them, and the one-click view that ties them together; the pipeline part is about keeping all of it affordable at volume. Be honest about iteration state: r1.1 is authored against the target versions but not yet run end-to-end here, so it ships marked unverified, and a live rehearsal against the real stack is the next milestone. Point people at the repo: the tutorial mirrors these slides chapter for chapter, and every example has a runnable demo.sh.</a:t>
+              <a:t>The app emits everything; the Collector decides what survives and at what cost. This part keeps telemetry affordable at volume with tail sampling, then adds the fourth signal — profiling — that shows where the time goes inside a slow span.</a:t>
             </a:r>
             <a:endParaRPr lang="en-US" dirty="0"/>
           </a:p>
@@ -2935,6 +2940,446 @@
             <a:fld id="{F7021451-1387-4CA6-816F-3879F97B5CBC}" type="slidenum">
               <a:rPr lang="en-US"/>
               <a:t>34</a:t>
+            </a:fld>
+            <a:endParaRPr lang="en-US"/>
+          </a:p>
+        </p:txBody>
+      </p:sp>
+    </p:spTree>
+    <p:extLst>
+      <p:ext uri="{BB962C8B-B14F-4D97-AF65-F5344CB8AC3E}">
+        <p14:creationId xmlns:p14="http://schemas.microsoft.com/office/powerpoint/2010/main" val="1024086991"/>
+      </p:ext>
+    </p:extLst>
+  </p:cSld>
+  <p:clrMapOvr>
+    <a:masterClrMapping/>
+  </p:clrMapOvr>
+</p:notes>
+</file>
+
+<file path=ppt/notesSlides/notesSlide35.xml><?xml version="1.0" encoding="utf-8"?>
+<p:notes xmlns:a="http://schemas.openxmlformats.org/drawingml/2006/main" xmlns:r="http://schemas.openxmlformats.org/officeDocument/2006/relationships" xmlns:p="http://schemas.openxmlformats.org/presentationml/2006/main">
+  <p:cSld>
+    <p:spTree>
+      <p:nvGrpSpPr>
+        <p:cNvPr id="1" name=""/>
+        <p:cNvGrpSpPr/>
+        <p:nvPr/>
+      </p:nvGrpSpPr>
+      <p:grpSpPr>
+        <a:xfrm>
+          <a:off x="0" y="0"/>
+          <a:ext cx="0" cy="0"/>
+          <a:chOff x="0" y="0"/>
+          <a:chExt cx="0" cy="0"/>
+        </a:xfrm>
+      </p:grpSpPr>
+      <p:sp>
+        <p:nvSpPr>
+          <p:cNvPr id="2" name="Slide Image Placeholder 1"/>
+          <p:cNvSpPr>
+            <a:spLocks noGrp="1" noRot="1" noChangeAspect="1"/>
+          </p:cNvSpPr>
+          <p:nvPr>
+            <p:ph type="sldImg"/>
+          </p:nvPr>
+        </p:nvSpPr>
+        <p:spPr/>
+      </p:sp>
+      <p:sp>
+        <p:nvSpPr>
+          <p:cNvPr id="3" name="Notes Placeholder 2"/>
+          <p:cNvSpPr>
+            <a:spLocks noGrp="1"/>
+          </p:cNvSpPr>
+          <p:nvPr>
+            <p:ph type="body" idx="1"/>
+          </p:nvPr>
+        </p:nvSpPr>
+        <p:spPr/>
+        <p:txBody>
+          <a:bodyPr/>
+          <a:lstStyle/>
+          <a:p>
+            <a:r>
+              <a:rPr lang="en-US" dirty="0"/>
+              <a:t>Set up head-vs-tail visually before the policy slide. The cost of intelligence is memory: tail sampling must hold each in-flight trace until it knows how the trace turned out, then decide.</a:t>
+            </a:r>
+            <a:endParaRPr lang="en-US" dirty="0"/>
+          </a:p>
+        </p:txBody>
+      </p:sp>
+      <p:sp>
+        <p:nvSpPr>
+          <p:cNvPr id="4" name="Slide Number Placeholder 3"/>
+          <p:cNvSpPr>
+            <a:spLocks noGrp="1"/>
+          </p:cNvSpPr>
+          <p:nvPr>
+            <p:ph type="sldNum" sz="quarter" idx="10"/>
+          </p:nvPr>
+        </p:nvSpPr>
+        <p:spPr/>
+        <p:txBody>
+          <a:bodyPr/>
+          <a:lstStyle/>
+          <a:p>
+            <a:fld id="{F7021451-1387-4CA6-816F-3879F97B5CBC}" type="slidenum">
+              <a:rPr lang="en-US"/>
+              <a:t>35</a:t>
+            </a:fld>
+            <a:endParaRPr lang="en-US"/>
+          </a:p>
+        </p:txBody>
+      </p:sp>
+    </p:spTree>
+    <p:extLst>
+      <p:ext uri="{BB962C8B-B14F-4D97-AF65-F5344CB8AC3E}">
+        <p14:creationId xmlns:p14="http://schemas.microsoft.com/office/powerpoint/2010/main" val="1024086991"/>
+      </p:ext>
+    </p:extLst>
+  </p:cSld>
+  <p:clrMapOvr>
+    <a:masterClrMapping/>
+  </p:clrMapOvr>
+</p:notes>
+</file>
+
+<file path=ppt/notesSlides/notesSlide36.xml><?xml version="1.0" encoding="utf-8"?>
+<p:notes xmlns:a="http://schemas.openxmlformats.org/drawingml/2006/main" xmlns:r="http://schemas.openxmlformats.org/officeDocument/2006/relationships" xmlns:p="http://schemas.openxmlformats.org/presentationml/2006/main">
+  <p:cSld>
+    <p:spTree>
+      <p:nvGrpSpPr>
+        <p:cNvPr id="1" name=""/>
+        <p:cNvGrpSpPr/>
+        <p:nvPr/>
+      </p:nvGrpSpPr>
+      <p:grpSpPr>
+        <a:xfrm>
+          <a:off x="0" y="0"/>
+          <a:ext cx="0" cy="0"/>
+          <a:chOff x="0" y="0"/>
+          <a:chExt cx="0" cy="0"/>
+        </a:xfrm>
+      </p:grpSpPr>
+      <p:sp>
+        <p:nvSpPr>
+          <p:cNvPr id="2" name="Slide Image Placeholder 1"/>
+          <p:cNvSpPr>
+            <a:spLocks noGrp="1" noRot="1" noChangeAspect="1"/>
+          </p:cNvSpPr>
+          <p:nvPr>
+            <p:ph type="sldImg"/>
+          </p:nvPr>
+        </p:nvSpPr>
+        <p:spPr/>
+      </p:sp>
+      <p:sp>
+        <p:nvSpPr>
+          <p:cNvPr id="3" name="Notes Placeholder 2"/>
+          <p:cNvSpPr>
+            <a:spLocks noGrp="1"/>
+          </p:cNvSpPr>
+          <p:nvPr>
+            <p:ph type="body" idx="1"/>
+          </p:nvPr>
+        </p:nvSpPr>
+        <p:spPr/>
+        <p:txBody>
+          <a:bodyPr/>
+          <a:lstStyle/>
+          <a:p>
+            <a:r>
+              <a:rPr lang="en-US" dirty="0"/>
+              <a:t>The headline trade: you pay in Collector memory for the ability to keep a trace based on how it turned out. decision_wait holds traces until trailing spans arrive; num_traces caps the buffer so the Collector drops new traces rather than running out of memory. Stress that the app is deliberately not in the sampling business — that separation is why the policy changes without a redeploy.</a:t>
+            </a:r>
+            <a:endParaRPr lang="en-US" dirty="0"/>
+          </a:p>
+        </p:txBody>
+      </p:sp>
+      <p:sp>
+        <p:nvSpPr>
+          <p:cNvPr id="4" name="Slide Number Placeholder 3"/>
+          <p:cNvSpPr>
+            <a:spLocks noGrp="1"/>
+          </p:cNvSpPr>
+          <p:nvPr>
+            <p:ph type="sldNum" sz="quarter" idx="10"/>
+          </p:nvPr>
+        </p:nvSpPr>
+        <p:spPr/>
+        <p:txBody>
+          <a:bodyPr/>
+          <a:lstStyle/>
+          <a:p>
+            <a:fld id="{F7021451-1387-4CA6-816F-3879F97B5CBC}" type="slidenum">
+              <a:rPr lang="en-US"/>
+              <a:t>36</a:t>
+            </a:fld>
+            <a:endParaRPr lang="en-US"/>
+          </a:p>
+        </p:txBody>
+      </p:sp>
+    </p:spTree>
+    <p:extLst>
+      <p:ext uri="{BB962C8B-B14F-4D97-AF65-F5344CB8AC3E}">
+        <p14:creationId xmlns:p14="http://schemas.microsoft.com/office/powerpoint/2010/main" val="1024086991"/>
+      </p:ext>
+    </p:extLst>
+  </p:cSld>
+  <p:clrMapOvr>
+    <a:masterClrMapping/>
+  </p:clrMapOvr>
+</p:notes>
+</file>
+
+<file path=ppt/notesSlides/notesSlide37.xml><?xml version="1.0" encoding="utf-8"?>
+<p:notes xmlns:a="http://schemas.openxmlformats.org/drawingml/2006/main" xmlns:r="http://schemas.openxmlformats.org/officeDocument/2006/relationships" xmlns:p="http://schemas.openxmlformats.org/presentationml/2006/main">
+  <p:cSld>
+    <p:spTree>
+      <p:nvGrpSpPr>
+        <p:cNvPr id="1" name=""/>
+        <p:cNvGrpSpPr/>
+        <p:nvPr/>
+      </p:nvGrpSpPr>
+      <p:grpSpPr>
+        <a:xfrm>
+          <a:off x="0" y="0"/>
+          <a:ext cx="0" cy="0"/>
+          <a:chOff x="0" y="0"/>
+          <a:chExt cx="0" cy="0"/>
+        </a:xfrm>
+      </p:grpSpPr>
+      <p:sp>
+        <p:nvSpPr>
+          <p:cNvPr id="2" name="Slide Image Placeholder 1"/>
+          <p:cNvSpPr>
+            <a:spLocks noGrp="1" noRot="1" noChangeAspect="1"/>
+          </p:cNvSpPr>
+          <p:nvPr>
+            <p:ph type="sldImg"/>
+          </p:nvPr>
+        </p:nvSpPr>
+        <p:spPr/>
+      </p:sp>
+      <p:sp>
+        <p:nvSpPr>
+          <p:cNvPr id="3" name="Notes Placeholder 2"/>
+          <p:cNvSpPr>
+            <a:spLocks noGrp="1"/>
+          </p:cNvSpPr>
+          <p:nvPr>
+            <p:ph type="body" idx="1"/>
+          </p:nvPr>
+        </p:nvSpPr>
+        <p:spPr/>
+        <p:txBody>
+          <a:bodyPr/>
+          <a:lstStyle/>
+          <a:p>
+            <a:r>
+              <a:rPr lang="en-US" dirty="0"/>
+              <a:t>Traces localise the slow span across services; the profile localises what was slow inside one. The link is service + time window, not a shared id — the same correlation pattern as trace→logs, one signal over.</a:t>
+            </a:r>
+            <a:endParaRPr lang="en-US" dirty="0"/>
+          </a:p>
+        </p:txBody>
+      </p:sp>
+      <p:sp>
+        <p:nvSpPr>
+          <p:cNvPr id="4" name="Slide Number Placeholder 3"/>
+          <p:cNvSpPr>
+            <a:spLocks noGrp="1"/>
+          </p:cNvSpPr>
+          <p:nvPr>
+            <p:ph type="sldNum" sz="quarter" idx="10"/>
+          </p:nvPr>
+        </p:nvSpPr>
+        <p:spPr/>
+        <p:txBody>
+          <a:bodyPr/>
+          <a:lstStyle/>
+          <a:p>
+            <a:fld id="{F7021451-1387-4CA6-816F-3879F97B5CBC}" type="slidenum">
+              <a:rPr lang="en-US"/>
+              <a:t>37</a:t>
+            </a:fld>
+            <a:endParaRPr lang="en-US"/>
+          </a:p>
+        </p:txBody>
+      </p:sp>
+    </p:spTree>
+    <p:extLst>
+      <p:ext uri="{BB962C8B-B14F-4D97-AF65-F5344CB8AC3E}">
+        <p14:creationId xmlns:p14="http://schemas.microsoft.com/office/powerpoint/2010/main" val="1024086991"/>
+      </p:ext>
+    </p:extLst>
+  </p:cSld>
+  <p:clrMapOvr>
+    <a:masterClrMapping/>
+  </p:clrMapOvr>
+</p:notes>
+</file>
+
+<file path=ppt/notesSlides/notesSlide38.xml><?xml version="1.0" encoding="utf-8"?>
+<p:notes xmlns:a="http://schemas.openxmlformats.org/drawingml/2006/main" xmlns:r="http://schemas.openxmlformats.org/officeDocument/2006/relationships" xmlns:p="http://schemas.openxmlformats.org/presentationml/2006/main">
+  <p:cSld>
+    <p:spTree>
+      <p:nvGrpSpPr>
+        <p:cNvPr id="1" name=""/>
+        <p:cNvGrpSpPr/>
+        <p:nvPr/>
+      </p:nvGrpSpPr>
+      <p:grpSpPr>
+        <a:xfrm>
+          <a:off x="0" y="0"/>
+          <a:ext cx="0" cy="0"/>
+          <a:chOff x="0" y="0"/>
+          <a:chExt cx="0" cy="0"/>
+        </a:xfrm>
+      </p:grpSpPr>
+      <p:sp>
+        <p:nvSpPr>
+          <p:cNvPr id="2" name="Slide Image Placeholder 1"/>
+          <p:cNvSpPr>
+            <a:spLocks noGrp="1" noRot="1" noChangeAspect="1"/>
+          </p:cNvSpPr>
+          <p:nvPr>
+            <p:ph type="sldImg"/>
+          </p:nvPr>
+        </p:nvSpPr>
+        <p:spPr/>
+      </p:sp>
+      <p:sp>
+        <p:nvSpPr>
+          <p:cNvPr id="3" name="Notes Placeholder 2"/>
+          <p:cNvSpPr>
+            <a:spLocks noGrp="1"/>
+          </p:cNvSpPr>
+          <p:nvPr>
+            <p:ph type="body" idx="1"/>
+          </p:nvPr>
+        </p:nvSpPr>
+        <p:spPr/>
+        <p:txBody>
+          <a:bodyPr/>
+          <a:lstStyle/>
+          <a:p>
+            <a:r>
+              <a:rPr lang="en-US" dirty="0"/>
+              <a:t>Be candid that this chapter is a sketch to validate, not a settled recipe. The good news is the backend ships in the same image; the friction is all on the Python client side and the version-sensitive wiring. obs.profiling is an optional, gated hook that no-ops unless PYROSCOPE_ADDRESS is set.</a:t>
+            </a:r>
+            <a:endParaRPr lang="en-US" dirty="0"/>
+          </a:p>
+        </p:txBody>
+      </p:sp>
+      <p:sp>
+        <p:nvSpPr>
+          <p:cNvPr id="4" name="Slide Number Placeholder 3"/>
+          <p:cNvSpPr>
+            <a:spLocks noGrp="1"/>
+          </p:cNvSpPr>
+          <p:nvPr>
+            <p:ph type="sldNum" sz="quarter" idx="10"/>
+          </p:nvPr>
+        </p:nvSpPr>
+        <p:spPr/>
+        <p:txBody>
+          <a:bodyPr/>
+          <a:lstStyle/>
+          <a:p>
+            <a:fld id="{F7021451-1387-4CA6-816F-3879F97B5CBC}" type="slidenum">
+              <a:rPr lang="en-US"/>
+              <a:t>38</a:t>
+            </a:fld>
+            <a:endParaRPr lang="en-US"/>
+          </a:p>
+        </p:txBody>
+      </p:sp>
+    </p:spTree>
+    <p:extLst>
+      <p:ext uri="{BB962C8B-B14F-4D97-AF65-F5344CB8AC3E}">
+        <p14:creationId xmlns:p14="http://schemas.microsoft.com/office/powerpoint/2010/main" val="1024086991"/>
+      </p:ext>
+    </p:extLst>
+  </p:cSld>
+  <p:clrMapOvr>
+    <a:masterClrMapping/>
+  </p:clrMapOvr>
+</p:notes>
+</file>
+
+<file path=ppt/notesSlides/notesSlide39.xml><?xml version="1.0" encoding="utf-8"?>
+<p:notes xmlns:a="http://schemas.openxmlformats.org/drawingml/2006/main" xmlns:r="http://schemas.openxmlformats.org/officeDocument/2006/relationships" xmlns:p="http://schemas.openxmlformats.org/presentationml/2006/main">
+  <p:cSld>
+    <p:spTree>
+      <p:nvGrpSpPr>
+        <p:cNvPr id="1" name=""/>
+        <p:cNvGrpSpPr/>
+        <p:nvPr/>
+      </p:nvGrpSpPr>
+      <p:grpSpPr>
+        <a:xfrm>
+          <a:off x="0" y="0"/>
+          <a:ext cx="0" cy="0"/>
+          <a:chOff x="0" y="0"/>
+          <a:chExt cx="0" cy="0"/>
+        </a:xfrm>
+      </p:grpSpPr>
+      <p:sp>
+        <p:nvSpPr>
+          <p:cNvPr id="2" name="Slide Image Placeholder 1"/>
+          <p:cNvSpPr>
+            <a:spLocks noGrp="1" noRot="1" noChangeAspect="1"/>
+          </p:cNvSpPr>
+          <p:nvPr>
+            <p:ph type="sldImg"/>
+          </p:nvPr>
+        </p:nvSpPr>
+        <p:spPr/>
+      </p:sp>
+      <p:sp>
+        <p:nvSpPr>
+          <p:cNvPr id="3" name="Notes Placeholder 2"/>
+          <p:cNvSpPr>
+            <a:spLocks noGrp="1"/>
+          </p:cNvSpPr>
+          <p:nvPr>
+            <p:ph type="body" idx="1"/>
+          </p:nvPr>
+        </p:nvSpPr>
+        <p:spPr/>
+        <p:txBody>
+          <a:bodyPr/>
+          <a:lstStyle/>
+          <a:p>
+            <a:r>
+              <a:rPr lang="en-US" dirty="0"/>
+              <a:t>Re-walk the whole arc so the audience knows what they hold. Foundations gave them the services and the model; the three signals gave them the correlated signals, their cost, and the one-click view; the pipeline kept it affordable at volume and added the fourth signal. Be honest about iteration state: this is authored against the target versions but not yet run end-to-end here, so it ships marked unverified, and a live rehearsal is the next milestone. Point people at the repo — the tutorial mirrors these slides chapter for chapter, and every example has a runnable demo.sh.</a:t>
+            </a:r>
+            <a:endParaRPr lang="en-US" dirty="0"/>
+          </a:p>
+        </p:txBody>
+      </p:sp>
+      <p:sp>
+        <p:nvSpPr>
+          <p:cNvPr id="4" name="Slide Number Placeholder 3"/>
+          <p:cNvSpPr>
+            <a:spLocks noGrp="1"/>
+          </p:cNvSpPr>
+          <p:nvPr>
+            <p:ph type="sldNum" sz="quarter" idx="10"/>
+          </p:nvPr>
+        </p:nvSpPr>
+        <p:spPr/>
+        <p:txBody>
+          <a:bodyPr/>
+          <a:lstStyle/>
+          <a:p>
+            <a:fld id="{F7021451-1387-4CA6-816F-3879F97B5CBC}" type="slidenum">
+              <a:rPr lang="en-US"/>
+              <a:t>39</a:t>
             </a:fld>
             <a:endParaRPr lang="en-US"/>
           </a:p>
@@ -4003,7 +4448,7 @@
                 <a:ea typeface="Red Hat Mono" pitchFamily="34" charset="-122"/>
                 <a:cs typeface="Red Hat Mono" pitchFamily="34" charset="-120"/>
               </a:rPr>
-              <a:t>r01.0</a:t>
+              <a:t>r2.0</a:t>
             </a:r>
             <a:endParaRPr lang="en-US" sz="1100" dirty="0"/>
           </a:p>
@@ -7897,7 +8342,7 @@
                 <a:ea typeface="Overpass" pitchFamily="34" charset="-122"/>
                 <a:cs typeface="Overpass" pitchFamily="34" charset="-120"/>
               </a:rPr>
-              <a:t>Traces, metrics, logs — and the thread that ties them</a:t>
+              <a:t>Three signals, one thread</a:t>
             </a:r>
             <a:endParaRPr lang="en-US" sz="4400" dirty="0"/>
           </a:p>
@@ -12028,6 +12473,13 @@
 <file path=ppt/slides/slide34.xml><?xml version="1.0" encoding="utf-8"?>
 <p:sld xmlns:a="http://schemas.openxmlformats.org/drawingml/2006/main" xmlns:r="http://schemas.openxmlformats.org/officeDocument/2006/relationships" xmlns:p="http://schemas.openxmlformats.org/presentationml/2006/main">
   <p:cSld name="Slide 34">
+    <p:bg>
+      <p:bgPr>
+        <a:solidFill>
+          <a:srgbClr val="AB0000"/>
+        </a:solidFill>
+      </p:bgPr>
+    </p:bg>
     <p:spTree>
       <p:nvGrpSpPr>
         <p:cNvPr id="1" name=""/>
@@ -12042,48 +12494,9 @@
           <a:chExt cx="0" cy="0"/>
         </a:xfrm>
       </p:grpSpPr>
-      <p:sp>
-        <p:nvSpPr>
-          <p:cNvPr id="2" name="Text 0"/>
-          <p:cNvSpPr/>
-          <p:nvPr/>
-        </p:nvSpPr>
-        <p:spPr>
-          <a:xfrm>
-            <a:off x="566928" y="6364224"/>
-            <a:ext cx="914400" cy="274320"/>
-          </a:xfrm>
-          <a:prstGeom prst="rect">
-            <a:avLst/>
-          </a:prstGeom>
-          <a:noFill/>
-          <a:ln/>
-        </p:spPr>
-        <p:txBody>
-          <a:bodyPr wrap="square" rtlCol="0" anchor="ctr"/>
-          <a:lstStyle/>
-          <a:p>
-            <a:pPr algn="l" indent="0" marL="0">
-              <a:buNone/>
-            </a:pPr>
-            <a:r>
-              <a:rPr lang="en-US" sz="1000" dirty="0">
-                <a:solidFill>
-                  <a:srgbClr val="8A8A8A"/>
-                </a:solidFill>
-                <a:latin typeface="Red Hat Text" pitchFamily="34" charset="0"/>
-                <a:ea typeface="Red Hat Text" pitchFamily="34" charset="-122"/>
-                <a:cs typeface="Red Hat Text" pitchFamily="34" charset="-120"/>
-              </a:rPr>
-              <a:t>34</a:t>
-            </a:r>
-            <a:endParaRPr lang="en-US" sz="1000" dirty="0"/>
-          </a:p>
-        </p:txBody>
-      </p:sp>
       <p:pic>
         <p:nvPicPr>
-          <p:cNvPr id="3" name="Image 0" descr="./assets/logo-candidate-2.png">    </p:cNvPr>
+          <p:cNvPr id="2" name="Image 0" descr="./assets/section-panel.png">    </p:cNvPr>
           <p:cNvPicPr>
             <a:picLocks noChangeAspect="1"/>
           </p:cNvPicPr>
@@ -12097,8 +12510,8 @@
         </p:blipFill>
         <p:spPr>
           <a:xfrm>
-            <a:off x="10561320" y="6355080"/>
-            <a:ext cx="1033272" cy="246888"/>
+            <a:off x="0" y="0"/>
+            <a:ext cx="12191695" cy="6858000"/>
           </a:xfrm>
           <a:prstGeom prst="rect">
             <a:avLst/>
@@ -12107,14 +12520,14 @@
       </p:pic>
       <p:sp>
         <p:nvSpPr>
-          <p:cNvPr id="4" name="Text 1"/>
+          <p:cNvPr id="3" name="Text 0"/>
           <p:cNvSpPr/>
           <p:nvPr/>
         </p:nvSpPr>
         <p:spPr>
           <a:xfrm>
-            <a:off x="566928" y="384048"/>
-            <a:ext cx="11055096" cy="292608"/>
+            <a:off x="5733288" y="2121408"/>
+            <a:ext cx="5852160" cy="457200"/>
           </a:xfrm>
           <a:prstGeom prst="rect">
             <a:avLst/>
@@ -12130,30 +12543,30 @@
               <a:buNone/>
             </a:pPr>
             <a:r>
-              <a:rPr lang="en-US" sz="1200" b="1" spc="400" kern="0" dirty="0">
-                <a:solidFill>
-                  <a:srgbClr val="EE0000"/>
+              <a:rPr lang="en-US" sz="2200" b="1" spc="600" kern="0" dirty="0">
+                <a:solidFill>
+                  <a:srgbClr val="FFFFFF"/>
                 </a:solidFill>
                 <a:latin typeface="Overpass" pitchFamily="34" charset="0"/>
                 <a:ea typeface="Overpass" pitchFamily="34" charset="-122"/>
                 <a:cs typeface="Overpass" pitchFamily="34" charset="-120"/>
               </a:rPr>
-              <a:t>THE THREE SIGNALS</a:t>
-            </a:r>
-            <a:endParaRPr lang="en-US" sz="1200" dirty="0"/>
-          </a:p>
-        </p:txBody>
-      </p:sp>
-      <p:sp>
-        <p:nvSpPr>
-          <p:cNvPr id="5" name="Text 2"/>
+              <a:t>THE PIPELINE</a:t>
+            </a:r>
+            <a:endParaRPr lang="en-US" sz="2200" dirty="0"/>
+          </a:p>
+        </p:txBody>
+      </p:sp>
+      <p:sp>
+        <p:nvSpPr>
+          <p:cNvPr id="4" name="Text 1"/>
           <p:cNvSpPr/>
           <p:nvPr/>
         </p:nvSpPr>
         <p:spPr>
           <a:xfrm>
-            <a:off x="566928" y="676656"/>
-            <a:ext cx="11055096" cy="1005840"/>
+            <a:off x="5705856" y="2596896"/>
+            <a:ext cx="6126480" cy="1463040"/>
           </a:xfrm>
           <a:prstGeom prst="rect">
             <a:avLst/>
@@ -12169,15 +12582,472 @@
               <a:buNone/>
             </a:pPr>
             <a:r>
-              <a:rPr lang="en-US" sz="3000" b="1" dirty="0">
-                <a:solidFill>
-                  <a:srgbClr val="151515"/>
+              <a:rPr lang="en-US" sz="4400" b="1" dirty="0">
+                <a:solidFill>
+                  <a:srgbClr val="FFFFFF"/>
                 </a:solidFill>
                 <a:latin typeface="Overpass" pitchFamily="34" charset="0"/>
                 <a:ea typeface="Overpass" pitchFamily="34" charset="-122"/>
                 <a:cs typeface="Overpass" pitchFamily="34" charset="-120"/>
               </a:rPr>
-              <a:t>Where this goes next</a:t>
+              <a:t>Decide in the Collector</a:t>
+            </a:r>
+            <a:endParaRPr lang="en-US" sz="4400" dirty="0"/>
+          </a:p>
+        </p:txBody>
+      </p:sp>
+      <p:sp>
+        <p:nvSpPr>
+          <p:cNvPr id="5" name="Text 2"/>
+          <p:cNvSpPr/>
+          <p:nvPr/>
+        </p:nvSpPr>
+        <p:spPr>
+          <a:xfrm>
+            <a:off x="5733288" y="4160520"/>
+            <a:ext cx="6035040" cy="731520"/>
+          </a:xfrm>
+          <a:prstGeom prst="rect">
+            <a:avLst/>
+          </a:prstGeom>
+          <a:noFill/>
+          <a:ln/>
+        </p:spPr>
+        <p:txBody>
+          <a:bodyPr wrap="square" rtlCol="0" anchor="t"/>
+          <a:lstStyle/>
+          <a:p>
+            <a:pPr algn="l" indent="0" marL="0">
+              <a:buNone/>
+            </a:pPr>
+            <a:r>
+              <a:rPr lang="en-US" sz="1600" i="1" dirty="0">
+                <a:solidFill>
+                  <a:srgbClr val="FFD9D9"/>
+                </a:solidFill>
+                <a:latin typeface="Red Hat Text" pitchFamily="34" charset="0"/>
+                <a:ea typeface="Red Hat Text" pitchFamily="34" charset="-122"/>
+                <a:cs typeface="Red Hat Text" pitchFamily="34" charset="-120"/>
+              </a:rPr>
+              <a:t>Sampling · Continuous profiling</a:t>
+            </a:r>
+            <a:endParaRPr lang="en-US" sz="1600" dirty="0"/>
+          </a:p>
+        </p:txBody>
+      </p:sp>
+      <p:pic>
+        <p:nvPicPr>
+          <p:cNvPr id="6" name="Image 1" descr="./assets/redhat-logo-white.png">    </p:cNvPr>
+          <p:cNvPicPr>
+            <a:picLocks noChangeAspect="1"/>
+          </p:cNvPicPr>
+          <p:nvPr/>
+        </p:nvPicPr>
+        <p:blipFill>
+          <a:blip r:embed="rId2"/>
+          <a:stretch>
+            <a:fillRect/>
+          </a:stretch>
+        </p:blipFill>
+        <p:spPr>
+          <a:xfrm>
+            <a:off x="10442448" y="6291072"/>
+            <a:ext cx="1216152" cy="283464"/>
+          </a:xfrm>
+          <a:prstGeom prst="rect">
+            <a:avLst/>
+          </a:prstGeom>
+        </p:spPr>
+      </p:pic>
+    </p:spTree>
+  </p:cSld>
+  <p:clrMapOvr>
+    <a:masterClrMapping/>
+  </p:clrMapOvr>
+</p:sld>
+</file>
+
+<file path=ppt/slides/slide35.xml><?xml version="1.0" encoding="utf-8"?>
+<p:sld xmlns:a="http://schemas.openxmlformats.org/drawingml/2006/main" xmlns:r="http://schemas.openxmlformats.org/officeDocument/2006/relationships" xmlns:p="http://schemas.openxmlformats.org/presentationml/2006/main">
+  <p:cSld name="Slide 35">
+    <p:spTree>
+      <p:nvGrpSpPr>
+        <p:cNvPr id="1" name=""/>
+        <p:cNvGrpSpPr/>
+        <p:nvPr/>
+      </p:nvGrpSpPr>
+      <p:grpSpPr>
+        <a:xfrm>
+          <a:off x="0" y="0"/>
+          <a:ext cx="0" cy="0"/>
+          <a:chOff x="0" y="0"/>
+          <a:chExt cx="0" cy="0"/>
+        </a:xfrm>
+      </p:grpSpPr>
+      <p:sp>
+        <p:nvSpPr>
+          <p:cNvPr id="2" name="Text 0"/>
+          <p:cNvSpPr/>
+          <p:nvPr/>
+        </p:nvSpPr>
+        <p:spPr>
+          <a:xfrm>
+            <a:off x="566928" y="6364224"/>
+            <a:ext cx="914400" cy="274320"/>
+          </a:xfrm>
+          <a:prstGeom prst="rect">
+            <a:avLst/>
+          </a:prstGeom>
+          <a:noFill/>
+          <a:ln/>
+        </p:spPr>
+        <p:txBody>
+          <a:bodyPr wrap="square" rtlCol="0" anchor="ctr"/>
+          <a:lstStyle/>
+          <a:p>
+            <a:pPr algn="l" indent="0" marL="0">
+              <a:buNone/>
+            </a:pPr>
+            <a:r>
+              <a:rPr lang="en-US" sz="1000" dirty="0">
+                <a:solidFill>
+                  <a:srgbClr val="8A8A8A"/>
+                </a:solidFill>
+                <a:latin typeface="Red Hat Text" pitchFamily="34" charset="0"/>
+                <a:ea typeface="Red Hat Text" pitchFamily="34" charset="-122"/>
+                <a:cs typeface="Red Hat Text" pitchFamily="34" charset="-120"/>
+              </a:rPr>
+              <a:t>35</a:t>
+            </a:r>
+            <a:endParaRPr lang="en-US" sz="1000" dirty="0"/>
+          </a:p>
+        </p:txBody>
+      </p:sp>
+      <p:pic>
+        <p:nvPicPr>
+          <p:cNvPr id="3" name="Image 0" descr="./assets/logo-candidate-2.png">    </p:cNvPr>
+          <p:cNvPicPr>
+            <a:picLocks noChangeAspect="1"/>
+          </p:cNvPicPr>
+          <p:nvPr/>
+        </p:nvPicPr>
+        <p:blipFill>
+          <a:blip r:embed="rId1"/>
+          <a:stretch>
+            <a:fillRect/>
+          </a:stretch>
+        </p:blipFill>
+        <p:spPr>
+          <a:xfrm>
+            <a:off x="10561320" y="6355080"/>
+            <a:ext cx="1033272" cy="246888"/>
+          </a:xfrm>
+          <a:prstGeom prst="rect">
+            <a:avLst/>
+          </a:prstGeom>
+        </p:spPr>
+      </p:pic>
+      <p:sp>
+        <p:nvSpPr>
+          <p:cNvPr id="4" name="Text 1"/>
+          <p:cNvSpPr/>
+          <p:nvPr/>
+        </p:nvSpPr>
+        <p:spPr>
+          <a:xfrm>
+            <a:off x="566928" y="384048"/>
+            <a:ext cx="11055096" cy="292608"/>
+          </a:xfrm>
+          <a:prstGeom prst="rect">
+            <a:avLst/>
+          </a:prstGeom>
+          <a:noFill/>
+          <a:ln/>
+        </p:spPr>
+        <p:txBody>
+          <a:bodyPr wrap="square" rtlCol="0" anchor="ctr"/>
+          <a:lstStyle/>
+          <a:p>
+            <a:pPr algn="l" indent="0" marL="0">
+              <a:buNone/>
+            </a:pPr>
+            <a:r>
+              <a:rPr lang="en-US" sz="1200" b="1" spc="400" kern="0" dirty="0">
+                <a:solidFill>
+                  <a:srgbClr val="EE0000"/>
+                </a:solidFill>
+                <a:latin typeface="Overpass" pitchFamily="34" charset="0"/>
+                <a:ea typeface="Overpass" pitchFamily="34" charset="-122"/>
+                <a:cs typeface="Overpass" pitchFamily="34" charset="-120"/>
+              </a:rPr>
+              <a:t>THE PIPELINE · SAMPLING</a:t>
+            </a:r>
+            <a:endParaRPr lang="en-US" sz="1200" dirty="0"/>
+          </a:p>
+        </p:txBody>
+      </p:sp>
+      <p:sp>
+        <p:nvSpPr>
+          <p:cNvPr id="5" name="Text 2"/>
+          <p:cNvSpPr/>
+          <p:nvPr/>
+        </p:nvSpPr>
+        <p:spPr>
+          <a:xfrm>
+            <a:off x="566928" y="676656"/>
+            <a:ext cx="11055096" cy="1005840"/>
+          </a:xfrm>
+          <a:prstGeom prst="rect">
+            <a:avLst/>
+          </a:prstGeom>
+          <a:noFill/>
+          <a:ln/>
+        </p:spPr>
+        <p:txBody>
+          <a:bodyPr wrap="square" rtlCol="0" anchor="t"/>
+          <a:lstStyle/>
+          <a:p>
+            <a:pPr algn="l" indent="0" marL="0">
+              <a:buNone/>
+            </a:pPr>
+            <a:r>
+              <a:rPr lang="en-US" sz="3000" b="1" dirty="0">
+                <a:solidFill>
+                  <a:srgbClr val="151515"/>
+                </a:solidFill>
+                <a:latin typeface="Overpass" pitchFamily="34" charset="0"/>
+                <a:ea typeface="Overpass" pitchFamily="34" charset="-122"/>
+                <a:cs typeface="Overpass" pitchFamily="34" charset="-120"/>
+              </a:rPr>
+              <a:t>Where you decide what to keep</a:t>
+            </a:r>
+            <a:endParaRPr lang="en-US" sz="3000" dirty="0"/>
+          </a:p>
+        </p:txBody>
+      </p:sp>
+      <p:pic>
+        <p:nvPicPr>
+          <p:cNvPr id="6" name="Image 1" descr="./png/fig-09-sampling-location.png">    </p:cNvPr>
+          <p:cNvPicPr>
+            <a:picLocks noChangeAspect="1"/>
+          </p:cNvPicPr>
+          <p:nvPr/>
+        </p:nvPicPr>
+        <p:blipFill>
+          <a:blip r:embed="rId2"/>
+          <a:srcRect l="0" r="0" t="0" b="0"/>
+          <a:stretch/>
+        </p:blipFill>
+        <p:spPr>
+          <a:xfrm>
+            <a:off x="1645920" y="1600200"/>
+            <a:ext cx="8906256" cy="4343400"/>
+          </a:xfrm>
+          <a:prstGeom prst="rect">
+            <a:avLst/>
+          </a:prstGeom>
+        </p:spPr>
+      </p:pic>
+      <p:sp>
+        <p:nvSpPr>
+          <p:cNvPr id="7" name="Text 3"/>
+          <p:cNvSpPr/>
+          <p:nvPr/>
+        </p:nvSpPr>
+        <p:spPr>
+          <a:xfrm>
+            <a:off x="566928" y="5943600"/>
+            <a:ext cx="11055096" cy="310896"/>
+          </a:xfrm>
+          <a:prstGeom prst="rect">
+            <a:avLst/>
+          </a:prstGeom>
+          <a:noFill/>
+          <a:ln/>
+        </p:spPr>
+        <p:txBody>
+          <a:bodyPr wrap="square" rtlCol="0" anchor="ctr"/>
+          <a:lstStyle/>
+          <a:p>
+            <a:pPr algn="ctr" indent="0" marL="0">
+              <a:buNone/>
+            </a:pPr>
+            <a:r>
+              <a:rPr lang="en-US" sz="1300" i="1" dirty="0">
+                <a:solidFill>
+                  <a:srgbClr val="5A5A5A"/>
+                </a:solidFill>
+                <a:latin typeface="Red Hat Text" pitchFamily="34" charset="0"/>
+                <a:ea typeface="Red Hat Text" pitchFamily="34" charset="-122"/>
+                <a:cs typeface="Red Hat Text" pitchFamily="34" charset="-120"/>
+              </a:rPr>
+              <a:t>Figure 10.1 — Head sampling decides at the SDK, cheap and blind; tail sampling buffers the whole trace in the Collector, then keeps errors, slow, and critical routes.</a:t>
+            </a:r>
+            <a:endParaRPr lang="en-US" sz="1300" dirty="0"/>
+          </a:p>
+        </p:txBody>
+      </p:sp>
+    </p:spTree>
+  </p:cSld>
+  <p:clrMapOvr>
+    <a:masterClrMapping/>
+  </p:clrMapOvr>
+</p:sld>
+</file>
+
+<file path=ppt/slides/slide36.xml><?xml version="1.0" encoding="utf-8"?>
+<p:sld xmlns:a="http://schemas.openxmlformats.org/drawingml/2006/main" xmlns:r="http://schemas.openxmlformats.org/officeDocument/2006/relationships" xmlns:p="http://schemas.openxmlformats.org/presentationml/2006/main">
+  <p:cSld name="Slide 36">
+    <p:spTree>
+      <p:nvGrpSpPr>
+        <p:cNvPr id="1" name=""/>
+        <p:cNvGrpSpPr/>
+        <p:nvPr/>
+      </p:nvGrpSpPr>
+      <p:grpSpPr>
+        <a:xfrm>
+          <a:off x="0" y="0"/>
+          <a:ext cx="0" cy="0"/>
+          <a:chOff x="0" y="0"/>
+          <a:chExt cx="0" cy="0"/>
+        </a:xfrm>
+      </p:grpSpPr>
+      <p:sp>
+        <p:nvSpPr>
+          <p:cNvPr id="2" name="Text 0"/>
+          <p:cNvSpPr/>
+          <p:nvPr/>
+        </p:nvSpPr>
+        <p:spPr>
+          <a:xfrm>
+            <a:off x="566928" y="6364224"/>
+            <a:ext cx="914400" cy="274320"/>
+          </a:xfrm>
+          <a:prstGeom prst="rect">
+            <a:avLst/>
+          </a:prstGeom>
+          <a:noFill/>
+          <a:ln/>
+        </p:spPr>
+        <p:txBody>
+          <a:bodyPr wrap="square" rtlCol="0" anchor="ctr"/>
+          <a:lstStyle/>
+          <a:p>
+            <a:pPr algn="l" indent="0" marL="0">
+              <a:buNone/>
+            </a:pPr>
+            <a:r>
+              <a:rPr lang="en-US" sz="1000" dirty="0">
+                <a:solidFill>
+                  <a:srgbClr val="8A8A8A"/>
+                </a:solidFill>
+                <a:latin typeface="Red Hat Text" pitchFamily="34" charset="0"/>
+                <a:ea typeface="Red Hat Text" pitchFamily="34" charset="-122"/>
+                <a:cs typeface="Red Hat Text" pitchFamily="34" charset="-120"/>
+              </a:rPr>
+              <a:t>36</a:t>
+            </a:r>
+            <a:endParaRPr lang="en-US" sz="1000" dirty="0"/>
+          </a:p>
+        </p:txBody>
+      </p:sp>
+      <p:pic>
+        <p:nvPicPr>
+          <p:cNvPr id="3" name="Image 0" descr="./assets/logo-candidate-2.png">    </p:cNvPr>
+          <p:cNvPicPr>
+            <a:picLocks noChangeAspect="1"/>
+          </p:cNvPicPr>
+          <p:nvPr/>
+        </p:nvPicPr>
+        <p:blipFill>
+          <a:blip r:embed="rId1"/>
+          <a:stretch>
+            <a:fillRect/>
+          </a:stretch>
+        </p:blipFill>
+        <p:spPr>
+          <a:xfrm>
+            <a:off x="10561320" y="6355080"/>
+            <a:ext cx="1033272" cy="246888"/>
+          </a:xfrm>
+          <a:prstGeom prst="rect">
+            <a:avLst/>
+          </a:prstGeom>
+        </p:spPr>
+      </p:pic>
+      <p:sp>
+        <p:nvSpPr>
+          <p:cNvPr id="4" name="Text 1"/>
+          <p:cNvSpPr/>
+          <p:nvPr/>
+        </p:nvSpPr>
+        <p:spPr>
+          <a:xfrm>
+            <a:off x="566928" y="384048"/>
+            <a:ext cx="11055096" cy="292608"/>
+          </a:xfrm>
+          <a:prstGeom prst="rect">
+            <a:avLst/>
+          </a:prstGeom>
+          <a:noFill/>
+          <a:ln/>
+        </p:spPr>
+        <p:txBody>
+          <a:bodyPr wrap="square" rtlCol="0" anchor="ctr"/>
+          <a:lstStyle/>
+          <a:p>
+            <a:pPr algn="l" indent="0" marL="0">
+              <a:buNone/>
+            </a:pPr>
+            <a:r>
+              <a:rPr lang="en-US" sz="1200" b="1" spc="400" kern="0" dirty="0">
+                <a:solidFill>
+                  <a:srgbClr val="EE0000"/>
+                </a:solidFill>
+                <a:latin typeface="Overpass" pitchFamily="34" charset="0"/>
+                <a:ea typeface="Overpass" pitchFamily="34" charset="-122"/>
+                <a:cs typeface="Overpass" pitchFamily="34" charset="-120"/>
+              </a:rPr>
+              <a:t>THE PIPELINE · SAMPLING</a:t>
+            </a:r>
+            <a:endParaRPr lang="en-US" sz="1200" dirty="0"/>
+          </a:p>
+        </p:txBody>
+      </p:sp>
+      <p:sp>
+        <p:nvSpPr>
+          <p:cNvPr id="5" name="Text 2"/>
+          <p:cNvSpPr/>
+          <p:nvPr/>
+        </p:nvSpPr>
+        <p:spPr>
+          <a:xfrm>
+            <a:off x="566928" y="676656"/>
+            <a:ext cx="11055096" cy="1005840"/>
+          </a:xfrm>
+          <a:prstGeom prst="rect">
+            <a:avLst/>
+          </a:prstGeom>
+          <a:noFill/>
+          <a:ln/>
+        </p:spPr>
+        <p:txBody>
+          <a:bodyPr wrap="square" rtlCol="0" anchor="t"/>
+          <a:lstStyle/>
+          <a:p>
+            <a:pPr algn="l" indent="0" marL="0">
+              <a:buNone/>
+            </a:pPr>
+            <a:r>
+              <a:rPr lang="en-US" sz="3000" b="1" dirty="0">
+                <a:solidFill>
+                  <a:srgbClr val="151515"/>
+                </a:solidFill>
+                <a:latin typeface="Overpass" pitchFamily="34" charset="0"/>
+                <a:ea typeface="Overpass" pitchFamily="34" charset="-122"/>
+                <a:cs typeface="Overpass" pitchFamily="34" charset="-120"/>
+              </a:rPr>
+              <a:t>Keep errors, slow, and critical — sample the rest</a:t>
             </a:r>
             <a:endParaRPr lang="en-US" sz="3000" dirty="0"/>
           </a:p>
@@ -12223,7 +13093,7 @@
                 <a:ea typeface="Red Hat Text" pitchFamily="34" charset="-122"/>
                 <a:cs typeface="Red Hat Text" pitchFamily="34" charset="-120"/>
               </a:rPr>
-              <a:t>You now have the full correlation story across the services: traces across REST and gRPC for free, metrics with exemplars, logs stamped with the trace_id, custom spans that carry the trace across Kafka, the honest auto/custom/hybrid trade-off, and a Grafana walkthrough that pivots trace → logs → metrics on one click.</a:t>
+              <a:t>Head sampling decides in the SDK before the request runs: cheap, but blind — a 5% head sampler keeps 5% of your errors too. Tail sampling decides in the Collector once the trace is complete, so it can keep a trace because it errored, was slow, or hit a route you care about.</a:t>
             </a:r>
             <a:endParaRPr lang="en-US" sz="1500" dirty="0"/>
           </a:p>
@@ -12247,7 +13117,7 @@
                 <a:ea typeface="Red Hat Text" pitchFamily="34" charset="-122"/>
                 <a:cs typeface="Red Hat Text" pitchFamily="34" charset="-120"/>
               </a:rPr>
-              <a:t>Next part — the pipeline: move the costly decisions into the Collector. Where sampling happens, what it costs to keep telemetry at volume, and continuous profiling.</a:t>
+              <a:t>The policy is OR-evaluated in stack/otelcol/config.tail-sampling.yaml: keep every ERROR, every request over 1s, every /orders, plus a 5% probabilistic baseline of the healthy rest.</a:t>
             </a:r>
             <a:endParaRPr lang="en-US" sz="1500" dirty="0"/>
           </a:p>
@@ -12271,7 +13141,755 @@
                 <a:ea typeface="Red Hat Text" pitchFamily="34" charset="-122"/>
                 <a:cs typeface="Red Hat Text" pitchFamily="34" charset="-120"/>
               </a:rPr>
-              <a:t>Iteration r1.1 ships Sections 0–9, the six example services, the shared protos and obs library, and Demos 1–7. The Collector-side pipeline demos land in r2.0; see the iteration plan in the repo.</a:t>
+              <a:t>The services export 100% and own no sampling — what you keep is a Collector config change, not a redeploy. The cost is Collector RAM: roughly 10–50 KB per in-flight trace held for the decision window (here 30s), capped by num_traces.</a:t>
+            </a:r>
+            <a:endParaRPr lang="en-US" sz="1500" dirty="0"/>
+          </a:p>
+        </p:txBody>
+      </p:sp>
+    </p:spTree>
+  </p:cSld>
+  <p:clrMapOvr>
+    <a:masterClrMapping/>
+  </p:clrMapOvr>
+</p:sld>
+</file>
+
+<file path=ppt/slides/slide37.xml><?xml version="1.0" encoding="utf-8"?>
+<p:sld xmlns:a="http://schemas.openxmlformats.org/drawingml/2006/main" xmlns:r="http://schemas.openxmlformats.org/officeDocument/2006/relationships" xmlns:p="http://schemas.openxmlformats.org/presentationml/2006/main">
+  <p:cSld name="Slide 37">
+    <p:spTree>
+      <p:nvGrpSpPr>
+        <p:cNvPr id="1" name=""/>
+        <p:cNvGrpSpPr/>
+        <p:nvPr/>
+      </p:nvGrpSpPr>
+      <p:grpSpPr>
+        <a:xfrm>
+          <a:off x="0" y="0"/>
+          <a:ext cx="0" cy="0"/>
+          <a:chOff x="0" y="0"/>
+          <a:chExt cx="0" cy="0"/>
+        </a:xfrm>
+      </p:grpSpPr>
+      <p:sp>
+        <p:nvSpPr>
+          <p:cNvPr id="2" name="Text 0"/>
+          <p:cNvSpPr/>
+          <p:nvPr/>
+        </p:nvSpPr>
+        <p:spPr>
+          <a:xfrm>
+            <a:off x="566928" y="6364224"/>
+            <a:ext cx="914400" cy="274320"/>
+          </a:xfrm>
+          <a:prstGeom prst="rect">
+            <a:avLst/>
+          </a:prstGeom>
+          <a:noFill/>
+          <a:ln/>
+        </p:spPr>
+        <p:txBody>
+          <a:bodyPr wrap="square" rtlCol="0" anchor="ctr"/>
+          <a:lstStyle/>
+          <a:p>
+            <a:pPr algn="l" indent="0" marL="0">
+              <a:buNone/>
+            </a:pPr>
+            <a:r>
+              <a:rPr lang="en-US" sz="1000" dirty="0">
+                <a:solidFill>
+                  <a:srgbClr val="8A8A8A"/>
+                </a:solidFill>
+                <a:latin typeface="Red Hat Text" pitchFamily="34" charset="0"/>
+                <a:ea typeface="Red Hat Text" pitchFamily="34" charset="-122"/>
+                <a:cs typeface="Red Hat Text" pitchFamily="34" charset="-120"/>
+              </a:rPr>
+              <a:t>37</a:t>
+            </a:r>
+            <a:endParaRPr lang="en-US" sz="1000" dirty="0"/>
+          </a:p>
+        </p:txBody>
+      </p:sp>
+      <p:pic>
+        <p:nvPicPr>
+          <p:cNvPr id="3" name="Image 0" descr="./assets/logo-candidate-2.png">    </p:cNvPr>
+          <p:cNvPicPr>
+            <a:picLocks noChangeAspect="1"/>
+          </p:cNvPicPr>
+          <p:nvPr/>
+        </p:nvPicPr>
+        <p:blipFill>
+          <a:blip r:embed="rId1"/>
+          <a:stretch>
+            <a:fillRect/>
+          </a:stretch>
+        </p:blipFill>
+        <p:spPr>
+          <a:xfrm>
+            <a:off x="10561320" y="6355080"/>
+            <a:ext cx="1033272" cy="246888"/>
+          </a:xfrm>
+          <a:prstGeom prst="rect">
+            <a:avLst/>
+          </a:prstGeom>
+        </p:spPr>
+      </p:pic>
+      <p:sp>
+        <p:nvSpPr>
+          <p:cNvPr id="4" name="Text 1"/>
+          <p:cNvSpPr/>
+          <p:nvPr/>
+        </p:nvSpPr>
+        <p:spPr>
+          <a:xfrm>
+            <a:off x="566928" y="384048"/>
+            <a:ext cx="11055096" cy="292608"/>
+          </a:xfrm>
+          <a:prstGeom prst="rect">
+            <a:avLst/>
+          </a:prstGeom>
+          <a:noFill/>
+          <a:ln/>
+        </p:spPr>
+        <p:txBody>
+          <a:bodyPr wrap="square" rtlCol="0" anchor="ctr"/>
+          <a:lstStyle/>
+          <a:p>
+            <a:pPr algn="l" indent="0" marL="0">
+              <a:buNone/>
+            </a:pPr>
+            <a:r>
+              <a:rPr lang="en-US" sz="1200" b="1" spc="400" kern="0" dirty="0">
+                <a:solidFill>
+                  <a:srgbClr val="EE0000"/>
+                </a:solidFill>
+                <a:latin typeface="Overpass" pitchFamily="34" charset="0"/>
+                <a:ea typeface="Overpass" pitchFamily="34" charset="-122"/>
+                <a:cs typeface="Overpass" pitchFamily="34" charset="-120"/>
+              </a:rPr>
+              <a:t>THE PIPELINE · PROFILING</a:t>
+            </a:r>
+            <a:endParaRPr lang="en-US" sz="1200" dirty="0"/>
+          </a:p>
+        </p:txBody>
+      </p:sp>
+      <p:sp>
+        <p:nvSpPr>
+          <p:cNvPr id="5" name="Text 2"/>
+          <p:cNvSpPr/>
+          <p:nvPr/>
+        </p:nvSpPr>
+        <p:spPr>
+          <a:xfrm>
+            <a:off x="566928" y="676656"/>
+            <a:ext cx="11055096" cy="1005840"/>
+          </a:xfrm>
+          <a:prstGeom prst="rect">
+            <a:avLst/>
+          </a:prstGeom>
+          <a:noFill/>
+          <a:ln/>
+        </p:spPr>
+        <p:txBody>
+          <a:bodyPr wrap="square" rtlCol="0" anchor="t"/>
+          <a:lstStyle/>
+          <a:p>
+            <a:pPr algn="l" indent="0" marL="0">
+              <a:buNone/>
+            </a:pPr>
+            <a:r>
+              <a:rPr lang="en-US" sz="3000" b="1" dirty="0">
+                <a:solidFill>
+                  <a:srgbClr val="151515"/>
+                </a:solidFill>
+                <a:latin typeface="Overpass" pitchFamily="34" charset="0"/>
+                <a:ea typeface="Overpass" pitchFamily="34" charset="-122"/>
+                <a:cs typeface="Overpass" pitchFamily="34" charset="-120"/>
+              </a:rPr>
+              <a:t>The fourth signal: inside the slow span</a:t>
+            </a:r>
+            <a:endParaRPr lang="en-US" sz="3000" dirty="0"/>
+          </a:p>
+        </p:txBody>
+      </p:sp>
+      <p:pic>
+        <p:nvPicPr>
+          <p:cNvPr id="6" name="Image 1" descr="./png/fig-12-profiling.png">    </p:cNvPr>
+          <p:cNvPicPr>
+            <a:picLocks noChangeAspect="1"/>
+          </p:cNvPicPr>
+          <p:nvPr/>
+        </p:nvPicPr>
+        <p:blipFill>
+          <a:blip r:embed="rId2"/>
+          <a:srcRect l="0" r="0" t="0" b="0"/>
+          <a:stretch/>
+        </p:blipFill>
+        <p:spPr>
+          <a:xfrm>
+            <a:off x="1645920" y="1600200"/>
+            <a:ext cx="8906256" cy="4343400"/>
+          </a:xfrm>
+          <a:prstGeom prst="rect">
+            <a:avLst/>
+          </a:prstGeom>
+        </p:spPr>
+      </p:pic>
+      <p:sp>
+        <p:nvSpPr>
+          <p:cNvPr id="7" name="Text 3"/>
+          <p:cNvSpPr/>
+          <p:nvPr/>
+        </p:nvSpPr>
+        <p:spPr>
+          <a:xfrm>
+            <a:off x="566928" y="5943600"/>
+            <a:ext cx="11055096" cy="310896"/>
+          </a:xfrm>
+          <a:prstGeom prst="rect">
+            <a:avLst/>
+          </a:prstGeom>
+          <a:noFill/>
+          <a:ln/>
+        </p:spPr>
+        <p:txBody>
+          <a:bodyPr wrap="square" rtlCol="0" anchor="ctr"/>
+          <a:lstStyle/>
+          <a:p>
+            <a:pPr algn="ctr" indent="0" marL="0">
+              <a:buNone/>
+            </a:pPr>
+            <a:r>
+              <a:rPr lang="en-US" sz="1300" i="1" dirty="0">
+                <a:solidFill>
+                  <a:srgbClr val="5A5A5A"/>
+                </a:solidFill>
+                <a:latin typeface="Red Hat Text" pitchFamily="34" charset="0"/>
+                <a:ea typeface="Red Hat Text" pitchFamily="34" charset="-122"/>
+                <a:cs typeface="Red Hat Text" pitchFamily="34" charset="-120"/>
+              </a:rPr>
+              <a:t>Figure 11.1 — A slow span in Tempo links by service + time window to a CPU flame graph in Pyroscope, showing which functions inside it spent the time.</a:t>
+            </a:r>
+            <a:endParaRPr lang="en-US" sz="1300" dirty="0"/>
+          </a:p>
+        </p:txBody>
+      </p:sp>
+    </p:spTree>
+  </p:cSld>
+  <p:clrMapOvr>
+    <a:masterClrMapping/>
+  </p:clrMapOvr>
+</p:sld>
+</file>
+
+<file path=ppt/slides/slide38.xml><?xml version="1.0" encoding="utf-8"?>
+<p:sld xmlns:a="http://schemas.openxmlformats.org/drawingml/2006/main" xmlns:r="http://schemas.openxmlformats.org/officeDocument/2006/relationships" xmlns:p="http://schemas.openxmlformats.org/presentationml/2006/main">
+  <p:cSld name="Slide 38">
+    <p:spTree>
+      <p:nvGrpSpPr>
+        <p:cNvPr id="1" name=""/>
+        <p:cNvGrpSpPr/>
+        <p:nvPr/>
+      </p:nvGrpSpPr>
+      <p:grpSpPr>
+        <a:xfrm>
+          <a:off x="0" y="0"/>
+          <a:ext cx="0" cy="0"/>
+          <a:chOff x="0" y="0"/>
+          <a:chExt cx="0" cy="0"/>
+        </a:xfrm>
+      </p:grpSpPr>
+      <p:sp>
+        <p:nvSpPr>
+          <p:cNvPr id="2" name="Text 0"/>
+          <p:cNvSpPr/>
+          <p:nvPr/>
+        </p:nvSpPr>
+        <p:spPr>
+          <a:xfrm>
+            <a:off x="566928" y="6364224"/>
+            <a:ext cx="914400" cy="274320"/>
+          </a:xfrm>
+          <a:prstGeom prst="rect">
+            <a:avLst/>
+          </a:prstGeom>
+          <a:noFill/>
+          <a:ln/>
+        </p:spPr>
+        <p:txBody>
+          <a:bodyPr wrap="square" rtlCol="0" anchor="ctr"/>
+          <a:lstStyle/>
+          <a:p>
+            <a:pPr algn="l" indent="0" marL="0">
+              <a:buNone/>
+            </a:pPr>
+            <a:r>
+              <a:rPr lang="en-US" sz="1000" dirty="0">
+                <a:solidFill>
+                  <a:srgbClr val="8A8A8A"/>
+                </a:solidFill>
+                <a:latin typeface="Red Hat Text" pitchFamily="34" charset="0"/>
+                <a:ea typeface="Red Hat Text" pitchFamily="34" charset="-122"/>
+                <a:cs typeface="Red Hat Text" pitchFamily="34" charset="-120"/>
+              </a:rPr>
+              <a:t>38</a:t>
+            </a:r>
+            <a:endParaRPr lang="en-US" sz="1000" dirty="0"/>
+          </a:p>
+        </p:txBody>
+      </p:sp>
+      <p:pic>
+        <p:nvPicPr>
+          <p:cNvPr id="3" name="Image 0" descr="./assets/logo-candidate-2.png">    </p:cNvPr>
+          <p:cNvPicPr>
+            <a:picLocks noChangeAspect="1"/>
+          </p:cNvPicPr>
+          <p:nvPr/>
+        </p:nvPicPr>
+        <p:blipFill>
+          <a:blip r:embed="rId1"/>
+          <a:stretch>
+            <a:fillRect/>
+          </a:stretch>
+        </p:blipFill>
+        <p:spPr>
+          <a:xfrm>
+            <a:off x="10561320" y="6355080"/>
+            <a:ext cx="1033272" cy="246888"/>
+          </a:xfrm>
+          <a:prstGeom prst="rect">
+            <a:avLst/>
+          </a:prstGeom>
+        </p:spPr>
+      </p:pic>
+      <p:sp>
+        <p:nvSpPr>
+          <p:cNvPr id="4" name="Text 1"/>
+          <p:cNvSpPr/>
+          <p:nvPr/>
+        </p:nvSpPr>
+        <p:spPr>
+          <a:xfrm>
+            <a:off x="566928" y="384048"/>
+            <a:ext cx="11055096" cy="292608"/>
+          </a:xfrm>
+          <a:prstGeom prst="rect">
+            <a:avLst/>
+          </a:prstGeom>
+          <a:noFill/>
+          <a:ln/>
+        </p:spPr>
+        <p:txBody>
+          <a:bodyPr wrap="square" rtlCol="0" anchor="ctr"/>
+          <a:lstStyle/>
+          <a:p>
+            <a:pPr algn="l" indent="0" marL="0">
+              <a:buNone/>
+            </a:pPr>
+            <a:r>
+              <a:rPr lang="en-US" sz="1200" b="1" spc="400" kern="0" dirty="0">
+                <a:solidFill>
+                  <a:srgbClr val="EE0000"/>
+                </a:solidFill>
+                <a:latin typeface="Overpass" pitchFamily="34" charset="0"/>
+                <a:ea typeface="Overpass" pitchFamily="34" charset="-122"/>
+                <a:cs typeface="Overpass" pitchFamily="34" charset="-120"/>
+              </a:rPr>
+              <a:t>THE PIPELINE · PROFILING</a:t>
+            </a:r>
+            <a:endParaRPr lang="en-US" sz="1200" dirty="0"/>
+          </a:p>
+        </p:txBody>
+      </p:sp>
+      <p:sp>
+        <p:nvSpPr>
+          <p:cNvPr id="5" name="Text 2"/>
+          <p:cNvSpPr/>
+          <p:nvPr/>
+        </p:nvSpPr>
+        <p:spPr>
+          <a:xfrm>
+            <a:off x="566928" y="676656"/>
+            <a:ext cx="11055096" cy="1005840"/>
+          </a:xfrm>
+          <a:prstGeom prst="rect">
+            <a:avLst/>
+          </a:prstGeom>
+          <a:noFill/>
+          <a:ln/>
+        </p:spPr>
+        <p:txBody>
+          <a:bodyPr wrap="square" rtlCol="0" anchor="t"/>
+          <a:lstStyle/>
+          <a:p>
+            <a:pPr algn="l" indent="0" marL="0">
+              <a:buNone/>
+            </a:pPr>
+            <a:r>
+              <a:rPr lang="en-US" sz="3000" b="1" dirty="0">
+                <a:solidFill>
+                  <a:srgbClr val="151515"/>
+                </a:solidFill>
+                <a:latin typeface="Overpass" pitchFamily="34" charset="0"/>
+                <a:ea typeface="Overpass" pitchFamily="34" charset="-122"/>
+                <a:cs typeface="Overpass" pitchFamily="34" charset="-120"/>
+              </a:rPr>
+              <a:t>Bundled backend, unsettled client side</a:t>
+            </a:r>
+            <a:endParaRPr lang="en-US" sz="3000" dirty="0"/>
+          </a:p>
+        </p:txBody>
+      </p:sp>
+      <p:sp>
+        <p:nvSpPr>
+          <p:cNvPr id="6" name="Text 3"/>
+          <p:cNvSpPr/>
+          <p:nvPr/>
+        </p:nvSpPr>
+        <p:spPr>
+          <a:xfrm>
+            <a:off x="566928" y="1691640"/>
+            <a:ext cx="11055096" cy="4434840"/>
+          </a:xfrm>
+          <a:prstGeom prst="rect">
+            <a:avLst/>
+          </a:prstGeom>
+          <a:noFill/>
+          <a:ln/>
+        </p:spPr>
+        <p:txBody>
+          <a:bodyPr wrap="square" rtlCol="0" anchor="t"/>
+          <a:lstStyle/>
+          <a:p>
+            <a:pPr algn="l" marL="342900" indent="-342900">
+              <a:lnSpc>
+                <a:spcPct val="115000"/>
+              </a:lnSpc>
+              <a:spcAft>
+                <a:spcPts val="600"/>
+              </a:spcAft>
+              <a:buSzPct val="100000"/>
+              <a:buChar char="●"/>
+            </a:pPr>
+            <a:r>
+              <a:rPr lang="en-US" sz="1500" dirty="0">
+                <a:solidFill>
+                  <a:srgbClr val="242424"/>
+                </a:solidFill>
+                <a:latin typeface="Red Hat Text" pitchFamily="34" charset="0"/>
+                <a:ea typeface="Red Hat Text" pitchFamily="34" charset="-122"/>
+                <a:cs typeface="Red Hat Text" pitchFamily="34" charset="-120"/>
+              </a:rPr>
+              <a:t>Continuous profiling samples the call stack a few times a second at low overhead, always on, and aggregates it into a flame graph — the view traces, metrics, and logs cannot give, because they stop at the process boundary.</a:t>
+            </a:r>
+            <a:endParaRPr lang="en-US" sz="1500" dirty="0"/>
+          </a:p>
+          <a:p>
+            <a:pPr algn="l" marL="342900" indent="-342900">
+              <a:lnSpc>
+                <a:spcPct val="115000"/>
+              </a:lnSpc>
+              <a:spcAft>
+                <a:spcPts val="600"/>
+              </a:spcAft>
+              <a:buSzPct val="100000"/>
+              <a:buChar char="●"/>
+            </a:pPr>
+            <a:r>
+              <a:rPr lang="en-US" sz="1500" dirty="0">
+                <a:solidFill>
+                  <a:srgbClr val="242424"/>
+                </a:solidFill>
+                <a:latin typeface="Red Hat Text" pitchFamily="34" charset="0"/>
+                <a:ea typeface="Red Hat Text" pitchFamily="34" charset="-122"/>
+                <a:cs typeface="Red Hat Text" pitchFamily="34" charset="-120"/>
+              </a:rPr>
+              <a:t>The backend is already here: the otel-lgtm image bundles Pyroscope with a Collector profiles pipeline. The span→flame-graph link is Grafana's tracesToProfiles, matched on service + time.</a:t>
+            </a:r>
+            <a:endParaRPr lang="en-US" sz="1500" dirty="0"/>
+          </a:p>
+          <a:p>
+            <a:pPr algn="l" marL="342900" indent="-342900">
+              <a:lnSpc>
+                <a:spcPct val="115000"/>
+              </a:lnSpc>
+              <a:spcAft>
+                <a:spcPts val="600"/>
+              </a:spcAft>
+              <a:buSzPct val="100000"/>
+              <a:buChar char="●"/>
+            </a:pPr>
+            <a:r>
+              <a:rPr lang="en-US" sz="1500" dirty="0">
+                <a:solidFill>
+                  <a:srgbClr val="242424"/>
+                </a:solidFill>
+                <a:latin typeface="Red Hat Text" pitchFamily="34" charset="0"/>
+                <a:ea typeface="Red Hat Text" pitchFamily="34" charset="-122"/>
+                <a:cs typeface="Red Hat Text" pitchFamily="34" charset="-120"/>
+              </a:rPr>
+              <a:t>Honest caveats: the 0.8.1 image pin may predate Pyroscope (bump it); the mounted Collector config must add a profiles pipeline back; and the Python OTLP-profiles signal is still experimental, so the Pyroscope SDK is the pragmatic path today. This is the least-settled signal in the stack.</a:t>
+            </a:r>
+            <a:endParaRPr lang="en-US" sz="1500" dirty="0"/>
+          </a:p>
+        </p:txBody>
+      </p:sp>
+    </p:spTree>
+  </p:cSld>
+  <p:clrMapOvr>
+    <a:masterClrMapping/>
+  </p:clrMapOvr>
+</p:sld>
+</file>
+
+<file path=ppt/slides/slide39.xml><?xml version="1.0" encoding="utf-8"?>
+<p:sld xmlns:a="http://schemas.openxmlformats.org/drawingml/2006/main" xmlns:r="http://schemas.openxmlformats.org/officeDocument/2006/relationships" xmlns:p="http://schemas.openxmlformats.org/presentationml/2006/main">
+  <p:cSld name="Slide 39">
+    <p:spTree>
+      <p:nvGrpSpPr>
+        <p:cNvPr id="1" name=""/>
+        <p:cNvGrpSpPr/>
+        <p:nvPr/>
+      </p:nvGrpSpPr>
+      <p:grpSpPr>
+        <a:xfrm>
+          <a:off x="0" y="0"/>
+          <a:ext cx="0" cy="0"/>
+          <a:chOff x="0" y="0"/>
+          <a:chExt cx="0" cy="0"/>
+        </a:xfrm>
+      </p:grpSpPr>
+      <p:sp>
+        <p:nvSpPr>
+          <p:cNvPr id="2" name="Text 0"/>
+          <p:cNvSpPr/>
+          <p:nvPr/>
+        </p:nvSpPr>
+        <p:spPr>
+          <a:xfrm>
+            <a:off x="566928" y="6364224"/>
+            <a:ext cx="914400" cy="274320"/>
+          </a:xfrm>
+          <a:prstGeom prst="rect">
+            <a:avLst/>
+          </a:prstGeom>
+          <a:noFill/>
+          <a:ln/>
+        </p:spPr>
+        <p:txBody>
+          <a:bodyPr wrap="square" rtlCol="0" anchor="ctr"/>
+          <a:lstStyle/>
+          <a:p>
+            <a:pPr algn="l" indent="0" marL="0">
+              <a:buNone/>
+            </a:pPr>
+            <a:r>
+              <a:rPr lang="en-US" sz="1000" dirty="0">
+                <a:solidFill>
+                  <a:srgbClr val="8A8A8A"/>
+                </a:solidFill>
+                <a:latin typeface="Red Hat Text" pitchFamily="34" charset="0"/>
+                <a:ea typeface="Red Hat Text" pitchFamily="34" charset="-122"/>
+                <a:cs typeface="Red Hat Text" pitchFamily="34" charset="-120"/>
+              </a:rPr>
+              <a:t>39</a:t>
+            </a:r>
+            <a:endParaRPr lang="en-US" sz="1000" dirty="0"/>
+          </a:p>
+        </p:txBody>
+      </p:sp>
+      <p:pic>
+        <p:nvPicPr>
+          <p:cNvPr id="3" name="Image 0" descr="./assets/logo-candidate-2.png">    </p:cNvPr>
+          <p:cNvPicPr>
+            <a:picLocks noChangeAspect="1"/>
+          </p:cNvPicPr>
+          <p:nvPr/>
+        </p:nvPicPr>
+        <p:blipFill>
+          <a:blip r:embed="rId1"/>
+          <a:stretch>
+            <a:fillRect/>
+          </a:stretch>
+        </p:blipFill>
+        <p:spPr>
+          <a:xfrm>
+            <a:off x="10561320" y="6355080"/>
+            <a:ext cx="1033272" cy="246888"/>
+          </a:xfrm>
+          <a:prstGeom prst="rect">
+            <a:avLst/>
+          </a:prstGeom>
+        </p:spPr>
+      </p:pic>
+      <p:sp>
+        <p:nvSpPr>
+          <p:cNvPr id="4" name="Text 1"/>
+          <p:cNvSpPr/>
+          <p:nvPr/>
+        </p:nvSpPr>
+        <p:spPr>
+          <a:xfrm>
+            <a:off x="566928" y="384048"/>
+            <a:ext cx="11055096" cy="292608"/>
+          </a:xfrm>
+          <a:prstGeom prst="rect">
+            <a:avLst/>
+          </a:prstGeom>
+          <a:noFill/>
+          <a:ln/>
+        </p:spPr>
+        <p:txBody>
+          <a:bodyPr wrap="square" rtlCol="0" anchor="ctr"/>
+          <a:lstStyle/>
+          <a:p>
+            <a:pPr algn="l" indent="0" marL="0">
+              <a:buNone/>
+            </a:pPr>
+            <a:r>
+              <a:rPr lang="en-US" sz="1200" b="1" spc="400" kern="0" dirty="0">
+                <a:solidFill>
+                  <a:srgbClr val="EE0000"/>
+                </a:solidFill>
+                <a:latin typeface="Overpass" pitchFamily="34" charset="0"/>
+                <a:ea typeface="Overpass" pitchFamily="34" charset="-122"/>
+                <a:cs typeface="Overpass" pitchFamily="34" charset="-120"/>
+              </a:rPr>
+              <a:t>WRAP-UP</a:t>
+            </a:r>
+            <a:endParaRPr lang="en-US" sz="1200" dirty="0"/>
+          </a:p>
+        </p:txBody>
+      </p:sp>
+      <p:sp>
+        <p:nvSpPr>
+          <p:cNvPr id="5" name="Text 2"/>
+          <p:cNvSpPr/>
+          <p:nvPr/>
+        </p:nvSpPr>
+        <p:spPr>
+          <a:xfrm>
+            <a:off x="566928" y="676656"/>
+            <a:ext cx="11055096" cy="1005840"/>
+          </a:xfrm>
+          <a:prstGeom prst="rect">
+            <a:avLst/>
+          </a:prstGeom>
+          <a:noFill/>
+          <a:ln/>
+        </p:spPr>
+        <p:txBody>
+          <a:bodyPr wrap="square" rtlCol="0" anchor="t"/>
+          <a:lstStyle/>
+          <a:p>
+            <a:pPr algn="l" indent="0" marL="0">
+              <a:buNone/>
+            </a:pPr>
+            <a:r>
+              <a:rPr lang="en-US" sz="3000" b="1" dirty="0">
+                <a:solidFill>
+                  <a:srgbClr val="151515"/>
+                </a:solidFill>
+                <a:latin typeface="Overpass" pitchFamily="34" charset="0"/>
+                <a:ea typeface="Overpass" pitchFamily="34" charset="-122"/>
+                <a:cs typeface="Overpass" pitchFamily="34" charset="-120"/>
+              </a:rPr>
+              <a:t>One request, four signals, end to end</a:t>
+            </a:r>
+            <a:endParaRPr lang="en-US" sz="3000" dirty="0"/>
+          </a:p>
+        </p:txBody>
+      </p:sp>
+      <p:sp>
+        <p:nvSpPr>
+          <p:cNvPr id="6" name="Text 3"/>
+          <p:cNvSpPr/>
+          <p:nvPr/>
+        </p:nvSpPr>
+        <p:spPr>
+          <a:xfrm>
+            <a:off x="566928" y="1691640"/>
+            <a:ext cx="11055096" cy="4434840"/>
+          </a:xfrm>
+          <a:prstGeom prst="rect">
+            <a:avLst/>
+          </a:prstGeom>
+          <a:noFill/>
+          <a:ln/>
+        </p:spPr>
+        <p:txBody>
+          <a:bodyPr wrap="square" rtlCol="0" anchor="t"/>
+          <a:lstStyle/>
+          <a:p>
+            <a:pPr algn="l" marL="342900" indent="-342900">
+              <a:lnSpc>
+                <a:spcPct val="115000"/>
+              </a:lnSpc>
+              <a:spcAft>
+                <a:spcPts val="600"/>
+              </a:spcAft>
+              <a:buSzPct val="100000"/>
+              <a:buChar char="●"/>
+            </a:pPr>
+            <a:r>
+              <a:rPr lang="en-US" sz="1500" dirty="0">
+                <a:solidFill>
+                  <a:srgbClr val="242424"/>
+                </a:solidFill>
+                <a:latin typeface="Red Hat Text" pitchFamily="34" charset="0"/>
+                <a:ea typeface="Red Hat Text" pitchFamily="34" charset="-122"/>
+                <a:cs typeface="Red Hat Text" pitchFamily="34" charset="-120"/>
+              </a:rPr>
+              <a:t>The full correlation story across the services: traces across REST and gRPC for free, metrics with exemplars, logs stamped with the trace_id, custom spans that carry the trace across Kafka, the honest auto/custom/hybrid trade-off, and a Grafana walkthrough that pivots trace → logs → metrics on one click.</a:t>
+            </a:r>
+            <a:endParaRPr lang="en-US" sz="1500" dirty="0"/>
+          </a:p>
+          <a:p>
+            <a:pPr algn="l" marL="342900" indent="-342900">
+              <a:lnSpc>
+                <a:spcPct val="115000"/>
+              </a:lnSpc>
+              <a:spcAft>
+                <a:spcPts val="600"/>
+              </a:spcAft>
+              <a:buSzPct val="100000"/>
+              <a:buChar char="●"/>
+            </a:pPr>
+            <a:r>
+              <a:rPr lang="en-US" sz="1500" dirty="0">
+                <a:solidFill>
+                  <a:srgbClr val="242424"/>
+                </a:solidFill>
+                <a:latin typeface="Red Hat Text" pitchFamily="34" charset="0"/>
+                <a:ea typeface="Red Hat Text" pitchFamily="34" charset="-122"/>
+                <a:cs typeface="Red Hat Text" pitchFamily="34" charset="-120"/>
+              </a:rPr>
+              <a:t>The pipeline part moved the costly decisions into the Collector: tail sampling that keeps errors, slow, and critical routes at volume while the app stays out of the sampling business — and continuous profiling as the fourth signal, where the CPU goes inside a slow span.</a:t>
+            </a:r>
+            <a:endParaRPr lang="en-US" sz="1500" dirty="0"/>
+          </a:p>
+          <a:p>
+            <a:pPr algn="l" marL="342900" indent="-342900">
+              <a:lnSpc>
+                <a:spcPct val="115000"/>
+              </a:lnSpc>
+              <a:spcAft>
+                <a:spcPts val="600"/>
+              </a:spcAft>
+              <a:buSzPct val="100000"/>
+              <a:buChar char="●"/>
+            </a:pPr>
+            <a:r>
+              <a:rPr lang="en-US" sz="1500" dirty="0">
+                <a:solidFill>
+                  <a:srgbClr val="242424"/>
+                </a:solidFill>
+                <a:latin typeface="Red Hat Text" pitchFamily="34" charset="0"/>
+                <a:ea typeface="Red Hat Text" pitchFamily="34" charset="-122"/>
+                <a:cs typeface="Red Hat Text" pitchFamily="34" charset="-120"/>
+              </a:rPr>
+              <a:t>The tutorial mirrors these slides chapter for chapter (§0–§11), with six example services, the shared protos and obs library, and a runnable demo per chapter. It is authored against the target versions but not yet run end to end — it ships marked unverified, and a live rehearsal against the real stack is the next milestone.</a:t>
             </a:r>
             <a:endParaRPr lang="en-US" sz="1500" dirty="0"/>
           </a:p>

--- a/presentations/otel-lgtm-python.pptx
+++ b/presentations/otel-lgtm-python.pptx
@@ -44,9 +44,11 @@
     <p:sldId id="292" r:id="rId38"/>
     <p:sldId id="293" r:id="rId39"/>
     <p:sldId id="294" r:id="rId40"/>
+    <p:sldId id="295" r:id="rId41"/>
+    <p:sldId id="296" r:id="rId42"/>
   </p:sldIdLst>
   <p:notesMasterIdLst>
-    <p:notesMasterId r:id="rId41"/>
+    <p:notesMasterId r:id="rId43"/>
   </p:notesMasterIdLst>
   <p:sldSz cx="12192000" cy="6858000"/>
   <p:notesSz cx="6858000" cy="12192000"/>
@@ -3356,7 +3358,7 @@
           <a:p>
             <a:r>
               <a:rPr lang="en-US" dirty="0"/>
-              <a:t>Re-walk the whole arc so the audience knows what they hold. Foundations gave them the services and the model; the three signals gave them the correlated signals, their cost, and the one-click view; the pipeline kept it affordable at volume and added the fourth signal. Be honest about iteration state: this is authored against the target versions but not yet run end-to-end here, so it ships marked unverified, and a live rehearsal is the next milestone. Point people at the repo — the tutorial mirrors these slides chapter for chapter, and every example has a runnable demo.sh.</a:t>
+              <a:t>The operational, all-requests-at-once view — same correlation idea one level up: instead of one trace, the shape of all of them. Stress that it's trace-derived: the edges come from client/server and producer/consumer span kinds and db.* attributes, which is exactly why it needs no service mesh or sidecars.</a:t>
             </a:r>
             <a:endParaRPr lang="en-US" dirty="0"/>
           </a:p>
@@ -3468,6 +3470,182 @@
             <a:fld id="{F7021451-1387-4CA6-816F-3879F97B5CBC}" type="slidenum">
               <a:rPr lang="en-US"/>
               <a:t>4</a:t>
+            </a:fld>
+            <a:endParaRPr lang="en-US"/>
+          </a:p>
+        </p:txBody>
+      </p:sp>
+    </p:spTree>
+    <p:extLst>
+      <p:ext uri="{BB962C8B-B14F-4D97-AF65-F5344CB8AC3E}">
+        <p14:creationId xmlns:p14="http://schemas.microsoft.com/office/powerpoint/2010/main" val="1024086991"/>
+      </p:ext>
+    </p:extLst>
+  </p:cSld>
+  <p:clrMapOvr>
+    <a:masterClrMapping/>
+  </p:clrMapOvr>
+</p:notes>
+</file>
+
+<file path=ppt/notesSlides/notesSlide40.xml><?xml version="1.0" encoding="utf-8"?>
+<p:notes xmlns:a="http://schemas.openxmlformats.org/drawingml/2006/main" xmlns:r="http://schemas.openxmlformats.org/officeDocument/2006/relationships" xmlns:p="http://schemas.openxmlformats.org/presentationml/2006/main">
+  <p:cSld>
+    <p:spTree>
+      <p:nvGrpSpPr>
+        <p:cNvPr id="1" name=""/>
+        <p:cNvGrpSpPr/>
+        <p:nvPr/>
+      </p:nvGrpSpPr>
+      <p:grpSpPr>
+        <a:xfrm>
+          <a:off x="0" y="0"/>
+          <a:ext cx="0" cy="0"/>
+          <a:chOff x="0" y="0"/>
+          <a:chExt cx="0" cy="0"/>
+        </a:xfrm>
+      </p:grpSpPr>
+      <p:sp>
+        <p:nvSpPr>
+          <p:cNvPr id="2" name="Slide Image Placeholder 1"/>
+          <p:cNvSpPr>
+            <a:spLocks noGrp="1" noRot="1" noChangeAspect="1"/>
+          </p:cNvSpPr>
+          <p:nvPr>
+            <p:ph type="sldImg"/>
+          </p:nvPr>
+        </p:nvSpPr>
+        <p:spPr/>
+      </p:sp>
+      <p:sp>
+        <p:nvSpPr>
+          <p:cNvPr id="3" name="Notes Placeholder 2"/>
+          <p:cNvSpPr>
+            <a:spLocks noGrp="1"/>
+          </p:cNvSpPr>
+          <p:nvPr>
+            <p:ph type="body" idx="1"/>
+          </p:nvPr>
+        </p:nvSpPr>
+        <p:spPr/>
+        <p:txBody>
+          <a:bodyPr/>
+          <a:lstStyle/>
+          <a:p>
+            <a:r>
+              <a:rPr lang="en-US" dirty="0"/>
+              <a:t>This is the answer to 'can we see what's happening live?' without adopting Istio. The Kafka edge only appears if propagation is on (Demo 2) — a missing shipping/notification edge is the broken async link from §7, seen from above. The Grafana service map is provisioned; the Tempo generator enablement is the version-sensitive bit to confirm.</a:t>
+            </a:r>
+            <a:endParaRPr lang="en-US" dirty="0"/>
+          </a:p>
+        </p:txBody>
+      </p:sp>
+      <p:sp>
+        <p:nvSpPr>
+          <p:cNvPr id="4" name="Slide Number Placeholder 3"/>
+          <p:cNvSpPr>
+            <a:spLocks noGrp="1"/>
+          </p:cNvSpPr>
+          <p:nvPr>
+            <p:ph type="sldNum" sz="quarter" idx="10"/>
+          </p:nvPr>
+        </p:nvSpPr>
+        <p:spPr/>
+        <p:txBody>
+          <a:bodyPr/>
+          <a:lstStyle/>
+          <a:p>
+            <a:fld id="{F7021451-1387-4CA6-816F-3879F97B5CBC}" type="slidenum">
+              <a:rPr lang="en-US"/>
+              <a:t>40</a:t>
+            </a:fld>
+            <a:endParaRPr lang="en-US"/>
+          </a:p>
+        </p:txBody>
+      </p:sp>
+    </p:spTree>
+    <p:extLst>
+      <p:ext uri="{BB962C8B-B14F-4D97-AF65-F5344CB8AC3E}">
+        <p14:creationId xmlns:p14="http://schemas.microsoft.com/office/powerpoint/2010/main" val="1024086991"/>
+      </p:ext>
+    </p:extLst>
+  </p:cSld>
+  <p:clrMapOvr>
+    <a:masterClrMapping/>
+  </p:clrMapOvr>
+</p:notes>
+</file>
+
+<file path=ppt/notesSlides/notesSlide41.xml><?xml version="1.0" encoding="utf-8"?>
+<p:notes xmlns:a="http://schemas.openxmlformats.org/drawingml/2006/main" xmlns:r="http://schemas.openxmlformats.org/officeDocument/2006/relationships" xmlns:p="http://schemas.openxmlformats.org/presentationml/2006/main">
+  <p:cSld>
+    <p:spTree>
+      <p:nvGrpSpPr>
+        <p:cNvPr id="1" name=""/>
+        <p:cNvGrpSpPr/>
+        <p:nvPr/>
+      </p:nvGrpSpPr>
+      <p:grpSpPr>
+        <a:xfrm>
+          <a:off x="0" y="0"/>
+          <a:ext cx="0" cy="0"/>
+          <a:chOff x="0" y="0"/>
+          <a:chExt cx="0" cy="0"/>
+        </a:xfrm>
+      </p:grpSpPr>
+      <p:sp>
+        <p:nvSpPr>
+          <p:cNvPr id="2" name="Slide Image Placeholder 1"/>
+          <p:cNvSpPr>
+            <a:spLocks noGrp="1" noRot="1" noChangeAspect="1"/>
+          </p:cNvSpPr>
+          <p:nvPr>
+            <p:ph type="sldImg"/>
+          </p:nvPr>
+        </p:nvSpPr>
+        <p:spPr/>
+      </p:sp>
+      <p:sp>
+        <p:nvSpPr>
+          <p:cNvPr id="3" name="Notes Placeholder 2"/>
+          <p:cNvSpPr>
+            <a:spLocks noGrp="1"/>
+          </p:cNvSpPr>
+          <p:nvPr>
+            <p:ph type="body" idx="1"/>
+          </p:nvPr>
+        </p:nvSpPr>
+        <p:spPr/>
+        <p:txBody>
+          <a:bodyPr/>
+          <a:lstStyle/>
+          <a:p>
+            <a:r>
+              <a:rPr lang="en-US" dirty="0"/>
+              <a:t>Re-walk the whole arc so the audience knows what they hold. Foundations gave them the services and the model; the three signals gave them the correlated signals, their cost, and the one-click view; the pipeline kept it affordable at volume and added the fourth signal. Be honest about iteration state: this is authored against the target versions but not yet run end-to-end here, so it ships marked unverified, and a live rehearsal is the next milestone. Point people at the repo — the tutorial mirrors these slides chapter for chapter, and every example has a runnable demo.sh.</a:t>
+            </a:r>
+            <a:endParaRPr lang="en-US" dirty="0"/>
+          </a:p>
+        </p:txBody>
+      </p:sp>
+      <p:sp>
+        <p:nvSpPr>
+          <p:cNvPr id="4" name="Slide Number Placeholder 3"/>
+          <p:cNvSpPr>
+            <a:spLocks noGrp="1"/>
+          </p:cNvSpPr>
+          <p:nvPr>
+            <p:ph type="sldNum" sz="quarter" idx="10"/>
+          </p:nvPr>
+        </p:nvSpPr>
+        <p:spPr/>
+        <p:txBody>
+          <a:bodyPr/>
+          <a:lstStyle/>
+          <a:p>
+            <a:fld id="{F7021451-1387-4CA6-816F-3879F97B5CBC}" type="slidenum">
+              <a:rPr lang="en-US"/>
+              <a:t>41</a:t>
             </a:fld>
             <a:endParaRPr lang="en-US"/>
           </a:p>
@@ -13756,7 +13934,7 @@
                 <a:ea typeface="Overpass" pitchFamily="34" charset="-122"/>
                 <a:cs typeface="Overpass" pitchFamily="34" charset="-120"/>
               </a:rPr>
-              <a:t>WRAP-UP</a:t>
+              <a:t>THE PIPELINE · LIVE SERVICE GRAPH</a:t>
             </a:r>
             <a:endParaRPr lang="en-US" sz="1200" dirty="0"/>
           </a:p>
@@ -13795,22 +13973,45 @@
                 <a:ea typeface="Overpass" pitchFamily="34" charset="-122"/>
                 <a:cs typeface="Overpass" pitchFamily="34" charset="-120"/>
               </a:rPr>
-              <a:t>One request, four signals, end to end</a:t>
+              <a:t>What's going on right now</a:t>
             </a:r>
             <a:endParaRPr lang="en-US" sz="3000" dirty="0"/>
           </a:p>
         </p:txBody>
       </p:sp>
-      <p:sp>
-        <p:nvSpPr>
-          <p:cNvPr id="6" name="Text 3"/>
+      <p:pic>
+        <p:nvPicPr>
+          <p:cNvPr id="6" name="Image 1" descr="./png/fig-13-service-graph.png">    </p:cNvPr>
+          <p:cNvPicPr>
+            <a:picLocks noChangeAspect="1"/>
+          </p:cNvPicPr>
+          <p:nvPr/>
+        </p:nvPicPr>
+        <p:blipFill>
+          <a:blip r:embed="rId2"/>
+          <a:srcRect l="0" r="0" t="0" b="0"/>
+          <a:stretch/>
+        </p:blipFill>
+        <p:spPr>
+          <a:xfrm>
+            <a:off x="1645920" y="1600200"/>
+            <a:ext cx="8906256" cy="4343400"/>
+          </a:xfrm>
+          <a:prstGeom prst="rect">
+            <a:avLst/>
+          </a:prstGeom>
+        </p:spPr>
+      </p:pic>
+      <p:sp>
+        <p:nvSpPr>
+          <p:cNvPr id="7" name="Text 3"/>
           <p:cNvSpPr/>
           <p:nvPr/>
         </p:nvSpPr>
         <p:spPr>
           <a:xfrm>
-            <a:off x="566928" y="1691640"/>
-            <a:ext cx="11055096" cy="4434840"/>
+            <a:off x="566928" y="5943600"/>
+            <a:ext cx="11055096" cy="310896"/>
           </a:xfrm>
           <a:prstGeom prst="rect">
             <a:avLst/>
@@ -13819,79 +14020,24 @@
           <a:ln/>
         </p:spPr>
         <p:txBody>
-          <a:bodyPr wrap="square" rtlCol="0" anchor="t"/>
-          <a:lstStyle/>
-          <a:p>
-            <a:pPr algn="l" marL="342900" indent="-342900">
-              <a:lnSpc>
-                <a:spcPct val="115000"/>
-              </a:lnSpc>
-              <a:spcAft>
-                <a:spcPts val="600"/>
-              </a:spcAft>
-              <a:buSzPct val="100000"/>
-              <a:buChar char="●"/>
-            </a:pPr>
-            <a:r>
-              <a:rPr lang="en-US" sz="1500" dirty="0">
-                <a:solidFill>
-                  <a:srgbClr val="242424"/>
+          <a:bodyPr wrap="square" rtlCol="0" anchor="ctr"/>
+          <a:lstStyle/>
+          <a:p>
+            <a:pPr algn="ctr" indent="0" marL="0">
+              <a:buNone/>
+            </a:pPr>
+            <a:r>
+              <a:rPr lang="en-US" sz="1300" i="1" dirty="0">
+                <a:solidFill>
+                  <a:srgbClr val="5A5A5A"/>
                 </a:solidFill>
                 <a:latin typeface="Red Hat Text" pitchFamily="34" charset="0"/>
                 <a:ea typeface="Red Hat Text" pitchFamily="34" charset="-122"/>
                 <a:cs typeface="Red Hat Text" pitchFamily="34" charset="-120"/>
               </a:rPr>
-              <a:t>The full correlation story across the services: traces across REST and gRPC for free, metrics with exemplars, logs stamped with the trace_id, custom spans that carry the trace across Kafka, the honest auto/custom/hybrid trade-off, and a Grafana walkthrough that pivots trace → logs → metrics on one click.</a:t>
-            </a:r>
-            <a:endParaRPr lang="en-US" sz="1500" dirty="0"/>
-          </a:p>
-          <a:p>
-            <a:pPr algn="l" marL="342900" indent="-342900">
-              <a:lnSpc>
-                <a:spcPct val="115000"/>
-              </a:lnSpc>
-              <a:spcAft>
-                <a:spcPts val="600"/>
-              </a:spcAft>
-              <a:buSzPct val="100000"/>
-              <a:buChar char="●"/>
-            </a:pPr>
-            <a:r>
-              <a:rPr lang="en-US" sz="1500" dirty="0">
-                <a:solidFill>
-                  <a:srgbClr val="242424"/>
-                </a:solidFill>
-                <a:latin typeface="Red Hat Text" pitchFamily="34" charset="0"/>
-                <a:ea typeface="Red Hat Text" pitchFamily="34" charset="-122"/>
-                <a:cs typeface="Red Hat Text" pitchFamily="34" charset="-120"/>
-              </a:rPr>
-              <a:t>The pipeline part moved the costly decisions into the Collector: tail sampling that keeps errors, slow, and critical routes at volume while the app stays out of the sampling business — and continuous profiling as the fourth signal, where the CPU goes inside a slow span.</a:t>
-            </a:r>
-            <a:endParaRPr lang="en-US" sz="1500" dirty="0"/>
-          </a:p>
-          <a:p>
-            <a:pPr algn="l" marL="342900" indent="-342900">
-              <a:lnSpc>
-                <a:spcPct val="115000"/>
-              </a:lnSpc>
-              <a:spcAft>
-                <a:spcPts val="600"/>
-              </a:spcAft>
-              <a:buSzPct val="100000"/>
-              <a:buChar char="●"/>
-            </a:pPr>
-            <a:r>
-              <a:rPr lang="en-US" sz="1500" dirty="0">
-                <a:solidFill>
-                  <a:srgbClr val="242424"/>
-                </a:solidFill>
-                <a:latin typeface="Red Hat Text" pitchFamily="34" charset="0"/>
-                <a:ea typeface="Red Hat Text" pitchFamily="34" charset="-122"/>
-                <a:cs typeface="Red Hat Text" pitchFamily="34" charset="-120"/>
-              </a:rPr>
-              <a:t>The tutorial mirrors these slides chapter for chapter (§0–§11), with six example services, the shared protos and obs library, and a runnable demo per chapter. It is authored against the target versions but not yet run end to end — it ships marked unverified, and a live rehearsal against the real stack is the next milestone.</a:t>
-            </a:r>
-            <a:endParaRPr lang="en-US" sz="1500" dirty="0"/>
+              <a:t>Figure 12.1 — The topology with live request, error, and latency on every edge — built from traces by Tempo's metrics-generator, no mesh required.</a:t>
+            </a:r>
+            <a:endParaRPr lang="en-US" sz="1300" dirty="0"/>
           </a:p>
         </p:txBody>
       </p:sp>
@@ -14719,6 +14865,526 @@
               <a:t>Foundations is this part; the three signals and the pipeline are the two halves that follow.</a:t>
             </a:r>
             <a:endParaRPr lang="en-US" sz="1300" dirty="0"/>
+          </a:p>
+        </p:txBody>
+      </p:sp>
+    </p:spTree>
+  </p:cSld>
+  <p:clrMapOvr>
+    <a:masterClrMapping/>
+  </p:clrMapOvr>
+</p:sld>
+</file>
+
+<file path=ppt/slides/slide40.xml><?xml version="1.0" encoding="utf-8"?>
+<p:sld xmlns:a="http://schemas.openxmlformats.org/drawingml/2006/main" xmlns:r="http://schemas.openxmlformats.org/officeDocument/2006/relationships" xmlns:p="http://schemas.openxmlformats.org/presentationml/2006/main">
+  <p:cSld name="Slide 40">
+    <p:spTree>
+      <p:nvGrpSpPr>
+        <p:cNvPr id="1" name=""/>
+        <p:cNvGrpSpPr/>
+        <p:nvPr/>
+      </p:nvGrpSpPr>
+      <p:grpSpPr>
+        <a:xfrm>
+          <a:off x="0" y="0"/>
+          <a:ext cx="0" cy="0"/>
+          <a:chOff x="0" y="0"/>
+          <a:chExt cx="0" cy="0"/>
+        </a:xfrm>
+      </p:grpSpPr>
+      <p:sp>
+        <p:nvSpPr>
+          <p:cNvPr id="2" name="Text 0"/>
+          <p:cNvSpPr/>
+          <p:nvPr/>
+        </p:nvSpPr>
+        <p:spPr>
+          <a:xfrm>
+            <a:off x="566928" y="6364224"/>
+            <a:ext cx="914400" cy="274320"/>
+          </a:xfrm>
+          <a:prstGeom prst="rect">
+            <a:avLst/>
+          </a:prstGeom>
+          <a:noFill/>
+          <a:ln/>
+        </p:spPr>
+        <p:txBody>
+          <a:bodyPr wrap="square" rtlCol="0" anchor="ctr"/>
+          <a:lstStyle/>
+          <a:p>
+            <a:pPr algn="l" indent="0" marL="0">
+              <a:buNone/>
+            </a:pPr>
+            <a:r>
+              <a:rPr lang="en-US" sz="1000" dirty="0">
+                <a:solidFill>
+                  <a:srgbClr val="8A8A8A"/>
+                </a:solidFill>
+                <a:latin typeface="Red Hat Text" pitchFamily="34" charset="0"/>
+                <a:ea typeface="Red Hat Text" pitchFamily="34" charset="-122"/>
+                <a:cs typeface="Red Hat Text" pitchFamily="34" charset="-120"/>
+              </a:rPr>
+              <a:t>40</a:t>
+            </a:r>
+            <a:endParaRPr lang="en-US" sz="1000" dirty="0"/>
+          </a:p>
+        </p:txBody>
+      </p:sp>
+      <p:pic>
+        <p:nvPicPr>
+          <p:cNvPr id="3" name="Image 0" descr="./assets/logo-candidate-2.png">    </p:cNvPr>
+          <p:cNvPicPr>
+            <a:picLocks noChangeAspect="1"/>
+          </p:cNvPicPr>
+          <p:nvPr/>
+        </p:nvPicPr>
+        <p:blipFill>
+          <a:blip r:embed="rId1"/>
+          <a:stretch>
+            <a:fillRect/>
+          </a:stretch>
+        </p:blipFill>
+        <p:spPr>
+          <a:xfrm>
+            <a:off x="10561320" y="6355080"/>
+            <a:ext cx="1033272" cy="246888"/>
+          </a:xfrm>
+          <a:prstGeom prst="rect">
+            <a:avLst/>
+          </a:prstGeom>
+        </p:spPr>
+      </p:pic>
+      <p:sp>
+        <p:nvSpPr>
+          <p:cNvPr id="4" name="Text 1"/>
+          <p:cNvSpPr/>
+          <p:nvPr/>
+        </p:nvSpPr>
+        <p:spPr>
+          <a:xfrm>
+            <a:off x="566928" y="384048"/>
+            <a:ext cx="11055096" cy="292608"/>
+          </a:xfrm>
+          <a:prstGeom prst="rect">
+            <a:avLst/>
+          </a:prstGeom>
+          <a:noFill/>
+          <a:ln/>
+        </p:spPr>
+        <p:txBody>
+          <a:bodyPr wrap="square" rtlCol="0" anchor="ctr"/>
+          <a:lstStyle/>
+          <a:p>
+            <a:pPr algn="l" indent="0" marL="0">
+              <a:buNone/>
+            </a:pPr>
+            <a:r>
+              <a:rPr lang="en-US" sz="1200" b="1" spc="400" kern="0" dirty="0">
+                <a:solidFill>
+                  <a:srgbClr val="EE0000"/>
+                </a:solidFill>
+                <a:latin typeface="Overpass" pitchFamily="34" charset="0"/>
+                <a:ea typeface="Overpass" pitchFamily="34" charset="-122"/>
+                <a:cs typeface="Overpass" pitchFamily="34" charset="-120"/>
+              </a:rPr>
+              <a:t>THE PIPELINE · LIVE SERVICE GRAPH</a:t>
+            </a:r>
+            <a:endParaRPr lang="en-US" sz="1200" dirty="0"/>
+          </a:p>
+        </p:txBody>
+      </p:sp>
+      <p:sp>
+        <p:nvSpPr>
+          <p:cNvPr id="5" name="Text 2"/>
+          <p:cNvSpPr/>
+          <p:nvPr/>
+        </p:nvSpPr>
+        <p:spPr>
+          <a:xfrm>
+            <a:off x="566928" y="676656"/>
+            <a:ext cx="11055096" cy="1005840"/>
+          </a:xfrm>
+          <a:prstGeom prst="rect">
+            <a:avLst/>
+          </a:prstGeom>
+          <a:noFill/>
+          <a:ln/>
+        </p:spPr>
+        <p:txBody>
+          <a:bodyPr wrap="square" rtlCol="0" anchor="t"/>
+          <a:lstStyle/>
+          <a:p>
+            <a:pPr algn="l" indent="0" marL="0">
+              <a:buNone/>
+            </a:pPr>
+            <a:r>
+              <a:rPr lang="en-US" sz="3000" b="1" dirty="0">
+                <a:solidFill>
+                  <a:srgbClr val="151515"/>
+                </a:solidFill>
+                <a:latin typeface="Overpass" pitchFamily="34" charset="0"/>
+                <a:ea typeface="Overpass" pitchFamily="34" charset="-122"/>
+                <a:cs typeface="Overpass" pitchFamily="34" charset="-120"/>
+              </a:rPr>
+              <a:t>The Kiali view, without the mesh</a:t>
+            </a:r>
+            <a:endParaRPr lang="en-US" sz="3000" dirty="0"/>
+          </a:p>
+        </p:txBody>
+      </p:sp>
+      <p:sp>
+        <p:nvSpPr>
+          <p:cNvPr id="6" name="Text 3"/>
+          <p:cNvSpPr/>
+          <p:nvPr/>
+        </p:nvSpPr>
+        <p:spPr>
+          <a:xfrm>
+            <a:off x="566928" y="1691640"/>
+            <a:ext cx="11055096" cy="4434840"/>
+          </a:xfrm>
+          <a:prstGeom prst="rect">
+            <a:avLst/>
+          </a:prstGeom>
+          <a:noFill/>
+          <a:ln/>
+        </p:spPr>
+        <p:txBody>
+          <a:bodyPr wrap="square" rtlCol="0" anchor="t"/>
+          <a:lstStyle/>
+          <a:p>
+            <a:pPr algn="l" marL="342900" indent="-342900">
+              <a:lnSpc>
+                <a:spcPct val="115000"/>
+              </a:lnSpc>
+              <a:spcAft>
+                <a:spcPts val="600"/>
+              </a:spcAft>
+              <a:buSzPct val="100000"/>
+              <a:buChar char="●"/>
+            </a:pPr>
+            <a:r>
+              <a:rPr lang="en-US" sz="1500" dirty="0">
+                <a:solidFill>
+                  <a:srgbClr val="242424"/>
+                </a:solidFill>
+                <a:latin typeface="Red Hat Text" pitchFamily="34" charset="0"/>
+                <a:ea typeface="Red Hat Text" pitchFamily="34" charset="-122"/>
+                <a:cs typeface="Red Hat Text" pitchFamily="34" charset="-120"/>
+              </a:rPr>
+              <a:t>Tempo's metrics-generator reads span relationships — client/server calls, producer/consumer hops, db.* attributes — and emits service-graph and span metrics; Grafana renders them as a node graph with live RED on every node and edge.</a:t>
+            </a:r>
+            <a:endParaRPr lang="en-US" sz="1500" dirty="0"/>
+          </a:p>
+          <a:p>
+            <a:pPr algn="l" marL="342900" indent="-342900">
+              <a:lnSpc>
+                <a:spcPct val="115000"/>
+              </a:lnSpc>
+              <a:spcAft>
+                <a:spcPts val="600"/>
+              </a:spcAft>
+              <a:buSzPct val="100000"/>
+              <a:buChar char="●"/>
+            </a:pPr>
+            <a:r>
+              <a:rPr lang="en-US" sz="1500" dirty="0">
+                <a:solidFill>
+                  <a:srgbClr val="242424"/>
+                </a:solidFill>
+                <a:latin typeface="Red Hat Text" pitchFamily="34" charset="0"/>
+                <a:ea typeface="Red Hat Text" pitchFamily="34" charset="-122"/>
+                <a:cs typeface="Red Hat Text" pitchFamily="34" charset="-120"/>
+              </a:rPr>
+              <a:t>That's exactly this system's shape: REST/gRPC give the inventory and payment edges, the Kafka hop gives shipping and notification (because §7 set the producer/consumer span kinds), and asyncpg gives the Postgres edge.</a:t>
+            </a:r>
+            <a:endParaRPr lang="en-US" sz="1500" dirty="0"/>
+          </a:p>
+          <a:p>
+            <a:pPr algn="l" marL="342900" indent="-342900">
+              <a:lnSpc>
+                <a:spcPct val="115000"/>
+              </a:lnSpc>
+              <a:spcAft>
+                <a:spcPts val="600"/>
+              </a:spcAft>
+              <a:buSzPct val="100000"/>
+              <a:buChar char="●"/>
+            </a:pPr>
+            <a:r>
+              <a:rPr lang="en-US" sz="1500" dirty="0">
+                <a:solidFill>
+                  <a:srgbClr val="242424"/>
+                </a:solidFill>
+                <a:latin typeface="Red Hat Text" pitchFamily="34" charset="0"/>
+                <a:ea typeface="Red Hat Text" pitchFamily="34" charset="-122"/>
+                <a:cs typeface="Red Hat Text" pitchFamily="34" charset="-120"/>
+              </a:rPr>
+              <a:t>So you get the Kiali-style live map — request rate, error rate, latency, animated — with no service mesh, no sidecars, and no Kubernetes. Enabling it is two bits of config: the generator's processors plus remote-write, and Grafana's service map pointing at the metrics store.</a:t>
+            </a:r>
+            <a:endParaRPr lang="en-US" sz="1500" dirty="0"/>
+          </a:p>
+        </p:txBody>
+      </p:sp>
+    </p:spTree>
+  </p:cSld>
+  <p:clrMapOvr>
+    <a:masterClrMapping/>
+  </p:clrMapOvr>
+</p:sld>
+</file>
+
+<file path=ppt/slides/slide41.xml><?xml version="1.0" encoding="utf-8"?>
+<p:sld xmlns:a="http://schemas.openxmlformats.org/drawingml/2006/main" xmlns:r="http://schemas.openxmlformats.org/officeDocument/2006/relationships" xmlns:p="http://schemas.openxmlformats.org/presentationml/2006/main">
+  <p:cSld name="Slide 41">
+    <p:spTree>
+      <p:nvGrpSpPr>
+        <p:cNvPr id="1" name=""/>
+        <p:cNvGrpSpPr/>
+        <p:nvPr/>
+      </p:nvGrpSpPr>
+      <p:grpSpPr>
+        <a:xfrm>
+          <a:off x="0" y="0"/>
+          <a:ext cx="0" cy="0"/>
+          <a:chOff x="0" y="0"/>
+          <a:chExt cx="0" cy="0"/>
+        </a:xfrm>
+      </p:grpSpPr>
+      <p:sp>
+        <p:nvSpPr>
+          <p:cNvPr id="2" name="Text 0"/>
+          <p:cNvSpPr/>
+          <p:nvPr/>
+        </p:nvSpPr>
+        <p:spPr>
+          <a:xfrm>
+            <a:off x="566928" y="6364224"/>
+            <a:ext cx="914400" cy="274320"/>
+          </a:xfrm>
+          <a:prstGeom prst="rect">
+            <a:avLst/>
+          </a:prstGeom>
+          <a:noFill/>
+          <a:ln/>
+        </p:spPr>
+        <p:txBody>
+          <a:bodyPr wrap="square" rtlCol="0" anchor="ctr"/>
+          <a:lstStyle/>
+          <a:p>
+            <a:pPr algn="l" indent="0" marL="0">
+              <a:buNone/>
+            </a:pPr>
+            <a:r>
+              <a:rPr lang="en-US" sz="1000" dirty="0">
+                <a:solidFill>
+                  <a:srgbClr val="8A8A8A"/>
+                </a:solidFill>
+                <a:latin typeface="Red Hat Text" pitchFamily="34" charset="0"/>
+                <a:ea typeface="Red Hat Text" pitchFamily="34" charset="-122"/>
+                <a:cs typeface="Red Hat Text" pitchFamily="34" charset="-120"/>
+              </a:rPr>
+              <a:t>41</a:t>
+            </a:r>
+            <a:endParaRPr lang="en-US" sz="1000" dirty="0"/>
+          </a:p>
+        </p:txBody>
+      </p:sp>
+      <p:pic>
+        <p:nvPicPr>
+          <p:cNvPr id="3" name="Image 0" descr="./assets/logo-candidate-2.png">    </p:cNvPr>
+          <p:cNvPicPr>
+            <a:picLocks noChangeAspect="1"/>
+          </p:cNvPicPr>
+          <p:nvPr/>
+        </p:nvPicPr>
+        <p:blipFill>
+          <a:blip r:embed="rId1"/>
+          <a:stretch>
+            <a:fillRect/>
+          </a:stretch>
+        </p:blipFill>
+        <p:spPr>
+          <a:xfrm>
+            <a:off x="10561320" y="6355080"/>
+            <a:ext cx="1033272" cy="246888"/>
+          </a:xfrm>
+          <a:prstGeom prst="rect">
+            <a:avLst/>
+          </a:prstGeom>
+        </p:spPr>
+      </p:pic>
+      <p:sp>
+        <p:nvSpPr>
+          <p:cNvPr id="4" name="Text 1"/>
+          <p:cNvSpPr/>
+          <p:nvPr/>
+        </p:nvSpPr>
+        <p:spPr>
+          <a:xfrm>
+            <a:off x="566928" y="384048"/>
+            <a:ext cx="11055096" cy="292608"/>
+          </a:xfrm>
+          <a:prstGeom prst="rect">
+            <a:avLst/>
+          </a:prstGeom>
+          <a:noFill/>
+          <a:ln/>
+        </p:spPr>
+        <p:txBody>
+          <a:bodyPr wrap="square" rtlCol="0" anchor="ctr"/>
+          <a:lstStyle/>
+          <a:p>
+            <a:pPr algn="l" indent="0" marL="0">
+              <a:buNone/>
+            </a:pPr>
+            <a:r>
+              <a:rPr lang="en-US" sz="1200" b="1" spc="400" kern="0" dirty="0">
+                <a:solidFill>
+                  <a:srgbClr val="EE0000"/>
+                </a:solidFill>
+                <a:latin typeface="Overpass" pitchFamily="34" charset="0"/>
+                <a:ea typeface="Overpass" pitchFamily="34" charset="-122"/>
+                <a:cs typeface="Overpass" pitchFamily="34" charset="-120"/>
+              </a:rPr>
+              <a:t>WRAP-UP</a:t>
+            </a:r>
+            <a:endParaRPr lang="en-US" sz="1200" dirty="0"/>
+          </a:p>
+        </p:txBody>
+      </p:sp>
+      <p:sp>
+        <p:nvSpPr>
+          <p:cNvPr id="5" name="Text 2"/>
+          <p:cNvSpPr/>
+          <p:nvPr/>
+        </p:nvSpPr>
+        <p:spPr>
+          <a:xfrm>
+            <a:off x="566928" y="676656"/>
+            <a:ext cx="11055096" cy="1005840"/>
+          </a:xfrm>
+          <a:prstGeom prst="rect">
+            <a:avLst/>
+          </a:prstGeom>
+          <a:noFill/>
+          <a:ln/>
+        </p:spPr>
+        <p:txBody>
+          <a:bodyPr wrap="square" rtlCol="0" anchor="t"/>
+          <a:lstStyle/>
+          <a:p>
+            <a:pPr algn="l" indent="0" marL="0">
+              <a:buNone/>
+            </a:pPr>
+            <a:r>
+              <a:rPr lang="en-US" sz="3000" b="1" dirty="0">
+                <a:solidFill>
+                  <a:srgbClr val="151515"/>
+                </a:solidFill>
+                <a:latin typeface="Overpass" pitchFamily="34" charset="0"/>
+                <a:ea typeface="Overpass" pitchFamily="34" charset="-122"/>
+                <a:cs typeface="Overpass" pitchFamily="34" charset="-120"/>
+              </a:rPr>
+              <a:t>One request, four signals, end to end</a:t>
+            </a:r>
+            <a:endParaRPr lang="en-US" sz="3000" dirty="0"/>
+          </a:p>
+        </p:txBody>
+      </p:sp>
+      <p:sp>
+        <p:nvSpPr>
+          <p:cNvPr id="6" name="Text 3"/>
+          <p:cNvSpPr/>
+          <p:nvPr/>
+        </p:nvSpPr>
+        <p:spPr>
+          <a:xfrm>
+            <a:off x="566928" y="1691640"/>
+            <a:ext cx="11055096" cy="4434840"/>
+          </a:xfrm>
+          <a:prstGeom prst="rect">
+            <a:avLst/>
+          </a:prstGeom>
+          <a:noFill/>
+          <a:ln/>
+        </p:spPr>
+        <p:txBody>
+          <a:bodyPr wrap="square" rtlCol="0" anchor="t"/>
+          <a:lstStyle/>
+          <a:p>
+            <a:pPr algn="l" marL="342900" indent="-342900">
+              <a:lnSpc>
+                <a:spcPct val="115000"/>
+              </a:lnSpc>
+              <a:spcAft>
+                <a:spcPts val="600"/>
+              </a:spcAft>
+              <a:buSzPct val="100000"/>
+              <a:buChar char="●"/>
+            </a:pPr>
+            <a:r>
+              <a:rPr lang="en-US" sz="1500" dirty="0">
+                <a:solidFill>
+                  <a:srgbClr val="242424"/>
+                </a:solidFill>
+                <a:latin typeface="Red Hat Text" pitchFamily="34" charset="0"/>
+                <a:ea typeface="Red Hat Text" pitchFamily="34" charset="-122"/>
+                <a:cs typeface="Red Hat Text" pitchFamily="34" charset="-120"/>
+              </a:rPr>
+              <a:t>The full correlation story across the services: traces across REST and gRPC for free, metrics with exemplars, logs stamped with the trace_id, custom spans that carry the trace across Kafka, the honest auto/custom/hybrid trade-off, and a Grafana walkthrough that pivots trace → logs → metrics on one click.</a:t>
+            </a:r>
+            <a:endParaRPr lang="en-US" sz="1500" dirty="0"/>
+          </a:p>
+          <a:p>
+            <a:pPr algn="l" marL="342900" indent="-342900">
+              <a:lnSpc>
+                <a:spcPct val="115000"/>
+              </a:lnSpc>
+              <a:spcAft>
+                <a:spcPts val="600"/>
+              </a:spcAft>
+              <a:buSzPct val="100000"/>
+              <a:buChar char="●"/>
+            </a:pPr>
+            <a:r>
+              <a:rPr lang="en-US" sz="1500" dirty="0">
+                <a:solidFill>
+                  <a:srgbClr val="242424"/>
+                </a:solidFill>
+                <a:latin typeface="Red Hat Text" pitchFamily="34" charset="0"/>
+                <a:ea typeface="Red Hat Text" pitchFamily="34" charset="-122"/>
+                <a:cs typeface="Red Hat Text" pitchFamily="34" charset="-120"/>
+              </a:rPr>
+              <a:t>The pipeline part moved the costly decisions into the Collector: tail sampling that keeps errors, slow, and critical routes at volume while the app stays out of the sampling business, continuous profiling as the fourth signal, and a live service graph built from the traces — the whole system, at a glance.</a:t>
+            </a:r>
+            <a:endParaRPr lang="en-US" sz="1500" dirty="0"/>
+          </a:p>
+          <a:p>
+            <a:pPr algn="l" marL="342900" indent="-342900">
+              <a:lnSpc>
+                <a:spcPct val="115000"/>
+              </a:lnSpc>
+              <a:spcAft>
+                <a:spcPts val="600"/>
+              </a:spcAft>
+              <a:buSzPct val="100000"/>
+              <a:buChar char="●"/>
+            </a:pPr>
+            <a:r>
+              <a:rPr lang="en-US" sz="1500" dirty="0">
+                <a:solidFill>
+                  <a:srgbClr val="242424"/>
+                </a:solidFill>
+                <a:latin typeface="Red Hat Text" pitchFamily="34" charset="0"/>
+                <a:ea typeface="Red Hat Text" pitchFamily="34" charset="-122"/>
+                <a:cs typeface="Red Hat Text" pitchFamily="34" charset="-120"/>
+              </a:rPr>
+              <a:t>The tutorial mirrors these slides chapter for chapter (§0–§11), with six example services, the shared protos and obs library, and a runnable demo per chapter. It is authored against the target versions but not yet run end to end — it ships marked unverified, and a live rehearsal against the real stack is the next milestone.</a:t>
+            </a:r>
+            <a:endParaRPr lang="en-US" sz="1500" dirty="0"/>
           </a:p>
         </p:txBody>
       </p:sp>
